--- a/examples/agency-pipeline-demo/deck.pptx
+++ b/examples/agency-pipeline-demo/deck.pptx
@@ -730,8 +730,10 @@
       <p:sp>
         <p:nvSpPr>
           <p:cNvPr id="2" name="TextBox 1"/>
-          <p:cNvSpPr txBox="1"/>
-          <p:nvPr/>
+          <p:cNvSpPr/>
+          <p:nvPr>
+            <p:ph type="title"/>
+          </p:nvPr>
         </p:nvSpPr>
         <p:spPr>
           <a:xfrm>
@@ -803,8 +805,10 @@
       <p:sp>
         <p:nvSpPr>
           <p:cNvPr id="2" name="TextBox 1"/>
-          <p:cNvSpPr txBox="1"/>
-          <p:nvPr/>
+          <p:cNvSpPr/>
+          <p:nvPr>
+            <p:ph type="title"/>
+          </p:nvPr>
         </p:nvSpPr>
         <p:spPr>
           <a:xfrm>
@@ -838,8 +842,10 @@
       <p:sp>
         <p:nvSpPr>
           <p:cNvPr id="3" name="TextBox 2"/>
-          <p:cNvSpPr txBox="1"/>
-          <p:nvPr/>
+          <p:cNvSpPr/>
+          <p:nvPr>
+            <p:ph type="body" idx="1"/>
+          </p:nvPr>
         </p:nvSpPr>
         <p:spPr>
           <a:xfrm>
@@ -873,8 +879,10 @@
       <p:sp>
         <p:nvSpPr>
           <p:cNvPr id="4" name="TextBox 3"/>
-          <p:cNvSpPr txBox="1"/>
-          <p:nvPr/>
+          <p:cNvSpPr/>
+          <p:nvPr>
+            <p:ph type="body" idx="2"/>
+          </p:nvPr>
         </p:nvSpPr>
         <p:spPr>
           <a:xfrm>
@@ -908,8 +916,10 @@
       <p:sp>
         <p:nvSpPr>
           <p:cNvPr id="5" name="TextBox 4"/>
-          <p:cNvSpPr txBox="1"/>
-          <p:nvPr/>
+          <p:cNvSpPr/>
+          <p:nvPr>
+            <p:ph type="body" idx="3"/>
+          </p:nvPr>
         </p:nvSpPr>
         <p:spPr>
           <a:xfrm>
@@ -943,8 +953,10 @@
       <p:sp>
         <p:nvSpPr>
           <p:cNvPr id="6" name="TextBox 5"/>
-          <p:cNvSpPr txBox="1"/>
-          <p:nvPr/>
+          <p:cNvSpPr/>
+          <p:nvPr>
+            <p:ph type="body" idx="4"/>
+          </p:nvPr>
         </p:nvSpPr>
         <p:spPr>
           <a:xfrm>
@@ -978,8 +990,10 @@
       <p:sp>
         <p:nvSpPr>
           <p:cNvPr id="7" name="TextBox 6"/>
-          <p:cNvSpPr txBox="1"/>
-          <p:nvPr/>
+          <p:cNvSpPr/>
+          <p:nvPr>
+            <p:ph type="body" idx="5"/>
+          </p:nvPr>
         </p:nvSpPr>
         <p:spPr>
           <a:xfrm>
@@ -1013,8 +1027,10 @@
       <p:sp>
         <p:nvSpPr>
           <p:cNvPr id="8" name="TextBox 7"/>
-          <p:cNvSpPr txBox="1"/>
-          <p:nvPr/>
+          <p:cNvSpPr/>
+          <p:nvPr>
+            <p:ph type="body" idx="6"/>
+          </p:nvPr>
         </p:nvSpPr>
         <p:spPr>
           <a:xfrm>
@@ -1086,8 +1102,10 @@
       <p:sp>
         <p:nvSpPr>
           <p:cNvPr id="2" name="TextBox 1"/>
-          <p:cNvSpPr txBox="1"/>
-          <p:nvPr/>
+          <p:cNvSpPr/>
+          <p:nvPr>
+            <p:ph type="title"/>
+          </p:nvPr>
         </p:nvSpPr>
         <p:spPr>
           <a:xfrm>
@@ -1121,8 +1139,10 @@
       <p:sp>
         <p:nvSpPr>
           <p:cNvPr id="3" name="TextBox 2"/>
-          <p:cNvSpPr txBox="1"/>
-          <p:nvPr/>
+          <p:cNvSpPr/>
+          <p:nvPr>
+            <p:ph type="body" idx="1"/>
+          </p:nvPr>
         </p:nvSpPr>
         <p:spPr>
           <a:xfrm>
@@ -1156,8 +1176,10 @@
       <p:sp>
         <p:nvSpPr>
           <p:cNvPr id="4" name="TextBox 3"/>
-          <p:cNvSpPr txBox="1"/>
-          <p:nvPr/>
+          <p:cNvSpPr/>
+          <p:nvPr>
+            <p:ph type="body" idx="2"/>
+          </p:nvPr>
         </p:nvSpPr>
         <p:spPr>
           <a:xfrm>
@@ -1191,8 +1213,10 @@
       <p:sp>
         <p:nvSpPr>
           <p:cNvPr id="5" name="TextBox 4"/>
-          <p:cNvSpPr txBox="1"/>
-          <p:nvPr/>
+          <p:cNvSpPr/>
+          <p:nvPr>
+            <p:ph type="body" idx="3"/>
+          </p:nvPr>
         </p:nvSpPr>
         <p:spPr>
           <a:xfrm>
@@ -1226,8 +1250,10 @@
       <p:sp>
         <p:nvSpPr>
           <p:cNvPr id="6" name="TextBox 5"/>
-          <p:cNvSpPr txBox="1"/>
-          <p:nvPr/>
+          <p:cNvSpPr/>
+          <p:nvPr>
+            <p:ph type="body" idx="4"/>
+          </p:nvPr>
         </p:nvSpPr>
         <p:spPr>
           <a:xfrm>
@@ -1261,8 +1287,10 @@
       <p:sp>
         <p:nvSpPr>
           <p:cNvPr id="7" name="TextBox 6"/>
-          <p:cNvSpPr txBox="1"/>
-          <p:nvPr/>
+          <p:cNvSpPr/>
+          <p:nvPr>
+            <p:ph type="body" idx="5"/>
+          </p:nvPr>
         </p:nvSpPr>
         <p:spPr>
           <a:xfrm>
@@ -1296,8 +1324,10 @@
       <p:sp>
         <p:nvSpPr>
           <p:cNvPr id="8" name="TextBox 7"/>
-          <p:cNvSpPr txBox="1"/>
-          <p:nvPr/>
+          <p:cNvSpPr/>
+          <p:nvPr>
+            <p:ph type="body" idx="6"/>
+          </p:nvPr>
         </p:nvSpPr>
         <p:spPr>
           <a:xfrm>
@@ -1369,8 +1399,10 @@
       <p:sp>
         <p:nvSpPr>
           <p:cNvPr id="2" name="TextBox 1"/>
-          <p:cNvSpPr txBox="1"/>
-          <p:nvPr/>
+          <p:cNvSpPr/>
+          <p:nvPr>
+            <p:ph type="title"/>
+          </p:nvPr>
         </p:nvSpPr>
         <p:spPr>
           <a:xfrm>
@@ -1404,8 +1436,10 @@
       <p:sp>
         <p:nvSpPr>
           <p:cNvPr id="3" name="TextBox 2"/>
-          <p:cNvSpPr txBox="1"/>
-          <p:nvPr/>
+          <p:cNvSpPr/>
+          <p:nvPr>
+            <p:ph type="body" idx="1"/>
+          </p:nvPr>
         </p:nvSpPr>
         <p:spPr>
           <a:xfrm>
@@ -1439,8 +1473,10 @@
       <p:sp>
         <p:nvSpPr>
           <p:cNvPr id="4" name="TextBox 3"/>
-          <p:cNvSpPr txBox="1"/>
-          <p:nvPr/>
+          <p:cNvSpPr/>
+          <p:nvPr>
+            <p:ph type="body" idx="2"/>
+          </p:nvPr>
         </p:nvSpPr>
         <p:spPr>
           <a:xfrm>
@@ -1474,8 +1510,10 @@
       <p:sp>
         <p:nvSpPr>
           <p:cNvPr id="5" name="TextBox 4"/>
-          <p:cNvSpPr txBox="1"/>
-          <p:nvPr/>
+          <p:cNvSpPr/>
+          <p:nvPr>
+            <p:ph type="body" idx="3"/>
+          </p:nvPr>
         </p:nvSpPr>
         <p:spPr>
           <a:xfrm>
@@ -1509,8 +1547,10 @@
       <p:sp>
         <p:nvSpPr>
           <p:cNvPr id="6" name="TextBox 5"/>
-          <p:cNvSpPr txBox="1"/>
-          <p:nvPr/>
+          <p:cNvSpPr/>
+          <p:nvPr>
+            <p:ph type="body" idx="4"/>
+          </p:nvPr>
         </p:nvSpPr>
         <p:spPr>
           <a:xfrm>
@@ -1544,8 +1584,10 @@
       <p:sp>
         <p:nvSpPr>
           <p:cNvPr id="7" name="TextBox 6"/>
-          <p:cNvSpPr txBox="1"/>
-          <p:nvPr/>
+          <p:cNvSpPr/>
+          <p:nvPr>
+            <p:ph type="body" idx="5"/>
+          </p:nvPr>
         </p:nvSpPr>
         <p:spPr>
           <a:xfrm>
@@ -1579,8 +1621,10 @@
       <p:sp>
         <p:nvSpPr>
           <p:cNvPr id="8" name="TextBox 7"/>
-          <p:cNvSpPr txBox="1"/>
-          <p:nvPr/>
+          <p:cNvSpPr/>
+          <p:nvPr>
+            <p:ph type="body" idx="6"/>
+          </p:nvPr>
         </p:nvSpPr>
         <p:spPr>
           <a:xfrm>
@@ -1614,8 +1658,10 @@
       <p:sp>
         <p:nvSpPr>
           <p:cNvPr id="9" name="TextBox 8"/>
-          <p:cNvSpPr txBox="1"/>
-          <p:nvPr/>
+          <p:cNvSpPr/>
+          <p:nvPr>
+            <p:ph type="body" idx="7"/>
+          </p:nvPr>
         </p:nvSpPr>
         <p:spPr>
           <a:xfrm>
@@ -1649,8 +1695,10 @@
       <p:sp>
         <p:nvSpPr>
           <p:cNvPr id="10" name="TextBox 9"/>
-          <p:cNvSpPr txBox="1"/>
-          <p:nvPr/>
+          <p:cNvSpPr/>
+          <p:nvPr>
+            <p:ph type="body" idx="8"/>
+          </p:nvPr>
         </p:nvSpPr>
         <p:spPr>
           <a:xfrm>
@@ -1722,8 +1770,10 @@
       <p:sp>
         <p:nvSpPr>
           <p:cNvPr id="2" name="TextBox 1"/>
-          <p:cNvSpPr txBox="1"/>
-          <p:nvPr/>
+          <p:cNvSpPr/>
+          <p:nvPr>
+            <p:ph type="title"/>
+          </p:nvPr>
         </p:nvSpPr>
         <p:spPr>
           <a:xfrm>
@@ -1757,8 +1807,10 @@
       <p:sp>
         <p:nvSpPr>
           <p:cNvPr id="3" name="TextBox 2"/>
-          <p:cNvSpPr txBox="1"/>
-          <p:nvPr/>
+          <p:cNvSpPr/>
+          <p:nvPr>
+            <p:ph type="body" idx="1"/>
+          </p:nvPr>
         </p:nvSpPr>
         <p:spPr>
           <a:xfrm>
@@ -1792,8 +1844,10 @@
       <p:sp>
         <p:nvSpPr>
           <p:cNvPr id="4" name="TextBox 3"/>
-          <p:cNvSpPr txBox="1"/>
-          <p:nvPr/>
+          <p:cNvSpPr/>
+          <p:nvPr>
+            <p:ph type="body" idx="2"/>
+          </p:nvPr>
         </p:nvSpPr>
         <p:spPr>
           <a:xfrm>
@@ -1827,8 +1881,10 @@
       <p:sp>
         <p:nvSpPr>
           <p:cNvPr id="5" name="TextBox 4"/>
-          <p:cNvSpPr txBox="1"/>
-          <p:nvPr/>
+          <p:cNvSpPr/>
+          <p:nvPr>
+            <p:ph type="body" idx="3"/>
+          </p:nvPr>
         </p:nvSpPr>
         <p:spPr>
           <a:xfrm>
@@ -1862,8 +1918,10 @@
       <p:sp>
         <p:nvSpPr>
           <p:cNvPr id="6" name="TextBox 5"/>
-          <p:cNvSpPr txBox="1"/>
-          <p:nvPr/>
+          <p:cNvSpPr/>
+          <p:nvPr>
+            <p:ph type="body" idx="4"/>
+          </p:nvPr>
         </p:nvSpPr>
         <p:spPr>
           <a:xfrm>
@@ -1897,8 +1955,10 @@
       <p:sp>
         <p:nvSpPr>
           <p:cNvPr id="7" name="TextBox 6"/>
-          <p:cNvSpPr txBox="1"/>
-          <p:nvPr/>
+          <p:cNvSpPr/>
+          <p:nvPr>
+            <p:ph type="body" idx="5"/>
+          </p:nvPr>
         </p:nvSpPr>
         <p:spPr>
           <a:xfrm>
@@ -1932,8 +1992,10 @@
       <p:sp>
         <p:nvSpPr>
           <p:cNvPr id="8" name="TextBox 7"/>
-          <p:cNvSpPr txBox="1"/>
-          <p:nvPr/>
+          <p:cNvSpPr/>
+          <p:nvPr>
+            <p:ph type="body" idx="6"/>
+          </p:nvPr>
         </p:nvSpPr>
         <p:spPr>
           <a:xfrm>
@@ -1967,8 +2029,10 @@
       <p:sp>
         <p:nvSpPr>
           <p:cNvPr id="9" name="TextBox 8"/>
-          <p:cNvSpPr txBox="1"/>
-          <p:nvPr/>
+          <p:cNvSpPr/>
+          <p:nvPr>
+            <p:ph type="body" idx="7"/>
+          </p:nvPr>
         </p:nvSpPr>
         <p:spPr>
           <a:xfrm>
@@ -2002,8 +2066,10 @@
       <p:sp>
         <p:nvSpPr>
           <p:cNvPr id="10" name="TextBox 9"/>
-          <p:cNvSpPr txBox="1"/>
-          <p:nvPr/>
+          <p:cNvSpPr/>
+          <p:nvPr>
+            <p:ph type="body" idx="8"/>
+          </p:nvPr>
         </p:nvSpPr>
         <p:spPr>
           <a:xfrm>
@@ -2037,8 +2103,10 @@
       <p:sp>
         <p:nvSpPr>
           <p:cNvPr id="11" name="TextBox 10"/>
-          <p:cNvSpPr txBox="1"/>
-          <p:nvPr/>
+          <p:cNvSpPr/>
+          <p:nvPr>
+            <p:ph type="body" idx="9"/>
+          </p:nvPr>
         </p:nvSpPr>
         <p:spPr>
           <a:xfrm>
@@ -2072,8 +2140,10 @@
       <p:sp>
         <p:nvSpPr>
           <p:cNvPr id="12" name="TextBox 11"/>
-          <p:cNvSpPr txBox="1"/>
-          <p:nvPr/>
+          <p:cNvSpPr/>
+          <p:nvPr>
+            <p:ph type="body" idx="13"/>
+          </p:nvPr>
         </p:nvSpPr>
         <p:spPr>
           <a:xfrm>
@@ -2107,8 +2177,10 @@
       <p:sp>
         <p:nvSpPr>
           <p:cNvPr id="13" name="TextBox 12"/>
-          <p:cNvSpPr txBox="1"/>
-          <p:nvPr/>
+          <p:cNvSpPr/>
+          <p:nvPr>
+            <p:ph type="body" idx="14"/>
+          </p:nvPr>
         </p:nvSpPr>
         <p:spPr>
           <a:xfrm>
@@ -2142,8 +2214,10 @@
       <p:sp>
         <p:nvSpPr>
           <p:cNvPr id="14" name="TextBox 13"/>
-          <p:cNvSpPr txBox="1"/>
-          <p:nvPr/>
+          <p:cNvSpPr/>
+          <p:nvPr>
+            <p:ph type="body" idx="15"/>
+          </p:nvPr>
         </p:nvSpPr>
         <p:spPr>
           <a:xfrm>
@@ -2215,8 +2289,10 @@
       <p:sp>
         <p:nvSpPr>
           <p:cNvPr id="2" name="TextBox 1"/>
-          <p:cNvSpPr txBox="1"/>
-          <p:nvPr/>
+          <p:cNvSpPr/>
+          <p:nvPr>
+            <p:ph type="title"/>
+          </p:nvPr>
         </p:nvSpPr>
         <p:spPr>
           <a:xfrm>
@@ -2250,8 +2326,10 @@
       <p:sp>
         <p:nvSpPr>
           <p:cNvPr id="3" name="TextBox 2"/>
-          <p:cNvSpPr txBox="1"/>
-          <p:nvPr/>
+          <p:cNvSpPr/>
+          <p:nvPr>
+            <p:ph type="body" idx="1"/>
+          </p:nvPr>
         </p:nvSpPr>
         <p:spPr>
           <a:xfrm>
@@ -2285,8 +2363,10 @@
       <p:sp>
         <p:nvSpPr>
           <p:cNvPr id="4" name="TextBox 3"/>
-          <p:cNvSpPr txBox="1"/>
-          <p:nvPr/>
+          <p:cNvSpPr/>
+          <p:nvPr>
+            <p:ph type="body" idx="2"/>
+          </p:nvPr>
         </p:nvSpPr>
         <p:spPr>
           <a:xfrm>
@@ -2358,8 +2438,10 @@
       <p:sp>
         <p:nvSpPr>
           <p:cNvPr id="2" name="TextBox 1"/>
-          <p:cNvSpPr txBox="1"/>
-          <p:nvPr/>
+          <p:cNvSpPr/>
+          <p:nvPr>
+            <p:ph type="title"/>
+          </p:nvPr>
         </p:nvSpPr>
         <p:spPr>
           <a:xfrm>
@@ -2393,8 +2475,10 @@
       <p:sp>
         <p:nvSpPr>
           <p:cNvPr id="3" name="TextBox 2"/>
-          <p:cNvSpPr txBox="1"/>
-          <p:nvPr/>
+          <p:cNvSpPr/>
+          <p:nvPr>
+            <p:ph type="body" idx="1"/>
+          </p:nvPr>
         </p:nvSpPr>
         <p:spPr>
           <a:xfrm>
@@ -2428,8 +2512,10 @@
       <p:sp>
         <p:nvSpPr>
           <p:cNvPr id="4" name="TextBox 3"/>
-          <p:cNvSpPr txBox="1"/>
-          <p:nvPr/>
+          <p:cNvSpPr/>
+          <p:nvPr>
+            <p:ph type="body" idx="2"/>
+          </p:nvPr>
         </p:nvSpPr>
         <p:spPr>
           <a:xfrm>
@@ -2463,8 +2549,10 @@
       <p:sp>
         <p:nvSpPr>
           <p:cNvPr id="5" name="TextBox 4"/>
-          <p:cNvSpPr txBox="1"/>
-          <p:nvPr/>
+          <p:cNvSpPr/>
+          <p:nvPr>
+            <p:ph type="body" idx="3"/>
+          </p:nvPr>
         </p:nvSpPr>
         <p:spPr>
           <a:xfrm>
@@ -2498,8 +2586,10 @@
       <p:sp>
         <p:nvSpPr>
           <p:cNvPr id="6" name="TextBox 5"/>
-          <p:cNvSpPr txBox="1"/>
-          <p:nvPr/>
+          <p:cNvSpPr/>
+          <p:nvPr>
+            <p:ph type="body" idx="4"/>
+          </p:nvPr>
         </p:nvSpPr>
         <p:spPr>
           <a:xfrm>
@@ -2533,8 +2623,10 @@
       <p:sp>
         <p:nvSpPr>
           <p:cNvPr id="7" name="TextBox 6"/>
-          <p:cNvSpPr txBox="1"/>
-          <p:nvPr/>
+          <p:cNvSpPr/>
+          <p:nvPr>
+            <p:ph type="body" idx="5"/>
+          </p:nvPr>
         </p:nvSpPr>
         <p:spPr>
           <a:xfrm>
@@ -2568,8 +2660,10 @@
       <p:sp>
         <p:nvSpPr>
           <p:cNvPr id="8" name="TextBox 7"/>
-          <p:cNvSpPr txBox="1"/>
-          <p:nvPr/>
+          <p:cNvSpPr/>
+          <p:nvPr>
+            <p:ph type="body" idx="6"/>
+          </p:nvPr>
         </p:nvSpPr>
         <p:spPr>
           <a:xfrm>
@@ -2603,8 +2697,10 @@
       <p:sp>
         <p:nvSpPr>
           <p:cNvPr id="9" name="TextBox 8"/>
-          <p:cNvSpPr txBox="1"/>
-          <p:nvPr/>
+          <p:cNvSpPr/>
+          <p:nvPr>
+            <p:ph type="body" idx="7"/>
+          </p:nvPr>
         </p:nvSpPr>
         <p:spPr>
           <a:xfrm>
@@ -2638,8 +2734,10 @@
       <p:sp>
         <p:nvSpPr>
           <p:cNvPr id="10" name="TextBox 9"/>
-          <p:cNvSpPr txBox="1"/>
-          <p:nvPr/>
+          <p:cNvSpPr/>
+          <p:nvPr>
+            <p:ph type="body" idx="8"/>
+          </p:nvPr>
         </p:nvSpPr>
         <p:spPr>
           <a:xfrm>
@@ -2755,8 +2853,10 @@
       <p:sp>
         <p:nvSpPr>
           <p:cNvPr id="3" name="TextBox 2"/>
-          <p:cNvSpPr txBox="1"/>
-          <p:nvPr/>
+          <p:cNvSpPr/>
+          <p:nvPr>
+            <p:ph type="body" idx="1"/>
+          </p:nvPr>
         </p:nvSpPr>
         <p:spPr>
           <a:xfrm>
@@ -2790,8 +2890,10 @@
       <p:sp>
         <p:nvSpPr>
           <p:cNvPr id="4" name="TextBox 3"/>
-          <p:cNvSpPr txBox="1"/>
-          <p:nvPr/>
+          <p:cNvSpPr/>
+          <p:nvPr>
+            <p:ph type="body" idx="2"/>
+          </p:nvPr>
         </p:nvSpPr>
         <p:spPr>
           <a:xfrm>
@@ -3033,8 +3135,10 @@
       <p:sp>
         <p:nvSpPr>
           <p:cNvPr id="2" name="TextBox 1"/>
-          <p:cNvSpPr txBox="1"/>
-          <p:nvPr/>
+          <p:cNvSpPr/>
+          <p:nvPr>
+            <p:ph type="title"/>
+          </p:nvPr>
         </p:nvSpPr>
         <p:spPr>
           <a:xfrm>
@@ -3112,8 +3216,10 @@
       <p:sp>
         <p:nvSpPr>
           <p:cNvPr id="4" name="TextBox 3"/>
-          <p:cNvSpPr txBox="1"/>
-          <p:nvPr/>
+          <p:cNvSpPr/>
+          <p:nvPr>
+            <p:ph type="body" idx="1"/>
+          </p:nvPr>
         </p:nvSpPr>
         <p:spPr>
           <a:xfrm>
@@ -3147,8 +3253,10 @@
       <p:sp>
         <p:nvSpPr>
           <p:cNvPr id="5" name="TextBox 4"/>
-          <p:cNvSpPr txBox="1"/>
-          <p:nvPr/>
+          <p:cNvSpPr/>
+          <p:nvPr>
+            <p:ph type="body" idx="2"/>
+          </p:nvPr>
         </p:nvSpPr>
         <p:spPr>
           <a:xfrm>
@@ -3182,8 +3290,10 @@
       <p:sp>
         <p:nvSpPr>
           <p:cNvPr id="6" name="TextBox 5"/>
-          <p:cNvSpPr txBox="1"/>
-          <p:nvPr/>
+          <p:cNvSpPr/>
+          <p:nvPr>
+            <p:ph type="body" idx="3"/>
+          </p:nvPr>
         </p:nvSpPr>
         <p:spPr>
           <a:xfrm>
@@ -3217,8 +3327,10 @@
       <p:sp>
         <p:nvSpPr>
           <p:cNvPr id="7" name="TextBox 6"/>
-          <p:cNvSpPr txBox="1"/>
-          <p:nvPr/>
+          <p:cNvSpPr/>
+          <p:nvPr>
+            <p:ph type="body" idx="4"/>
+          </p:nvPr>
         </p:nvSpPr>
         <p:spPr>
           <a:xfrm>
@@ -3252,8 +3364,10 @@
       <p:sp>
         <p:nvSpPr>
           <p:cNvPr id="8" name="TextBox 7"/>
-          <p:cNvSpPr txBox="1"/>
-          <p:nvPr/>
+          <p:cNvSpPr/>
+          <p:nvPr>
+            <p:ph type="body" idx="5"/>
+          </p:nvPr>
         </p:nvSpPr>
         <p:spPr>
           <a:xfrm>
@@ -3287,8 +3401,10 @@
       <p:sp>
         <p:nvSpPr>
           <p:cNvPr id="9" name="TextBox 8"/>
-          <p:cNvSpPr txBox="1"/>
-          <p:nvPr/>
+          <p:cNvSpPr/>
+          <p:nvPr>
+            <p:ph type="body" idx="6"/>
+          </p:nvPr>
         </p:nvSpPr>
         <p:spPr>
           <a:xfrm>
@@ -3322,8 +3438,10 @@
       <p:sp>
         <p:nvSpPr>
           <p:cNvPr id="10" name="TextBox 9"/>
-          <p:cNvSpPr txBox="1"/>
-          <p:nvPr/>
+          <p:cNvSpPr/>
+          <p:nvPr>
+            <p:ph type="body" idx="7"/>
+          </p:nvPr>
         </p:nvSpPr>
         <p:spPr>
           <a:xfrm>
@@ -3357,8 +3475,10 @@
       <p:sp>
         <p:nvSpPr>
           <p:cNvPr id="11" name="TextBox 10"/>
-          <p:cNvSpPr txBox="1"/>
-          <p:nvPr/>
+          <p:cNvSpPr/>
+          <p:nvPr>
+            <p:ph type="body" idx="8"/>
+          </p:nvPr>
         </p:nvSpPr>
         <p:spPr>
           <a:xfrm>
@@ -3392,8 +3512,10 @@
       <p:sp>
         <p:nvSpPr>
           <p:cNvPr id="12" name="TextBox 11"/>
-          <p:cNvSpPr txBox="1"/>
-          <p:nvPr/>
+          <p:cNvSpPr/>
+          <p:nvPr>
+            <p:ph type="body" idx="9"/>
+          </p:nvPr>
         </p:nvSpPr>
         <p:spPr>
           <a:xfrm>
@@ -3427,8 +3549,10 @@
       <p:sp>
         <p:nvSpPr>
           <p:cNvPr id="13" name="TextBox 12"/>
-          <p:cNvSpPr txBox="1"/>
-          <p:nvPr/>
+          <p:cNvSpPr/>
+          <p:nvPr>
+            <p:ph type="body" idx="13"/>
+          </p:nvPr>
         </p:nvSpPr>
         <p:spPr>
           <a:xfrm>
@@ -3500,8 +3624,10 @@
       <p:sp>
         <p:nvSpPr>
           <p:cNvPr id="2" name="TextBox 1"/>
-          <p:cNvSpPr txBox="1"/>
-          <p:nvPr/>
+          <p:cNvSpPr/>
+          <p:nvPr>
+            <p:ph type="body" idx="1"/>
+          </p:nvPr>
         </p:nvSpPr>
         <p:spPr>
           <a:xfrm>
@@ -3579,8 +3705,10 @@
       <p:sp>
         <p:nvSpPr>
           <p:cNvPr id="4" name="TextBox 3"/>
-          <p:cNvSpPr txBox="1"/>
-          <p:nvPr/>
+          <p:cNvSpPr/>
+          <p:nvPr>
+            <p:ph type="body" idx="2"/>
+          </p:nvPr>
         </p:nvSpPr>
         <p:spPr>
           <a:xfrm>
@@ -3696,8 +3824,10 @@
       <p:sp>
         <p:nvSpPr>
           <p:cNvPr id="3" name="TextBox 2"/>
-          <p:cNvSpPr txBox="1"/>
-          <p:nvPr/>
+          <p:cNvSpPr/>
+          <p:nvPr>
+            <p:ph type="body" idx="1"/>
+          </p:nvPr>
         </p:nvSpPr>
         <p:spPr>
           <a:xfrm>
@@ -3731,8 +3861,10 @@
       <p:sp>
         <p:nvSpPr>
           <p:cNvPr id="4" name="TextBox 3"/>
-          <p:cNvSpPr txBox="1"/>
-          <p:nvPr/>
+          <p:cNvSpPr/>
+          <p:nvPr>
+            <p:ph type="body" idx="2"/>
+          </p:nvPr>
         </p:nvSpPr>
         <p:spPr>
           <a:xfrm>
@@ -3848,8 +3980,10 @@
       <p:sp>
         <p:nvSpPr>
           <p:cNvPr id="3" name="TextBox 2"/>
-          <p:cNvSpPr txBox="1"/>
-          <p:nvPr/>
+          <p:cNvSpPr/>
+          <p:nvPr>
+            <p:ph type="body" idx="1"/>
+          </p:nvPr>
         </p:nvSpPr>
         <p:spPr>
           <a:xfrm>
@@ -3883,8 +4017,10 @@
       <p:sp>
         <p:nvSpPr>
           <p:cNvPr id="4" name="TextBox 3"/>
-          <p:cNvSpPr txBox="1"/>
-          <p:nvPr/>
+          <p:cNvSpPr/>
+          <p:nvPr>
+            <p:ph type="body" idx="2"/>
+          </p:nvPr>
         </p:nvSpPr>
         <p:spPr>
           <a:xfrm>
@@ -4000,8 +4136,10 @@
       <p:sp>
         <p:nvSpPr>
           <p:cNvPr id="3" name="TextBox 2"/>
-          <p:cNvSpPr txBox="1"/>
-          <p:nvPr/>
+          <p:cNvSpPr/>
+          <p:nvPr>
+            <p:ph type="body" idx="1"/>
+          </p:nvPr>
         </p:nvSpPr>
         <p:spPr>
           <a:xfrm>
@@ -4073,8 +4211,10 @@
       <p:sp>
         <p:nvSpPr>
           <p:cNvPr id="2" name="TextBox 1"/>
-          <p:cNvSpPr txBox="1"/>
-          <p:nvPr/>
+          <p:cNvSpPr/>
+          <p:nvPr>
+            <p:ph type="title"/>
+          </p:nvPr>
         </p:nvSpPr>
         <p:spPr>
           <a:xfrm>
@@ -4108,8 +4248,10 @@
       <p:sp>
         <p:nvSpPr>
           <p:cNvPr id="3" name="TextBox 2"/>
-          <p:cNvSpPr txBox="1"/>
-          <p:nvPr/>
+          <p:cNvSpPr/>
+          <p:nvPr>
+            <p:ph type="body" idx="1"/>
+          </p:nvPr>
         </p:nvSpPr>
         <p:spPr>
           <a:xfrm>
@@ -4143,8 +4285,10 @@
       <p:sp>
         <p:nvSpPr>
           <p:cNvPr id="4" name="TextBox 3"/>
-          <p:cNvSpPr txBox="1"/>
-          <p:nvPr/>
+          <p:cNvSpPr/>
+          <p:nvPr>
+            <p:ph type="body" idx="2"/>
+          </p:nvPr>
         </p:nvSpPr>
         <p:spPr>
           <a:xfrm>
@@ -4178,8 +4322,10 @@
       <p:sp>
         <p:nvSpPr>
           <p:cNvPr id="5" name="TextBox 4"/>
-          <p:cNvSpPr txBox="1"/>
-          <p:nvPr/>
+          <p:cNvSpPr/>
+          <p:nvPr>
+            <p:ph type="body" idx="3"/>
+          </p:nvPr>
         </p:nvSpPr>
         <p:spPr>
           <a:xfrm>
@@ -4383,8 +4529,10 @@
       <p:sp>
         <p:nvSpPr>
           <p:cNvPr id="5" name="TextBox 4"/>
-          <p:cNvSpPr txBox="1"/>
-          <p:nvPr/>
+          <p:cNvSpPr/>
+          <p:nvPr>
+            <p:ph type="body" idx="1"/>
+          </p:nvPr>
         </p:nvSpPr>
         <p:spPr>
           <a:xfrm>
@@ -4418,8 +4566,10 @@
       <p:sp>
         <p:nvSpPr>
           <p:cNvPr id="6" name="TextBox 5"/>
-          <p:cNvSpPr txBox="1"/>
-          <p:nvPr/>
+          <p:cNvSpPr/>
+          <p:nvPr>
+            <p:ph type="body" idx="2"/>
+          </p:nvPr>
         </p:nvSpPr>
         <p:spPr>
           <a:xfrm>
@@ -4453,8 +4603,10 @@
       <p:sp>
         <p:nvSpPr>
           <p:cNvPr id="7" name="TextBox 6"/>
-          <p:cNvSpPr txBox="1"/>
-          <p:nvPr/>
+          <p:cNvSpPr/>
+          <p:nvPr>
+            <p:ph type="body" idx="3"/>
+          </p:nvPr>
         </p:nvSpPr>
         <p:spPr>
           <a:xfrm>
@@ -4488,8 +4640,10 @@
       <p:sp>
         <p:nvSpPr>
           <p:cNvPr id="8" name="TextBox 7"/>
-          <p:cNvSpPr txBox="1"/>
-          <p:nvPr/>
+          <p:cNvSpPr/>
+          <p:nvPr>
+            <p:ph type="body" idx="4"/>
+          </p:nvPr>
         </p:nvSpPr>
         <p:spPr>
           <a:xfrm>
@@ -4523,8 +4677,10 @@
       <p:sp>
         <p:nvSpPr>
           <p:cNvPr id="9" name="TextBox 8"/>
-          <p:cNvSpPr txBox="1"/>
-          <p:nvPr/>
+          <p:cNvSpPr/>
+          <p:nvPr>
+            <p:ph type="body" idx="5"/>
+          </p:nvPr>
         </p:nvSpPr>
         <p:spPr>
           <a:xfrm>
@@ -4558,8 +4714,10 @@
       <p:sp>
         <p:nvSpPr>
           <p:cNvPr id="10" name="TextBox 9"/>
-          <p:cNvSpPr txBox="1"/>
-          <p:nvPr/>
+          <p:cNvSpPr/>
+          <p:nvPr>
+            <p:ph type="body" idx="6"/>
+          </p:nvPr>
         </p:nvSpPr>
         <p:spPr>
           <a:xfrm>
@@ -4593,8 +4751,10 @@
       <p:sp>
         <p:nvSpPr>
           <p:cNvPr id="11" name="TextBox 10"/>
-          <p:cNvSpPr txBox="1"/>
-          <p:nvPr/>
+          <p:cNvSpPr/>
+          <p:nvPr>
+            <p:ph type="body" idx="7"/>
+          </p:nvPr>
         </p:nvSpPr>
         <p:spPr>
           <a:xfrm>
@@ -4628,8 +4788,10 @@
       <p:sp>
         <p:nvSpPr>
           <p:cNvPr id="12" name="TextBox 11"/>
-          <p:cNvSpPr txBox="1"/>
-          <p:nvPr/>
+          <p:cNvSpPr/>
+          <p:nvPr>
+            <p:ph type="body" idx="8"/>
+          </p:nvPr>
         </p:nvSpPr>
         <p:spPr>
           <a:xfrm>
@@ -4663,8 +4825,10 @@
       <p:sp>
         <p:nvSpPr>
           <p:cNvPr id="13" name="TextBox 12"/>
-          <p:cNvSpPr txBox="1"/>
-          <p:nvPr/>
+          <p:cNvSpPr/>
+          <p:nvPr>
+            <p:ph type="body" idx="9"/>
+          </p:nvPr>
         </p:nvSpPr>
         <p:spPr>
           <a:xfrm>
@@ -4698,8 +4862,10 @@
       <p:sp>
         <p:nvSpPr>
           <p:cNvPr id="14" name="TextBox 13"/>
-          <p:cNvSpPr txBox="1"/>
-          <p:nvPr/>
+          <p:cNvSpPr/>
+          <p:nvPr>
+            <p:ph type="body" idx="13"/>
+          </p:nvPr>
         </p:nvSpPr>
         <p:spPr>
           <a:xfrm>
@@ -4733,8 +4899,10 @@
       <p:sp>
         <p:nvSpPr>
           <p:cNvPr id="15" name="TextBox 14"/>
-          <p:cNvSpPr txBox="1"/>
-          <p:nvPr/>
+          <p:cNvSpPr/>
+          <p:nvPr>
+            <p:ph type="body" idx="14"/>
+          </p:nvPr>
         </p:nvSpPr>
         <p:spPr>
           <a:xfrm>
@@ -4768,8 +4936,10 @@
       <p:sp>
         <p:nvSpPr>
           <p:cNvPr id="16" name="TextBox 15"/>
-          <p:cNvSpPr txBox="1"/>
-          <p:nvPr/>
+          <p:cNvSpPr/>
+          <p:nvPr>
+            <p:ph type="body" idx="15"/>
+          </p:nvPr>
         </p:nvSpPr>
         <p:spPr>
           <a:xfrm>
@@ -4803,8 +4973,10 @@
       <p:sp>
         <p:nvSpPr>
           <p:cNvPr id="17" name="TextBox 16"/>
-          <p:cNvSpPr txBox="1"/>
-          <p:nvPr/>
+          <p:cNvSpPr/>
+          <p:nvPr>
+            <p:ph type="body" idx="16"/>
+          </p:nvPr>
         </p:nvSpPr>
         <p:spPr>
           <a:xfrm>
@@ -4838,8 +5010,10 @@
       <p:sp>
         <p:nvSpPr>
           <p:cNvPr id="18" name="TextBox 17"/>
-          <p:cNvSpPr txBox="1"/>
-          <p:nvPr/>
+          <p:cNvSpPr/>
+          <p:nvPr>
+            <p:ph type="body" idx="17"/>
+          </p:nvPr>
         </p:nvSpPr>
         <p:spPr>
           <a:xfrm>
@@ -4873,8 +5047,10 @@
       <p:sp>
         <p:nvSpPr>
           <p:cNvPr id="19" name="TextBox 18"/>
-          <p:cNvSpPr txBox="1"/>
-          <p:nvPr/>
+          <p:cNvSpPr/>
+          <p:nvPr>
+            <p:ph type="body" idx="18"/>
+          </p:nvPr>
         </p:nvSpPr>
         <p:spPr>
           <a:xfrm>
@@ -4908,8 +5084,10 @@
       <p:sp>
         <p:nvSpPr>
           <p:cNvPr id="20" name="TextBox 19"/>
-          <p:cNvSpPr txBox="1"/>
-          <p:nvPr/>
+          <p:cNvSpPr/>
+          <p:nvPr>
+            <p:ph type="body" idx="19"/>
+          </p:nvPr>
         </p:nvSpPr>
         <p:spPr>
           <a:xfrm>
@@ -4981,8 +5159,10 @@
       <p:sp>
         <p:nvSpPr>
           <p:cNvPr id="2" name="TextBox 1"/>
-          <p:cNvSpPr txBox="1"/>
-          <p:nvPr/>
+          <p:cNvSpPr/>
+          <p:nvPr>
+            <p:ph type="title"/>
+          </p:nvPr>
         </p:nvSpPr>
         <p:spPr>
           <a:xfrm>
@@ -5062,8 +5242,10 @@
       <p:sp>
         <p:nvSpPr>
           <p:cNvPr id="4" name="TextBox 3"/>
-          <p:cNvSpPr txBox="1"/>
-          <p:nvPr/>
+          <p:cNvSpPr/>
+          <p:nvPr>
+            <p:ph type="body" idx="1"/>
+          </p:nvPr>
         </p:nvSpPr>
         <p:spPr>
           <a:xfrm>
@@ -5097,8 +5279,10 @@
       <p:sp>
         <p:nvSpPr>
           <p:cNvPr id="5" name="TextBox 4"/>
-          <p:cNvSpPr txBox="1"/>
-          <p:nvPr/>
+          <p:cNvSpPr/>
+          <p:nvPr>
+            <p:ph type="body" idx="2"/>
+          </p:nvPr>
         </p:nvSpPr>
         <p:spPr>
           <a:xfrm>
@@ -5132,8 +5316,10 @@
       <p:sp>
         <p:nvSpPr>
           <p:cNvPr id="6" name="TextBox 5"/>
-          <p:cNvSpPr txBox="1"/>
-          <p:nvPr/>
+          <p:cNvSpPr/>
+          <p:nvPr>
+            <p:ph type="body" idx="3"/>
+          </p:nvPr>
         </p:nvSpPr>
         <p:spPr>
           <a:xfrm>
@@ -5167,8 +5353,10 @@
       <p:sp>
         <p:nvSpPr>
           <p:cNvPr id="7" name="TextBox 6"/>
-          <p:cNvSpPr txBox="1"/>
-          <p:nvPr/>
+          <p:cNvSpPr/>
+          <p:nvPr>
+            <p:ph type="body" idx="4"/>
+          </p:nvPr>
         </p:nvSpPr>
         <p:spPr>
           <a:xfrm>
@@ -5202,8 +5390,10 @@
       <p:sp>
         <p:nvSpPr>
           <p:cNvPr id="8" name="TextBox 7"/>
-          <p:cNvSpPr txBox="1"/>
-          <p:nvPr/>
+          <p:cNvSpPr/>
+          <p:nvPr>
+            <p:ph type="body" idx="5"/>
+          </p:nvPr>
         </p:nvSpPr>
         <p:spPr>
           <a:xfrm>
@@ -5237,8 +5427,10 @@
       <p:sp>
         <p:nvSpPr>
           <p:cNvPr id="9" name="TextBox 8"/>
-          <p:cNvSpPr txBox="1"/>
-          <p:nvPr/>
+          <p:cNvSpPr/>
+          <p:nvPr>
+            <p:ph type="body" idx="6"/>
+          </p:nvPr>
         </p:nvSpPr>
         <p:spPr>
           <a:xfrm>
@@ -5272,8 +5464,10 @@
       <p:sp>
         <p:nvSpPr>
           <p:cNvPr id="10" name="TextBox 9"/>
-          <p:cNvSpPr txBox="1"/>
-          <p:nvPr/>
+          <p:cNvSpPr/>
+          <p:nvPr>
+            <p:ph type="body" idx="7"/>
+          </p:nvPr>
         </p:nvSpPr>
         <p:spPr>
           <a:xfrm>
@@ -5307,8 +5501,10 @@
       <p:sp>
         <p:nvSpPr>
           <p:cNvPr id="11" name="TextBox 10"/>
-          <p:cNvSpPr txBox="1"/>
-          <p:nvPr/>
+          <p:cNvSpPr/>
+          <p:nvPr>
+            <p:ph type="body" idx="8"/>
+          </p:nvPr>
         </p:nvSpPr>
         <p:spPr>
           <a:xfrm>
@@ -5342,8 +5538,10 @@
       <p:sp>
         <p:nvSpPr>
           <p:cNvPr id="12" name="TextBox 11"/>
-          <p:cNvSpPr txBox="1"/>
-          <p:nvPr/>
+          <p:cNvSpPr/>
+          <p:nvPr>
+            <p:ph type="body" idx="9"/>
+          </p:nvPr>
         </p:nvSpPr>
         <p:spPr>
           <a:xfrm>
@@ -5377,8 +5575,10 @@
       <p:sp>
         <p:nvSpPr>
           <p:cNvPr id="13" name="TextBox 12"/>
-          <p:cNvSpPr txBox="1"/>
-          <p:nvPr/>
+          <p:cNvSpPr/>
+          <p:nvPr>
+            <p:ph type="body" idx="13"/>
+          </p:nvPr>
         </p:nvSpPr>
         <p:spPr>
           <a:xfrm>
@@ -5412,8 +5612,10 @@
       <p:sp>
         <p:nvSpPr>
           <p:cNvPr id="14" name="TextBox 13"/>
-          <p:cNvSpPr txBox="1"/>
-          <p:nvPr/>
+          <p:cNvSpPr/>
+          <p:nvPr>
+            <p:ph type="body" idx="14"/>
+          </p:nvPr>
         </p:nvSpPr>
         <p:spPr>
           <a:xfrm>
@@ -5447,8 +5649,10 @@
       <p:sp>
         <p:nvSpPr>
           <p:cNvPr id="15" name="TextBox 14"/>
-          <p:cNvSpPr txBox="1"/>
-          <p:nvPr/>
+          <p:cNvSpPr/>
+          <p:nvPr>
+            <p:ph type="body" idx="15"/>
+          </p:nvPr>
         </p:nvSpPr>
         <p:spPr>
           <a:xfrm>
@@ -5482,8 +5686,10 @@
       <p:sp>
         <p:nvSpPr>
           <p:cNvPr id="16" name="TextBox 15"/>
-          <p:cNvSpPr txBox="1"/>
-          <p:nvPr/>
+          <p:cNvSpPr/>
+          <p:nvPr>
+            <p:ph type="body" idx="16"/>
+          </p:nvPr>
         </p:nvSpPr>
         <p:spPr>
           <a:xfrm>
@@ -5517,8 +5723,10 @@
       <p:sp>
         <p:nvSpPr>
           <p:cNvPr id="17" name="TextBox 16"/>
-          <p:cNvSpPr txBox="1"/>
-          <p:nvPr/>
+          <p:cNvSpPr/>
+          <p:nvPr>
+            <p:ph type="body" idx="17"/>
+          </p:nvPr>
         </p:nvSpPr>
         <p:spPr>
           <a:xfrm>
@@ -5552,8 +5760,10 @@
       <p:sp>
         <p:nvSpPr>
           <p:cNvPr id="18" name="TextBox 17"/>
-          <p:cNvSpPr txBox="1"/>
-          <p:nvPr/>
+          <p:cNvSpPr/>
+          <p:nvPr>
+            <p:ph type="body" idx="18"/>
+          </p:nvPr>
         </p:nvSpPr>
         <p:spPr>
           <a:xfrm>
@@ -5625,8 +5835,10 @@
       <p:sp>
         <p:nvSpPr>
           <p:cNvPr id="2" name="TextBox 1"/>
-          <p:cNvSpPr txBox="1"/>
-          <p:nvPr/>
+          <p:cNvSpPr/>
+          <p:nvPr>
+            <p:ph type="title"/>
+          </p:nvPr>
         </p:nvSpPr>
         <p:spPr>
           <a:xfrm>
@@ -5660,8 +5872,10 @@
       <p:sp>
         <p:nvSpPr>
           <p:cNvPr id="3" name="TextBox 2"/>
-          <p:cNvSpPr txBox="1"/>
-          <p:nvPr/>
+          <p:cNvSpPr/>
+          <p:nvPr>
+            <p:ph type="body" idx="1"/>
+          </p:nvPr>
         </p:nvSpPr>
         <p:spPr>
           <a:xfrm>
@@ -5695,8 +5909,10 @@
       <p:sp>
         <p:nvSpPr>
           <p:cNvPr id="4" name="TextBox 3"/>
-          <p:cNvSpPr txBox="1"/>
-          <p:nvPr/>
+          <p:cNvSpPr/>
+          <p:nvPr>
+            <p:ph type="body" idx="2"/>
+          </p:nvPr>
         </p:nvSpPr>
         <p:spPr>
           <a:xfrm>
@@ -5730,8 +5946,10 @@
       <p:sp>
         <p:nvSpPr>
           <p:cNvPr id="5" name="TextBox 4"/>
-          <p:cNvSpPr txBox="1"/>
-          <p:nvPr/>
+          <p:cNvSpPr/>
+          <p:nvPr>
+            <p:ph type="body" idx="3"/>
+          </p:nvPr>
         </p:nvSpPr>
         <p:spPr>
           <a:xfrm>
@@ -5765,8 +5983,10 @@
       <p:sp>
         <p:nvSpPr>
           <p:cNvPr id="6" name="TextBox 5"/>
-          <p:cNvSpPr txBox="1"/>
-          <p:nvPr/>
+          <p:cNvSpPr/>
+          <p:nvPr>
+            <p:ph type="body" idx="4"/>
+          </p:nvPr>
         </p:nvSpPr>
         <p:spPr>
           <a:xfrm>
@@ -5800,8 +6020,10 @@
       <p:sp>
         <p:nvSpPr>
           <p:cNvPr id="7" name="TextBox 6"/>
-          <p:cNvSpPr txBox="1"/>
-          <p:nvPr/>
+          <p:cNvSpPr/>
+          <p:nvPr>
+            <p:ph type="body" idx="5"/>
+          </p:nvPr>
         </p:nvSpPr>
         <p:spPr>
           <a:xfrm>
@@ -5835,8 +6057,10 @@
       <p:sp>
         <p:nvSpPr>
           <p:cNvPr id="8" name="TextBox 7"/>
-          <p:cNvSpPr txBox="1"/>
-          <p:nvPr/>
+          <p:cNvSpPr/>
+          <p:nvPr>
+            <p:ph type="body" idx="6"/>
+          </p:nvPr>
         </p:nvSpPr>
         <p:spPr>
           <a:xfrm>
@@ -5870,8 +6094,10 @@
       <p:sp>
         <p:nvSpPr>
           <p:cNvPr id="9" name="TextBox 8"/>
-          <p:cNvSpPr txBox="1"/>
-          <p:nvPr/>
+          <p:cNvSpPr/>
+          <p:nvPr>
+            <p:ph type="body" idx="7"/>
+          </p:nvPr>
         </p:nvSpPr>
         <p:spPr>
           <a:xfrm>
@@ -5905,8 +6131,10 @@
       <p:sp>
         <p:nvSpPr>
           <p:cNvPr id="10" name="TextBox 9"/>
-          <p:cNvSpPr txBox="1"/>
-          <p:nvPr/>
+          <p:cNvSpPr/>
+          <p:nvPr>
+            <p:ph type="body" idx="8"/>
+          </p:nvPr>
         </p:nvSpPr>
         <p:spPr>
           <a:xfrm>
@@ -5940,8 +6168,10 @@
       <p:sp>
         <p:nvSpPr>
           <p:cNvPr id="11" name="TextBox 10"/>
-          <p:cNvSpPr txBox="1"/>
-          <p:nvPr/>
+          <p:cNvSpPr/>
+          <p:nvPr>
+            <p:ph type="body" idx="9"/>
+          </p:nvPr>
         </p:nvSpPr>
         <p:spPr>
           <a:xfrm>
@@ -6013,8 +6243,10 @@
       <p:sp>
         <p:nvSpPr>
           <p:cNvPr id="2" name="TextBox 1"/>
-          <p:cNvSpPr txBox="1"/>
-          <p:nvPr/>
+          <p:cNvSpPr/>
+          <p:nvPr>
+            <p:ph type="title"/>
+          </p:nvPr>
         </p:nvSpPr>
         <p:spPr>
           <a:xfrm>
@@ -6048,8 +6280,10 @@
       <p:sp>
         <p:nvSpPr>
           <p:cNvPr id="3" name="TextBox 2"/>
-          <p:cNvSpPr txBox="1"/>
-          <p:nvPr/>
+          <p:cNvSpPr/>
+          <p:nvPr>
+            <p:ph type="body" idx="1"/>
+          </p:nvPr>
         </p:nvSpPr>
         <p:spPr>
           <a:xfrm>
@@ -6127,8 +6361,10 @@
       <p:sp>
         <p:nvSpPr>
           <p:cNvPr id="5" name="TextBox 4"/>
-          <p:cNvSpPr txBox="1"/>
-          <p:nvPr/>
+          <p:cNvSpPr/>
+          <p:nvPr>
+            <p:ph type="body" idx="2"/>
+          </p:nvPr>
         </p:nvSpPr>
         <p:spPr>
           <a:xfrm>
@@ -6206,8 +6442,10 @@
       <p:sp>
         <p:nvSpPr>
           <p:cNvPr id="7" name="TextBox 6"/>
-          <p:cNvSpPr txBox="1"/>
-          <p:nvPr/>
+          <p:cNvSpPr/>
+          <p:nvPr>
+            <p:ph type="body" idx="3"/>
+          </p:nvPr>
         </p:nvSpPr>
         <p:spPr>
           <a:xfrm>
@@ -6241,8 +6479,10 @@
       <p:sp>
         <p:nvSpPr>
           <p:cNvPr id="8" name="TextBox 7"/>
-          <p:cNvSpPr txBox="1"/>
-          <p:nvPr/>
+          <p:cNvSpPr/>
+          <p:nvPr>
+            <p:ph type="body" idx="4"/>
+          </p:nvPr>
         </p:nvSpPr>
         <p:spPr>
           <a:xfrm>
@@ -6276,8 +6516,10 @@
       <p:sp>
         <p:nvSpPr>
           <p:cNvPr id="9" name="TextBox 8"/>
-          <p:cNvSpPr txBox="1"/>
-          <p:nvPr/>
+          <p:cNvSpPr/>
+          <p:nvPr>
+            <p:ph type="body" idx="5"/>
+          </p:nvPr>
         </p:nvSpPr>
         <p:spPr>
           <a:xfrm>
@@ -6311,8 +6553,10 @@
       <p:sp>
         <p:nvSpPr>
           <p:cNvPr id="10" name="TextBox 9"/>
-          <p:cNvSpPr txBox="1"/>
-          <p:nvPr/>
+          <p:cNvSpPr/>
+          <p:nvPr>
+            <p:ph type="body" idx="6"/>
+          </p:nvPr>
         </p:nvSpPr>
         <p:spPr>
           <a:xfrm>
@@ -6346,8 +6590,10 @@
       <p:sp>
         <p:nvSpPr>
           <p:cNvPr id="11" name="TextBox 10"/>
-          <p:cNvSpPr txBox="1"/>
-          <p:nvPr/>
+          <p:cNvSpPr/>
+          <p:nvPr>
+            <p:ph type="body" idx="7"/>
+          </p:nvPr>
         </p:nvSpPr>
         <p:spPr>
           <a:xfrm>
@@ -6381,8 +6627,10 @@
       <p:sp>
         <p:nvSpPr>
           <p:cNvPr id="12" name="TextBox 11"/>
-          <p:cNvSpPr txBox="1"/>
-          <p:nvPr/>
+          <p:cNvSpPr/>
+          <p:nvPr>
+            <p:ph type="body" idx="8"/>
+          </p:nvPr>
         </p:nvSpPr>
         <p:spPr>
           <a:xfrm>
@@ -6700,8 +6948,10 @@
       <p:sp>
         <p:nvSpPr>
           <p:cNvPr id="2" name="TextBox 1"/>
-          <p:cNvSpPr txBox="1"/>
-          <p:nvPr/>
+          <p:cNvSpPr/>
+          <p:nvPr>
+            <p:ph type="title"/>
+          </p:nvPr>
         </p:nvSpPr>
         <p:spPr>
           <a:xfrm>
@@ -6735,8 +6985,10 @@
       <p:sp>
         <p:nvSpPr>
           <p:cNvPr id="3" name="TextBox 2"/>
-          <p:cNvSpPr txBox="1"/>
-          <p:nvPr/>
+          <p:cNvSpPr/>
+          <p:nvPr>
+            <p:ph type="body" idx="1"/>
+          </p:nvPr>
         </p:nvSpPr>
         <p:spPr>
           <a:xfrm>
@@ -6770,8 +7022,10 @@
       <p:sp>
         <p:nvSpPr>
           <p:cNvPr id="4" name="TextBox 3"/>
-          <p:cNvSpPr txBox="1"/>
-          <p:nvPr/>
+          <p:cNvSpPr/>
+          <p:nvPr>
+            <p:ph type="body" idx="2"/>
+          </p:nvPr>
         </p:nvSpPr>
         <p:spPr>
           <a:xfrm>
@@ -6805,8 +7059,10 @@
       <p:sp>
         <p:nvSpPr>
           <p:cNvPr id="5" name="TextBox 4"/>
-          <p:cNvSpPr txBox="1"/>
-          <p:nvPr/>
+          <p:cNvSpPr/>
+          <p:nvPr>
+            <p:ph type="body" idx="3"/>
+          </p:nvPr>
         </p:nvSpPr>
         <p:spPr>
           <a:xfrm>
@@ -6840,8 +7096,10 @@
       <p:sp>
         <p:nvSpPr>
           <p:cNvPr id="6" name="TextBox 5"/>
-          <p:cNvSpPr txBox="1"/>
-          <p:nvPr/>
+          <p:cNvSpPr/>
+          <p:nvPr>
+            <p:ph type="body" idx="4"/>
+          </p:nvPr>
         </p:nvSpPr>
         <p:spPr>
           <a:xfrm>
@@ -6875,8 +7133,10 @@
       <p:sp>
         <p:nvSpPr>
           <p:cNvPr id="7" name="TextBox 6"/>
-          <p:cNvSpPr txBox="1"/>
-          <p:nvPr/>
+          <p:cNvSpPr/>
+          <p:nvPr>
+            <p:ph type="body" idx="5"/>
+          </p:nvPr>
         </p:nvSpPr>
         <p:spPr>
           <a:xfrm>
@@ -6948,8 +7208,10 @@
       <p:sp>
         <p:nvSpPr>
           <p:cNvPr id="2" name="TextBox 1"/>
-          <p:cNvSpPr txBox="1"/>
-          <p:nvPr/>
+          <p:cNvSpPr/>
+          <p:nvPr>
+            <p:ph type="title"/>
+          </p:nvPr>
         </p:nvSpPr>
         <p:spPr>
           <a:xfrm>
@@ -6983,8 +7245,10 @@
       <p:sp>
         <p:nvSpPr>
           <p:cNvPr id="3" name="TextBox 2"/>
-          <p:cNvSpPr txBox="1"/>
-          <p:nvPr/>
+          <p:cNvSpPr/>
+          <p:nvPr>
+            <p:ph type="body" idx="1"/>
+          </p:nvPr>
         </p:nvSpPr>
         <p:spPr>
           <a:xfrm>
@@ -7062,8 +7326,10 @@
       <p:sp>
         <p:nvSpPr>
           <p:cNvPr id="5" name="TextBox 4"/>
-          <p:cNvSpPr txBox="1"/>
-          <p:nvPr/>
+          <p:cNvSpPr/>
+          <p:nvPr>
+            <p:ph type="body" idx="2"/>
+          </p:nvPr>
         </p:nvSpPr>
         <p:spPr>
           <a:xfrm>
@@ -7097,8 +7363,10 @@
       <p:sp>
         <p:nvSpPr>
           <p:cNvPr id="6" name="TextBox 5"/>
-          <p:cNvSpPr txBox="1"/>
-          <p:nvPr/>
+          <p:cNvSpPr/>
+          <p:nvPr>
+            <p:ph type="body" idx="3"/>
+          </p:nvPr>
         </p:nvSpPr>
         <p:spPr>
           <a:xfrm>
@@ -7176,8 +7444,10 @@
       <p:sp>
         <p:nvSpPr>
           <p:cNvPr id="8" name="TextBox 7"/>
-          <p:cNvSpPr txBox="1"/>
-          <p:nvPr/>
+          <p:cNvSpPr/>
+          <p:nvPr>
+            <p:ph type="body" idx="4"/>
+          </p:nvPr>
         </p:nvSpPr>
         <p:spPr>
           <a:xfrm>
@@ -7211,8 +7481,10 @@
       <p:sp>
         <p:nvSpPr>
           <p:cNvPr id="9" name="TextBox 8"/>
-          <p:cNvSpPr txBox="1"/>
-          <p:nvPr/>
+          <p:cNvSpPr/>
+          <p:nvPr>
+            <p:ph type="body" idx="5"/>
+          </p:nvPr>
         </p:nvSpPr>
         <p:spPr>
           <a:xfrm>
@@ -7290,8 +7562,10 @@
       <p:sp>
         <p:nvSpPr>
           <p:cNvPr id="11" name="TextBox 10"/>
-          <p:cNvSpPr txBox="1"/>
-          <p:nvPr/>
+          <p:cNvSpPr/>
+          <p:nvPr>
+            <p:ph type="body" idx="6"/>
+          </p:nvPr>
         </p:nvSpPr>
         <p:spPr>
           <a:xfrm>
@@ -7325,8 +7599,10 @@
       <p:sp>
         <p:nvSpPr>
           <p:cNvPr id="12" name="TextBox 11"/>
-          <p:cNvSpPr txBox="1"/>
-          <p:nvPr/>
+          <p:cNvSpPr/>
+          <p:nvPr>
+            <p:ph type="body" idx="7"/>
+          </p:nvPr>
         </p:nvSpPr>
         <p:spPr>
           <a:xfrm>
@@ -7404,8 +7680,10 @@
       <p:sp>
         <p:nvSpPr>
           <p:cNvPr id="14" name="TextBox 13"/>
-          <p:cNvSpPr txBox="1"/>
-          <p:nvPr/>
+          <p:cNvSpPr/>
+          <p:nvPr>
+            <p:ph type="body" idx="8"/>
+          </p:nvPr>
         </p:nvSpPr>
         <p:spPr>
           <a:xfrm>
@@ -7439,8 +7717,10 @@
       <p:sp>
         <p:nvSpPr>
           <p:cNvPr id="15" name="TextBox 14"/>
-          <p:cNvSpPr txBox="1"/>
-          <p:nvPr/>
+          <p:cNvSpPr/>
+          <p:nvPr>
+            <p:ph type="body" idx="9"/>
+          </p:nvPr>
         </p:nvSpPr>
         <p:spPr>
           <a:xfrm>
@@ -7518,8 +7798,10 @@
       <p:sp>
         <p:nvSpPr>
           <p:cNvPr id="17" name="TextBox 16"/>
-          <p:cNvSpPr txBox="1"/>
-          <p:nvPr/>
+          <p:cNvSpPr/>
+          <p:nvPr>
+            <p:ph type="body" idx="13"/>
+          </p:nvPr>
         </p:nvSpPr>
         <p:spPr>
           <a:xfrm>
@@ -7553,8 +7835,10 @@
       <p:sp>
         <p:nvSpPr>
           <p:cNvPr id="18" name="TextBox 17"/>
-          <p:cNvSpPr txBox="1"/>
-          <p:nvPr/>
+          <p:cNvSpPr/>
+          <p:nvPr>
+            <p:ph type="body" idx="14"/>
+          </p:nvPr>
         </p:nvSpPr>
         <p:spPr>
           <a:xfrm>
@@ -7632,8 +7916,10 @@
       <p:sp>
         <p:nvSpPr>
           <p:cNvPr id="20" name="TextBox 19"/>
-          <p:cNvSpPr txBox="1"/>
-          <p:nvPr/>
+          <p:cNvSpPr/>
+          <p:nvPr>
+            <p:ph type="body" idx="15"/>
+          </p:nvPr>
         </p:nvSpPr>
         <p:spPr>
           <a:xfrm>
@@ -7705,8 +7991,10 @@
       <p:sp>
         <p:nvSpPr>
           <p:cNvPr id="2" name="TextBox 1"/>
-          <p:cNvSpPr txBox="1"/>
-          <p:nvPr/>
+          <p:cNvSpPr/>
+          <p:nvPr>
+            <p:ph type="title"/>
+          </p:nvPr>
         </p:nvSpPr>
         <p:spPr>
           <a:xfrm>
@@ -7740,8 +8028,10 @@
       <p:sp>
         <p:nvSpPr>
           <p:cNvPr id="3" name="TextBox 2"/>
-          <p:cNvSpPr txBox="1"/>
-          <p:nvPr/>
+          <p:cNvSpPr/>
+          <p:nvPr>
+            <p:ph type="body" idx="1"/>
+          </p:nvPr>
         </p:nvSpPr>
         <p:spPr>
           <a:xfrm>
@@ -7819,8 +8109,10 @@
       <p:sp>
         <p:nvSpPr>
           <p:cNvPr id="5" name="TextBox 4"/>
-          <p:cNvSpPr txBox="1"/>
-          <p:nvPr/>
+          <p:cNvSpPr/>
+          <p:nvPr>
+            <p:ph type="body" idx="2"/>
+          </p:nvPr>
         </p:nvSpPr>
         <p:spPr>
           <a:xfrm>
@@ -7854,8 +8146,10 @@
       <p:sp>
         <p:nvSpPr>
           <p:cNvPr id="6" name="TextBox 5"/>
-          <p:cNvSpPr txBox="1"/>
-          <p:nvPr/>
+          <p:cNvSpPr/>
+          <p:nvPr>
+            <p:ph type="body" idx="3"/>
+          </p:nvPr>
         </p:nvSpPr>
         <p:spPr>
           <a:xfrm>
@@ -7933,8 +8227,10 @@
       <p:sp>
         <p:nvSpPr>
           <p:cNvPr id="8" name="TextBox 7"/>
-          <p:cNvSpPr txBox="1"/>
-          <p:nvPr/>
+          <p:cNvSpPr/>
+          <p:nvPr>
+            <p:ph type="body" idx="4"/>
+          </p:nvPr>
         </p:nvSpPr>
         <p:spPr>
           <a:xfrm>
@@ -7968,8 +8264,10 @@
       <p:sp>
         <p:nvSpPr>
           <p:cNvPr id="9" name="TextBox 8"/>
-          <p:cNvSpPr txBox="1"/>
-          <p:nvPr/>
+          <p:cNvSpPr/>
+          <p:nvPr>
+            <p:ph type="body" idx="5"/>
+          </p:nvPr>
         </p:nvSpPr>
         <p:spPr>
           <a:xfrm>
@@ -8047,8 +8345,10 @@
       <p:sp>
         <p:nvSpPr>
           <p:cNvPr id="11" name="TextBox 10"/>
-          <p:cNvSpPr txBox="1"/>
-          <p:nvPr/>
+          <p:cNvSpPr/>
+          <p:nvPr>
+            <p:ph type="body" idx="6"/>
+          </p:nvPr>
         </p:nvSpPr>
         <p:spPr>
           <a:xfrm>
@@ -8082,8 +8382,10 @@
       <p:sp>
         <p:nvSpPr>
           <p:cNvPr id="12" name="TextBox 11"/>
-          <p:cNvSpPr txBox="1"/>
-          <p:nvPr/>
+          <p:cNvSpPr/>
+          <p:nvPr>
+            <p:ph type="body" idx="7"/>
+          </p:nvPr>
         </p:nvSpPr>
         <p:spPr>
           <a:xfrm>
@@ -8161,8 +8463,10 @@
       <p:sp>
         <p:nvSpPr>
           <p:cNvPr id="14" name="TextBox 13"/>
-          <p:cNvSpPr txBox="1"/>
-          <p:nvPr/>
+          <p:cNvSpPr/>
+          <p:nvPr>
+            <p:ph type="body" idx="8"/>
+          </p:nvPr>
         </p:nvSpPr>
         <p:spPr>
           <a:xfrm>
@@ -8240,8 +8544,10 @@
       <p:sp>
         <p:nvSpPr>
           <p:cNvPr id="16" name="TextBox 15"/>
-          <p:cNvSpPr txBox="1"/>
-          <p:nvPr/>
+          <p:cNvSpPr/>
+          <p:nvPr>
+            <p:ph type="body" idx="9"/>
+          </p:nvPr>
         </p:nvSpPr>
         <p:spPr>
           <a:xfrm>
@@ -8313,8 +8619,10 @@
       <p:sp>
         <p:nvSpPr>
           <p:cNvPr id="2" name="TextBox 1"/>
-          <p:cNvSpPr txBox="1"/>
-          <p:nvPr/>
+          <p:cNvSpPr/>
+          <p:nvPr>
+            <p:ph type="title"/>
+          </p:nvPr>
         </p:nvSpPr>
         <p:spPr>
           <a:xfrm>
@@ -8348,8 +8656,10 @@
       <p:sp>
         <p:nvSpPr>
           <p:cNvPr id="3" name="TextBox 2"/>
-          <p:cNvSpPr txBox="1"/>
-          <p:nvPr/>
+          <p:cNvSpPr/>
+          <p:nvPr>
+            <p:ph type="body" idx="1"/>
+          </p:nvPr>
         </p:nvSpPr>
         <p:spPr>
           <a:xfrm>
@@ -8383,8 +8693,10 @@
       <p:sp>
         <p:nvSpPr>
           <p:cNvPr id="4" name="TextBox 3"/>
-          <p:cNvSpPr txBox="1"/>
-          <p:nvPr/>
+          <p:cNvSpPr/>
+          <p:nvPr>
+            <p:ph type="body" idx="2"/>
+          </p:nvPr>
         </p:nvSpPr>
         <p:spPr>
           <a:xfrm>
@@ -8418,8 +8730,10 @@
       <p:sp>
         <p:nvSpPr>
           <p:cNvPr id="5" name="TextBox 4"/>
-          <p:cNvSpPr txBox="1"/>
-          <p:nvPr/>
+          <p:cNvSpPr/>
+          <p:nvPr>
+            <p:ph type="body" idx="3"/>
+          </p:nvPr>
         </p:nvSpPr>
         <p:spPr>
           <a:xfrm>
@@ -8497,8 +8811,10 @@
       <p:sp>
         <p:nvSpPr>
           <p:cNvPr id="7" name="TextBox 6"/>
-          <p:cNvSpPr txBox="1"/>
-          <p:nvPr/>
+          <p:cNvSpPr/>
+          <p:nvPr>
+            <p:ph type="body" idx="4"/>
+          </p:nvPr>
         </p:nvSpPr>
         <p:spPr>
           <a:xfrm>
@@ -8532,8 +8848,10 @@
       <p:sp>
         <p:nvSpPr>
           <p:cNvPr id="8" name="TextBox 7"/>
-          <p:cNvSpPr txBox="1"/>
-          <p:nvPr/>
+          <p:cNvSpPr/>
+          <p:nvPr>
+            <p:ph type="body" idx="5"/>
+          </p:nvPr>
         </p:nvSpPr>
         <p:spPr>
           <a:xfrm>
@@ -8567,8 +8885,10 @@
       <p:sp>
         <p:nvSpPr>
           <p:cNvPr id="9" name="TextBox 8"/>
-          <p:cNvSpPr txBox="1"/>
-          <p:nvPr/>
+          <p:cNvSpPr/>
+          <p:nvPr>
+            <p:ph type="body" idx="6"/>
+          </p:nvPr>
         </p:nvSpPr>
         <p:spPr>
           <a:xfrm>
@@ -8602,8 +8922,10 @@
       <p:sp>
         <p:nvSpPr>
           <p:cNvPr id="10" name="TextBox 9"/>
-          <p:cNvSpPr txBox="1"/>
-          <p:nvPr/>
+          <p:cNvSpPr/>
+          <p:nvPr>
+            <p:ph type="body" idx="7"/>
+          </p:nvPr>
         </p:nvSpPr>
         <p:spPr>
           <a:xfrm>
@@ -8637,8 +8959,10 @@
       <p:sp>
         <p:nvSpPr>
           <p:cNvPr id="11" name="TextBox 10"/>
-          <p:cNvSpPr txBox="1"/>
-          <p:nvPr/>
+          <p:cNvSpPr/>
+          <p:nvPr>
+            <p:ph type="body" idx="8"/>
+          </p:nvPr>
         </p:nvSpPr>
         <p:spPr>
           <a:xfrm>
@@ -8672,8 +8996,10 @@
       <p:sp>
         <p:nvSpPr>
           <p:cNvPr id="12" name="TextBox 11"/>
-          <p:cNvSpPr txBox="1"/>
-          <p:nvPr/>
+          <p:cNvSpPr/>
+          <p:nvPr>
+            <p:ph type="body" idx="9"/>
+          </p:nvPr>
         </p:nvSpPr>
         <p:spPr>
           <a:xfrm>
@@ -8707,8 +9033,10 @@
       <p:sp>
         <p:nvSpPr>
           <p:cNvPr id="13" name="TextBox 12"/>
-          <p:cNvSpPr txBox="1"/>
-          <p:nvPr/>
+          <p:cNvSpPr/>
+          <p:nvPr>
+            <p:ph type="body" idx="13"/>
+          </p:nvPr>
         </p:nvSpPr>
         <p:spPr>
           <a:xfrm>
@@ -8742,8 +9070,10 @@
       <p:sp>
         <p:nvSpPr>
           <p:cNvPr id="14" name="TextBox 13"/>
-          <p:cNvSpPr txBox="1"/>
-          <p:nvPr/>
+          <p:cNvSpPr/>
+          <p:nvPr>
+            <p:ph type="body" idx="14"/>
+          </p:nvPr>
         </p:nvSpPr>
         <p:spPr>
           <a:xfrm>
@@ -8777,8 +9107,10 @@
       <p:sp>
         <p:nvSpPr>
           <p:cNvPr id="15" name="TextBox 14"/>
-          <p:cNvSpPr txBox="1"/>
-          <p:nvPr/>
+          <p:cNvSpPr/>
+          <p:nvPr>
+            <p:ph type="body" idx="15"/>
+          </p:nvPr>
         </p:nvSpPr>
         <p:spPr>
           <a:xfrm>
@@ -8812,8 +9144,10 @@
       <p:sp>
         <p:nvSpPr>
           <p:cNvPr id="16" name="TextBox 15"/>
-          <p:cNvSpPr txBox="1"/>
-          <p:nvPr/>
+          <p:cNvSpPr/>
+          <p:nvPr>
+            <p:ph type="body" idx="16"/>
+          </p:nvPr>
         </p:nvSpPr>
         <p:spPr>
           <a:xfrm>
@@ -8847,8 +9181,10 @@
       <p:sp>
         <p:nvSpPr>
           <p:cNvPr id="17" name="TextBox 16"/>
-          <p:cNvSpPr txBox="1"/>
-          <p:nvPr/>
+          <p:cNvSpPr/>
+          <p:nvPr>
+            <p:ph type="body" idx="17"/>
+          </p:nvPr>
         </p:nvSpPr>
         <p:spPr>
           <a:xfrm>
@@ -8882,8 +9218,10 @@
       <p:sp>
         <p:nvSpPr>
           <p:cNvPr id="18" name="TextBox 17"/>
-          <p:cNvSpPr txBox="1"/>
-          <p:nvPr/>
+          <p:cNvSpPr/>
+          <p:nvPr>
+            <p:ph type="body" idx="18"/>
+          </p:nvPr>
         </p:nvSpPr>
         <p:spPr>
           <a:xfrm>
@@ -8955,8 +9293,10 @@
       <p:sp>
         <p:nvSpPr>
           <p:cNvPr id="2" name="TextBox 1"/>
-          <p:cNvSpPr txBox="1"/>
-          <p:nvPr/>
+          <p:cNvSpPr/>
+          <p:nvPr>
+            <p:ph type="title"/>
+          </p:nvPr>
         </p:nvSpPr>
         <p:spPr>
           <a:xfrm>
@@ -8990,8 +9330,10 @@
       <p:sp>
         <p:nvSpPr>
           <p:cNvPr id="3" name="TextBox 2"/>
-          <p:cNvSpPr txBox="1"/>
-          <p:nvPr/>
+          <p:cNvSpPr/>
+          <p:nvPr>
+            <p:ph type="body" idx="1"/>
+          </p:nvPr>
         </p:nvSpPr>
         <p:spPr>
           <a:xfrm>
@@ -9025,8 +9367,10 @@
       <p:sp>
         <p:nvSpPr>
           <p:cNvPr id="4" name="TextBox 3"/>
-          <p:cNvSpPr txBox="1"/>
-          <p:nvPr/>
+          <p:cNvSpPr/>
+          <p:nvPr>
+            <p:ph type="body" idx="2"/>
+          </p:nvPr>
         </p:nvSpPr>
         <p:spPr>
           <a:xfrm>
@@ -9104,8 +9448,10 @@
       <p:sp>
         <p:nvSpPr>
           <p:cNvPr id="6" name="TextBox 5"/>
-          <p:cNvSpPr txBox="1"/>
-          <p:nvPr/>
+          <p:cNvSpPr/>
+          <p:nvPr>
+            <p:ph type="body" idx="3"/>
+          </p:nvPr>
         </p:nvSpPr>
         <p:spPr>
           <a:xfrm>
@@ -9139,8 +9485,10 @@
       <p:sp>
         <p:nvSpPr>
           <p:cNvPr id="7" name="TextBox 6"/>
-          <p:cNvSpPr txBox="1"/>
-          <p:nvPr/>
+          <p:cNvSpPr/>
+          <p:nvPr>
+            <p:ph type="body" idx="4"/>
+          </p:nvPr>
         </p:nvSpPr>
         <p:spPr>
           <a:xfrm>
@@ -9174,8 +9522,10 @@
       <p:sp>
         <p:nvSpPr>
           <p:cNvPr id="8" name="TextBox 7"/>
-          <p:cNvSpPr txBox="1"/>
-          <p:nvPr/>
+          <p:cNvSpPr/>
+          <p:nvPr>
+            <p:ph type="body" idx="5"/>
+          </p:nvPr>
         </p:nvSpPr>
         <p:spPr>
           <a:xfrm>
@@ -9253,8 +9603,10 @@
       <p:sp>
         <p:nvSpPr>
           <p:cNvPr id="10" name="TextBox 9"/>
-          <p:cNvSpPr txBox="1"/>
-          <p:nvPr/>
+          <p:cNvSpPr/>
+          <p:nvPr>
+            <p:ph type="body" idx="6"/>
+          </p:nvPr>
         </p:nvSpPr>
         <p:spPr>
           <a:xfrm>
@@ -9288,8 +9640,10 @@
       <p:sp>
         <p:nvSpPr>
           <p:cNvPr id="11" name="TextBox 10"/>
-          <p:cNvSpPr txBox="1"/>
-          <p:nvPr/>
+          <p:cNvSpPr/>
+          <p:nvPr>
+            <p:ph type="body" idx="7"/>
+          </p:nvPr>
         </p:nvSpPr>
         <p:spPr>
           <a:xfrm>
@@ -9323,8 +9677,10 @@
       <p:sp>
         <p:nvSpPr>
           <p:cNvPr id="12" name="TextBox 11"/>
-          <p:cNvSpPr txBox="1"/>
-          <p:nvPr/>
+          <p:cNvSpPr/>
+          <p:nvPr>
+            <p:ph type="body" idx="8"/>
+          </p:nvPr>
         </p:nvSpPr>
         <p:spPr>
           <a:xfrm>
@@ -9402,8 +9758,10 @@
       <p:sp>
         <p:nvSpPr>
           <p:cNvPr id="14" name="TextBox 13"/>
-          <p:cNvSpPr txBox="1"/>
-          <p:nvPr/>
+          <p:cNvSpPr/>
+          <p:nvPr>
+            <p:ph type="body" idx="9"/>
+          </p:nvPr>
         </p:nvSpPr>
         <p:spPr>
           <a:xfrm>
@@ -9475,8 +9833,10 @@
       <p:sp>
         <p:nvSpPr>
           <p:cNvPr id="2" name="TextBox 1"/>
-          <p:cNvSpPr txBox="1"/>
-          <p:nvPr/>
+          <p:cNvSpPr/>
+          <p:nvPr>
+            <p:ph type="title"/>
+          </p:nvPr>
         </p:nvSpPr>
         <p:spPr>
           <a:xfrm>
@@ -9510,8 +9870,10 @@
       <p:sp>
         <p:nvSpPr>
           <p:cNvPr id="3" name="TextBox 2"/>
-          <p:cNvSpPr txBox="1"/>
-          <p:nvPr/>
+          <p:cNvSpPr/>
+          <p:nvPr>
+            <p:ph type="body" idx="1"/>
+          </p:nvPr>
         </p:nvSpPr>
         <p:spPr>
           <a:xfrm>
@@ -9589,8 +9951,10 @@
       <p:sp>
         <p:nvSpPr>
           <p:cNvPr id="5" name="TextBox 4"/>
-          <p:cNvSpPr txBox="1"/>
-          <p:nvPr/>
+          <p:cNvSpPr/>
+          <p:nvPr>
+            <p:ph type="body" idx="2"/>
+          </p:nvPr>
         </p:nvSpPr>
         <p:spPr>
           <a:xfrm>
@@ -9624,8 +9988,10 @@
       <p:sp>
         <p:nvSpPr>
           <p:cNvPr id="6" name="TextBox 5"/>
-          <p:cNvSpPr txBox="1"/>
-          <p:nvPr/>
+          <p:cNvSpPr/>
+          <p:nvPr>
+            <p:ph type="body" idx="3"/>
+          </p:nvPr>
         </p:nvSpPr>
         <p:spPr>
           <a:xfrm>
@@ -9659,8 +10025,10 @@
       <p:sp>
         <p:nvSpPr>
           <p:cNvPr id="7" name="TextBox 6"/>
-          <p:cNvSpPr txBox="1"/>
-          <p:nvPr/>
+          <p:cNvSpPr/>
+          <p:nvPr>
+            <p:ph type="body" idx="4"/>
+          </p:nvPr>
         </p:nvSpPr>
         <p:spPr>
           <a:xfrm>
@@ -9738,8 +10106,10 @@
       <p:sp>
         <p:nvSpPr>
           <p:cNvPr id="9" name="TextBox 8"/>
-          <p:cNvSpPr txBox="1"/>
-          <p:nvPr/>
+          <p:cNvSpPr/>
+          <p:nvPr>
+            <p:ph type="body" idx="5"/>
+          </p:nvPr>
         </p:nvSpPr>
         <p:spPr>
           <a:xfrm>
@@ -9773,8 +10143,10 @@
       <p:sp>
         <p:nvSpPr>
           <p:cNvPr id="10" name="TextBox 9"/>
-          <p:cNvSpPr txBox="1"/>
-          <p:nvPr/>
+          <p:cNvSpPr/>
+          <p:nvPr>
+            <p:ph type="body" idx="6"/>
+          </p:nvPr>
         </p:nvSpPr>
         <p:spPr>
           <a:xfrm>
@@ -9808,8 +10180,10 @@
       <p:sp>
         <p:nvSpPr>
           <p:cNvPr id="11" name="TextBox 10"/>
-          <p:cNvSpPr txBox="1"/>
-          <p:nvPr/>
+          <p:cNvSpPr/>
+          <p:nvPr>
+            <p:ph type="body" idx="7"/>
+          </p:nvPr>
         </p:nvSpPr>
         <p:spPr>
           <a:xfrm>
@@ -9887,8 +10261,10 @@
       <p:sp>
         <p:nvSpPr>
           <p:cNvPr id="13" name="TextBox 12"/>
-          <p:cNvSpPr txBox="1"/>
-          <p:nvPr/>
+          <p:cNvSpPr/>
+          <p:nvPr>
+            <p:ph type="body" idx="8"/>
+          </p:nvPr>
         </p:nvSpPr>
         <p:spPr>
           <a:xfrm>
@@ -9922,8 +10298,10 @@
       <p:sp>
         <p:nvSpPr>
           <p:cNvPr id="14" name="TextBox 13"/>
-          <p:cNvSpPr txBox="1"/>
-          <p:nvPr/>
+          <p:cNvSpPr/>
+          <p:nvPr>
+            <p:ph type="body" idx="9"/>
+          </p:nvPr>
         </p:nvSpPr>
         <p:spPr>
           <a:xfrm>
@@ -9957,8 +10335,10 @@
       <p:sp>
         <p:nvSpPr>
           <p:cNvPr id="15" name="TextBox 14"/>
-          <p:cNvSpPr txBox="1"/>
-          <p:nvPr/>
+          <p:cNvSpPr/>
+          <p:nvPr>
+            <p:ph type="body" idx="13"/>
+          </p:nvPr>
         </p:nvSpPr>
         <p:spPr>
           <a:xfrm>
@@ -10036,8 +10416,10 @@
       <p:sp>
         <p:nvSpPr>
           <p:cNvPr id="17" name="TextBox 16"/>
-          <p:cNvSpPr txBox="1"/>
-          <p:nvPr/>
+          <p:cNvSpPr/>
+          <p:nvPr>
+            <p:ph type="body" idx="14"/>
+          </p:nvPr>
         </p:nvSpPr>
         <p:spPr>
           <a:xfrm>
@@ -10071,8 +10453,10 @@
       <p:sp>
         <p:nvSpPr>
           <p:cNvPr id="18" name="TextBox 17"/>
-          <p:cNvSpPr txBox="1"/>
-          <p:nvPr/>
+          <p:cNvSpPr/>
+          <p:nvPr>
+            <p:ph type="body" idx="15"/>
+          </p:nvPr>
         </p:nvSpPr>
         <p:spPr>
           <a:xfrm>
@@ -10144,8 +10528,10 @@
       <p:sp>
         <p:nvSpPr>
           <p:cNvPr id="2" name="TextBox 1"/>
-          <p:cNvSpPr txBox="1"/>
-          <p:nvPr/>
+          <p:cNvSpPr/>
+          <p:nvPr>
+            <p:ph type="title"/>
+          </p:nvPr>
         </p:nvSpPr>
         <p:spPr>
           <a:xfrm>
@@ -10223,8 +10609,10 @@
       <p:sp>
         <p:nvSpPr>
           <p:cNvPr id="4" name="TextBox 3"/>
-          <p:cNvSpPr txBox="1"/>
-          <p:nvPr/>
+          <p:cNvSpPr/>
+          <p:nvPr>
+            <p:ph type="body" idx="1"/>
+          </p:nvPr>
         </p:nvSpPr>
         <p:spPr>
           <a:xfrm>
@@ -10258,8 +10646,10 @@
       <p:sp>
         <p:nvSpPr>
           <p:cNvPr id="5" name="TextBox 4"/>
-          <p:cNvSpPr txBox="1"/>
-          <p:nvPr/>
+          <p:cNvSpPr/>
+          <p:nvPr>
+            <p:ph type="body" idx="2"/>
+          </p:nvPr>
         </p:nvSpPr>
         <p:spPr>
           <a:xfrm>
@@ -10293,8 +10683,10 @@
       <p:sp>
         <p:nvSpPr>
           <p:cNvPr id="6" name="TextBox 5"/>
-          <p:cNvSpPr txBox="1"/>
-          <p:nvPr/>
+          <p:cNvSpPr/>
+          <p:nvPr>
+            <p:ph type="body" idx="3"/>
+          </p:nvPr>
         </p:nvSpPr>
         <p:spPr>
           <a:xfrm>
@@ -10372,8 +10764,10 @@
       <p:sp>
         <p:nvSpPr>
           <p:cNvPr id="8" name="TextBox 7"/>
-          <p:cNvSpPr txBox="1"/>
-          <p:nvPr/>
+          <p:cNvSpPr/>
+          <p:nvPr>
+            <p:ph type="body" idx="4"/>
+          </p:nvPr>
         </p:nvSpPr>
         <p:spPr>
           <a:xfrm>
@@ -10407,8 +10801,10 @@
       <p:sp>
         <p:nvSpPr>
           <p:cNvPr id="9" name="TextBox 8"/>
-          <p:cNvSpPr txBox="1"/>
-          <p:nvPr/>
+          <p:cNvSpPr/>
+          <p:nvPr>
+            <p:ph type="body" idx="5"/>
+          </p:nvPr>
         </p:nvSpPr>
         <p:spPr>
           <a:xfrm>
@@ -10442,8 +10838,10 @@
       <p:sp>
         <p:nvSpPr>
           <p:cNvPr id="10" name="TextBox 9"/>
-          <p:cNvSpPr txBox="1"/>
-          <p:nvPr/>
+          <p:cNvSpPr/>
+          <p:nvPr>
+            <p:ph type="body" idx="6"/>
+          </p:nvPr>
         </p:nvSpPr>
         <p:spPr>
           <a:xfrm>
@@ -10521,8 +10919,10 @@
       <p:sp>
         <p:nvSpPr>
           <p:cNvPr id="12" name="TextBox 11"/>
-          <p:cNvSpPr txBox="1"/>
-          <p:nvPr/>
+          <p:cNvSpPr/>
+          <p:nvPr>
+            <p:ph type="body" idx="7"/>
+          </p:nvPr>
         </p:nvSpPr>
         <p:spPr>
           <a:xfrm>
@@ -10556,8 +10956,10 @@
       <p:sp>
         <p:nvSpPr>
           <p:cNvPr id="13" name="TextBox 12"/>
-          <p:cNvSpPr txBox="1"/>
-          <p:nvPr/>
+          <p:cNvSpPr/>
+          <p:nvPr>
+            <p:ph type="body" idx="8"/>
+          </p:nvPr>
         </p:nvSpPr>
         <p:spPr>
           <a:xfrm>
@@ -10591,8 +10993,10 @@
       <p:sp>
         <p:nvSpPr>
           <p:cNvPr id="14" name="TextBox 13"/>
-          <p:cNvSpPr txBox="1"/>
-          <p:nvPr/>
+          <p:cNvSpPr/>
+          <p:nvPr>
+            <p:ph type="body" idx="9"/>
+          </p:nvPr>
         </p:nvSpPr>
         <p:spPr>
           <a:xfrm>
@@ -10664,8 +11068,10 @@
       <p:sp>
         <p:nvSpPr>
           <p:cNvPr id="2" name="TextBox 1"/>
-          <p:cNvSpPr txBox="1"/>
-          <p:nvPr/>
+          <p:cNvSpPr/>
+          <p:nvPr>
+            <p:ph type="title"/>
+          </p:nvPr>
         </p:nvSpPr>
         <p:spPr>
           <a:xfrm>
@@ -10743,8 +11149,10 @@
       <p:sp>
         <p:nvSpPr>
           <p:cNvPr id="4" name="TextBox 3"/>
-          <p:cNvSpPr txBox="1"/>
-          <p:nvPr/>
+          <p:cNvSpPr/>
+          <p:nvPr>
+            <p:ph type="body" idx="1"/>
+          </p:nvPr>
         </p:nvSpPr>
         <p:spPr>
           <a:xfrm>
@@ -10822,8 +11230,10 @@
       <p:sp>
         <p:nvSpPr>
           <p:cNvPr id="6" name="TextBox 5"/>
-          <p:cNvSpPr txBox="1"/>
-          <p:nvPr/>
+          <p:cNvSpPr/>
+          <p:nvPr>
+            <p:ph type="body" idx="2"/>
+          </p:nvPr>
         </p:nvSpPr>
         <p:spPr>
           <a:xfrm>
@@ -10901,8 +11311,10 @@
       <p:sp>
         <p:nvSpPr>
           <p:cNvPr id="8" name="TextBox 7"/>
-          <p:cNvSpPr txBox="1"/>
-          <p:nvPr/>
+          <p:cNvSpPr/>
+          <p:nvPr>
+            <p:ph type="body" idx="3"/>
+          </p:nvPr>
         </p:nvSpPr>
         <p:spPr>
           <a:xfrm>
@@ -10980,8 +11392,10 @@
       <p:sp>
         <p:nvSpPr>
           <p:cNvPr id="10" name="TextBox 9"/>
-          <p:cNvSpPr txBox="1"/>
-          <p:nvPr/>
+          <p:cNvSpPr/>
+          <p:nvPr>
+            <p:ph type="body" idx="4"/>
+          </p:nvPr>
         </p:nvSpPr>
         <p:spPr>
           <a:xfrm>
@@ -11053,8 +11467,10 @@
       <p:sp>
         <p:nvSpPr>
           <p:cNvPr id="2" name="TextBox 1"/>
-          <p:cNvSpPr txBox="1"/>
-          <p:nvPr/>
+          <p:cNvSpPr/>
+          <p:nvPr>
+            <p:ph type="title"/>
+          </p:nvPr>
         </p:nvSpPr>
         <p:spPr>
           <a:xfrm>
@@ -11220,8 +11636,10 @@
       <p:sp>
         <p:nvSpPr>
           <p:cNvPr id="6" name="TextBox 5"/>
-          <p:cNvSpPr txBox="1"/>
-          <p:nvPr/>
+          <p:cNvSpPr/>
+          <p:nvPr>
+            <p:ph type="body" idx="1"/>
+          </p:nvPr>
         </p:nvSpPr>
         <p:spPr>
           <a:xfrm>
@@ -11255,8 +11673,10 @@
       <p:sp>
         <p:nvSpPr>
           <p:cNvPr id="7" name="TextBox 6"/>
-          <p:cNvSpPr txBox="1"/>
-          <p:nvPr/>
+          <p:cNvSpPr/>
+          <p:nvPr>
+            <p:ph type="body" idx="2"/>
+          </p:nvPr>
         </p:nvSpPr>
         <p:spPr>
           <a:xfrm>
@@ -11290,8 +11710,10 @@
       <p:sp>
         <p:nvSpPr>
           <p:cNvPr id="8" name="TextBox 7"/>
-          <p:cNvSpPr txBox="1"/>
-          <p:nvPr/>
+          <p:cNvSpPr/>
+          <p:nvPr>
+            <p:ph type="body" idx="3"/>
+          </p:nvPr>
         </p:nvSpPr>
         <p:spPr>
           <a:xfrm>
@@ -11325,8 +11747,10 @@
       <p:sp>
         <p:nvSpPr>
           <p:cNvPr id="9" name="TextBox 8"/>
-          <p:cNvSpPr txBox="1"/>
-          <p:nvPr/>
+          <p:cNvSpPr/>
+          <p:nvPr>
+            <p:ph type="body" idx="4"/>
+          </p:nvPr>
         </p:nvSpPr>
         <p:spPr>
           <a:xfrm>
@@ -11360,8 +11784,10 @@
       <p:sp>
         <p:nvSpPr>
           <p:cNvPr id="10" name="TextBox 9"/>
-          <p:cNvSpPr txBox="1"/>
-          <p:nvPr/>
+          <p:cNvSpPr/>
+          <p:nvPr>
+            <p:ph type="body" idx="5"/>
+          </p:nvPr>
         </p:nvSpPr>
         <p:spPr>
           <a:xfrm>
@@ -11395,8 +11821,10 @@
       <p:sp>
         <p:nvSpPr>
           <p:cNvPr id="11" name="TextBox 10"/>
-          <p:cNvSpPr txBox="1"/>
-          <p:nvPr/>
+          <p:cNvSpPr/>
+          <p:nvPr>
+            <p:ph type="body" idx="6"/>
+          </p:nvPr>
         </p:nvSpPr>
         <p:spPr>
           <a:xfrm>
@@ -11468,8 +11896,10 @@
       <p:sp>
         <p:nvSpPr>
           <p:cNvPr id="2" name="TextBox 1"/>
-          <p:cNvSpPr txBox="1"/>
-          <p:nvPr/>
+          <p:cNvSpPr/>
+          <p:nvPr>
+            <p:ph type="title"/>
+          </p:nvPr>
         </p:nvSpPr>
         <p:spPr>
           <a:xfrm>
@@ -11547,8 +11977,10 @@
       <p:sp>
         <p:nvSpPr>
           <p:cNvPr id="4" name="TextBox 3"/>
-          <p:cNvSpPr txBox="1"/>
-          <p:nvPr/>
+          <p:cNvSpPr/>
+          <p:nvPr>
+            <p:ph type="body" idx="1"/>
+          </p:nvPr>
         </p:nvSpPr>
         <p:spPr>
           <a:xfrm>
@@ -11626,8 +12058,10 @@
       <p:sp>
         <p:nvSpPr>
           <p:cNvPr id="6" name="TextBox 5"/>
-          <p:cNvSpPr txBox="1"/>
-          <p:nvPr/>
+          <p:cNvSpPr/>
+          <p:nvPr>
+            <p:ph type="body" idx="2"/>
+          </p:nvPr>
         </p:nvSpPr>
         <p:spPr>
           <a:xfrm>
@@ -11705,8 +12139,10 @@
       <p:sp>
         <p:nvSpPr>
           <p:cNvPr id="8" name="TextBox 7"/>
-          <p:cNvSpPr txBox="1"/>
-          <p:nvPr/>
+          <p:cNvSpPr/>
+          <p:nvPr>
+            <p:ph type="body" idx="3"/>
+          </p:nvPr>
         </p:nvSpPr>
         <p:spPr>
           <a:xfrm>
@@ -11784,8 +12220,10 @@
       <p:sp>
         <p:nvSpPr>
           <p:cNvPr id="10" name="TextBox 9"/>
-          <p:cNvSpPr txBox="1"/>
-          <p:nvPr/>
+          <p:cNvSpPr/>
+          <p:nvPr>
+            <p:ph type="body" idx="4"/>
+          </p:nvPr>
         </p:nvSpPr>
         <p:spPr>
           <a:xfrm>
@@ -12145,8 +12583,10 @@
       <p:sp>
         <p:nvSpPr>
           <p:cNvPr id="2" name="TextBox 1"/>
-          <p:cNvSpPr txBox="1"/>
-          <p:nvPr/>
+          <p:cNvSpPr/>
+          <p:nvPr>
+            <p:ph type="title"/>
+          </p:nvPr>
         </p:nvSpPr>
         <p:spPr>
           <a:xfrm>
@@ -12180,8 +12620,10 @@
       <p:sp>
         <p:nvSpPr>
           <p:cNvPr id="3" name="TextBox 2"/>
-          <p:cNvSpPr txBox="1"/>
-          <p:nvPr/>
+          <p:cNvSpPr/>
+          <p:nvPr>
+            <p:ph type="body" idx="1"/>
+          </p:nvPr>
         </p:nvSpPr>
         <p:spPr>
           <a:xfrm>
@@ -12259,8 +12701,10 @@
       <p:sp>
         <p:nvSpPr>
           <p:cNvPr id="5" name="TextBox 4"/>
-          <p:cNvSpPr txBox="1"/>
-          <p:nvPr/>
+          <p:cNvSpPr/>
+          <p:nvPr>
+            <p:ph type="body" idx="2"/>
+          </p:nvPr>
         </p:nvSpPr>
         <p:spPr>
           <a:xfrm>
@@ -12294,8 +12738,10 @@
       <p:sp>
         <p:nvSpPr>
           <p:cNvPr id="6" name="TextBox 5"/>
-          <p:cNvSpPr txBox="1"/>
-          <p:nvPr/>
+          <p:cNvSpPr/>
+          <p:nvPr>
+            <p:ph type="body" idx="3"/>
+          </p:nvPr>
         </p:nvSpPr>
         <p:spPr>
           <a:xfrm>
@@ -12373,8 +12819,10 @@
       <p:sp>
         <p:nvSpPr>
           <p:cNvPr id="8" name="TextBox 7"/>
-          <p:cNvSpPr txBox="1"/>
-          <p:nvPr/>
+          <p:cNvSpPr/>
+          <p:nvPr>
+            <p:ph type="body" idx="4"/>
+          </p:nvPr>
         </p:nvSpPr>
         <p:spPr>
           <a:xfrm>
@@ -12408,8 +12856,10 @@
       <p:sp>
         <p:nvSpPr>
           <p:cNvPr id="9" name="TextBox 8"/>
-          <p:cNvSpPr txBox="1"/>
-          <p:nvPr/>
+          <p:cNvSpPr/>
+          <p:nvPr>
+            <p:ph type="body" idx="5"/>
+          </p:nvPr>
         </p:nvSpPr>
         <p:spPr>
           <a:xfrm>
@@ -12487,8 +12937,10 @@
       <p:sp>
         <p:nvSpPr>
           <p:cNvPr id="11" name="TextBox 10"/>
-          <p:cNvSpPr txBox="1"/>
-          <p:nvPr/>
+          <p:cNvSpPr/>
+          <p:nvPr>
+            <p:ph type="body" idx="6"/>
+          </p:nvPr>
         </p:nvSpPr>
         <p:spPr>
           <a:xfrm>
@@ -12522,8 +12974,10 @@
       <p:sp>
         <p:nvSpPr>
           <p:cNvPr id="12" name="TextBox 11"/>
-          <p:cNvSpPr txBox="1"/>
-          <p:nvPr/>
+          <p:cNvSpPr/>
+          <p:nvPr>
+            <p:ph type="body" idx="7"/>
+          </p:nvPr>
         </p:nvSpPr>
         <p:spPr>
           <a:xfrm>
@@ -12601,8 +13055,10 @@
       <p:sp>
         <p:nvSpPr>
           <p:cNvPr id="14" name="TextBox 13"/>
-          <p:cNvSpPr txBox="1"/>
-          <p:nvPr/>
+          <p:cNvSpPr/>
+          <p:nvPr>
+            <p:ph type="body" idx="8"/>
+          </p:nvPr>
         </p:nvSpPr>
         <p:spPr>
           <a:xfrm>
@@ -12674,8 +13130,10 @@
       <p:sp>
         <p:nvSpPr>
           <p:cNvPr id="2" name="TextBox 1"/>
-          <p:cNvSpPr txBox="1"/>
-          <p:nvPr/>
+          <p:cNvSpPr/>
+          <p:nvPr>
+            <p:ph type="title"/>
+          </p:nvPr>
         </p:nvSpPr>
         <p:spPr>
           <a:xfrm>
@@ -12709,8 +13167,10 @@
       <p:sp>
         <p:nvSpPr>
           <p:cNvPr id="3" name="TextBox 2"/>
-          <p:cNvSpPr txBox="1"/>
-          <p:nvPr/>
+          <p:cNvSpPr/>
+          <p:nvPr>
+            <p:ph type="body" idx="1"/>
+          </p:nvPr>
         </p:nvSpPr>
         <p:spPr>
           <a:xfrm>
@@ -12744,8 +13204,10 @@
       <p:sp>
         <p:nvSpPr>
           <p:cNvPr id="4" name="TextBox 3"/>
-          <p:cNvSpPr txBox="1"/>
-          <p:nvPr/>
+          <p:cNvSpPr/>
+          <p:nvPr>
+            <p:ph type="body" idx="2"/>
+          </p:nvPr>
         </p:nvSpPr>
         <p:spPr>
           <a:xfrm>
@@ -12779,8 +13241,10 @@
       <p:sp>
         <p:nvSpPr>
           <p:cNvPr id="5" name="TextBox 4"/>
-          <p:cNvSpPr txBox="1"/>
-          <p:nvPr/>
+          <p:cNvSpPr/>
+          <p:nvPr>
+            <p:ph type="body" idx="3"/>
+          </p:nvPr>
         </p:nvSpPr>
         <p:spPr>
           <a:xfrm>
@@ -12858,8 +13322,10 @@
       <p:sp>
         <p:nvSpPr>
           <p:cNvPr id="7" name="TextBox 6"/>
-          <p:cNvSpPr txBox="1"/>
-          <p:nvPr/>
+          <p:cNvSpPr/>
+          <p:nvPr>
+            <p:ph type="body" idx="4"/>
+          </p:nvPr>
         </p:nvSpPr>
         <p:spPr>
           <a:xfrm>
@@ -12937,8 +13403,10 @@
       <p:sp>
         <p:nvSpPr>
           <p:cNvPr id="9" name="TextBox 8"/>
-          <p:cNvSpPr txBox="1"/>
-          <p:nvPr/>
+          <p:cNvSpPr/>
+          <p:nvPr>
+            <p:ph type="body" idx="5"/>
+          </p:nvPr>
         </p:nvSpPr>
         <p:spPr>
           <a:xfrm>
@@ -12972,8 +13440,10 @@
       <p:sp>
         <p:nvSpPr>
           <p:cNvPr id="10" name="TextBox 9"/>
-          <p:cNvSpPr txBox="1"/>
-          <p:nvPr/>
+          <p:cNvSpPr/>
+          <p:nvPr>
+            <p:ph type="body" idx="6"/>
+          </p:nvPr>
         </p:nvSpPr>
         <p:spPr>
           <a:xfrm>
@@ -13007,8 +13477,10 @@
       <p:sp>
         <p:nvSpPr>
           <p:cNvPr id="11" name="TextBox 10"/>
-          <p:cNvSpPr txBox="1"/>
-          <p:nvPr/>
+          <p:cNvSpPr/>
+          <p:nvPr>
+            <p:ph type="body" idx="7"/>
+          </p:nvPr>
         </p:nvSpPr>
         <p:spPr>
           <a:xfrm>
@@ -13042,8 +13514,10 @@
       <p:sp>
         <p:nvSpPr>
           <p:cNvPr id="12" name="TextBox 11"/>
-          <p:cNvSpPr txBox="1"/>
-          <p:nvPr/>
+          <p:cNvSpPr/>
+          <p:nvPr>
+            <p:ph type="body" idx="8"/>
+          </p:nvPr>
         </p:nvSpPr>
         <p:spPr>
           <a:xfrm>
@@ -13077,8 +13551,10 @@
       <p:sp>
         <p:nvSpPr>
           <p:cNvPr id="13" name="TextBox 12"/>
-          <p:cNvSpPr txBox="1"/>
-          <p:nvPr/>
+          <p:cNvSpPr/>
+          <p:nvPr>
+            <p:ph type="body" idx="9"/>
+          </p:nvPr>
         </p:nvSpPr>
         <p:spPr>
           <a:xfrm>
@@ -13112,8 +13588,10 @@
       <p:sp>
         <p:nvSpPr>
           <p:cNvPr id="14" name="TextBox 13"/>
-          <p:cNvSpPr txBox="1"/>
-          <p:nvPr/>
+          <p:cNvSpPr/>
+          <p:nvPr>
+            <p:ph type="body" idx="13"/>
+          </p:nvPr>
         </p:nvSpPr>
         <p:spPr>
           <a:xfrm>
@@ -13147,8 +13625,10 @@
       <p:sp>
         <p:nvSpPr>
           <p:cNvPr id="15" name="TextBox 14"/>
-          <p:cNvSpPr txBox="1"/>
-          <p:nvPr/>
+          <p:cNvSpPr/>
+          <p:nvPr>
+            <p:ph type="body" idx="14"/>
+          </p:nvPr>
         </p:nvSpPr>
         <p:spPr>
           <a:xfrm>
@@ -13182,8 +13662,10 @@
       <p:sp>
         <p:nvSpPr>
           <p:cNvPr id="16" name="TextBox 15"/>
-          <p:cNvSpPr txBox="1"/>
-          <p:nvPr/>
+          <p:cNvSpPr/>
+          <p:nvPr>
+            <p:ph type="body" idx="15"/>
+          </p:nvPr>
         </p:nvSpPr>
         <p:spPr>
           <a:xfrm>
@@ -13261,8 +13743,10 @@
       <p:sp>
         <p:nvSpPr>
           <p:cNvPr id="18" name="TextBox 17"/>
-          <p:cNvSpPr txBox="1"/>
-          <p:nvPr/>
+          <p:cNvSpPr/>
+          <p:nvPr>
+            <p:ph type="body" idx="16"/>
+          </p:nvPr>
         </p:nvSpPr>
         <p:spPr>
           <a:xfrm>
@@ -13296,8 +13780,10 @@
       <p:sp>
         <p:nvSpPr>
           <p:cNvPr id="19" name="TextBox 18"/>
-          <p:cNvSpPr txBox="1"/>
-          <p:nvPr/>
+          <p:cNvSpPr/>
+          <p:nvPr>
+            <p:ph type="body" idx="17"/>
+          </p:nvPr>
         </p:nvSpPr>
         <p:spPr>
           <a:xfrm>
@@ -13331,8 +13817,10 @@
       <p:sp>
         <p:nvSpPr>
           <p:cNvPr id="20" name="TextBox 19"/>
-          <p:cNvSpPr txBox="1"/>
-          <p:nvPr/>
+          <p:cNvSpPr/>
+          <p:nvPr>
+            <p:ph type="body" idx="18"/>
+          </p:nvPr>
         </p:nvSpPr>
         <p:spPr>
           <a:xfrm>

--- a/examples/agency-pipeline-demo/deck.pptx
+++ b/examples/agency-pipeline-demo/deck.pptx
@@ -2810,7 +2810,9 @@
         <p:nvSpPr>
           <p:cNvPr id="2" name="Rectangle 1"/>
           <p:cNvSpPr/>
-          <p:nvPr/>
+          <p:nvPr>
+            <p:ph type="body" idx="1"/>
+          </p:nvPr>
         </p:nvSpPr>
         <p:spPr>
           <a:xfrm>
@@ -2828,20 +2830,6 @@
           </a:ln>
           <a:effectLst/>
         </p:spPr>
-        <p:style>
-          <a:lnRef idx="1">
-            <a:schemeClr val="accent1"/>
-          </a:lnRef>
-          <a:fillRef idx="3">
-            <a:schemeClr val="accent1"/>
-          </a:fillRef>
-          <a:effectRef idx="2">
-            <a:schemeClr val="accent1"/>
-          </a:effectRef>
-          <a:fontRef idx="minor">
-            <a:schemeClr val="lt1"/>
-          </a:fontRef>
-        </p:style>
         <p:txBody>
           <a:bodyPr rtlCol="0" anchor="ctr"/>
           <a:lstStyle/>
@@ -2855,7 +2843,7 @@
           <p:cNvPr id="3" name="TextBox 2"/>
           <p:cNvSpPr/>
           <p:nvPr>
-            <p:ph type="body" idx="1"/>
+            <p:ph type="body" idx="2"/>
           </p:nvPr>
         </p:nvSpPr>
         <p:spPr>
@@ -2892,7 +2880,7 @@
           <p:cNvPr id="4" name="TextBox 3"/>
           <p:cNvSpPr/>
           <p:nvPr>
-            <p:ph type="body" idx="2"/>
+            <p:ph type="body" idx="3"/>
           </p:nvPr>
         </p:nvSpPr>
         <p:spPr>
@@ -3173,7 +3161,9 @@
         <p:nvSpPr>
           <p:cNvPr id="3" name="Rectangle 2"/>
           <p:cNvSpPr/>
-          <p:nvPr/>
+          <p:nvPr>
+            <p:ph type="body" idx="1"/>
+          </p:nvPr>
         </p:nvSpPr>
         <p:spPr>
           <a:xfrm>
@@ -3191,20 +3181,6 @@
           </a:ln>
           <a:effectLst/>
         </p:spPr>
-        <p:style>
-          <a:lnRef idx="1">
-            <a:schemeClr val="accent1"/>
-          </a:lnRef>
-          <a:fillRef idx="3">
-            <a:schemeClr val="accent1"/>
-          </a:fillRef>
-          <a:effectRef idx="2">
-            <a:schemeClr val="accent1"/>
-          </a:effectRef>
-          <a:fontRef idx="minor">
-            <a:schemeClr val="lt1"/>
-          </a:fontRef>
-        </p:style>
         <p:txBody>
           <a:bodyPr rtlCol="0" anchor="ctr"/>
           <a:lstStyle/>
@@ -3218,7 +3194,7 @@
           <p:cNvPr id="4" name="TextBox 3"/>
           <p:cNvSpPr/>
           <p:nvPr>
-            <p:ph type="body" idx="1"/>
+            <p:ph type="body" idx="2"/>
           </p:nvPr>
         </p:nvSpPr>
         <p:spPr>
@@ -3255,7 +3231,7 @@
           <p:cNvPr id="5" name="TextBox 4"/>
           <p:cNvSpPr/>
           <p:nvPr>
-            <p:ph type="body" idx="2"/>
+            <p:ph type="body" idx="3"/>
           </p:nvPr>
         </p:nvSpPr>
         <p:spPr>
@@ -3292,7 +3268,7 @@
           <p:cNvPr id="6" name="TextBox 5"/>
           <p:cNvSpPr/>
           <p:nvPr>
-            <p:ph type="body" idx="3"/>
+            <p:ph type="body" idx="4"/>
           </p:nvPr>
         </p:nvSpPr>
         <p:spPr>
@@ -3329,7 +3305,7 @@
           <p:cNvPr id="7" name="TextBox 6"/>
           <p:cNvSpPr/>
           <p:nvPr>
-            <p:ph type="body" idx="4"/>
+            <p:ph type="body" idx="5"/>
           </p:nvPr>
         </p:nvSpPr>
         <p:spPr>
@@ -3366,7 +3342,7 @@
           <p:cNvPr id="8" name="TextBox 7"/>
           <p:cNvSpPr/>
           <p:nvPr>
-            <p:ph type="body" idx="5"/>
+            <p:ph type="body" idx="6"/>
           </p:nvPr>
         </p:nvSpPr>
         <p:spPr>
@@ -3403,7 +3379,7 @@
           <p:cNvPr id="9" name="TextBox 8"/>
           <p:cNvSpPr/>
           <p:nvPr>
-            <p:ph type="body" idx="6"/>
+            <p:ph type="body" idx="7"/>
           </p:nvPr>
         </p:nvSpPr>
         <p:spPr>
@@ -3440,7 +3416,7 @@
           <p:cNvPr id="10" name="TextBox 9"/>
           <p:cNvSpPr/>
           <p:nvPr>
-            <p:ph type="body" idx="7"/>
+            <p:ph type="body" idx="8"/>
           </p:nvPr>
         </p:nvSpPr>
         <p:spPr>
@@ -3477,7 +3453,7 @@
           <p:cNvPr id="11" name="TextBox 10"/>
           <p:cNvSpPr/>
           <p:nvPr>
-            <p:ph type="body" idx="8"/>
+            <p:ph type="body" idx="9"/>
           </p:nvPr>
         </p:nvSpPr>
         <p:spPr>
@@ -3514,7 +3490,7 @@
           <p:cNvPr id="12" name="TextBox 11"/>
           <p:cNvSpPr/>
           <p:nvPr>
-            <p:ph type="body" idx="9"/>
+            <p:ph type="body" idx="13"/>
           </p:nvPr>
         </p:nvSpPr>
         <p:spPr>
@@ -3551,7 +3527,7 @@
           <p:cNvPr id="13" name="TextBox 12"/>
           <p:cNvSpPr/>
           <p:nvPr>
-            <p:ph type="body" idx="13"/>
+            <p:ph type="body" idx="14"/>
           </p:nvPr>
         </p:nvSpPr>
         <p:spPr>
@@ -3662,7 +3638,9 @@
         <p:nvSpPr>
           <p:cNvPr id="3" name="Rectangle 2"/>
           <p:cNvSpPr/>
-          <p:nvPr/>
+          <p:nvPr>
+            <p:ph type="body" idx="2"/>
+          </p:nvPr>
         </p:nvSpPr>
         <p:spPr>
           <a:xfrm>
@@ -3680,20 +3658,6 @@
           </a:ln>
           <a:effectLst/>
         </p:spPr>
-        <p:style>
-          <a:lnRef idx="1">
-            <a:schemeClr val="accent1"/>
-          </a:lnRef>
-          <a:fillRef idx="3">
-            <a:schemeClr val="accent1"/>
-          </a:fillRef>
-          <a:effectRef idx="2">
-            <a:schemeClr val="accent1"/>
-          </a:effectRef>
-          <a:fontRef idx="minor">
-            <a:schemeClr val="lt1"/>
-          </a:fontRef>
-        </p:style>
         <p:txBody>
           <a:bodyPr rtlCol="0" anchor="ctr"/>
           <a:lstStyle/>
@@ -3707,7 +3671,7 @@
           <p:cNvPr id="4" name="TextBox 3"/>
           <p:cNvSpPr/>
           <p:nvPr>
-            <p:ph type="body" idx="2"/>
+            <p:ph type="body" idx="3"/>
           </p:nvPr>
         </p:nvSpPr>
         <p:spPr>
@@ -3781,7 +3745,9 @@
         <p:nvSpPr>
           <p:cNvPr id="2" name="Rectangle 1"/>
           <p:cNvSpPr/>
-          <p:nvPr/>
+          <p:nvPr>
+            <p:ph type="body" idx="1"/>
+          </p:nvPr>
         </p:nvSpPr>
         <p:spPr>
           <a:xfrm>
@@ -3799,20 +3765,6 @@
           </a:ln>
           <a:effectLst/>
         </p:spPr>
-        <p:style>
-          <a:lnRef idx="1">
-            <a:schemeClr val="accent1"/>
-          </a:lnRef>
-          <a:fillRef idx="3">
-            <a:schemeClr val="accent1"/>
-          </a:fillRef>
-          <a:effectRef idx="2">
-            <a:schemeClr val="accent1"/>
-          </a:effectRef>
-          <a:fontRef idx="minor">
-            <a:schemeClr val="lt1"/>
-          </a:fontRef>
-        </p:style>
         <p:txBody>
           <a:bodyPr rtlCol="0" anchor="ctr"/>
           <a:lstStyle/>
@@ -3826,7 +3778,7 @@
           <p:cNvPr id="3" name="TextBox 2"/>
           <p:cNvSpPr/>
           <p:nvPr>
-            <p:ph type="body" idx="1"/>
+            <p:ph type="body" idx="2"/>
           </p:nvPr>
         </p:nvSpPr>
         <p:spPr>
@@ -3863,7 +3815,7 @@
           <p:cNvPr id="4" name="TextBox 3"/>
           <p:cNvSpPr/>
           <p:nvPr>
-            <p:ph type="body" idx="2"/>
+            <p:ph type="body" idx="3"/>
           </p:nvPr>
         </p:nvSpPr>
         <p:spPr>
@@ -3937,7 +3889,9 @@
         <p:nvSpPr>
           <p:cNvPr id="2" name="Rectangle 1"/>
           <p:cNvSpPr/>
-          <p:nvPr/>
+          <p:nvPr>
+            <p:ph type="body" idx="1"/>
+          </p:nvPr>
         </p:nvSpPr>
         <p:spPr>
           <a:xfrm>
@@ -3955,20 +3909,6 @@
           </a:ln>
           <a:effectLst/>
         </p:spPr>
-        <p:style>
-          <a:lnRef idx="1">
-            <a:schemeClr val="accent1"/>
-          </a:lnRef>
-          <a:fillRef idx="3">
-            <a:schemeClr val="accent1"/>
-          </a:fillRef>
-          <a:effectRef idx="2">
-            <a:schemeClr val="accent1"/>
-          </a:effectRef>
-          <a:fontRef idx="minor">
-            <a:schemeClr val="lt1"/>
-          </a:fontRef>
-        </p:style>
         <p:txBody>
           <a:bodyPr rtlCol="0" anchor="ctr"/>
           <a:lstStyle/>
@@ -3982,7 +3922,7 @@
           <p:cNvPr id="3" name="TextBox 2"/>
           <p:cNvSpPr/>
           <p:nvPr>
-            <p:ph type="body" idx="1"/>
+            <p:ph type="body" idx="2"/>
           </p:nvPr>
         </p:nvSpPr>
         <p:spPr>
@@ -4019,7 +3959,7 @@
           <p:cNvPr id="4" name="TextBox 3"/>
           <p:cNvSpPr/>
           <p:nvPr>
-            <p:ph type="body" idx="2"/>
+            <p:ph type="body" idx="3"/>
           </p:nvPr>
         </p:nvSpPr>
         <p:spPr>
@@ -4093,7 +4033,9 @@
         <p:nvSpPr>
           <p:cNvPr id="2" name="Rectangle 1"/>
           <p:cNvSpPr/>
-          <p:nvPr/>
+          <p:nvPr>
+            <p:ph type="body" idx="1"/>
+          </p:nvPr>
         </p:nvSpPr>
         <p:spPr>
           <a:xfrm>
@@ -4111,20 +4053,6 @@
           </a:ln>
           <a:effectLst/>
         </p:spPr>
-        <p:style>
-          <a:lnRef idx="1">
-            <a:schemeClr val="accent1"/>
-          </a:lnRef>
-          <a:fillRef idx="3">
-            <a:schemeClr val="accent1"/>
-          </a:fillRef>
-          <a:effectRef idx="2">
-            <a:schemeClr val="accent1"/>
-          </a:effectRef>
-          <a:fontRef idx="minor">
-            <a:schemeClr val="lt1"/>
-          </a:fontRef>
-        </p:style>
         <p:txBody>
           <a:bodyPr rtlCol="0" anchor="ctr"/>
           <a:lstStyle/>
@@ -4138,7 +4066,7 @@
           <p:cNvPr id="3" name="TextBox 2"/>
           <p:cNvSpPr/>
           <p:nvPr>
-            <p:ph type="body" idx="1"/>
+            <p:ph type="body" idx="2"/>
           </p:nvPr>
         </p:nvSpPr>
         <p:spPr>
@@ -4398,7 +4326,9 @@
         <p:nvSpPr>
           <p:cNvPr id="2" name="Rectangle 1"/>
           <p:cNvSpPr/>
-          <p:nvPr/>
+          <p:nvPr>
+            <p:ph type="body" idx="1"/>
+          </p:nvPr>
         </p:nvSpPr>
         <p:spPr>
           <a:xfrm>
@@ -4416,20 +4346,6 @@
           </a:ln>
           <a:effectLst/>
         </p:spPr>
-        <p:style>
-          <a:lnRef idx="1">
-            <a:schemeClr val="accent1"/>
-          </a:lnRef>
-          <a:fillRef idx="3">
-            <a:schemeClr val="accent1"/>
-          </a:fillRef>
-          <a:effectRef idx="2">
-            <a:schemeClr val="accent1"/>
-          </a:effectRef>
-          <a:fontRef idx="minor">
-            <a:schemeClr val="lt1"/>
-          </a:fontRef>
-        </p:style>
         <p:txBody>
           <a:bodyPr rtlCol="0" anchor="ctr"/>
           <a:lstStyle/>
@@ -4442,7 +4358,9 @@
         <p:nvSpPr>
           <p:cNvPr id="3" name="Rectangle 2"/>
           <p:cNvSpPr/>
-          <p:nvPr/>
+          <p:nvPr>
+            <p:ph type="body" idx="2"/>
+          </p:nvPr>
         </p:nvSpPr>
         <p:spPr>
           <a:xfrm>
@@ -4460,20 +4378,6 @@
           </a:ln>
           <a:effectLst/>
         </p:spPr>
-        <p:style>
-          <a:lnRef idx="1">
-            <a:schemeClr val="accent1"/>
-          </a:lnRef>
-          <a:fillRef idx="3">
-            <a:schemeClr val="accent1"/>
-          </a:fillRef>
-          <a:effectRef idx="2">
-            <a:schemeClr val="accent1"/>
-          </a:effectRef>
-          <a:fontRef idx="minor">
-            <a:schemeClr val="lt1"/>
-          </a:fontRef>
-        </p:style>
         <p:txBody>
           <a:bodyPr rtlCol="0" anchor="ctr"/>
           <a:lstStyle/>
@@ -4486,7 +4390,9 @@
         <p:nvSpPr>
           <p:cNvPr id="4" name="Rectangle 3"/>
           <p:cNvSpPr/>
-          <p:nvPr/>
+          <p:nvPr>
+            <p:ph type="body" idx="3"/>
+          </p:nvPr>
         </p:nvSpPr>
         <p:spPr>
           <a:xfrm>
@@ -4504,20 +4410,6 @@
           </a:ln>
           <a:effectLst/>
         </p:spPr>
-        <p:style>
-          <a:lnRef idx="1">
-            <a:schemeClr val="accent1"/>
-          </a:lnRef>
-          <a:fillRef idx="3">
-            <a:schemeClr val="accent1"/>
-          </a:fillRef>
-          <a:effectRef idx="2">
-            <a:schemeClr val="accent1"/>
-          </a:effectRef>
-          <a:fontRef idx="minor">
-            <a:schemeClr val="lt1"/>
-          </a:fontRef>
-        </p:style>
         <p:txBody>
           <a:bodyPr rtlCol="0" anchor="ctr"/>
           <a:lstStyle/>
@@ -4531,7 +4423,7 @@
           <p:cNvPr id="5" name="TextBox 4"/>
           <p:cNvSpPr/>
           <p:nvPr>
-            <p:ph type="body" idx="1"/>
+            <p:ph type="body" idx="4"/>
           </p:nvPr>
         </p:nvSpPr>
         <p:spPr>
@@ -4568,7 +4460,7 @@
           <p:cNvPr id="6" name="TextBox 5"/>
           <p:cNvSpPr/>
           <p:nvPr>
-            <p:ph type="body" idx="2"/>
+            <p:ph type="body" idx="5"/>
           </p:nvPr>
         </p:nvSpPr>
         <p:spPr>
@@ -4605,7 +4497,7 @@
           <p:cNvPr id="7" name="TextBox 6"/>
           <p:cNvSpPr/>
           <p:nvPr>
-            <p:ph type="body" idx="3"/>
+            <p:ph type="body" idx="6"/>
           </p:nvPr>
         </p:nvSpPr>
         <p:spPr>
@@ -4642,7 +4534,7 @@
           <p:cNvPr id="8" name="TextBox 7"/>
           <p:cNvSpPr/>
           <p:nvPr>
-            <p:ph type="body" idx="4"/>
+            <p:ph type="body" idx="7"/>
           </p:nvPr>
         </p:nvSpPr>
         <p:spPr>
@@ -4679,7 +4571,7 @@
           <p:cNvPr id="9" name="TextBox 8"/>
           <p:cNvSpPr/>
           <p:nvPr>
-            <p:ph type="body" idx="5"/>
+            <p:ph type="body" idx="8"/>
           </p:nvPr>
         </p:nvSpPr>
         <p:spPr>
@@ -4716,7 +4608,7 @@
           <p:cNvPr id="10" name="TextBox 9"/>
           <p:cNvSpPr/>
           <p:nvPr>
-            <p:ph type="body" idx="6"/>
+            <p:ph type="body" idx="9"/>
           </p:nvPr>
         </p:nvSpPr>
         <p:spPr>
@@ -4753,7 +4645,7 @@
           <p:cNvPr id="11" name="TextBox 10"/>
           <p:cNvSpPr/>
           <p:nvPr>
-            <p:ph type="body" idx="7"/>
+            <p:ph type="body" idx="13"/>
           </p:nvPr>
         </p:nvSpPr>
         <p:spPr>
@@ -4790,7 +4682,7 @@
           <p:cNvPr id="12" name="TextBox 11"/>
           <p:cNvSpPr/>
           <p:nvPr>
-            <p:ph type="body" idx="8"/>
+            <p:ph type="body" idx="14"/>
           </p:nvPr>
         </p:nvSpPr>
         <p:spPr>
@@ -4827,7 +4719,7 @@
           <p:cNvPr id="13" name="TextBox 12"/>
           <p:cNvSpPr/>
           <p:nvPr>
-            <p:ph type="body" idx="9"/>
+            <p:ph type="body" idx="15"/>
           </p:nvPr>
         </p:nvSpPr>
         <p:spPr>
@@ -4864,7 +4756,7 @@
           <p:cNvPr id="14" name="TextBox 13"/>
           <p:cNvSpPr/>
           <p:nvPr>
-            <p:ph type="body" idx="13"/>
+            <p:ph type="body" idx="16"/>
           </p:nvPr>
         </p:nvSpPr>
         <p:spPr>
@@ -4901,7 +4793,7 @@
           <p:cNvPr id="15" name="TextBox 14"/>
           <p:cNvSpPr/>
           <p:nvPr>
-            <p:ph type="body" idx="14"/>
+            <p:ph type="body" idx="17"/>
           </p:nvPr>
         </p:nvSpPr>
         <p:spPr>
@@ -4938,7 +4830,7 @@
           <p:cNvPr id="16" name="TextBox 15"/>
           <p:cNvSpPr/>
           <p:nvPr>
-            <p:ph type="body" idx="15"/>
+            <p:ph type="body" idx="18"/>
           </p:nvPr>
         </p:nvSpPr>
         <p:spPr>
@@ -4975,7 +4867,7 @@
           <p:cNvPr id="17" name="TextBox 16"/>
           <p:cNvSpPr/>
           <p:nvPr>
-            <p:ph type="body" idx="16"/>
+            <p:ph type="body" idx="19"/>
           </p:nvPr>
         </p:nvSpPr>
         <p:spPr>
@@ -5012,7 +4904,7 @@
           <p:cNvPr id="18" name="TextBox 17"/>
           <p:cNvSpPr/>
           <p:nvPr>
-            <p:ph type="body" idx="17"/>
+            <p:ph type="body" idx="20"/>
           </p:nvPr>
         </p:nvSpPr>
         <p:spPr>
@@ -5049,7 +4941,7 @@
           <p:cNvPr id="19" name="TextBox 18"/>
           <p:cNvSpPr/>
           <p:nvPr>
-            <p:ph type="body" idx="18"/>
+            <p:ph type="body" idx="21"/>
           </p:nvPr>
         </p:nvSpPr>
         <p:spPr>
@@ -5086,7 +4978,7 @@
           <p:cNvPr id="20" name="TextBox 19"/>
           <p:cNvSpPr/>
           <p:nvPr>
-            <p:ph type="body" idx="19"/>
+            <p:ph type="body" idx="22"/>
           </p:nvPr>
         </p:nvSpPr>
         <p:spPr>
@@ -5197,7 +5089,9 @@
         <p:nvSpPr>
           <p:cNvPr id="3" name="Rounded Rectangle 2"/>
           <p:cNvSpPr/>
-          <p:nvPr/>
+          <p:nvPr>
+            <p:ph type="body" idx="1"/>
+          </p:nvPr>
         </p:nvSpPr>
         <p:spPr>
           <a:xfrm>
@@ -5217,20 +5111,6 @@
           </a:ln>
           <a:effectLst/>
         </p:spPr>
-        <p:style>
-          <a:lnRef idx="1">
-            <a:schemeClr val="accent1"/>
-          </a:lnRef>
-          <a:fillRef idx="3">
-            <a:schemeClr val="accent1"/>
-          </a:fillRef>
-          <a:effectRef idx="2">
-            <a:schemeClr val="accent1"/>
-          </a:effectRef>
-          <a:fontRef idx="minor">
-            <a:schemeClr val="lt1"/>
-          </a:fontRef>
-        </p:style>
         <p:txBody>
           <a:bodyPr rtlCol="0" anchor="ctr"/>
           <a:lstStyle/>
@@ -5244,7 +5124,7 @@
           <p:cNvPr id="4" name="TextBox 3"/>
           <p:cNvSpPr/>
           <p:nvPr>
-            <p:ph type="body" idx="1"/>
+            <p:ph type="body" idx="2"/>
           </p:nvPr>
         </p:nvSpPr>
         <p:spPr>
@@ -5281,7 +5161,7 @@
           <p:cNvPr id="5" name="TextBox 4"/>
           <p:cNvSpPr/>
           <p:nvPr>
-            <p:ph type="body" idx="2"/>
+            <p:ph type="body" idx="3"/>
           </p:nvPr>
         </p:nvSpPr>
         <p:spPr>
@@ -5318,7 +5198,7 @@
           <p:cNvPr id="6" name="TextBox 5"/>
           <p:cNvSpPr/>
           <p:nvPr>
-            <p:ph type="body" idx="3"/>
+            <p:ph type="body" idx="4"/>
           </p:nvPr>
         </p:nvSpPr>
         <p:spPr>
@@ -5355,7 +5235,7 @@
           <p:cNvPr id="7" name="TextBox 6"/>
           <p:cNvSpPr/>
           <p:nvPr>
-            <p:ph type="body" idx="4"/>
+            <p:ph type="body" idx="5"/>
           </p:nvPr>
         </p:nvSpPr>
         <p:spPr>
@@ -5392,7 +5272,7 @@
           <p:cNvPr id="8" name="TextBox 7"/>
           <p:cNvSpPr/>
           <p:nvPr>
-            <p:ph type="body" idx="5"/>
+            <p:ph type="body" idx="6"/>
           </p:nvPr>
         </p:nvSpPr>
         <p:spPr>
@@ -5429,7 +5309,7 @@
           <p:cNvPr id="9" name="TextBox 8"/>
           <p:cNvSpPr/>
           <p:nvPr>
-            <p:ph type="body" idx="6"/>
+            <p:ph type="body" idx="7"/>
           </p:nvPr>
         </p:nvSpPr>
         <p:spPr>
@@ -5466,7 +5346,7 @@
           <p:cNvPr id="10" name="TextBox 9"/>
           <p:cNvSpPr/>
           <p:nvPr>
-            <p:ph type="body" idx="7"/>
+            <p:ph type="body" idx="8"/>
           </p:nvPr>
         </p:nvSpPr>
         <p:spPr>
@@ -5503,7 +5383,7 @@
           <p:cNvPr id="11" name="TextBox 10"/>
           <p:cNvSpPr/>
           <p:nvPr>
-            <p:ph type="body" idx="8"/>
+            <p:ph type="body" idx="9"/>
           </p:nvPr>
         </p:nvSpPr>
         <p:spPr>
@@ -5540,7 +5420,7 @@
           <p:cNvPr id="12" name="TextBox 11"/>
           <p:cNvSpPr/>
           <p:nvPr>
-            <p:ph type="body" idx="9"/>
+            <p:ph type="body" idx="13"/>
           </p:nvPr>
         </p:nvSpPr>
         <p:spPr>
@@ -5577,7 +5457,7 @@
           <p:cNvPr id="13" name="TextBox 12"/>
           <p:cNvSpPr/>
           <p:nvPr>
-            <p:ph type="body" idx="13"/>
+            <p:ph type="body" idx="14"/>
           </p:nvPr>
         </p:nvSpPr>
         <p:spPr>
@@ -5614,7 +5494,7 @@
           <p:cNvPr id="14" name="TextBox 13"/>
           <p:cNvSpPr/>
           <p:nvPr>
-            <p:ph type="body" idx="14"/>
+            <p:ph type="body" idx="15"/>
           </p:nvPr>
         </p:nvSpPr>
         <p:spPr>
@@ -5651,7 +5531,7 @@
           <p:cNvPr id="15" name="TextBox 14"/>
           <p:cNvSpPr/>
           <p:nvPr>
-            <p:ph type="body" idx="15"/>
+            <p:ph type="body" idx="16"/>
           </p:nvPr>
         </p:nvSpPr>
         <p:spPr>
@@ -5688,7 +5568,7 @@
           <p:cNvPr id="16" name="TextBox 15"/>
           <p:cNvSpPr/>
           <p:nvPr>
-            <p:ph type="body" idx="16"/>
+            <p:ph type="body" idx="17"/>
           </p:nvPr>
         </p:nvSpPr>
         <p:spPr>
@@ -5725,7 +5605,7 @@
           <p:cNvPr id="17" name="TextBox 16"/>
           <p:cNvSpPr/>
           <p:nvPr>
-            <p:ph type="body" idx="17"/>
+            <p:ph type="body" idx="18"/>
           </p:nvPr>
         </p:nvSpPr>
         <p:spPr>
@@ -5762,7 +5642,7 @@
           <p:cNvPr id="18" name="TextBox 17"/>
           <p:cNvSpPr/>
           <p:nvPr>
-            <p:ph type="body" idx="18"/>
+            <p:ph type="body" idx="19"/>
           </p:nvPr>
         </p:nvSpPr>
         <p:spPr>
@@ -6318,7 +6198,9 @@
         <p:nvSpPr>
           <p:cNvPr id="4" name="Rectangle 3"/>
           <p:cNvSpPr/>
-          <p:nvPr/>
+          <p:nvPr>
+            <p:ph type="body" idx="2"/>
+          </p:nvPr>
         </p:nvSpPr>
         <p:spPr>
           <a:xfrm>
@@ -6336,20 +6218,6 @@
           </a:ln>
           <a:effectLst/>
         </p:spPr>
-        <p:style>
-          <a:lnRef idx="1">
-            <a:schemeClr val="accent1"/>
-          </a:lnRef>
-          <a:fillRef idx="3">
-            <a:schemeClr val="accent1"/>
-          </a:fillRef>
-          <a:effectRef idx="2">
-            <a:schemeClr val="accent1"/>
-          </a:effectRef>
-          <a:fontRef idx="minor">
-            <a:schemeClr val="lt1"/>
-          </a:fontRef>
-        </p:style>
         <p:txBody>
           <a:bodyPr rtlCol="0" anchor="ctr"/>
           <a:lstStyle/>
@@ -6363,7 +6231,7 @@
           <p:cNvPr id="5" name="TextBox 4"/>
           <p:cNvSpPr/>
           <p:nvPr>
-            <p:ph type="body" idx="2"/>
+            <p:ph type="body" idx="3"/>
           </p:nvPr>
         </p:nvSpPr>
         <p:spPr>
@@ -6399,7 +6267,9 @@
         <p:nvSpPr>
           <p:cNvPr id="6" name="Rectangle 5"/>
           <p:cNvSpPr/>
-          <p:nvPr/>
+          <p:nvPr>
+            <p:ph type="body" idx="4"/>
+          </p:nvPr>
         </p:nvSpPr>
         <p:spPr>
           <a:xfrm>
@@ -6417,20 +6287,6 @@
           </a:ln>
           <a:effectLst/>
         </p:spPr>
-        <p:style>
-          <a:lnRef idx="1">
-            <a:schemeClr val="accent1"/>
-          </a:lnRef>
-          <a:fillRef idx="3">
-            <a:schemeClr val="accent1"/>
-          </a:fillRef>
-          <a:effectRef idx="2">
-            <a:schemeClr val="accent1"/>
-          </a:effectRef>
-          <a:fontRef idx="minor">
-            <a:schemeClr val="lt1"/>
-          </a:fontRef>
-        </p:style>
         <p:txBody>
           <a:bodyPr rtlCol="0" anchor="ctr"/>
           <a:lstStyle/>
@@ -6444,7 +6300,7 @@
           <p:cNvPr id="7" name="TextBox 6"/>
           <p:cNvSpPr/>
           <p:nvPr>
-            <p:ph type="body" idx="3"/>
+            <p:ph type="body" idx="5"/>
           </p:nvPr>
         </p:nvSpPr>
         <p:spPr>
@@ -6481,7 +6337,7 @@
           <p:cNvPr id="8" name="TextBox 7"/>
           <p:cNvSpPr/>
           <p:nvPr>
-            <p:ph type="body" idx="4"/>
+            <p:ph type="body" idx="6"/>
           </p:nvPr>
         </p:nvSpPr>
         <p:spPr>
@@ -6518,7 +6374,7 @@
           <p:cNvPr id="9" name="TextBox 8"/>
           <p:cNvSpPr/>
           <p:nvPr>
-            <p:ph type="body" idx="5"/>
+            <p:ph type="body" idx="7"/>
           </p:nvPr>
         </p:nvSpPr>
         <p:spPr>
@@ -6555,7 +6411,7 @@
           <p:cNvPr id="10" name="TextBox 9"/>
           <p:cNvSpPr/>
           <p:nvPr>
-            <p:ph type="body" idx="6"/>
+            <p:ph type="body" idx="8"/>
           </p:nvPr>
         </p:nvSpPr>
         <p:spPr>
@@ -6592,7 +6448,7 @@
           <p:cNvPr id="11" name="TextBox 10"/>
           <p:cNvSpPr/>
           <p:nvPr>
-            <p:ph type="body" idx="7"/>
+            <p:ph type="body" idx="9"/>
           </p:nvPr>
         </p:nvSpPr>
         <p:spPr>
@@ -6629,7 +6485,7 @@
           <p:cNvPr id="12" name="TextBox 11"/>
           <p:cNvSpPr/>
           <p:nvPr>
-            <p:ph type="body" idx="8"/>
+            <p:ph type="body" idx="13"/>
           </p:nvPr>
         </p:nvSpPr>
         <p:spPr>
@@ -7283,7 +7139,9 @@
         <p:nvSpPr>
           <p:cNvPr id="4" name="Rectangle 3"/>
           <p:cNvSpPr/>
-          <p:nvPr/>
+          <p:nvPr>
+            <p:ph type="body" idx="2"/>
+          </p:nvPr>
         </p:nvSpPr>
         <p:spPr>
           <a:xfrm>
@@ -7301,20 +7159,6 @@
           </a:ln>
           <a:effectLst/>
         </p:spPr>
-        <p:style>
-          <a:lnRef idx="1">
-            <a:schemeClr val="accent1"/>
-          </a:lnRef>
-          <a:fillRef idx="3">
-            <a:schemeClr val="accent1"/>
-          </a:fillRef>
-          <a:effectRef idx="2">
-            <a:schemeClr val="accent1"/>
-          </a:effectRef>
-          <a:fontRef idx="minor">
-            <a:schemeClr val="lt1"/>
-          </a:fontRef>
-        </p:style>
         <p:txBody>
           <a:bodyPr rtlCol="0" anchor="ctr"/>
           <a:lstStyle/>
@@ -7328,7 +7172,7 @@
           <p:cNvPr id="5" name="TextBox 4"/>
           <p:cNvSpPr/>
           <p:nvPr>
-            <p:ph type="body" idx="2"/>
+            <p:ph type="body" idx="3"/>
           </p:nvPr>
         </p:nvSpPr>
         <p:spPr>
@@ -7365,7 +7209,7 @@
           <p:cNvPr id="6" name="TextBox 5"/>
           <p:cNvSpPr/>
           <p:nvPr>
-            <p:ph type="body" idx="3"/>
+            <p:ph type="body" idx="4"/>
           </p:nvPr>
         </p:nvSpPr>
         <p:spPr>
@@ -7401,7 +7245,9 @@
         <p:nvSpPr>
           <p:cNvPr id="7" name="Rectangle 6"/>
           <p:cNvSpPr/>
-          <p:nvPr/>
+          <p:nvPr>
+            <p:ph type="body" idx="5"/>
+          </p:nvPr>
         </p:nvSpPr>
         <p:spPr>
           <a:xfrm>
@@ -7419,20 +7265,6 @@
           </a:ln>
           <a:effectLst/>
         </p:spPr>
-        <p:style>
-          <a:lnRef idx="1">
-            <a:schemeClr val="accent1"/>
-          </a:lnRef>
-          <a:fillRef idx="3">
-            <a:schemeClr val="accent1"/>
-          </a:fillRef>
-          <a:effectRef idx="2">
-            <a:schemeClr val="accent1"/>
-          </a:effectRef>
-          <a:fontRef idx="minor">
-            <a:schemeClr val="lt1"/>
-          </a:fontRef>
-        </p:style>
         <p:txBody>
           <a:bodyPr rtlCol="0" anchor="ctr"/>
           <a:lstStyle/>
@@ -7446,7 +7278,7 @@
           <p:cNvPr id="8" name="TextBox 7"/>
           <p:cNvSpPr/>
           <p:nvPr>
-            <p:ph type="body" idx="4"/>
+            <p:ph type="body" idx="6"/>
           </p:nvPr>
         </p:nvSpPr>
         <p:spPr>
@@ -7483,7 +7315,7 @@
           <p:cNvPr id="9" name="TextBox 8"/>
           <p:cNvSpPr/>
           <p:nvPr>
-            <p:ph type="body" idx="5"/>
+            <p:ph type="body" idx="7"/>
           </p:nvPr>
         </p:nvSpPr>
         <p:spPr>
@@ -7519,7 +7351,9 @@
         <p:nvSpPr>
           <p:cNvPr id="10" name="Rectangle 9"/>
           <p:cNvSpPr/>
-          <p:nvPr/>
+          <p:nvPr>
+            <p:ph type="body" idx="8"/>
+          </p:nvPr>
         </p:nvSpPr>
         <p:spPr>
           <a:xfrm>
@@ -7537,20 +7371,6 @@
           </a:ln>
           <a:effectLst/>
         </p:spPr>
-        <p:style>
-          <a:lnRef idx="1">
-            <a:schemeClr val="accent1"/>
-          </a:lnRef>
-          <a:fillRef idx="3">
-            <a:schemeClr val="accent1"/>
-          </a:fillRef>
-          <a:effectRef idx="2">
-            <a:schemeClr val="accent1"/>
-          </a:effectRef>
-          <a:fontRef idx="minor">
-            <a:schemeClr val="lt1"/>
-          </a:fontRef>
-        </p:style>
         <p:txBody>
           <a:bodyPr rtlCol="0" anchor="ctr"/>
           <a:lstStyle/>
@@ -7564,7 +7384,7 @@
           <p:cNvPr id="11" name="TextBox 10"/>
           <p:cNvSpPr/>
           <p:nvPr>
-            <p:ph type="body" idx="6"/>
+            <p:ph type="body" idx="9"/>
           </p:nvPr>
         </p:nvSpPr>
         <p:spPr>
@@ -7601,7 +7421,7 @@
           <p:cNvPr id="12" name="TextBox 11"/>
           <p:cNvSpPr/>
           <p:nvPr>
-            <p:ph type="body" idx="7"/>
+            <p:ph type="body" idx="13"/>
           </p:nvPr>
         </p:nvSpPr>
         <p:spPr>
@@ -7637,7 +7457,9 @@
         <p:nvSpPr>
           <p:cNvPr id="13" name="Rectangle 12"/>
           <p:cNvSpPr/>
-          <p:nvPr/>
+          <p:nvPr>
+            <p:ph type="body" idx="14"/>
+          </p:nvPr>
         </p:nvSpPr>
         <p:spPr>
           <a:xfrm>
@@ -7655,20 +7477,6 @@
           </a:ln>
           <a:effectLst/>
         </p:spPr>
-        <p:style>
-          <a:lnRef idx="1">
-            <a:schemeClr val="accent1"/>
-          </a:lnRef>
-          <a:fillRef idx="3">
-            <a:schemeClr val="accent1"/>
-          </a:fillRef>
-          <a:effectRef idx="2">
-            <a:schemeClr val="accent1"/>
-          </a:effectRef>
-          <a:fontRef idx="minor">
-            <a:schemeClr val="lt1"/>
-          </a:fontRef>
-        </p:style>
         <p:txBody>
           <a:bodyPr rtlCol="0" anchor="ctr"/>
           <a:lstStyle/>
@@ -7682,7 +7490,7 @@
           <p:cNvPr id="14" name="TextBox 13"/>
           <p:cNvSpPr/>
           <p:nvPr>
-            <p:ph type="body" idx="8"/>
+            <p:ph type="body" idx="15"/>
           </p:nvPr>
         </p:nvSpPr>
         <p:spPr>
@@ -7719,7 +7527,7 @@
           <p:cNvPr id="15" name="TextBox 14"/>
           <p:cNvSpPr/>
           <p:nvPr>
-            <p:ph type="body" idx="9"/>
+            <p:ph type="body" idx="16"/>
           </p:nvPr>
         </p:nvSpPr>
         <p:spPr>
@@ -7755,7 +7563,9 @@
         <p:nvSpPr>
           <p:cNvPr id="16" name="Rectangle 15"/>
           <p:cNvSpPr/>
-          <p:nvPr/>
+          <p:nvPr>
+            <p:ph type="body" idx="17"/>
+          </p:nvPr>
         </p:nvSpPr>
         <p:spPr>
           <a:xfrm>
@@ -7773,20 +7583,6 @@
           </a:ln>
           <a:effectLst/>
         </p:spPr>
-        <p:style>
-          <a:lnRef idx="1">
-            <a:schemeClr val="accent1"/>
-          </a:lnRef>
-          <a:fillRef idx="3">
-            <a:schemeClr val="accent1"/>
-          </a:fillRef>
-          <a:effectRef idx="2">
-            <a:schemeClr val="accent1"/>
-          </a:effectRef>
-          <a:fontRef idx="minor">
-            <a:schemeClr val="lt1"/>
-          </a:fontRef>
-        </p:style>
         <p:txBody>
           <a:bodyPr rtlCol="0" anchor="ctr"/>
           <a:lstStyle/>
@@ -7800,7 +7596,7 @@
           <p:cNvPr id="17" name="TextBox 16"/>
           <p:cNvSpPr/>
           <p:nvPr>
-            <p:ph type="body" idx="13"/>
+            <p:ph type="body" idx="18"/>
           </p:nvPr>
         </p:nvSpPr>
         <p:spPr>
@@ -7837,7 +7633,7 @@
           <p:cNvPr id="18" name="TextBox 17"/>
           <p:cNvSpPr/>
           <p:nvPr>
-            <p:ph type="body" idx="14"/>
+            <p:ph type="body" idx="19"/>
           </p:nvPr>
         </p:nvSpPr>
         <p:spPr>
@@ -7873,7 +7669,9 @@
         <p:nvSpPr>
           <p:cNvPr id="19" name="Rectangle 18"/>
           <p:cNvSpPr/>
-          <p:nvPr/>
+          <p:nvPr>
+            <p:ph type="body" idx="20"/>
+          </p:nvPr>
         </p:nvSpPr>
         <p:spPr>
           <a:xfrm>
@@ -7891,20 +7689,6 @@
           </a:ln>
           <a:effectLst/>
         </p:spPr>
-        <p:style>
-          <a:lnRef idx="1">
-            <a:schemeClr val="accent1"/>
-          </a:lnRef>
-          <a:fillRef idx="3">
-            <a:schemeClr val="accent1"/>
-          </a:fillRef>
-          <a:effectRef idx="2">
-            <a:schemeClr val="accent1"/>
-          </a:effectRef>
-          <a:fontRef idx="minor">
-            <a:schemeClr val="lt1"/>
-          </a:fontRef>
-        </p:style>
         <p:txBody>
           <a:bodyPr rtlCol="0" anchor="ctr"/>
           <a:lstStyle/>
@@ -7918,7 +7702,7 @@
           <p:cNvPr id="20" name="TextBox 19"/>
           <p:cNvSpPr/>
           <p:nvPr>
-            <p:ph type="body" idx="15"/>
+            <p:ph type="body" idx="21"/>
           </p:nvPr>
         </p:nvSpPr>
         <p:spPr>
@@ -8066,7 +7850,9 @@
         <p:nvSpPr>
           <p:cNvPr id="4" name="Rectangle 3"/>
           <p:cNvSpPr/>
-          <p:nvPr/>
+          <p:nvPr>
+            <p:ph type="body" idx="2"/>
+          </p:nvPr>
         </p:nvSpPr>
         <p:spPr>
           <a:xfrm>
@@ -8084,20 +7870,6 @@
           </a:ln>
           <a:effectLst/>
         </p:spPr>
-        <p:style>
-          <a:lnRef idx="1">
-            <a:schemeClr val="accent1"/>
-          </a:lnRef>
-          <a:fillRef idx="3">
-            <a:schemeClr val="accent1"/>
-          </a:fillRef>
-          <a:effectRef idx="2">
-            <a:schemeClr val="accent1"/>
-          </a:effectRef>
-          <a:fontRef idx="minor">
-            <a:schemeClr val="lt1"/>
-          </a:fontRef>
-        </p:style>
         <p:txBody>
           <a:bodyPr rtlCol="0" anchor="ctr"/>
           <a:lstStyle/>
@@ -8111,7 +7883,7 @@
           <p:cNvPr id="5" name="TextBox 4"/>
           <p:cNvSpPr/>
           <p:nvPr>
-            <p:ph type="body" idx="2"/>
+            <p:ph type="body" idx="3"/>
           </p:nvPr>
         </p:nvSpPr>
         <p:spPr>
@@ -8148,7 +7920,7 @@
           <p:cNvPr id="6" name="TextBox 5"/>
           <p:cNvSpPr/>
           <p:nvPr>
-            <p:ph type="body" idx="3"/>
+            <p:ph type="body" idx="4"/>
           </p:nvPr>
         </p:nvSpPr>
         <p:spPr>
@@ -8184,7 +7956,9 @@
         <p:nvSpPr>
           <p:cNvPr id="7" name="Rectangle 6"/>
           <p:cNvSpPr/>
-          <p:nvPr/>
+          <p:nvPr>
+            <p:ph type="body" idx="5"/>
+          </p:nvPr>
         </p:nvSpPr>
         <p:spPr>
           <a:xfrm>
@@ -8202,20 +7976,6 @@
           </a:ln>
           <a:effectLst/>
         </p:spPr>
-        <p:style>
-          <a:lnRef idx="1">
-            <a:schemeClr val="accent1"/>
-          </a:lnRef>
-          <a:fillRef idx="3">
-            <a:schemeClr val="accent1"/>
-          </a:fillRef>
-          <a:effectRef idx="2">
-            <a:schemeClr val="accent1"/>
-          </a:effectRef>
-          <a:fontRef idx="minor">
-            <a:schemeClr val="lt1"/>
-          </a:fontRef>
-        </p:style>
         <p:txBody>
           <a:bodyPr rtlCol="0" anchor="ctr"/>
           <a:lstStyle/>
@@ -8229,7 +7989,7 @@
           <p:cNvPr id="8" name="TextBox 7"/>
           <p:cNvSpPr/>
           <p:nvPr>
-            <p:ph type="body" idx="4"/>
+            <p:ph type="body" idx="6"/>
           </p:nvPr>
         </p:nvSpPr>
         <p:spPr>
@@ -8266,7 +8026,7 @@
           <p:cNvPr id="9" name="TextBox 8"/>
           <p:cNvSpPr/>
           <p:nvPr>
-            <p:ph type="body" idx="5"/>
+            <p:ph type="body" idx="7"/>
           </p:nvPr>
         </p:nvSpPr>
         <p:spPr>
@@ -8302,7 +8062,9 @@
         <p:nvSpPr>
           <p:cNvPr id="10" name="Rectangle 9"/>
           <p:cNvSpPr/>
-          <p:nvPr/>
+          <p:nvPr>
+            <p:ph type="body" idx="8"/>
+          </p:nvPr>
         </p:nvSpPr>
         <p:spPr>
           <a:xfrm>
@@ -8320,20 +8082,6 @@
           </a:ln>
           <a:effectLst/>
         </p:spPr>
-        <p:style>
-          <a:lnRef idx="1">
-            <a:schemeClr val="accent1"/>
-          </a:lnRef>
-          <a:fillRef idx="3">
-            <a:schemeClr val="accent1"/>
-          </a:fillRef>
-          <a:effectRef idx="2">
-            <a:schemeClr val="accent1"/>
-          </a:effectRef>
-          <a:fontRef idx="minor">
-            <a:schemeClr val="lt1"/>
-          </a:fontRef>
-        </p:style>
         <p:txBody>
           <a:bodyPr rtlCol="0" anchor="ctr"/>
           <a:lstStyle/>
@@ -8347,7 +8095,7 @@
           <p:cNvPr id="11" name="TextBox 10"/>
           <p:cNvSpPr/>
           <p:nvPr>
-            <p:ph type="body" idx="6"/>
+            <p:ph type="body" idx="9"/>
           </p:nvPr>
         </p:nvSpPr>
         <p:spPr>
@@ -8384,7 +8132,7 @@
           <p:cNvPr id="12" name="TextBox 11"/>
           <p:cNvSpPr/>
           <p:nvPr>
-            <p:ph type="body" idx="7"/>
+            <p:ph type="body" idx="13"/>
           </p:nvPr>
         </p:nvSpPr>
         <p:spPr>
@@ -8420,7 +8168,9 @@
         <p:nvSpPr>
           <p:cNvPr id="13" name="Rectangle 12"/>
           <p:cNvSpPr/>
-          <p:nvPr/>
+          <p:nvPr>
+            <p:ph type="body" idx="14"/>
+          </p:nvPr>
         </p:nvSpPr>
         <p:spPr>
           <a:xfrm>
@@ -8438,20 +8188,6 @@
           </a:ln>
           <a:effectLst/>
         </p:spPr>
-        <p:style>
-          <a:lnRef idx="1">
-            <a:schemeClr val="accent1"/>
-          </a:lnRef>
-          <a:fillRef idx="3">
-            <a:schemeClr val="accent1"/>
-          </a:fillRef>
-          <a:effectRef idx="2">
-            <a:schemeClr val="accent1"/>
-          </a:effectRef>
-          <a:fontRef idx="minor">
-            <a:schemeClr val="lt1"/>
-          </a:fontRef>
-        </p:style>
         <p:txBody>
           <a:bodyPr rtlCol="0" anchor="ctr"/>
           <a:lstStyle/>
@@ -8465,7 +8201,7 @@
           <p:cNvPr id="14" name="TextBox 13"/>
           <p:cNvSpPr/>
           <p:nvPr>
-            <p:ph type="body" idx="8"/>
+            <p:ph type="body" idx="15"/>
           </p:nvPr>
         </p:nvSpPr>
         <p:spPr>
@@ -8501,7 +8237,9 @@
         <p:nvSpPr>
           <p:cNvPr id="15" name="Rectangle 14"/>
           <p:cNvSpPr/>
-          <p:nvPr/>
+          <p:nvPr>
+            <p:ph type="body" idx="16"/>
+          </p:nvPr>
         </p:nvSpPr>
         <p:spPr>
           <a:xfrm>
@@ -8519,20 +8257,6 @@
           </a:ln>
           <a:effectLst/>
         </p:spPr>
-        <p:style>
-          <a:lnRef idx="1">
-            <a:schemeClr val="accent1"/>
-          </a:lnRef>
-          <a:fillRef idx="3">
-            <a:schemeClr val="accent1"/>
-          </a:fillRef>
-          <a:effectRef idx="2">
-            <a:schemeClr val="accent1"/>
-          </a:effectRef>
-          <a:fontRef idx="minor">
-            <a:schemeClr val="lt1"/>
-          </a:fontRef>
-        </p:style>
         <p:txBody>
           <a:bodyPr rtlCol="0" anchor="ctr"/>
           <a:lstStyle/>
@@ -8546,7 +8270,7 @@
           <p:cNvPr id="16" name="TextBox 15"/>
           <p:cNvSpPr/>
           <p:nvPr>
-            <p:ph type="body" idx="9"/>
+            <p:ph type="body" idx="17"/>
           </p:nvPr>
         </p:nvSpPr>
         <p:spPr>
@@ -8768,7 +8492,9 @@
         <p:nvSpPr>
           <p:cNvPr id="6" name="Rectangle 5"/>
           <p:cNvSpPr/>
-          <p:nvPr/>
+          <p:nvPr>
+            <p:ph type="body" idx="4"/>
+          </p:nvPr>
         </p:nvSpPr>
         <p:spPr>
           <a:xfrm>
@@ -8786,20 +8512,6 @@
           </a:ln>
           <a:effectLst/>
         </p:spPr>
-        <p:style>
-          <a:lnRef idx="1">
-            <a:schemeClr val="accent1"/>
-          </a:lnRef>
-          <a:fillRef idx="3">
-            <a:schemeClr val="accent1"/>
-          </a:fillRef>
-          <a:effectRef idx="2">
-            <a:schemeClr val="accent1"/>
-          </a:effectRef>
-          <a:fontRef idx="minor">
-            <a:schemeClr val="lt1"/>
-          </a:fontRef>
-        </p:style>
         <p:txBody>
           <a:bodyPr rtlCol="0" anchor="ctr"/>
           <a:lstStyle/>
@@ -8813,7 +8525,7 @@
           <p:cNvPr id="7" name="TextBox 6"/>
           <p:cNvSpPr/>
           <p:nvPr>
-            <p:ph type="body" idx="4"/>
+            <p:ph type="body" idx="5"/>
           </p:nvPr>
         </p:nvSpPr>
         <p:spPr>
@@ -8850,7 +8562,7 @@
           <p:cNvPr id="8" name="TextBox 7"/>
           <p:cNvSpPr/>
           <p:nvPr>
-            <p:ph type="body" idx="5"/>
+            <p:ph type="body" idx="6"/>
           </p:nvPr>
         </p:nvSpPr>
         <p:spPr>
@@ -8887,7 +8599,7 @@
           <p:cNvPr id="9" name="TextBox 8"/>
           <p:cNvSpPr/>
           <p:nvPr>
-            <p:ph type="body" idx="6"/>
+            <p:ph type="body" idx="7"/>
           </p:nvPr>
         </p:nvSpPr>
         <p:spPr>
@@ -8924,7 +8636,7 @@
           <p:cNvPr id="10" name="TextBox 9"/>
           <p:cNvSpPr/>
           <p:nvPr>
-            <p:ph type="body" idx="7"/>
+            <p:ph type="body" idx="8"/>
           </p:nvPr>
         </p:nvSpPr>
         <p:spPr>
@@ -8961,7 +8673,7 @@
           <p:cNvPr id="11" name="TextBox 10"/>
           <p:cNvSpPr/>
           <p:nvPr>
-            <p:ph type="body" idx="8"/>
+            <p:ph type="body" idx="9"/>
           </p:nvPr>
         </p:nvSpPr>
         <p:spPr>
@@ -8998,7 +8710,7 @@
           <p:cNvPr id="12" name="TextBox 11"/>
           <p:cNvSpPr/>
           <p:nvPr>
-            <p:ph type="body" idx="9"/>
+            <p:ph type="body" idx="13"/>
           </p:nvPr>
         </p:nvSpPr>
         <p:spPr>
@@ -9035,7 +8747,7 @@
           <p:cNvPr id="13" name="TextBox 12"/>
           <p:cNvSpPr/>
           <p:nvPr>
-            <p:ph type="body" idx="13"/>
+            <p:ph type="body" idx="14"/>
           </p:nvPr>
         </p:nvSpPr>
         <p:spPr>
@@ -9072,7 +8784,7 @@
           <p:cNvPr id="14" name="TextBox 13"/>
           <p:cNvSpPr/>
           <p:nvPr>
-            <p:ph type="body" idx="14"/>
+            <p:ph type="body" idx="15"/>
           </p:nvPr>
         </p:nvSpPr>
         <p:spPr>
@@ -9109,7 +8821,7 @@
           <p:cNvPr id="15" name="TextBox 14"/>
           <p:cNvSpPr/>
           <p:nvPr>
-            <p:ph type="body" idx="15"/>
+            <p:ph type="body" idx="16"/>
           </p:nvPr>
         </p:nvSpPr>
         <p:spPr>
@@ -9146,7 +8858,7 @@
           <p:cNvPr id="16" name="TextBox 15"/>
           <p:cNvSpPr/>
           <p:nvPr>
-            <p:ph type="body" idx="16"/>
+            <p:ph type="body" idx="17"/>
           </p:nvPr>
         </p:nvSpPr>
         <p:spPr>
@@ -9183,7 +8895,7 @@
           <p:cNvPr id="17" name="TextBox 16"/>
           <p:cNvSpPr/>
           <p:nvPr>
-            <p:ph type="body" idx="17"/>
+            <p:ph type="body" idx="18"/>
           </p:nvPr>
         </p:nvSpPr>
         <p:spPr>
@@ -9220,7 +8932,7 @@
           <p:cNvPr id="18" name="TextBox 17"/>
           <p:cNvSpPr/>
           <p:nvPr>
-            <p:ph type="body" idx="18"/>
+            <p:ph type="body" idx="19"/>
           </p:nvPr>
         </p:nvSpPr>
         <p:spPr>
@@ -9405,7 +9117,9 @@
         <p:nvSpPr>
           <p:cNvPr id="5" name="Rectangle 4"/>
           <p:cNvSpPr/>
-          <p:nvPr/>
+          <p:nvPr>
+            <p:ph type="body" idx="3"/>
+          </p:nvPr>
         </p:nvSpPr>
         <p:spPr>
           <a:xfrm>
@@ -9423,20 +9137,6 @@
           </a:ln>
           <a:effectLst/>
         </p:spPr>
-        <p:style>
-          <a:lnRef idx="1">
-            <a:schemeClr val="accent1"/>
-          </a:lnRef>
-          <a:fillRef idx="3">
-            <a:schemeClr val="accent1"/>
-          </a:fillRef>
-          <a:effectRef idx="2">
-            <a:schemeClr val="accent1"/>
-          </a:effectRef>
-          <a:fontRef idx="minor">
-            <a:schemeClr val="lt1"/>
-          </a:fontRef>
-        </p:style>
         <p:txBody>
           <a:bodyPr rtlCol="0" anchor="ctr"/>
           <a:lstStyle/>
@@ -9450,7 +9150,7 @@
           <p:cNvPr id="6" name="TextBox 5"/>
           <p:cNvSpPr/>
           <p:nvPr>
-            <p:ph type="body" idx="3"/>
+            <p:ph type="body" idx="4"/>
           </p:nvPr>
         </p:nvSpPr>
         <p:spPr>
@@ -9487,7 +9187,7 @@
           <p:cNvPr id="7" name="TextBox 6"/>
           <p:cNvSpPr/>
           <p:nvPr>
-            <p:ph type="body" idx="4"/>
+            <p:ph type="body" idx="5"/>
           </p:nvPr>
         </p:nvSpPr>
         <p:spPr>
@@ -9524,7 +9224,7 @@
           <p:cNvPr id="8" name="TextBox 7"/>
           <p:cNvSpPr/>
           <p:nvPr>
-            <p:ph type="body" idx="5"/>
+            <p:ph type="body" idx="6"/>
           </p:nvPr>
         </p:nvSpPr>
         <p:spPr>
@@ -9560,7 +9260,9 @@
         <p:nvSpPr>
           <p:cNvPr id="9" name="Rectangle 8"/>
           <p:cNvSpPr/>
-          <p:nvPr/>
+          <p:nvPr>
+            <p:ph type="body" idx="7"/>
+          </p:nvPr>
         </p:nvSpPr>
         <p:spPr>
           <a:xfrm>
@@ -9578,20 +9280,6 @@
           </a:ln>
           <a:effectLst/>
         </p:spPr>
-        <p:style>
-          <a:lnRef idx="1">
-            <a:schemeClr val="accent1"/>
-          </a:lnRef>
-          <a:fillRef idx="3">
-            <a:schemeClr val="accent1"/>
-          </a:fillRef>
-          <a:effectRef idx="2">
-            <a:schemeClr val="accent1"/>
-          </a:effectRef>
-          <a:fontRef idx="minor">
-            <a:schemeClr val="lt1"/>
-          </a:fontRef>
-        </p:style>
         <p:txBody>
           <a:bodyPr rtlCol="0" anchor="ctr"/>
           <a:lstStyle/>
@@ -9605,7 +9293,7 @@
           <p:cNvPr id="10" name="TextBox 9"/>
           <p:cNvSpPr/>
           <p:nvPr>
-            <p:ph type="body" idx="6"/>
+            <p:ph type="body" idx="8"/>
           </p:nvPr>
         </p:nvSpPr>
         <p:spPr>
@@ -9642,7 +9330,7 @@
           <p:cNvPr id="11" name="TextBox 10"/>
           <p:cNvSpPr/>
           <p:nvPr>
-            <p:ph type="body" idx="7"/>
+            <p:ph type="body" idx="9"/>
           </p:nvPr>
         </p:nvSpPr>
         <p:spPr>
@@ -9679,7 +9367,7 @@
           <p:cNvPr id="12" name="TextBox 11"/>
           <p:cNvSpPr/>
           <p:nvPr>
-            <p:ph type="body" idx="8"/>
+            <p:ph type="body" idx="13"/>
           </p:nvPr>
         </p:nvSpPr>
         <p:spPr>
@@ -9715,7 +9403,9 @@
         <p:nvSpPr>
           <p:cNvPr id="13" name="Rectangle 12"/>
           <p:cNvSpPr/>
-          <p:nvPr/>
+          <p:nvPr>
+            <p:ph type="body" idx="14"/>
+          </p:nvPr>
         </p:nvSpPr>
         <p:spPr>
           <a:xfrm>
@@ -9733,20 +9423,6 @@
           </a:ln>
           <a:effectLst/>
         </p:spPr>
-        <p:style>
-          <a:lnRef idx="1">
-            <a:schemeClr val="accent1"/>
-          </a:lnRef>
-          <a:fillRef idx="3">
-            <a:schemeClr val="accent1"/>
-          </a:fillRef>
-          <a:effectRef idx="2">
-            <a:schemeClr val="accent1"/>
-          </a:effectRef>
-          <a:fontRef idx="minor">
-            <a:schemeClr val="lt1"/>
-          </a:fontRef>
-        </p:style>
         <p:txBody>
           <a:bodyPr rtlCol="0" anchor="ctr"/>
           <a:lstStyle/>
@@ -9760,7 +9436,7 @@
           <p:cNvPr id="14" name="TextBox 13"/>
           <p:cNvSpPr/>
           <p:nvPr>
-            <p:ph type="body" idx="9"/>
+            <p:ph type="body" idx="15"/>
           </p:nvPr>
         </p:nvSpPr>
         <p:spPr>
@@ -9908,7 +9584,9 @@
         <p:nvSpPr>
           <p:cNvPr id="4" name="Rectangle 3"/>
           <p:cNvSpPr/>
-          <p:nvPr/>
+          <p:nvPr>
+            <p:ph type="body" idx="2"/>
+          </p:nvPr>
         </p:nvSpPr>
         <p:spPr>
           <a:xfrm>
@@ -9926,20 +9604,6 @@
           </a:ln>
           <a:effectLst/>
         </p:spPr>
-        <p:style>
-          <a:lnRef idx="1">
-            <a:schemeClr val="accent1"/>
-          </a:lnRef>
-          <a:fillRef idx="3">
-            <a:schemeClr val="accent1"/>
-          </a:fillRef>
-          <a:effectRef idx="2">
-            <a:schemeClr val="accent1"/>
-          </a:effectRef>
-          <a:fontRef idx="minor">
-            <a:schemeClr val="lt1"/>
-          </a:fontRef>
-        </p:style>
         <p:txBody>
           <a:bodyPr rtlCol="0" anchor="ctr"/>
           <a:lstStyle/>
@@ -9953,7 +9617,7 @@
           <p:cNvPr id="5" name="TextBox 4"/>
           <p:cNvSpPr/>
           <p:nvPr>
-            <p:ph type="body" idx="2"/>
+            <p:ph type="body" idx="3"/>
           </p:nvPr>
         </p:nvSpPr>
         <p:spPr>
@@ -9990,7 +9654,7 @@
           <p:cNvPr id="6" name="TextBox 5"/>
           <p:cNvSpPr/>
           <p:nvPr>
-            <p:ph type="body" idx="3"/>
+            <p:ph type="body" idx="4"/>
           </p:nvPr>
         </p:nvSpPr>
         <p:spPr>
@@ -10027,7 +9691,7 @@
           <p:cNvPr id="7" name="TextBox 6"/>
           <p:cNvSpPr/>
           <p:nvPr>
-            <p:ph type="body" idx="4"/>
+            <p:ph type="body" idx="5"/>
           </p:nvPr>
         </p:nvSpPr>
         <p:spPr>
@@ -10063,7 +9727,9 @@
         <p:nvSpPr>
           <p:cNvPr id="8" name="Rectangle 7"/>
           <p:cNvSpPr/>
-          <p:nvPr/>
+          <p:nvPr>
+            <p:ph type="body" idx="6"/>
+          </p:nvPr>
         </p:nvSpPr>
         <p:spPr>
           <a:xfrm>
@@ -10081,20 +9747,6 @@
           </a:ln>
           <a:effectLst/>
         </p:spPr>
-        <p:style>
-          <a:lnRef idx="1">
-            <a:schemeClr val="accent1"/>
-          </a:lnRef>
-          <a:fillRef idx="3">
-            <a:schemeClr val="accent1"/>
-          </a:fillRef>
-          <a:effectRef idx="2">
-            <a:schemeClr val="accent1"/>
-          </a:effectRef>
-          <a:fontRef idx="minor">
-            <a:schemeClr val="lt1"/>
-          </a:fontRef>
-        </p:style>
         <p:txBody>
           <a:bodyPr rtlCol="0" anchor="ctr"/>
           <a:lstStyle/>
@@ -10108,7 +9760,7 @@
           <p:cNvPr id="9" name="TextBox 8"/>
           <p:cNvSpPr/>
           <p:nvPr>
-            <p:ph type="body" idx="5"/>
+            <p:ph type="body" idx="7"/>
           </p:nvPr>
         </p:nvSpPr>
         <p:spPr>
@@ -10145,7 +9797,7 @@
           <p:cNvPr id="10" name="TextBox 9"/>
           <p:cNvSpPr/>
           <p:nvPr>
-            <p:ph type="body" idx="6"/>
+            <p:ph type="body" idx="8"/>
           </p:nvPr>
         </p:nvSpPr>
         <p:spPr>
@@ -10182,7 +9834,7 @@
           <p:cNvPr id="11" name="TextBox 10"/>
           <p:cNvSpPr/>
           <p:nvPr>
-            <p:ph type="body" idx="7"/>
+            <p:ph type="body" idx="9"/>
           </p:nvPr>
         </p:nvSpPr>
         <p:spPr>
@@ -10218,7 +9870,9 @@
         <p:nvSpPr>
           <p:cNvPr id="12" name="Rectangle 11"/>
           <p:cNvSpPr/>
-          <p:nvPr/>
+          <p:nvPr>
+            <p:ph type="body" idx="13"/>
+          </p:nvPr>
         </p:nvSpPr>
         <p:spPr>
           <a:xfrm>
@@ -10236,20 +9890,6 @@
           </a:ln>
           <a:effectLst/>
         </p:spPr>
-        <p:style>
-          <a:lnRef idx="1">
-            <a:schemeClr val="accent1"/>
-          </a:lnRef>
-          <a:fillRef idx="3">
-            <a:schemeClr val="accent1"/>
-          </a:fillRef>
-          <a:effectRef idx="2">
-            <a:schemeClr val="accent1"/>
-          </a:effectRef>
-          <a:fontRef idx="minor">
-            <a:schemeClr val="lt1"/>
-          </a:fontRef>
-        </p:style>
         <p:txBody>
           <a:bodyPr rtlCol="0" anchor="ctr"/>
           <a:lstStyle/>
@@ -10263,7 +9903,7 @@
           <p:cNvPr id="13" name="TextBox 12"/>
           <p:cNvSpPr/>
           <p:nvPr>
-            <p:ph type="body" idx="8"/>
+            <p:ph type="body" idx="14"/>
           </p:nvPr>
         </p:nvSpPr>
         <p:spPr>
@@ -10300,7 +9940,7 @@
           <p:cNvPr id="14" name="TextBox 13"/>
           <p:cNvSpPr/>
           <p:nvPr>
-            <p:ph type="body" idx="9"/>
+            <p:ph type="body" idx="15"/>
           </p:nvPr>
         </p:nvSpPr>
         <p:spPr>
@@ -10337,7 +9977,7 @@
           <p:cNvPr id="15" name="TextBox 14"/>
           <p:cNvSpPr/>
           <p:nvPr>
-            <p:ph type="body" idx="13"/>
+            <p:ph type="body" idx="16"/>
           </p:nvPr>
         </p:nvSpPr>
         <p:spPr>
@@ -10373,7 +10013,9 @@
         <p:nvSpPr>
           <p:cNvPr id="16" name="Rectangle 15"/>
           <p:cNvSpPr/>
-          <p:nvPr/>
+          <p:nvPr>
+            <p:ph type="body" idx="17"/>
+          </p:nvPr>
         </p:nvSpPr>
         <p:spPr>
           <a:xfrm>
@@ -10391,20 +10033,6 @@
           </a:ln>
           <a:effectLst/>
         </p:spPr>
-        <p:style>
-          <a:lnRef idx="1">
-            <a:schemeClr val="accent1"/>
-          </a:lnRef>
-          <a:fillRef idx="3">
-            <a:schemeClr val="accent1"/>
-          </a:fillRef>
-          <a:effectRef idx="2">
-            <a:schemeClr val="accent1"/>
-          </a:effectRef>
-          <a:fontRef idx="minor">
-            <a:schemeClr val="lt1"/>
-          </a:fontRef>
-        </p:style>
         <p:txBody>
           <a:bodyPr rtlCol="0" anchor="ctr"/>
           <a:lstStyle/>
@@ -10418,7 +10046,7 @@
           <p:cNvPr id="17" name="TextBox 16"/>
           <p:cNvSpPr/>
           <p:nvPr>
-            <p:ph type="body" idx="14"/>
+            <p:ph type="body" idx="18"/>
           </p:nvPr>
         </p:nvSpPr>
         <p:spPr>
@@ -10455,7 +10083,7 @@
           <p:cNvPr id="18" name="TextBox 17"/>
           <p:cNvSpPr/>
           <p:nvPr>
-            <p:ph type="body" idx="15"/>
+            <p:ph type="body" idx="19"/>
           </p:nvPr>
         </p:nvSpPr>
         <p:spPr>
@@ -10566,7 +10194,9 @@
         <p:nvSpPr>
           <p:cNvPr id="3" name="Rectangle 2"/>
           <p:cNvSpPr/>
-          <p:nvPr/>
+          <p:nvPr>
+            <p:ph type="body" idx="1"/>
+          </p:nvPr>
         </p:nvSpPr>
         <p:spPr>
           <a:xfrm>
@@ -10584,20 +10214,6 @@
           </a:ln>
           <a:effectLst/>
         </p:spPr>
-        <p:style>
-          <a:lnRef idx="1">
-            <a:schemeClr val="accent1"/>
-          </a:lnRef>
-          <a:fillRef idx="3">
-            <a:schemeClr val="accent1"/>
-          </a:fillRef>
-          <a:effectRef idx="2">
-            <a:schemeClr val="accent1"/>
-          </a:effectRef>
-          <a:fontRef idx="minor">
-            <a:schemeClr val="lt1"/>
-          </a:fontRef>
-        </p:style>
         <p:txBody>
           <a:bodyPr rtlCol="0" anchor="ctr"/>
           <a:lstStyle/>
@@ -10611,7 +10227,7 @@
           <p:cNvPr id="4" name="TextBox 3"/>
           <p:cNvSpPr/>
           <p:nvPr>
-            <p:ph type="body" idx="1"/>
+            <p:ph type="body" idx="2"/>
           </p:nvPr>
         </p:nvSpPr>
         <p:spPr>
@@ -10648,7 +10264,7 @@
           <p:cNvPr id="5" name="TextBox 4"/>
           <p:cNvSpPr/>
           <p:nvPr>
-            <p:ph type="body" idx="2"/>
+            <p:ph type="body" idx="3"/>
           </p:nvPr>
         </p:nvSpPr>
         <p:spPr>
@@ -10685,7 +10301,7 @@
           <p:cNvPr id="6" name="TextBox 5"/>
           <p:cNvSpPr/>
           <p:nvPr>
-            <p:ph type="body" idx="3"/>
+            <p:ph type="body" idx="4"/>
           </p:nvPr>
         </p:nvSpPr>
         <p:spPr>
@@ -10721,7 +10337,9 @@
         <p:nvSpPr>
           <p:cNvPr id="7" name="Rectangle 6"/>
           <p:cNvSpPr/>
-          <p:nvPr/>
+          <p:nvPr>
+            <p:ph type="body" idx="5"/>
+          </p:nvPr>
         </p:nvSpPr>
         <p:spPr>
           <a:xfrm>
@@ -10739,20 +10357,6 @@
           </a:ln>
           <a:effectLst/>
         </p:spPr>
-        <p:style>
-          <a:lnRef idx="1">
-            <a:schemeClr val="accent1"/>
-          </a:lnRef>
-          <a:fillRef idx="3">
-            <a:schemeClr val="accent1"/>
-          </a:fillRef>
-          <a:effectRef idx="2">
-            <a:schemeClr val="accent1"/>
-          </a:effectRef>
-          <a:fontRef idx="minor">
-            <a:schemeClr val="lt1"/>
-          </a:fontRef>
-        </p:style>
         <p:txBody>
           <a:bodyPr rtlCol="0" anchor="ctr"/>
           <a:lstStyle/>
@@ -10766,7 +10370,7 @@
           <p:cNvPr id="8" name="TextBox 7"/>
           <p:cNvSpPr/>
           <p:nvPr>
-            <p:ph type="body" idx="4"/>
+            <p:ph type="body" idx="6"/>
           </p:nvPr>
         </p:nvSpPr>
         <p:spPr>
@@ -10803,7 +10407,7 @@
           <p:cNvPr id="9" name="TextBox 8"/>
           <p:cNvSpPr/>
           <p:nvPr>
-            <p:ph type="body" idx="5"/>
+            <p:ph type="body" idx="7"/>
           </p:nvPr>
         </p:nvSpPr>
         <p:spPr>
@@ -10840,7 +10444,7 @@
           <p:cNvPr id="10" name="TextBox 9"/>
           <p:cNvSpPr/>
           <p:nvPr>
-            <p:ph type="body" idx="6"/>
+            <p:ph type="body" idx="8"/>
           </p:nvPr>
         </p:nvSpPr>
         <p:spPr>
@@ -10876,7 +10480,9 @@
         <p:nvSpPr>
           <p:cNvPr id="11" name="Rectangle 10"/>
           <p:cNvSpPr/>
-          <p:nvPr/>
+          <p:nvPr>
+            <p:ph type="body" idx="9"/>
+          </p:nvPr>
         </p:nvSpPr>
         <p:spPr>
           <a:xfrm>
@@ -10894,20 +10500,6 @@
           </a:ln>
           <a:effectLst/>
         </p:spPr>
-        <p:style>
-          <a:lnRef idx="1">
-            <a:schemeClr val="accent1"/>
-          </a:lnRef>
-          <a:fillRef idx="3">
-            <a:schemeClr val="accent1"/>
-          </a:fillRef>
-          <a:effectRef idx="2">
-            <a:schemeClr val="accent1"/>
-          </a:effectRef>
-          <a:fontRef idx="minor">
-            <a:schemeClr val="lt1"/>
-          </a:fontRef>
-        </p:style>
         <p:txBody>
           <a:bodyPr rtlCol="0" anchor="ctr"/>
           <a:lstStyle/>
@@ -10921,7 +10513,7 @@
           <p:cNvPr id="12" name="TextBox 11"/>
           <p:cNvSpPr/>
           <p:nvPr>
-            <p:ph type="body" idx="7"/>
+            <p:ph type="body" idx="13"/>
           </p:nvPr>
         </p:nvSpPr>
         <p:spPr>
@@ -10958,7 +10550,7 @@
           <p:cNvPr id="13" name="TextBox 12"/>
           <p:cNvSpPr/>
           <p:nvPr>
-            <p:ph type="body" idx="8"/>
+            <p:ph type="body" idx="14"/>
           </p:nvPr>
         </p:nvSpPr>
         <p:spPr>
@@ -10995,7 +10587,7 @@
           <p:cNvPr id="14" name="TextBox 13"/>
           <p:cNvSpPr/>
           <p:nvPr>
-            <p:ph type="body" idx="9"/>
+            <p:ph type="body" idx="15"/>
           </p:nvPr>
         </p:nvSpPr>
         <p:spPr>
@@ -11106,7 +10698,9 @@
         <p:nvSpPr>
           <p:cNvPr id="3" name="Rectangle 2"/>
           <p:cNvSpPr/>
-          <p:nvPr/>
+          <p:nvPr>
+            <p:ph type="body" idx="1"/>
+          </p:nvPr>
         </p:nvSpPr>
         <p:spPr>
           <a:xfrm>
@@ -11124,20 +10718,6 @@
           </a:ln>
           <a:effectLst/>
         </p:spPr>
-        <p:style>
-          <a:lnRef idx="1">
-            <a:schemeClr val="accent1"/>
-          </a:lnRef>
-          <a:fillRef idx="3">
-            <a:schemeClr val="accent1"/>
-          </a:fillRef>
-          <a:effectRef idx="2">
-            <a:schemeClr val="accent1"/>
-          </a:effectRef>
-          <a:fontRef idx="minor">
-            <a:schemeClr val="lt1"/>
-          </a:fontRef>
-        </p:style>
         <p:txBody>
           <a:bodyPr rtlCol="0" anchor="ctr"/>
           <a:lstStyle/>
@@ -11151,7 +10731,7 @@
           <p:cNvPr id="4" name="TextBox 3"/>
           <p:cNvSpPr/>
           <p:nvPr>
-            <p:ph type="body" idx="1"/>
+            <p:ph type="body" idx="2"/>
           </p:nvPr>
         </p:nvSpPr>
         <p:spPr>
@@ -11187,7 +10767,9 @@
         <p:nvSpPr>
           <p:cNvPr id="5" name="Rectangle 4"/>
           <p:cNvSpPr/>
-          <p:nvPr/>
+          <p:nvPr>
+            <p:ph type="body" idx="3"/>
+          </p:nvPr>
         </p:nvSpPr>
         <p:spPr>
           <a:xfrm>
@@ -11205,20 +10787,6 @@
           </a:ln>
           <a:effectLst/>
         </p:spPr>
-        <p:style>
-          <a:lnRef idx="1">
-            <a:schemeClr val="accent1"/>
-          </a:lnRef>
-          <a:fillRef idx="3">
-            <a:schemeClr val="accent1"/>
-          </a:fillRef>
-          <a:effectRef idx="2">
-            <a:schemeClr val="accent1"/>
-          </a:effectRef>
-          <a:fontRef idx="minor">
-            <a:schemeClr val="lt1"/>
-          </a:fontRef>
-        </p:style>
         <p:txBody>
           <a:bodyPr rtlCol="0" anchor="ctr"/>
           <a:lstStyle/>
@@ -11232,7 +10800,7 @@
           <p:cNvPr id="6" name="TextBox 5"/>
           <p:cNvSpPr/>
           <p:nvPr>
-            <p:ph type="body" idx="2"/>
+            <p:ph type="body" idx="4"/>
           </p:nvPr>
         </p:nvSpPr>
         <p:spPr>
@@ -11268,7 +10836,9 @@
         <p:nvSpPr>
           <p:cNvPr id="7" name="Rectangle 6"/>
           <p:cNvSpPr/>
-          <p:nvPr/>
+          <p:nvPr>
+            <p:ph type="body" idx="5"/>
+          </p:nvPr>
         </p:nvSpPr>
         <p:spPr>
           <a:xfrm>
@@ -11286,20 +10856,6 @@
           </a:ln>
           <a:effectLst/>
         </p:spPr>
-        <p:style>
-          <a:lnRef idx="1">
-            <a:schemeClr val="accent1"/>
-          </a:lnRef>
-          <a:fillRef idx="3">
-            <a:schemeClr val="accent1"/>
-          </a:fillRef>
-          <a:effectRef idx="2">
-            <a:schemeClr val="accent1"/>
-          </a:effectRef>
-          <a:fontRef idx="minor">
-            <a:schemeClr val="lt1"/>
-          </a:fontRef>
-        </p:style>
         <p:txBody>
           <a:bodyPr rtlCol="0" anchor="ctr"/>
           <a:lstStyle/>
@@ -11313,7 +10869,7 @@
           <p:cNvPr id="8" name="TextBox 7"/>
           <p:cNvSpPr/>
           <p:nvPr>
-            <p:ph type="body" idx="3"/>
+            <p:ph type="body" idx="6"/>
           </p:nvPr>
         </p:nvSpPr>
         <p:spPr>
@@ -11349,7 +10905,9 @@
         <p:nvSpPr>
           <p:cNvPr id="9" name="Rectangle 8"/>
           <p:cNvSpPr/>
-          <p:nvPr/>
+          <p:nvPr>
+            <p:ph type="body" idx="7"/>
+          </p:nvPr>
         </p:nvSpPr>
         <p:spPr>
           <a:xfrm>
@@ -11367,20 +10925,6 @@
           </a:ln>
           <a:effectLst/>
         </p:spPr>
-        <p:style>
-          <a:lnRef idx="1">
-            <a:schemeClr val="accent1"/>
-          </a:lnRef>
-          <a:fillRef idx="3">
-            <a:schemeClr val="accent1"/>
-          </a:fillRef>
-          <a:effectRef idx="2">
-            <a:schemeClr val="accent1"/>
-          </a:effectRef>
-          <a:fontRef idx="minor">
-            <a:schemeClr val="lt1"/>
-          </a:fontRef>
-        </p:style>
         <p:txBody>
           <a:bodyPr rtlCol="0" anchor="ctr"/>
           <a:lstStyle/>
@@ -11394,7 +10938,7 @@
           <p:cNvPr id="10" name="TextBox 9"/>
           <p:cNvSpPr/>
           <p:nvPr>
-            <p:ph type="body" idx="4"/>
+            <p:ph type="body" idx="8"/>
           </p:nvPr>
         </p:nvSpPr>
         <p:spPr>
@@ -11505,7 +11049,9 @@
         <p:nvSpPr>
           <p:cNvPr id="3" name="Oval 2"/>
           <p:cNvSpPr/>
-          <p:nvPr/>
+          <p:nvPr>
+            <p:ph type="body" idx="1"/>
+          </p:nvPr>
         </p:nvSpPr>
         <p:spPr>
           <a:xfrm>
@@ -11523,20 +11069,6 @@
           </a:ln>
           <a:effectLst/>
         </p:spPr>
-        <p:style>
-          <a:lnRef idx="1">
-            <a:schemeClr val="accent1"/>
-          </a:lnRef>
-          <a:fillRef idx="3">
-            <a:schemeClr val="accent1"/>
-          </a:fillRef>
-          <a:effectRef idx="2">
-            <a:schemeClr val="accent1"/>
-          </a:effectRef>
-          <a:fontRef idx="minor">
-            <a:schemeClr val="lt1"/>
-          </a:fontRef>
-        </p:style>
         <p:txBody>
           <a:bodyPr rtlCol="0" anchor="ctr"/>
           <a:lstStyle/>
@@ -11549,7 +11081,9 @@
         <p:nvSpPr>
           <p:cNvPr id="4" name="Oval 3"/>
           <p:cNvSpPr/>
-          <p:nvPr/>
+          <p:nvPr>
+            <p:ph type="body" idx="2"/>
+          </p:nvPr>
         </p:nvSpPr>
         <p:spPr>
           <a:xfrm>
@@ -11567,20 +11101,6 @@
           </a:ln>
           <a:effectLst/>
         </p:spPr>
-        <p:style>
-          <a:lnRef idx="1">
-            <a:schemeClr val="accent1"/>
-          </a:lnRef>
-          <a:fillRef idx="3">
-            <a:schemeClr val="accent1"/>
-          </a:fillRef>
-          <a:effectRef idx="2">
-            <a:schemeClr val="accent1"/>
-          </a:effectRef>
-          <a:fontRef idx="minor">
-            <a:schemeClr val="lt1"/>
-          </a:fontRef>
-        </p:style>
         <p:txBody>
           <a:bodyPr rtlCol="0" anchor="ctr"/>
           <a:lstStyle/>
@@ -11593,7 +11113,9 @@
         <p:nvSpPr>
           <p:cNvPr id="5" name="Oval 4"/>
           <p:cNvSpPr/>
-          <p:nvPr/>
+          <p:nvPr>
+            <p:ph type="body" idx="3"/>
+          </p:nvPr>
         </p:nvSpPr>
         <p:spPr>
           <a:xfrm>
@@ -11611,20 +11133,6 @@
           </a:ln>
           <a:effectLst/>
         </p:spPr>
-        <p:style>
-          <a:lnRef idx="1">
-            <a:schemeClr val="accent1"/>
-          </a:lnRef>
-          <a:fillRef idx="3">
-            <a:schemeClr val="accent1"/>
-          </a:fillRef>
-          <a:effectRef idx="2">
-            <a:schemeClr val="accent1"/>
-          </a:effectRef>
-          <a:fontRef idx="minor">
-            <a:schemeClr val="lt1"/>
-          </a:fontRef>
-        </p:style>
         <p:txBody>
           <a:bodyPr rtlCol="0" anchor="ctr"/>
           <a:lstStyle/>
@@ -11638,7 +11146,7 @@
           <p:cNvPr id="6" name="TextBox 5"/>
           <p:cNvSpPr/>
           <p:nvPr>
-            <p:ph type="body" idx="1"/>
+            <p:ph type="body" idx="4"/>
           </p:nvPr>
         </p:nvSpPr>
         <p:spPr>
@@ -11675,7 +11183,7 @@
           <p:cNvPr id="7" name="TextBox 6"/>
           <p:cNvSpPr/>
           <p:nvPr>
-            <p:ph type="body" idx="2"/>
+            <p:ph type="body" idx="5"/>
           </p:nvPr>
         </p:nvSpPr>
         <p:spPr>
@@ -11712,7 +11220,7 @@
           <p:cNvPr id="8" name="TextBox 7"/>
           <p:cNvSpPr/>
           <p:nvPr>
-            <p:ph type="body" idx="3"/>
+            <p:ph type="body" idx="6"/>
           </p:nvPr>
         </p:nvSpPr>
         <p:spPr>
@@ -11749,7 +11257,7 @@
           <p:cNvPr id="9" name="TextBox 8"/>
           <p:cNvSpPr/>
           <p:nvPr>
-            <p:ph type="body" idx="4"/>
+            <p:ph type="body" idx="7"/>
           </p:nvPr>
         </p:nvSpPr>
         <p:spPr>
@@ -11786,7 +11294,7 @@
           <p:cNvPr id="10" name="TextBox 9"/>
           <p:cNvSpPr/>
           <p:nvPr>
-            <p:ph type="body" idx="5"/>
+            <p:ph type="body" idx="8"/>
           </p:nvPr>
         </p:nvSpPr>
         <p:spPr>
@@ -11823,7 +11331,7 @@
           <p:cNvPr id="11" name="TextBox 10"/>
           <p:cNvSpPr/>
           <p:nvPr>
-            <p:ph type="body" idx="6"/>
+            <p:ph type="body" idx="9"/>
           </p:nvPr>
         </p:nvSpPr>
         <p:spPr>
@@ -11934,7 +11442,9 @@
         <p:nvSpPr>
           <p:cNvPr id="3" name="Rectangle 2"/>
           <p:cNvSpPr/>
-          <p:nvPr/>
+          <p:nvPr>
+            <p:ph type="body" idx="1"/>
+          </p:nvPr>
         </p:nvSpPr>
         <p:spPr>
           <a:xfrm>
@@ -11952,20 +11462,6 @@
           </a:ln>
           <a:effectLst/>
         </p:spPr>
-        <p:style>
-          <a:lnRef idx="1">
-            <a:schemeClr val="accent1"/>
-          </a:lnRef>
-          <a:fillRef idx="3">
-            <a:schemeClr val="accent1"/>
-          </a:fillRef>
-          <a:effectRef idx="2">
-            <a:schemeClr val="accent1"/>
-          </a:effectRef>
-          <a:fontRef idx="minor">
-            <a:schemeClr val="lt1"/>
-          </a:fontRef>
-        </p:style>
         <p:txBody>
           <a:bodyPr rtlCol="0" anchor="ctr"/>
           <a:lstStyle/>
@@ -11979,7 +11475,7 @@
           <p:cNvPr id="4" name="TextBox 3"/>
           <p:cNvSpPr/>
           <p:nvPr>
-            <p:ph type="body" idx="1"/>
+            <p:ph type="body" idx="2"/>
           </p:nvPr>
         </p:nvSpPr>
         <p:spPr>
@@ -12015,7 +11511,9 @@
         <p:nvSpPr>
           <p:cNvPr id="5" name="Rectangle 4"/>
           <p:cNvSpPr/>
-          <p:nvPr/>
+          <p:nvPr>
+            <p:ph type="body" idx="3"/>
+          </p:nvPr>
         </p:nvSpPr>
         <p:spPr>
           <a:xfrm>
@@ -12033,20 +11531,6 @@
           </a:ln>
           <a:effectLst/>
         </p:spPr>
-        <p:style>
-          <a:lnRef idx="1">
-            <a:schemeClr val="accent1"/>
-          </a:lnRef>
-          <a:fillRef idx="3">
-            <a:schemeClr val="accent1"/>
-          </a:fillRef>
-          <a:effectRef idx="2">
-            <a:schemeClr val="accent1"/>
-          </a:effectRef>
-          <a:fontRef idx="minor">
-            <a:schemeClr val="lt1"/>
-          </a:fontRef>
-        </p:style>
         <p:txBody>
           <a:bodyPr rtlCol="0" anchor="ctr"/>
           <a:lstStyle/>
@@ -12060,7 +11544,7 @@
           <p:cNvPr id="6" name="TextBox 5"/>
           <p:cNvSpPr/>
           <p:nvPr>
-            <p:ph type="body" idx="2"/>
+            <p:ph type="body" idx="4"/>
           </p:nvPr>
         </p:nvSpPr>
         <p:spPr>
@@ -12096,7 +11580,9 @@
         <p:nvSpPr>
           <p:cNvPr id="7" name="Rectangle 6"/>
           <p:cNvSpPr/>
-          <p:nvPr/>
+          <p:nvPr>
+            <p:ph type="body" idx="5"/>
+          </p:nvPr>
         </p:nvSpPr>
         <p:spPr>
           <a:xfrm>
@@ -12114,20 +11600,6 @@
           </a:ln>
           <a:effectLst/>
         </p:spPr>
-        <p:style>
-          <a:lnRef idx="1">
-            <a:schemeClr val="accent1"/>
-          </a:lnRef>
-          <a:fillRef idx="3">
-            <a:schemeClr val="accent1"/>
-          </a:fillRef>
-          <a:effectRef idx="2">
-            <a:schemeClr val="accent1"/>
-          </a:effectRef>
-          <a:fontRef idx="minor">
-            <a:schemeClr val="lt1"/>
-          </a:fontRef>
-        </p:style>
         <p:txBody>
           <a:bodyPr rtlCol="0" anchor="ctr"/>
           <a:lstStyle/>
@@ -12141,7 +11613,7 @@
           <p:cNvPr id="8" name="TextBox 7"/>
           <p:cNvSpPr/>
           <p:nvPr>
-            <p:ph type="body" idx="3"/>
+            <p:ph type="body" idx="6"/>
           </p:nvPr>
         </p:nvSpPr>
         <p:spPr>
@@ -12177,7 +11649,9 @@
         <p:nvSpPr>
           <p:cNvPr id="9" name="Rectangle 8"/>
           <p:cNvSpPr/>
-          <p:nvPr/>
+          <p:nvPr>
+            <p:ph type="body" idx="7"/>
+          </p:nvPr>
         </p:nvSpPr>
         <p:spPr>
           <a:xfrm>
@@ -12195,20 +11669,6 @@
           </a:ln>
           <a:effectLst/>
         </p:spPr>
-        <p:style>
-          <a:lnRef idx="1">
-            <a:schemeClr val="accent1"/>
-          </a:lnRef>
-          <a:fillRef idx="3">
-            <a:schemeClr val="accent1"/>
-          </a:fillRef>
-          <a:effectRef idx="2">
-            <a:schemeClr val="accent1"/>
-          </a:effectRef>
-          <a:fontRef idx="minor">
-            <a:schemeClr val="lt1"/>
-          </a:fontRef>
-        </p:style>
         <p:txBody>
           <a:bodyPr rtlCol="0" anchor="ctr"/>
           <a:lstStyle/>
@@ -12222,7 +11682,7 @@
           <p:cNvPr id="10" name="TextBox 9"/>
           <p:cNvSpPr/>
           <p:nvPr>
-            <p:ph type="body" idx="4"/>
+            <p:ph type="body" idx="8"/>
           </p:nvPr>
         </p:nvSpPr>
         <p:spPr>
@@ -12658,7 +12118,9 @@
         <p:nvSpPr>
           <p:cNvPr id="4" name="Rectangle 3"/>
           <p:cNvSpPr/>
-          <p:nvPr/>
+          <p:nvPr>
+            <p:ph type="body" idx="2"/>
+          </p:nvPr>
         </p:nvSpPr>
         <p:spPr>
           <a:xfrm>
@@ -12676,20 +12138,6 @@
           </a:ln>
           <a:effectLst/>
         </p:spPr>
-        <p:style>
-          <a:lnRef idx="1">
-            <a:schemeClr val="accent1"/>
-          </a:lnRef>
-          <a:fillRef idx="3">
-            <a:schemeClr val="accent1"/>
-          </a:fillRef>
-          <a:effectRef idx="2">
-            <a:schemeClr val="accent1"/>
-          </a:effectRef>
-          <a:fontRef idx="minor">
-            <a:schemeClr val="lt1"/>
-          </a:fontRef>
-        </p:style>
         <p:txBody>
           <a:bodyPr rtlCol="0" anchor="ctr"/>
           <a:lstStyle/>
@@ -12703,7 +12151,7 @@
           <p:cNvPr id="5" name="TextBox 4"/>
           <p:cNvSpPr/>
           <p:nvPr>
-            <p:ph type="body" idx="2"/>
+            <p:ph type="body" idx="3"/>
           </p:nvPr>
         </p:nvSpPr>
         <p:spPr>
@@ -12740,7 +12188,7 @@
           <p:cNvPr id="6" name="TextBox 5"/>
           <p:cNvSpPr/>
           <p:nvPr>
-            <p:ph type="body" idx="3"/>
+            <p:ph type="body" idx="4"/>
           </p:nvPr>
         </p:nvSpPr>
         <p:spPr>
@@ -12776,7 +12224,9 @@
         <p:nvSpPr>
           <p:cNvPr id="7" name="Rectangle 6"/>
           <p:cNvSpPr/>
-          <p:nvPr/>
+          <p:nvPr>
+            <p:ph type="body" idx="5"/>
+          </p:nvPr>
         </p:nvSpPr>
         <p:spPr>
           <a:xfrm>
@@ -12794,20 +12244,6 @@
           </a:ln>
           <a:effectLst/>
         </p:spPr>
-        <p:style>
-          <a:lnRef idx="1">
-            <a:schemeClr val="accent1"/>
-          </a:lnRef>
-          <a:fillRef idx="3">
-            <a:schemeClr val="accent1"/>
-          </a:fillRef>
-          <a:effectRef idx="2">
-            <a:schemeClr val="accent1"/>
-          </a:effectRef>
-          <a:fontRef idx="minor">
-            <a:schemeClr val="lt1"/>
-          </a:fontRef>
-        </p:style>
         <p:txBody>
           <a:bodyPr rtlCol="0" anchor="ctr"/>
           <a:lstStyle/>
@@ -12821,7 +12257,7 @@
           <p:cNvPr id="8" name="TextBox 7"/>
           <p:cNvSpPr/>
           <p:nvPr>
-            <p:ph type="body" idx="4"/>
+            <p:ph type="body" idx="6"/>
           </p:nvPr>
         </p:nvSpPr>
         <p:spPr>
@@ -12858,7 +12294,7 @@
           <p:cNvPr id="9" name="TextBox 8"/>
           <p:cNvSpPr/>
           <p:nvPr>
-            <p:ph type="body" idx="5"/>
+            <p:ph type="body" idx="7"/>
           </p:nvPr>
         </p:nvSpPr>
         <p:spPr>
@@ -12894,7 +12330,9 @@
         <p:nvSpPr>
           <p:cNvPr id="10" name="Rectangle 9"/>
           <p:cNvSpPr/>
-          <p:nvPr/>
+          <p:nvPr>
+            <p:ph type="body" idx="8"/>
+          </p:nvPr>
         </p:nvSpPr>
         <p:spPr>
           <a:xfrm>
@@ -12912,20 +12350,6 @@
           </a:ln>
           <a:effectLst/>
         </p:spPr>
-        <p:style>
-          <a:lnRef idx="1">
-            <a:schemeClr val="accent1"/>
-          </a:lnRef>
-          <a:fillRef idx="3">
-            <a:schemeClr val="accent1"/>
-          </a:fillRef>
-          <a:effectRef idx="2">
-            <a:schemeClr val="accent1"/>
-          </a:effectRef>
-          <a:fontRef idx="minor">
-            <a:schemeClr val="lt1"/>
-          </a:fontRef>
-        </p:style>
         <p:txBody>
           <a:bodyPr rtlCol="0" anchor="ctr"/>
           <a:lstStyle/>
@@ -12939,7 +12363,7 @@
           <p:cNvPr id="11" name="TextBox 10"/>
           <p:cNvSpPr/>
           <p:nvPr>
-            <p:ph type="body" idx="6"/>
+            <p:ph type="body" idx="9"/>
           </p:nvPr>
         </p:nvSpPr>
         <p:spPr>
@@ -12976,7 +12400,7 @@
           <p:cNvPr id="12" name="TextBox 11"/>
           <p:cNvSpPr/>
           <p:nvPr>
-            <p:ph type="body" idx="7"/>
+            <p:ph type="body" idx="13"/>
           </p:nvPr>
         </p:nvSpPr>
         <p:spPr>
@@ -13012,7 +12436,9 @@
         <p:nvSpPr>
           <p:cNvPr id="13" name="Rectangle 12"/>
           <p:cNvSpPr/>
-          <p:nvPr/>
+          <p:nvPr>
+            <p:ph type="body" idx="14"/>
+          </p:nvPr>
         </p:nvSpPr>
         <p:spPr>
           <a:xfrm>
@@ -13030,20 +12456,6 @@
           </a:ln>
           <a:effectLst/>
         </p:spPr>
-        <p:style>
-          <a:lnRef idx="1">
-            <a:schemeClr val="accent1"/>
-          </a:lnRef>
-          <a:fillRef idx="3">
-            <a:schemeClr val="accent1"/>
-          </a:fillRef>
-          <a:effectRef idx="2">
-            <a:schemeClr val="accent1"/>
-          </a:effectRef>
-          <a:fontRef idx="minor">
-            <a:schemeClr val="lt1"/>
-          </a:fontRef>
-        </p:style>
         <p:txBody>
           <a:bodyPr rtlCol="0" anchor="ctr"/>
           <a:lstStyle/>
@@ -13057,7 +12469,7 @@
           <p:cNvPr id="14" name="TextBox 13"/>
           <p:cNvSpPr/>
           <p:nvPr>
-            <p:ph type="body" idx="8"/>
+            <p:ph type="body" idx="15"/>
           </p:nvPr>
         </p:nvSpPr>
         <p:spPr>
@@ -13279,7 +12691,9 @@
         <p:nvSpPr>
           <p:cNvPr id="6" name="Rectangle 5"/>
           <p:cNvSpPr/>
-          <p:nvPr/>
+          <p:nvPr>
+            <p:ph type="body" idx="4"/>
+          </p:nvPr>
         </p:nvSpPr>
         <p:spPr>
           <a:xfrm>
@@ -13297,20 +12711,6 @@
           </a:ln>
           <a:effectLst/>
         </p:spPr>
-        <p:style>
-          <a:lnRef idx="1">
-            <a:schemeClr val="accent1"/>
-          </a:lnRef>
-          <a:fillRef idx="3">
-            <a:schemeClr val="accent1"/>
-          </a:fillRef>
-          <a:effectRef idx="2">
-            <a:schemeClr val="accent1"/>
-          </a:effectRef>
-          <a:fontRef idx="minor">
-            <a:schemeClr val="lt1"/>
-          </a:fontRef>
-        </p:style>
         <p:txBody>
           <a:bodyPr rtlCol="0" anchor="ctr"/>
           <a:lstStyle/>
@@ -13324,7 +12724,7 @@
           <p:cNvPr id="7" name="TextBox 6"/>
           <p:cNvSpPr/>
           <p:nvPr>
-            <p:ph type="body" idx="4"/>
+            <p:ph type="body" idx="5"/>
           </p:nvPr>
         </p:nvSpPr>
         <p:spPr>
@@ -13360,7 +12760,9 @@
         <p:nvSpPr>
           <p:cNvPr id="8" name="Rectangle 7"/>
           <p:cNvSpPr/>
-          <p:nvPr/>
+          <p:nvPr>
+            <p:ph type="body" idx="6"/>
+          </p:nvPr>
         </p:nvSpPr>
         <p:spPr>
           <a:xfrm>
@@ -13378,20 +12780,6 @@
           </a:ln>
           <a:effectLst/>
         </p:spPr>
-        <p:style>
-          <a:lnRef idx="1">
-            <a:schemeClr val="accent1"/>
-          </a:lnRef>
-          <a:fillRef idx="3">
-            <a:schemeClr val="accent1"/>
-          </a:fillRef>
-          <a:effectRef idx="2">
-            <a:schemeClr val="accent1"/>
-          </a:effectRef>
-          <a:fontRef idx="minor">
-            <a:schemeClr val="lt1"/>
-          </a:fontRef>
-        </p:style>
         <p:txBody>
           <a:bodyPr rtlCol="0" anchor="ctr"/>
           <a:lstStyle/>
@@ -13405,7 +12793,7 @@
           <p:cNvPr id="9" name="TextBox 8"/>
           <p:cNvSpPr/>
           <p:nvPr>
-            <p:ph type="body" idx="5"/>
+            <p:ph type="body" idx="7"/>
           </p:nvPr>
         </p:nvSpPr>
         <p:spPr>
@@ -13442,7 +12830,7 @@
           <p:cNvPr id="10" name="TextBox 9"/>
           <p:cNvSpPr/>
           <p:nvPr>
-            <p:ph type="body" idx="6"/>
+            <p:ph type="body" idx="8"/>
           </p:nvPr>
         </p:nvSpPr>
         <p:spPr>
@@ -13479,7 +12867,7 @@
           <p:cNvPr id="11" name="TextBox 10"/>
           <p:cNvSpPr/>
           <p:nvPr>
-            <p:ph type="body" idx="7"/>
+            <p:ph type="body" idx="9"/>
           </p:nvPr>
         </p:nvSpPr>
         <p:spPr>
@@ -13516,7 +12904,7 @@
           <p:cNvPr id="12" name="TextBox 11"/>
           <p:cNvSpPr/>
           <p:nvPr>
-            <p:ph type="body" idx="8"/>
+            <p:ph type="body" idx="13"/>
           </p:nvPr>
         </p:nvSpPr>
         <p:spPr>
@@ -13553,7 +12941,7 @@
           <p:cNvPr id="13" name="TextBox 12"/>
           <p:cNvSpPr/>
           <p:nvPr>
-            <p:ph type="body" idx="9"/>
+            <p:ph type="body" idx="14"/>
           </p:nvPr>
         </p:nvSpPr>
         <p:spPr>
@@ -13590,7 +12978,7 @@
           <p:cNvPr id="14" name="TextBox 13"/>
           <p:cNvSpPr/>
           <p:nvPr>
-            <p:ph type="body" idx="13"/>
+            <p:ph type="body" idx="15"/>
           </p:nvPr>
         </p:nvSpPr>
         <p:spPr>
@@ -13627,7 +13015,7 @@
           <p:cNvPr id="15" name="TextBox 14"/>
           <p:cNvSpPr/>
           <p:nvPr>
-            <p:ph type="body" idx="14"/>
+            <p:ph type="body" idx="16"/>
           </p:nvPr>
         </p:nvSpPr>
         <p:spPr>
@@ -13664,7 +13052,7 @@
           <p:cNvPr id="16" name="TextBox 15"/>
           <p:cNvSpPr/>
           <p:nvPr>
-            <p:ph type="body" idx="15"/>
+            <p:ph type="body" idx="17"/>
           </p:nvPr>
         </p:nvSpPr>
         <p:spPr>
@@ -13700,7 +13088,9 @@
         <p:nvSpPr>
           <p:cNvPr id="17" name="Rectangle 16"/>
           <p:cNvSpPr/>
-          <p:nvPr/>
+          <p:nvPr>
+            <p:ph type="body" idx="18"/>
+          </p:nvPr>
         </p:nvSpPr>
         <p:spPr>
           <a:xfrm>
@@ -13718,20 +13108,6 @@
           </a:ln>
           <a:effectLst/>
         </p:spPr>
-        <p:style>
-          <a:lnRef idx="1">
-            <a:schemeClr val="accent1"/>
-          </a:lnRef>
-          <a:fillRef idx="3">
-            <a:schemeClr val="accent1"/>
-          </a:fillRef>
-          <a:effectRef idx="2">
-            <a:schemeClr val="accent1"/>
-          </a:effectRef>
-          <a:fontRef idx="minor">
-            <a:schemeClr val="lt1"/>
-          </a:fontRef>
-        </p:style>
         <p:txBody>
           <a:bodyPr rtlCol="0" anchor="ctr"/>
           <a:lstStyle/>
@@ -13745,7 +13121,7 @@
           <p:cNvPr id="18" name="TextBox 17"/>
           <p:cNvSpPr/>
           <p:nvPr>
-            <p:ph type="body" idx="16"/>
+            <p:ph type="body" idx="19"/>
           </p:nvPr>
         </p:nvSpPr>
         <p:spPr>
@@ -13782,7 +13158,7 @@
           <p:cNvPr id="19" name="TextBox 18"/>
           <p:cNvSpPr/>
           <p:nvPr>
-            <p:ph type="body" idx="17"/>
+            <p:ph type="body" idx="20"/>
           </p:nvPr>
         </p:nvSpPr>
         <p:spPr>
@@ -13819,7 +13195,7 @@
           <p:cNvPr id="20" name="TextBox 19"/>
           <p:cNvSpPr/>
           <p:nvPr>
-            <p:ph type="body" idx="18"/>
+            <p:ph type="body" idx="21"/>
           </p:nvPr>
         </p:nvSpPr>
         <p:spPr>

--- a/examples/agency-pipeline-demo/deck.pptx
+++ b/examples/agency-pipeline-demo/deck.pptx
@@ -729,7 +729,35 @@
       </p:grpSpPr>
       <p:sp>
         <p:nvSpPr>
-          <p:cNvPr id="2" name="TextBox 1"/>
+          <p:cNvPr id="4" name="Slide Number Placeholder 3"/>
+          <p:cNvSpPr>
+            <a:spLocks noGrp="1"/>
+          </p:cNvSpPr>
+          <p:nvPr>
+            <p:ph type="sldNum" sz="quarter" idx="12"/>
+          </p:nvPr>
+        </p:nvSpPr>
+        <p:spPr>
+          <a:xfrm>
+            <a:off x="10363200" y="6035040"/>
+            <a:ext cx="1371600" cy="365760"/>
+          </a:xfrm>
+        </p:spPr>
+        <p:txBody>
+          <a:bodyPr/>
+          <a:lstStyle/>
+          <a:p>
+            <a:fld id="{C1FF6DA9-008F-8B48-92A6-B652298478BF}" type="slidenum">
+              <a:rPr lang="en-US" smtClean="0"/>
+              <a:t>‹#›</a:t>
+            </a:fld>
+            <a:endParaRPr lang="en-US"/>
+          </a:p>
+        </p:txBody>
+      </p:sp>
+      <p:sp>
+        <p:nvSpPr>
+          <p:cNvPr id="5" name="TextBox 4"/>
           <p:cNvSpPr/>
           <p:nvPr>
             <p:ph type="title"/>
@@ -746,7 +774,7 @@
           <a:noFill/>
         </p:spPr>
         <p:txBody>
-          <a:bodyPr wrap="square">
+          <a:bodyPr wrap="square" lIns="0" rIns="0">
             <a:noAutofit/>
           </a:bodyPr>
           <a:lstStyle/>
@@ -804,7 +832,35 @@
       </p:grpSpPr>
       <p:sp>
         <p:nvSpPr>
-          <p:cNvPr id="2" name="TextBox 1"/>
+          <p:cNvPr id="4" name="Slide Number Placeholder 3"/>
+          <p:cNvSpPr>
+            <a:spLocks noGrp="1"/>
+          </p:cNvSpPr>
+          <p:nvPr>
+            <p:ph type="sldNum" sz="quarter" idx="12"/>
+          </p:nvPr>
+        </p:nvSpPr>
+        <p:spPr>
+          <a:xfrm>
+            <a:off x="10363200" y="6035040"/>
+            <a:ext cx="1371600" cy="365760"/>
+          </a:xfrm>
+        </p:spPr>
+        <p:txBody>
+          <a:bodyPr/>
+          <a:lstStyle/>
+          <a:p>
+            <a:fld id="{C1FF6DA9-008F-8B48-92A6-B652298478BF}" type="slidenum">
+              <a:rPr lang="en-US" smtClean="0"/>
+              <a:t>‹#›</a:t>
+            </a:fld>
+            <a:endParaRPr lang="en-US"/>
+          </a:p>
+        </p:txBody>
+      </p:sp>
+      <p:sp>
+        <p:nvSpPr>
+          <p:cNvPr id="5" name="TextBox 4"/>
           <p:cNvSpPr/>
           <p:nvPr>
             <p:ph type="title"/>
@@ -821,7 +877,7 @@
           <a:noFill/>
         </p:spPr>
         <p:txBody>
-          <a:bodyPr wrap="square">
+          <a:bodyPr wrap="square" lIns="0" rIns="0">
             <a:noAutofit/>
           </a:bodyPr>
           <a:lstStyle/>
@@ -841,7 +897,7 @@
       </p:sp>
       <p:sp>
         <p:nvSpPr>
-          <p:cNvPr id="3" name="TextBox 2"/>
+          <p:cNvPr id="6" name="TextBox 5"/>
           <p:cNvSpPr/>
           <p:nvPr>
             <p:ph type="body" idx="1"/>
@@ -858,7 +914,7 @@
           <a:noFill/>
         </p:spPr>
         <p:txBody>
-          <a:bodyPr wrap="square">
+          <a:bodyPr wrap="square" lIns="0" rIns="0">
             <a:noAutofit/>
           </a:bodyPr>
           <a:lstStyle/>
@@ -878,7 +934,7 @@
       </p:sp>
       <p:sp>
         <p:nvSpPr>
-          <p:cNvPr id="4" name="TextBox 3"/>
+          <p:cNvPr id="7" name="TextBox 6"/>
           <p:cNvSpPr/>
           <p:nvPr>
             <p:ph type="body" idx="2"/>
@@ -895,7 +951,7 @@
           <a:noFill/>
         </p:spPr>
         <p:txBody>
-          <a:bodyPr wrap="square">
+          <a:bodyPr wrap="square" lIns="0" rIns="0">
             <a:noAutofit/>
           </a:bodyPr>
           <a:lstStyle/>
@@ -915,7 +971,7 @@
       </p:sp>
       <p:sp>
         <p:nvSpPr>
-          <p:cNvPr id="5" name="TextBox 4"/>
+          <p:cNvPr id="8" name="TextBox 7"/>
           <p:cNvSpPr/>
           <p:nvPr>
             <p:ph type="body" idx="3"/>
@@ -932,7 +988,7 @@
           <a:noFill/>
         </p:spPr>
         <p:txBody>
-          <a:bodyPr wrap="square">
+          <a:bodyPr wrap="square" lIns="0" rIns="0">
             <a:noAutofit/>
           </a:bodyPr>
           <a:lstStyle/>
@@ -952,7 +1008,7 @@
       </p:sp>
       <p:sp>
         <p:nvSpPr>
-          <p:cNvPr id="6" name="TextBox 5"/>
+          <p:cNvPr id="9" name="TextBox 8"/>
           <p:cNvSpPr/>
           <p:nvPr>
             <p:ph type="body" idx="4"/>
@@ -969,7 +1025,7 @@
           <a:noFill/>
         </p:spPr>
         <p:txBody>
-          <a:bodyPr wrap="square">
+          <a:bodyPr wrap="square" lIns="0" rIns="0">
             <a:noAutofit/>
           </a:bodyPr>
           <a:lstStyle/>
@@ -989,7 +1045,7 @@
       </p:sp>
       <p:sp>
         <p:nvSpPr>
-          <p:cNvPr id="7" name="TextBox 6"/>
+          <p:cNvPr id="10" name="TextBox 9"/>
           <p:cNvSpPr/>
           <p:nvPr>
             <p:ph type="body" idx="5"/>
@@ -1006,7 +1062,7 @@
           <a:noFill/>
         </p:spPr>
         <p:txBody>
-          <a:bodyPr wrap="square">
+          <a:bodyPr wrap="square" lIns="0" rIns="0">
             <a:noAutofit/>
           </a:bodyPr>
           <a:lstStyle/>
@@ -1026,7 +1082,7 @@
       </p:sp>
       <p:sp>
         <p:nvSpPr>
-          <p:cNvPr id="8" name="TextBox 7"/>
+          <p:cNvPr id="11" name="TextBox 10"/>
           <p:cNvSpPr/>
           <p:nvPr>
             <p:ph type="body" idx="6"/>
@@ -1043,7 +1099,7 @@
           <a:noFill/>
         </p:spPr>
         <p:txBody>
-          <a:bodyPr wrap="square">
+          <a:bodyPr wrap="square" lIns="0" rIns="0">
             <a:noAutofit/>
           </a:bodyPr>
           <a:lstStyle/>
@@ -1101,7 +1157,35 @@
       </p:grpSpPr>
       <p:sp>
         <p:nvSpPr>
-          <p:cNvPr id="2" name="TextBox 1"/>
+          <p:cNvPr id="4" name="Slide Number Placeholder 3"/>
+          <p:cNvSpPr>
+            <a:spLocks noGrp="1"/>
+          </p:cNvSpPr>
+          <p:nvPr>
+            <p:ph type="sldNum" sz="quarter" idx="12"/>
+          </p:nvPr>
+        </p:nvSpPr>
+        <p:spPr>
+          <a:xfrm>
+            <a:off x="10363200" y="6035040"/>
+            <a:ext cx="1371600" cy="365760"/>
+          </a:xfrm>
+        </p:spPr>
+        <p:txBody>
+          <a:bodyPr/>
+          <a:lstStyle/>
+          <a:p>
+            <a:fld id="{C1FF6DA9-008F-8B48-92A6-B652298478BF}" type="slidenum">
+              <a:rPr lang="en-US" smtClean="0"/>
+              <a:t>‹#›</a:t>
+            </a:fld>
+            <a:endParaRPr lang="en-US"/>
+          </a:p>
+        </p:txBody>
+      </p:sp>
+      <p:sp>
+        <p:nvSpPr>
+          <p:cNvPr id="5" name="TextBox 4"/>
           <p:cNvSpPr/>
           <p:nvPr>
             <p:ph type="title"/>
@@ -1118,7 +1202,7 @@
           <a:noFill/>
         </p:spPr>
         <p:txBody>
-          <a:bodyPr wrap="square">
+          <a:bodyPr wrap="square" lIns="0" rIns="0">
             <a:noAutofit/>
           </a:bodyPr>
           <a:lstStyle/>
@@ -1138,7 +1222,7 @@
       </p:sp>
       <p:sp>
         <p:nvSpPr>
-          <p:cNvPr id="3" name="TextBox 2"/>
+          <p:cNvPr id="6" name="TextBox 5"/>
           <p:cNvSpPr/>
           <p:nvPr>
             <p:ph type="body" idx="1"/>
@@ -1155,7 +1239,7 @@
           <a:noFill/>
         </p:spPr>
         <p:txBody>
-          <a:bodyPr wrap="square">
+          <a:bodyPr wrap="square" lIns="0" rIns="0">
             <a:noAutofit/>
           </a:bodyPr>
           <a:lstStyle/>
@@ -1175,7 +1259,7 @@
       </p:sp>
       <p:sp>
         <p:nvSpPr>
-          <p:cNvPr id="4" name="TextBox 3"/>
+          <p:cNvPr id="7" name="TextBox 6"/>
           <p:cNvSpPr/>
           <p:nvPr>
             <p:ph type="body" idx="2"/>
@@ -1192,7 +1276,7 @@
           <a:noFill/>
         </p:spPr>
         <p:txBody>
-          <a:bodyPr wrap="square">
+          <a:bodyPr wrap="square" lIns="0" rIns="0">
             <a:noAutofit/>
           </a:bodyPr>
           <a:lstStyle/>
@@ -1212,7 +1296,7 @@
       </p:sp>
       <p:sp>
         <p:nvSpPr>
-          <p:cNvPr id="5" name="TextBox 4"/>
+          <p:cNvPr id="8" name="TextBox 7"/>
           <p:cNvSpPr/>
           <p:nvPr>
             <p:ph type="body" idx="3"/>
@@ -1229,7 +1313,7 @@
           <a:noFill/>
         </p:spPr>
         <p:txBody>
-          <a:bodyPr wrap="square">
+          <a:bodyPr wrap="square" lIns="0" rIns="0">
             <a:noAutofit/>
           </a:bodyPr>
           <a:lstStyle/>
@@ -1249,7 +1333,7 @@
       </p:sp>
       <p:sp>
         <p:nvSpPr>
-          <p:cNvPr id="6" name="TextBox 5"/>
+          <p:cNvPr id="9" name="TextBox 8"/>
           <p:cNvSpPr/>
           <p:nvPr>
             <p:ph type="body" idx="4"/>
@@ -1266,7 +1350,7 @@
           <a:noFill/>
         </p:spPr>
         <p:txBody>
-          <a:bodyPr wrap="square">
+          <a:bodyPr wrap="square" lIns="0" rIns="0">
             <a:noAutofit/>
           </a:bodyPr>
           <a:lstStyle/>
@@ -1286,7 +1370,7 @@
       </p:sp>
       <p:sp>
         <p:nvSpPr>
-          <p:cNvPr id="7" name="TextBox 6"/>
+          <p:cNvPr id="10" name="TextBox 9"/>
           <p:cNvSpPr/>
           <p:nvPr>
             <p:ph type="body" idx="5"/>
@@ -1303,7 +1387,7 @@
           <a:noFill/>
         </p:spPr>
         <p:txBody>
-          <a:bodyPr wrap="square">
+          <a:bodyPr wrap="square" lIns="0" rIns="0">
             <a:noAutofit/>
           </a:bodyPr>
           <a:lstStyle/>
@@ -1323,7 +1407,7 @@
       </p:sp>
       <p:sp>
         <p:nvSpPr>
-          <p:cNvPr id="8" name="TextBox 7"/>
+          <p:cNvPr id="11" name="TextBox 10"/>
           <p:cNvSpPr/>
           <p:nvPr>
             <p:ph type="body" idx="6"/>
@@ -1340,7 +1424,7 @@
           <a:noFill/>
         </p:spPr>
         <p:txBody>
-          <a:bodyPr wrap="square">
+          <a:bodyPr wrap="square" lIns="0" rIns="0">
             <a:noAutofit/>
           </a:bodyPr>
           <a:lstStyle/>
@@ -1398,7 +1482,35 @@
       </p:grpSpPr>
       <p:sp>
         <p:nvSpPr>
-          <p:cNvPr id="2" name="TextBox 1"/>
+          <p:cNvPr id="4" name="Slide Number Placeholder 3"/>
+          <p:cNvSpPr>
+            <a:spLocks noGrp="1"/>
+          </p:cNvSpPr>
+          <p:nvPr>
+            <p:ph type="sldNum" sz="quarter" idx="12"/>
+          </p:nvPr>
+        </p:nvSpPr>
+        <p:spPr>
+          <a:xfrm>
+            <a:off x="10363200" y="6035040"/>
+            <a:ext cx="1371600" cy="365760"/>
+          </a:xfrm>
+        </p:spPr>
+        <p:txBody>
+          <a:bodyPr/>
+          <a:lstStyle/>
+          <a:p>
+            <a:fld id="{C1FF6DA9-008F-8B48-92A6-B652298478BF}" type="slidenum">
+              <a:rPr lang="en-US" smtClean="0"/>
+              <a:t>‹#›</a:t>
+            </a:fld>
+            <a:endParaRPr lang="en-US"/>
+          </a:p>
+        </p:txBody>
+      </p:sp>
+      <p:sp>
+        <p:nvSpPr>
+          <p:cNvPr id="5" name="TextBox 4"/>
           <p:cNvSpPr/>
           <p:nvPr>
             <p:ph type="title"/>
@@ -1415,7 +1527,7 @@
           <a:noFill/>
         </p:spPr>
         <p:txBody>
-          <a:bodyPr wrap="square">
+          <a:bodyPr wrap="square" lIns="0" rIns="0">
             <a:noAutofit/>
           </a:bodyPr>
           <a:lstStyle/>
@@ -1435,7 +1547,7 @@
       </p:sp>
       <p:sp>
         <p:nvSpPr>
-          <p:cNvPr id="3" name="TextBox 2"/>
+          <p:cNvPr id="6" name="TextBox 5"/>
           <p:cNvSpPr/>
           <p:nvPr>
             <p:ph type="body" idx="1"/>
@@ -1452,7 +1564,7 @@
           <a:noFill/>
         </p:spPr>
         <p:txBody>
-          <a:bodyPr wrap="square">
+          <a:bodyPr wrap="square" lIns="0" rIns="0">
             <a:noAutofit/>
           </a:bodyPr>
           <a:lstStyle/>
@@ -1472,7 +1584,7 @@
       </p:sp>
       <p:sp>
         <p:nvSpPr>
-          <p:cNvPr id="4" name="TextBox 3"/>
+          <p:cNvPr id="7" name="TextBox 6"/>
           <p:cNvSpPr/>
           <p:nvPr>
             <p:ph type="body" idx="2"/>
@@ -1489,7 +1601,7 @@
           <a:noFill/>
         </p:spPr>
         <p:txBody>
-          <a:bodyPr wrap="square">
+          <a:bodyPr wrap="square" lIns="0" rIns="0">
             <a:noAutofit/>
           </a:bodyPr>
           <a:lstStyle/>
@@ -1509,7 +1621,7 @@
       </p:sp>
       <p:sp>
         <p:nvSpPr>
-          <p:cNvPr id="5" name="TextBox 4"/>
+          <p:cNvPr id="8" name="TextBox 7"/>
           <p:cNvSpPr/>
           <p:nvPr>
             <p:ph type="body" idx="3"/>
@@ -1526,7 +1638,7 @@
           <a:noFill/>
         </p:spPr>
         <p:txBody>
-          <a:bodyPr wrap="square">
+          <a:bodyPr wrap="square" lIns="0" rIns="0">
             <a:noAutofit/>
           </a:bodyPr>
           <a:lstStyle/>
@@ -1546,7 +1658,7 @@
       </p:sp>
       <p:sp>
         <p:nvSpPr>
-          <p:cNvPr id="6" name="TextBox 5"/>
+          <p:cNvPr id="9" name="TextBox 8"/>
           <p:cNvSpPr/>
           <p:nvPr>
             <p:ph type="body" idx="4"/>
@@ -1563,7 +1675,7 @@
           <a:noFill/>
         </p:spPr>
         <p:txBody>
-          <a:bodyPr wrap="square">
+          <a:bodyPr wrap="square" lIns="0" rIns="0">
             <a:noAutofit/>
           </a:bodyPr>
           <a:lstStyle/>
@@ -1583,7 +1695,7 @@
       </p:sp>
       <p:sp>
         <p:nvSpPr>
-          <p:cNvPr id="7" name="TextBox 6"/>
+          <p:cNvPr id="10" name="TextBox 9"/>
           <p:cNvSpPr/>
           <p:nvPr>
             <p:ph type="body" idx="5"/>
@@ -1600,7 +1712,7 @@
           <a:noFill/>
         </p:spPr>
         <p:txBody>
-          <a:bodyPr wrap="square">
+          <a:bodyPr wrap="square" lIns="0" rIns="0">
             <a:noAutofit/>
           </a:bodyPr>
           <a:lstStyle/>
@@ -1620,7 +1732,7 @@
       </p:sp>
       <p:sp>
         <p:nvSpPr>
-          <p:cNvPr id="8" name="TextBox 7"/>
+          <p:cNvPr id="11" name="TextBox 10"/>
           <p:cNvSpPr/>
           <p:nvPr>
             <p:ph type="body" idx="6"/>
@@ -1637,7 +1749,7 @@
           <a:noFill/>
         </p:spPr>
         <p:txBody>
-          <a:bodyPr wrap="square">
+          <a:bodyPr wrap="square" lIns="0" rIns="0">
             <a:noAutofit/>
           </a:bodyPr>
           <a:lstStyle/>
@@ -1657,7 +1769,7 @@
       </p:sp>
       <p:sp>
         <p:nvSpPr>
-          <p:cNvPr id="9" name="TextBox 8"/>
+          <p:cNvPr id="12" name="TextBox 11"/>
           <p:cNvSpPr/>
           <p:nvPr>
             <p:ph type="body" idx="7"/>
@@ -1674,7 +1786,7 @@
           <a:noFill/>
         </p:spPr>
         <p:txBody>
-          <a:bodyPr wrap="square">
+          <a:bodyPr wrap="square" lIns="0" rIns="0">
             <a:noAutofit/>
           </a:bodyPr>
           <a:lstStyle/>
@@ -1694,7 +1806,7 @@
       </p:sp>
       <p:sp>
         <p:nvSpPr>
-          <p:cNvPr id="10" name="TextBox 9"/>
+          <p:cNvPr id="13" name="TextBox 12"/>
           <p:cNvSpPr/>
           <p:nvPr>
             <p:ph type="body" idx="8"/>
@@ -1711,7 +1823,7 @@
           <a:noFill/>
         </p:spPr>
         <p:txBody>
-          <a:bodyPr wrap="square">
+          <a:bodyPr wrap="square" lIns="0" rIns="0">
             <a:noAutofit/>
           </a:bodyPr>
           <a:lstStyle/>
@@ -1769,7 +1881,35 @@
       </p:grpSpPr>
       <p:sp>
         <p:nvSpPr>
-          <p:cNvPr id="2" name="TextBox 1"/>
+          <p:cNvPr id="4" name="Slide Number Placeholder 3"/>
+          <p:cNvSpPr>
+            <a:spLocks noGrp="1"/>
+          </p:cNvSpPr>
+          <p:nvPr>
+            <p:ph type="sldNum" sz="quarter" idx="12"/>
+          </p:nvPr>
+        </p:nvSpPr>
+        <p:spPr>
+          <a:xfrm>
+            <a:off x="10363200" y="6035040"/>
+            <a:ext cx="1371600" cy="365760"/>
+          </a:xfrm>
+        </p:spPr>
+        <p:txBody>
+          <a:bodyPr/>
+          <a:lstStyle/>
+          <a:p>
+            <a:fld id="{C1FF6DA9-008F-8B48-92A6-B652298478BF}" type="slidenum">
+              <a:rPr lang="en-US" smtClean="0"/>
+              <a:t>‹#›</a:t>
+            </a:fld>
+            <a:endParaRPr lang="en-US"/>
+          </a:p>
+        </p:txBody>
+      </p:sp>
+      <p:sp>
+        <p:nvSpPr>
+          <p:cNvPr id="5" name="TextBox 4"/>
           <p:cNvSpPr/>
           <p:nvPr>
             <p:ph type="title"/>
@@ -1786,7 +1926,7 @@
           <a:noFill/>
         </p:spPr>
         <p:txBody>
-          <a:bodyPr wrap="square">
+          <a:bodyPr wrap="square" lIns="0" rIns="0">
             <a:noAutofit/>
           </a:bodyPr>
           <a:lstStyle/>
@@ -1806,7 +1946,7 @@
       </p:sp>
       <p:sp>
         <p:nvSpPr>
-          <p:cNvPr id="3" name="TextBox 2"/>
+          <p:cNvPr id="6" name="TextBox 5"/>
           <p:cNvSpPr/>
           <p:nvPr>
             <p:ph type="body" idx="1"/>
@@ -1823,7 +1963,7 @@
           <a:noFill/>
         </p:spPr>
         <p:txBody>
-          <a:bodyPr wrap="square">
+          <a:bodyPr wrap="square" lIns="0" rIns="0">
             <a:noAutofit/>
           </a:bodyPr>
           <a:lstStyle/>
@@ -1843,7 +1983,7 @@
       </p:sp>
       <p:sp>
         <p:nvSpPr>
-          <p:cNvPr id="4" name="TextBox 3"/>
+          <p:cNvPr id="7" name="TextBox 6"/>
           <p:cNvSpPr/>
           <p:nvPr>
             <p:ph type="body" idx="2"/>
@@ -1860,7 +2000,7 @@
           <a:noFill/>
         </p:spPr>
         <p:txBody>
-          <a:bodyPr wrap="square">
+          <a:bodyPr wrap="square" lIns="0" rIns="0">
             <a:noAutofit/>
           </a:bodyPr>
           <a:lstStyle/>
@@ -1880,7 +2020,7 @@
       </p:sp>
       <p:sp>
         <p:nvSpPr>
-          <p:cNvPr id="5" name="TextBox 4"/>
+          <p:cNvPr id="8" name="TextBox 7"/>
           <p:cNvSpPr/>
           <p:nvPr>
             <p:ph type="body" idx="3"/>
@@ -1897,7 +2037,7 @@
           <a:noFill/>
         </p:spPr>
         <p:txBody>
-          <a:bodyPr wrap="square">
+          <a:bodyPr wrap="square" lIns="0" rIns="0">
             <a:noAutofit/>
           </a:bodyPr>
           <a:lstStyle/>
@@ -1917,7 +2057,7 @@
       </p:sp>
       <p:sp>
         <p:nvSpPr>
-          <p:cNvPr id="6" name="TextBox 5"/>
+          <p:cNvPr id="9" name="TextBox 8"/>
           <p:cNvSpPr/>
           <p:nvPr>
             <p:ph type="body" idx="4"/>
@@ -1934,7 +2074,7 @@
           <a:noFill/>
         </p:spPr>
         <p:txBody>
-          <a:bodyPr wrap="square">
+          <a:bodyPr wrap="square" lIns="0" rIns="0">
             <a:noAutofit/>
           </a:bodyPr>
           <a:lstStyle/>
@@ -1954,7 +2094,7 @@
       </p:sp>
       <p:sp>
         <p:nvSpPr>
-          <p:cNvPr id="7" name="TextBox 6"/>
+          <p:cNvPr id="10" name="TextBox 9"/>
           <p:cNvSpPr/>
           <p:nvPr>
             <p:ph type="body" idx="5"/>
@@ -1971,7 +2111,7 @@
           <a:noFill/>
         </p:spPr>
         <p:txBody>
-          <a:bodyPr wrap="square">
+          <a:bodyPr wrap="square" lIns="0" rIns="0">
             <a:noAutofit/>
           </a:bodyPr>
           <a:lstStyle/>
@@ -1991,7 +2131,7 @@
       </p:sp>
       <p:sp>
         <p:nvSpPr>
-          <p:cNvPr id="8" name="TextBox 7"/>
+          <p:cNvPr id="11" name="TextBox 10"/>
           <p:cNvSpPr/>
           <p:nvPr>
             <p:ph type="body" idx="6"/>
@@ -2008,7 +2148,7 @@
           <a:noFill/>
         </p:spPr>
         <p:txBody>
-          <a:bodyPr wrap="square">
+          <a:bodyPr wrap="square" lIns="0" rIns="0">
             <a:noAutofit/>
           </a:bodyPr>
           <a:lstStyle/>
@@ -2028,7 +2168,7 @@
       </p:sp>
       <p:sp>
         <p:nvSpPr>
-          <p:cNvPr id="9" name="TextBox 8"/>
+          <p:cNvPr id="12" name="TextBox 11"/>
           <p:cNvSpPr/>
           <p:nvPr>
             <p:ph type="body" idx="7"/>
@@ -2045,7 +2185,7 @@
           <a:noFill/>
         </p:spPr>
         <p:txBody>
-          <a:bodyPr wrap="square">
+          <a:bodyPr wrap="square" lIns="0" rIns="0">
             <a:noAutofit/>
           </a:bodyPr>
           <a:lstStyle/>
@@ -2065,7 +2205,7 @@
       </p:sp>
       <p:sp>
         <p:nvSpPr>
-          <p:cNvPr id="10" name="TextBox 9"/>
+          <p:cNvPr id="13" name="TextBox 12"/>
           <p:cNvSpPr/>
           <p:nvPr>
             <p:ph type="body" idx="8"/>
@@ -2082,7 +2222,7 @@
           <a:noFill/>
         </p:spPr>
         <p:txBody>
-          <a:bodyPr wrap="square">
+          <a:bodyPr wrap="square" lIns="0" rIns="0">
             <a:noAutofit/>
           </a:bodyPr>
           <a:lstStyle/>
@@ -2102,7 +2242,7 @@
       </p:sp>
       <p:sp>
         <p:nvSpPr>
-          <p:cNvPr id="11" name="TextBox 10"/>
+          <p:cNvPr id="14" name="TextBox 13"/>
           <p:cNvSpPr/>
           <p:nvPr>
             <p:ph type="body" idx="9"/>
@@ -2119,7 +2259,7 @@
           <a:noFill/>
         </p:spPr>
         <p:txBody>
-          <a:bodyPr wrap="square">
+          <a:bodyPr wrap="square" lIns="0" rIns="0">
             <a:noAutofit/>
           </a:bodyPr>
           <a:lstStyle/>
@@ -2139,7 +2279,7 @@
       </p:sp>
       <p:sp>
         <p:nvSpPr>
-          <p:cNvPr id="12" name="TextBox 11"/>
+          <p:cNvPr id="15" name="TextBox 14"/>
           <p:cNvSpPr/>
           <p:nvPr>
             <p:ph type="body" idx="13"/>
@@ -2156,7 +2296,7 @@
           <a:noFill/>
         </p:spPr>
         <p:txBody>
-          <a:bodyPr wrap="square">
+          <a:bodyPr wrap="square" lIns="0" rIns="0">
             <a:noAutofit/>
           </a:bodyPr>
           <a:lstStyle/>
@@ -2176,7 +2316,7 @@
       </p:sp>
       <p:sp>
         <p:nvSpPr>
-          <p:cNvPr id="13" name="TextBox 12"/>
+          <p:cNvPr id="16" name="TextBox 15"/>
           <p:cNvSpPr/>
           <p:nvPr>
             <p:ph type="body" idx="14"/>
@@ -2193,7 +2333,7 @@
           <a:noFill/>
         </p:spPr>
         <p:txBody>
-          <a:bodyPr wrap="square">
+          <a:bodyPr wrap="square" lIns="0" rIns="0">
             <a:noAutofit/>
           </a:bodyPr>
           <a:lstStyle/>
@@ -2213,7 +2353,7 @@
       </p:sp>
       <p:sp>
         <p:nvSpPr>
-          <p:cNvPr id="14" name="TextBox 13"/>
+          <p:cNvPr id="17" name="TextBox 16"/>
           <p:cNvSpPr/>
           <p:nvPr>
             <p:ph type="body" idx="15"/>
@@ -2230,7 +2370,7 @@
           <a:noFill/>
         </p:spPr>
         <p:txBody>
-          <a:bodyPr wrap="square">
+          <a:bodyPr wrap="square" lIns="0" rIns="0">
             <a:noAutofit/>
           </a:bodyPr>
           <a:lstStyle/>
@@ -2288,7 +2428,35 @@
       </p:grpSpPr>
       <p:sp>
         <p:nvSpPr>
-          <p:cNvPr id="2" name="TextBox 1"/>
+          <p:cNvPr id="4" name="Slide Number Placeholder 3"/>
+          <p:cNvSpPr>
+            <a:spLocks noGrp="1"/>
+          </p:cNvSpPr>
+          <p:nvPr>
+            <p:ph type="sldNum" sz="quarter" idx="12"/>
+          </p:nvPr>
+        </p:nvSpPr>
+        <p:spPr>
+          <a:xfrm>
+            <a:off x="10363200" y="6035040"/>
+            <a:ext cx="1371600" cy="365760"/>
+          </a:xfrm>
+        </p:spPr>
+        <p:txBody>
+          <a:bodyPr/>
+          <a:lstStyle/>
+          <a:p>
+            <a:fld id="{C1FF6DA9-008F-8B48-92A6-B652298478BF}" type="slidenum">
+              <a:rPr lang="en-US" smtClean="0"/>
+              <a:t>‹#›</a:t>
+            </a:fld>
+            <a:endParaRPr lang="en-US"/>
+          </a:p>
+        </p:txBody>
+      </p:sp>
+      <p:sp>
+        <p:nvSpPr>
+          <p:cNvPr id="5" name="TextBox 4"/>
           <p:cNvSpPr/>
           <p:nvPr>
             <p:ph type="title"/>
@@ -2305,7 +2473,7 @@
           <a:noFill/>
         </p:spPr>
         <p:txBody>
-          <a:bodyPr wrap="square">
+          <a:bodyPr wrap="square" lIns="0" rIns="0">
             <a:noAutofit/>
           </a:bodyPr>
           <a:lstStyle/>
@@ -2325,7 +2493,7 @@
       </p:sp>
       <p:sp>
         <p:nvSpPr>
-          <p:cNvPr id="3" name="TextBox 2"/>
+          <p:cNvPr id="6" name="TextBox 5"/>
           <p:cNvSpPr/>
           <p:nvPr>
             <p:ph type="body" idx="1"/>
@@ -2342,7 +2510,7 @@
           <a:noFill/>
         </p:spPr>
         <p:txBody>
-          <a:bodyPr wrap="square">
+          <a:bodyPr wrap="square" lIns="0" rIns="0">
             <a:noAutofit/>
           </a:bodyPr>
           <a:lstStyle/>
@@ -2362,7 +2530,7 @@
       </p:sp>
       <p:sp>
         <p:nvSpPr>
-          <p:cNvPr id="4" name="TextBox 3"/>
+          <p:cNvPr id="7" name="TextBox 6"/>
           <p:cNvSpPr/>
           <p:nvPr>
             <p:ph type="body" idx="2"/>
@@ -2379,7 +2547,7 @@
           <a:noFill/>
         </p:spPr>
         <p:txBody>
-          <a:bodyPr wrap="square">
+          <a:bodyPr wrap="square" lIns="0" rIns="0">
             <a:noAutofit/>
           </a:bodyPr>
           <a:lstStyle/>
@@ -2437,7 +2605,35 @@
       </p:grpSpPr>
       <p:sp>
         <p:nvSpPr>
-          <p:cNvPr id="2" name="TextBox 1"/>
+          <p:cNvPr id="4" name="Slide Number Placeholder 3"/>
+          <p:cNvSpPr>
+            <a:spLocks noGrp="1"/>
+          </p:cNvSpPr>
+          <p:nvPr>
+            <p:ph type="sldNum" sz="quarter" idx="12"/>
+          </p:nvPr>
+        </p:nvSpPr>
+        <p:spPr>
+          <a:xfrm>
+            <a:off x="10363200" y="6035040"/>
+            <a:ext cx="1371600" cy="365760"/>
+          </a:xfrm>
+        </p:spPr>
+        <p:txBody>
+          <a:bodyPr/>
+          <a:lstStyle/>
+          <a:p>
+            <a:fld id="{C1FF6DA9-008F-8B48-92A6-B652298478BF}" type="slidenum">
+              <a:rPr lang="en-US" smtClean="0"/>
+              <a:t>‹#›</a:t>
+            </a:fld>
+            <a:endParaRPr lang="en-US"/>
+          </a:p>
+        </p:txBody>
+      </p:sp>
+      <p:sp>
+        <p:nvSpPr>
+          <p:cNvPr id="5" name="TextBox 4"/>
           <p:cNvSpPr/>
           <p:nvPr>
             <p:ph type="title"/>
@@ -2454,7 +2650,7 @@
           <a:noFill/>
         </p:spPr>
         <p:txBody>
-          <a:bodyPr wrap="square">
+          <a:bodyPr wrap="square" lIns="0" rIns="0">
             <a:noAutofit/>
           </a:bodyPr>
           <a:lstStyle/>
@@ -2474,7 +2670,7 @@
       </p:sp>
       <p:sp>
         <p:nvSpPr>
-          <p:cNvPr id="3" name="TextBox 2"/>
+          <p:cNvPr id="6" name="TextBox 5"/>
           <p:cNvSpPr/>
           <p:nvPr>
             <p:ph type="body" idx="1"/>
@@ -2491,7 +2687,7 @@
           <a:noFill/>
         </p:spPr>
         <p:txBody>
-          <a:bodyPr wrap="square">
+          <a:bodyPr wrap="square" lIns="0" rIns="0">
             <a:noAutofit/>
           </a:bodyPr>
           <a:lstStyle/>
@@ -2511,7 +2707,7 @@
       </p:sp>
       <p:sp>
         <p:nvSpPr>
-          <p:cNvPr id="4" name="TextBox 3"/>
+          <p:cNvPr id="7" name="TextBox 6"/>
           <p:cNvSpPr/>
           <p:nvPr>
             <p:ph type="body" idx="2"/>
@@ -2528,7 +2724,7 @@
           <a:noFill/>
         </p:spPr>
         <p:txBody>
-          <a:bodyPr wrap="square">
+          <a:bodyPr wrap="square" lIns="0" rIns="0">
             <a:noAutofit/>
           </a:bodyPr>
           <a:lstStyle/>
@@ -2548,7 +2744,7 @@
       </p:sp>
       <p:sp>
         <p:nvSpPr>
-          <p:cNvPr id="5" name="TextBox 4"/>
+          <p:cNvPr id="8" name="TextBox 7"/>
           <p:cNvSpPr/>
           <p:nvPr>
             <p:ph type="body" idx="3"/>
@@ -2565,7 +2761,7 @@
           <a:noFill/>
         </p:spPr>
         <p:txBody>
-          <a:bodyPr wrap="square">
+          <a:bodyPr wrap="square" lIns="0" rIns="0">
             <a:noAutofit/>
           </a:bodyPr>
           <a:lstStyle/>
@@ -2585,7 +2781,7 @@
       </p:sp>
       <p:sp>
         <p:nvSpPr>
-          <p:cNvPr id="6" name="TextBox 5"/>
+          <p:cNvPr id="9" name="TextBox 8"/>
           <p:cNvSpPr/>
           <p:nvPr>
             <p:ph type="body" idx="4"/>
@@ -2602,7 +2798,7 @@
           <a:noFill/>
         </p:spPr>
         <p:txBody>
-          <a:bodyPr wrap="square">
+          <a:bodyPr wrap="square" lIns="0" rIns="0">
             <a:noAutofit/>
           </a:bodyPr>
           <a:lstStyle/>
@@ -2622,7 +2818,7 @@
       </p:sp>
       <p:sp>
         <p:nvSpPr>
-          <p:cNvPr id="7" name="TextBox 6"/>
+          <p:cNvPr id="10" name="TextBox 9"/>
           <p:cNvSpPr/>
           <p:nvPr>
             <p:ph type="body" idx="5"/>
@@ -2639,7 +2835,7 @@
           <a:noFill/>
         </p:spPr>
         <p:txBody>
-          <a:bodyPr wrap="square">
+          <a:bodyPr wrap="square" lIns="0" rIns="0">
             <a:noAutofit/>
           </a:bodyPr>
           <a:lstStyle/>
@@ -2659,7 +2855,7 @@
       </p:sp>
       <p:sp>
         <p:nvSpPr>
-          <p:cNvPr id="8" name="TextBox 7"/>
+          <p:cNvPr id="11" name="TextBox 10"/>
           <p:cNvSpPr/>
           <p:nvPr>
             <p:ph type="body" idx="6"/>
@@ -2676,7 +2872,7 @@
           <a:noFill/>
         </p:spPr>
         <p:txBody>
-          <a:bodyPr wrap="square">
+          <a:bodyPr wrap="square" lIns="0" rIns="0">
             <a:noAutofit/>
           </a:bodyPr>
           <a:lstStyle/>
@@ -2696,7 +2892,7 @@
       </p:sp>
       <p:sp>
         <p:nvSpPr>
-          <p:cNvPr id="9" name="TextBox 8"/>
+          <p:cNvPr id="12" name="TextBox 11"/>
           <p:cNvSpPr/>
           <p:nvPr>
             <p:ph type="body" idx="7"/>
@@ -2713,7 +2909,7 @@
           <a:noFill/>
         </p:spPr>
         <p:txBody>
-          <a:bodyPr wrap="square">
+          <a:bodyPr wrap="square" lIns="0" rIns="0">
             <a:noAutofit/>
           </a:bodyPr>
           <a:lstStyle/>
@@ -2733,7 +2929,7 @@
       </p:sp>
       <p:sp>
         <p:nvSpPr>
-          <p:cNvPr id="10" name="TextBox 9"/>
+          <p:cNvPr id="13" name="TextBox 12"/>
           <p:cNvSpPr/>
           <p:nvPr>
             <p:ph type="body" idx="8"/>
@@ -2750,7 +2946,7 @@
           <a:noFill/>
         </p:spPr>
         <p:txBody>
-          <a:bodyPr wrap="square">
+          <a:bodyPr wrap="square" lIns="0" rIns="0">
             <a:noAutofit/>
           </a:bodyPr>
           <a:lstStyle/>
@@ -2808,7 +3004,35 @@
       </p:grpSpPr>
       <p:sp>
         <p:nvSpPr>
-          <p:cNvPr id="2" name="Rectangle 1"/>
+          <p:cNvPr id="4" name="Slide Number Placeholder 3"/>
+          <p:cNvSpPr>
+            <a:spLocks noGrp="1"/>
+          </p:cNvSpPr>
+          <p:nvPr>
+            <p:ph type="sldNum" sz="quarter" idx="12"/>
+          </p:nvPr>
+        </p:nvSpPr>
+        <p:spPr>
+          <a:xfrm>
+            <a:off x="10363200" y="6035040"/>
+            <a:ext cx="1371600" cy="365760"/>
+          </a:xfrm>
+        </p:spPr>
+        <p:txBody>
+          <a:bodyPr/>
+          <a:lstStyle/>
+          <a:p>
+            <a:fld id="{C1FF6DA9-008F-8B48-92A6-B652298478BF}" type="slidenum">
+              <a:rPr lang="en-US" smtClean="0"/>
+              <a:t>‹#›</a:t>
+            </a:fld>
+            <a:endParaRPr lang="en-US"/>
+          </a:p>
+        </p:txBody>
+      </p:sp>
+      <p:sp>
+        <p:nvSpPr>
+          <p:cNvPr id="5" name="Rectangle 4"/>
           <p:cNvSpPr/>
           <p:nvPr>
             <p:ph type="body" idx="1"/>
@@ -2840,7 +3064,7 @@
       </p:sp>
       <p:sp>
         <p:nvSpPr>
-          <p:cNvPr id="3" name="TextBox 2"/>
+          <p:cNvPr id="6" name="TextBox 5"/>
           <p:cNvSpPr/>
           <p:nvPr>
             <p:ph type="body" idx="2"/>
@@ -2857,7 +3081,7 @@
           <a:noFill/>
         </p:spPr>
         <p:txBody>
-          <a:bodyPr wrap="square">
+          <a:bodyPr wrap="square" lIns="0" rIns="0">
             <a:noAutofit/>
           </a:bodyPr>
           <a:lstStyle/>
@@ -2877,7 +3101,7 @@
       </p:sp>
       <p:sp>
         <p:nvSpPr>
-          <p:cNvPr id="4" name="TextBox 3"/>
+          <p:cNvPr id="7" name="TextBox 6"/>
           <p:cNvSpPr/>
           <p:nvPr>
             <p:ph type="body" idx="3"/>
@@ -2894,7 +3118,7 @@
           <a:noFill/>
         </p:spPr>
         <p:txBody>
-          <a:bodyPr wrap="square">
+          <a:bodyPr wrap="square" lIns="0" rIns="0">
             <a:noAutofit/>
           </a:bodyPr>
           <a:lstStyle/>
@@ -3122,7 +3346,35 @@
       </p:grpSpPr>
       <p:sp>
         <p:nvSpPr>
-          <p:cNvPr id="2" name="TextBox 1"/>
+          <p:cNvPr id="4" name="Slide Number Placeholder 3"/>
+          <p:cNvSpPr>
+            <a:spLocks noGrp="1"/>
+          </p:cNvSpPr>
+          <p:nvPr>
+            <p:ph type="sldNum" sz="quarter" idx="12"/>
+          </p:nvPr>
+        </p:nvSpPr>
+        <p:spPr>
+          <a:xfrm>
+            <a:off x="10363200" y="6035040"/>
+            <a:ext cx="1371600" cy="365760"/>
+          </a:xfrm>
+        </p:spPr>
+        <p:txBody>
+          <a:bodyPr/>
+          <a:lstStyle/>
+          <a:p>
+            <a:fld id="{C1FF6DA9-008F-8B48-92A6-B652298478BF}" type="slidenum">
+              <a:rPr lang="en-US" smtClean="0"/>
+              <a:t>‹#›</a:t>
+            </a:fld>
+            <a:endParaRPr lang="en-US"/>
+          </a:p>
+        </p:txBody>
+      </p:sp>
+      <p:sp>
+        <p:nvSpPr>
+          <p:cNvPr id="5" name="TextBox 4"/>
           <p:cNvSpPr/>
           <p:nvPr>
             <p:ph type="title"/>
@@ -3139,7 +3391,7 @@
           <a:noFill/>
         </p:spPr>
         <p:txBody>
-          <a:bodyPr wrap="square">
+          <a:bodyPr wrap="square" lIns="0" rIns="0">
             <a:noAutofit/>
           </a:bodyPr>
           <a:lstStyle/>
@@ -3159,7 +3411,7 @@
       </p:sp>
       <p:sp>
         <p:nvSpPr>
-          <p:cNvPr id="3" name="Rectangle 2"/>
+          <p:cNvPr id="6" name="Rectangle 5"/>
           <p:cNvSpPr/>
           <p:nvPr>
             <p:ph type="body" idx="1"/>
@@ -3191,7 +3443,7 @@
       </p:sp>
       <p:sp>
         <p:nvSpPr>
-          <p:cNvPr id="4" name="TextBox 3"/>
+          <p:cNvPr id="7" name="TextBox 6"/>
           <p:cNvSpPr/>
           <p:nvPr>
             <p:ph type="body" idx="2"/>
@@ -3208,7 +3460,7 @@
           <a:noFill/>
         </p:spPr>
         <p:txBody>
-          <a:bodyPr wrap="square">
+          <a:bodyPr wrap="square" lIns="0" rIns="0">
             <a:noAutofit/>
           </a:bodyPr>
           <a:lstStyle/>
@@ -3228,7 +3480,7 @@
       </p:sp>
       <p:sp>
         <p:nvSpPr>
-          <p:cNvPr id="5" name="TextBox 4"/>
+          <p:cNvPr id="8" name="TextBox 7"/>
           <p:cNvSpPr/>
           <p:nvPr>
             <p:ph type="body" idx="3"/>
@@ -3245,7 +3497,7 @@
           <a:noFill/>
         </p:spPr>
         <p:txBody>
-          <a:bodyPr wrap="square">
+          <a:bodyPr wrap="square" lIns="0" rIns="0">
             <a:noAutofit/>
           </a:bodyPr>
           <a:lstStyle/>
@@ -3265,7 +3517,7 @@
       </p:sp>
       <p:sp>
         <p:nvSpPr>
-          <p:cNvPr id="6" name="TextBox 5"/>
+          <p:cNvPr id="9" name="TextBox 8"/>
           <p:cNvSpPr/>
           <p:nvPr>
             <p:ph type="body" idx="4"/>
@@ -3282,7 +3534,7 @@
           <a:noFill/>
         </p:spPr>
         <p:txBody>
-          <a:bodyPr wrap="square">
+          <a:bodyPr wrap="square" lIns="0" rIns="0">
             <a:noAutofit/>
           </a:bodyPr>
           <a:lstStyle/>
@@ -3302,7 +3554,7 @@
       </p:sp>
       <p:sp>
         <p:nvSpPr>
-          <p:cNvPr id="7" name="TextBox 6"/>
+          <p:cNvPr id="10" name="TextBox 9"/>
           <p:cNvSpPr/>
           <p:nvPr>
             <p:ph type="body" idx="5"/>
@@ -3319,7 +3571,7 @@
           <a:noFill/>
         </p:spPr>
         <p:txBody>
-          <a:bodyPr wrap="square">
+          <a:bodyPr wrap="square" lIns="0" rIns="0">
             <a:noAutofit/>
           </a:bodyPr>
           <a:lstStyle/>
@@ -3339,7 +3591,7 @@
       </p:sp>
       <p:sp>
         <p:nvSpPr>
-          <p:cNvPr id="8" name="TextBox 7"/>
+          <p:cNvPr id="11" name="TextBox 10"/>
           <p:cNvSpPr/>
           <p:nvPr>
             <p:ph type="body" idx="6"/>
@@ -3356,7 +3608,7 @@
           <a:noFill/>
         </p:spPr>
         <p:txBody>
-          <a:bodyPr wrap="square">
+          <a:bodyPr wrap="square" lIns="0" rIns="0">
             <a:noAutofit/>
           </a:bodyPr>
           <a:lstStyle/>
@@ -3376,7 +3628,7 @@
       </p:sp>
       <p:sp>
         <p:nvSpPr>
-          <p:cNvPr id="9" name="TextBox 8"/>
+          <p:cNvPr id="12" name="TextBox 11"/>
           <p:cNvSpPr/>
           <p:nvPr>
             <p:ph type="body" idx="7"/>
@@ -3393,7 +3645,7 @@
           <a:noFill/>
         </p:spPr>
         <p:txBody>
-          <a:bodyPr wrap="square">
+          <a:bodyPr wrap="square" lIns="0" rIns="0">
             <a:noAutofit/>
           </a:bodyPr>
           <a:lstStyle/>
@@ -3413,7 +3665,7 @@
       </p:sp>
       <p:sp>
         <p:nvSpPr>
-          <p:cNvPr id="10" name="TextBox 9"/>
+          <p:cNvPr id="13" name="TextBox 12"/>
           <p:cNvSpPr/>
           <p:nvPr>
             <p:ph type="body" idx="8"/>
@@ -3430,7 +3682,7 @@
           <a:noFill/>
         </p:spPr>
         <p:txBody>
-          <a:bodyPr wrap="square">
+          <a:bodyPr wrap="square" lIns="0" rIns="0">
             <a:noAutofit/>
           </a:bodyPr>
           <a:lstStyle/>
@@ -3450,7 +3702,7 @@
       </p:sp>
       <p:sp>
         <p:nvSpPr>
-          <p:cNvPr id="11" name="TextBox 10"/>
+          <p:cNvPr id="14" name="TextBox 13"/>
           <p:cNvSpPr/>
           <p:nvPr>
             <p:ph type="body" idx="9"/>
@@ -3467,7 +3719,7 @@
           <a:noFill/>
         </p:spPr>
         <p:txBody>
-          <a:bodyPr wrap="square">
+          <a:bodyPr wrap="square" lIns="0" rIns="0">
             <a:noAutofit/>
           </a:bodyPr>
           <a:lstStyle/>
@@ -3487,7 +3739,7 @@
       </p:sp>
       <p:sp>
         <p:nvSpPr>
-          <p:cNvPr id="12" name="TextBox 11"/>
+          <p:cNvPr id="15" name="TextBox 14"/>
           <p:cNvSpPr/>
           <p:nvPr>
             <p:ph type="body" idx="13"/>
@@ -3504,7 +3756,7 @@
           <a:noFill/>
         </p:spPr>
         <p:txBody>
-          <a:bodyPr wrap="square">
+          <a:bodyPr wrap="square" lIns="0" rIns="0">
             <a:noAutofit/>
           </a:bodyPr>
           <a:lstStyle/>
@@ -3524,7 +3776,7 @@
       </p:sp>
       <p:sp>
         <p:nvSpPr>
-          <p:cNvPr id="13" name="TextBox 12"/>
+          <p:cNvPr id="16" name="TextBox 15"/>
           <p:cNvSpPr/>
           <p:nvPr>
             <p:ph type="body" idx="14"/>
@@ -3541,7 +3793,7 @@
           <a:noFill/>
         </p:spPr>
         <p:txBody>
-          <a:bodyPr wrap="square">
+          <a:bodyPr wrap="square" lIns="0" rIns="0">
             <a:noAutofit/>
           </a:bodyPr>
           <a:lstStyle/>
@@ -3599,7 +3851,35 @@
       </p:grpSpPr>
       <p:sp>
         <p:nvSpPr>
-          <p:cNvPr id="2" name="TextBox 1"/>
+          <p:cNvPr id="4" name="Slide Number Placeholder 3"/>
+          <p:cNvSpPr>
+            <a:spLocks noGrp="1"/>
+          </p:cNvSpPr>
+          <p:nvPr>
+            <p:ph type="sldNum" sz="quarter" idx="12"/>
+          </p:nvPr>
+        </p:nvSpPr>
+        <p:spPr>
+          <a:xfrm>
+            <a:off x="10363200" y="6035040"/>
+            <a:ext cx="1371600" cy="365760"/>
+          </a:xfrm>
+        </p:spPr>
+        <p:txBody>
+          <a:bodyPr/>
+          <a:lstStyle/>
+          <a:p>
+            <a:fld id="{C1FF6DA9-008F-8B48-92A6-B652298478BF}" type="slidenum">
+              <a:rPr lang="en-US" smtClean="0"/>
+              <a:t>‹#›</a:t>
+            </a:fld>
+            <a:endParaRPr lang="en-US"/>
+          </a:p>
+        </p:txBody>
+      </p:sp>
+      <p:sp>
+        <p:nvSpPr>
+          <p:cNvPr id="5" name="TextBox 4"/>
           <p:cNvSpPr/>
           <p:nvPr>
             <p:ph type="body" idx="1"/>
@@ -3616,7 +3896,7 @@
           <a:noFill/>
         </p:spPr>
         <p:txBody>
-          <a:bodyPr wrap="square">
+          <a:bodyPr wrap="square" lIns="0" rIns="0">
             <a:noAutofit/>
           </a:bodyPr>
           <a:lstStyle/>
@@ -3636,7 +3916,7 @@
       </p:sp>
       <p:sp>
         <p:nvSpPr>
-          <p:cNvPr id="3" name="Rectangle 2"/>
+          <p:cNvPr id="6" name="Rectangle 5"/>
           <p:cNvSpPr/>
           <p:nvPr>
             <p:ph type="body" idx="2"/>
@@ -3668,7 +3948,7 @@
       </p:sp>
       <p:sp>
         <p:nvSpPr>
-          <p:cNvPr id="4" name="TextBox 3"/>
+          <p:cNvPr id="7" name="TextBox 6"/>
           <p:cNvSpPr/>
           <p:nvPr>
             <p:ph type="body" idx="3"/>
@@ -3685,7 +3965,7 @@
           <a:noFill/>
         </p:spPr>
         <p:txBody>
-          <a:bodyPr wrap="square">
+          <a:bodyPr wrap="square" lIns="0" rIns="0">
             <a:noAutofit/>
           </a:bodyPr>
           <a:lstStyle/>
@@ -3743,7 +4023,35 @@
       </p:grpSpPr>
       <p:sp>
         <p:nvSpPr>
-          <p:cNvPr id="2" name="Rectangle 1"/>
+          <p:cNvPr id="4" name="Slide Number Placeholder 3"/>
+          <p:cNvSpPr>
+            <a:spLocks noGrp="1"/>
+          </p:cNvSpPr>
+          <p:nvPr>
+            <p:ph type="sldNum" sz="quarter" idx="12"/>
+          </p:nvPr>
+        </p:nvSpPr>
+        <p:spPr>
+          <a:xfrm>
+            <a:off x="10363200" y="6035040"/>
+            <a:ext cx="1371600" cy="365760"/>
+          </a:xfrm>
+        </p:spPr>
+        <p:txBody>
+          <a:bodyPr/>
+          <a:lstStyle/>
+          <a:p>
+            <a:fld id="{C1FF6DA9-008F-8B48-92A6-B652298478BF}" type="slidenum">
+              <a:rPr lang="en-US" smtClean="0"/>
+              <a:t>‹#›</a:t>
+            </a:fld>
+            <a:endParaRPr lang="en-US"/>
+          </a:p>
+        </p:txBody>
+      </p:sp>
+      <p:sp>
+        <p:nvSpPr>
+          <p:cNvPr id="5" name="Rectangle 4"/>
           <p:cNvSpPr/>
           <p:nvPr>
             <p:ph type="body" idx="1"/>
@@ -3775,7 +4083,7 @@
       </p:sp>
       <p:sp>
         <p:nvSpPr>
-          <p:cNvPr id="3" name="TextBox 2"/>
+          <p:cNvPr id="6" name="TextBox 5"/>
           <p:cNvSpPr/>
           <p:nvPr>
             <p:ph type="body" idx="2"/>
@@ -3792,7 +4100,7 @@
           <a:noFill/>
         </p:spPr>
         <p:txBody>
-          <a:bodyPr wrap="square">
+          <a:bodyPr wrap="square" lIns="0" rIns="0">
             <a:noAutofit/>
           </a:bodyPr>
           <a:lstStyle/>
@@ -3812,7 +4120,7 @@
       </p:sp>
       <p:sp>
         <p:nvSpPr>
-          <p:cNvPr id="4" name="TextBox 3"/>
+          <p:cNvPr id="7" name="TextBox 6"/>
           <p:cNvSpPr/>
           <p:nvPr>
             <p:ph type="body" idx="3"/>
@@ -3829,7 +4137,7 @@
           <a:noFill/>
         </p:spPr>
         <p:txBody>
-          <a:bodyPr wrap="square">
+          <a:bodyPr wrap="square" lIns="0" rIns="0">
             <a:noAutofit/>
           </a:bodyPr>
           <a:lstStyle/>
@@ -3887,7 +4195,35 @@
       </p:grpSpPr>
       <p:sp>
         <p:nvSpPr>
-          <p:cNvPr id="2" name="Rectangle 1"/>
+          <p:cNvPr id="4" name="Slide Number Placeholder 3"/>
+          <p:cNvSpPr>
+            <a:spLocks noGrp="1"/>
+          </p:cNvSpPr>
+          <p:nvPr>
+            <p:ph type="sldNum" sz="quarter" idx="12"/>
+          </p:nvPr>
+        </p:nvSpPr>
+        <p:spPr>
+          <a:xfrm>
+            <a:off x="10363200" y="6035040"/>
+            <a:ext cx="1371600" cy="365760"/>
+          </a:xfrm>
+        </p:spPr>
+        <p:txBody>
+          <a:bodyPr/>
+          <a:lstStyle/>
+          <a:p>
+            <a:fld id="{C1FF6DA9-008F-8B48-92A6-B652298478BF}" type="slidenum">
+              <a:rPr lang="en-US" smtClean="0"/>
+              <a:t>‹#›</a:t>
+            </a:fld>
+            <a:endParaRPr lang="en-US"/>
+          </a:p>
+        </p:txBody>
+      </p:sp>
+      <p:sp>
+        <p:nvSpPr>
+          <p:cNvPr id="5" name="Rectangle 4"/>
           <p:cNvSpPr/>
           <p:nvPr>
             <p:ph type="body" idx="1"/>
@@ -3919,7 +4255,7 @@
       </p:sp>
       <p:sp>
         <p:nvSpPr>
-          <p:cNvPr id="3" name="TextBox 2"/>
+          <p:cNvPr id="6" name="TextBox 5"/>
           <p:cNvSpPr/>
           <p:nvPr>
             <p:ph type="body" idx="2"/>
@@ -3936,7 +4272,7 @@
           <a:noFill/>
         </p:spPr>
         <p:txBody>
-          <a:bodyPr wrap="square">
+          <a:bodyPr wrap="square" lIns="0" rIns="0">
             <a:noAutofit/>
           </a:bodyPr>
           <a:lstStyle/>
@@ -3956,7 +4292,7 @@
       </p:sp>
       <p:sp>
         <p:nvSpPr>
-          <p:cNvPr id="4" name="TextBox 3"/>
+          <p:cNvPr id="7" name="TextBox 6"/>
           <p:cNvSpPr/>
           <p:nvPr>
             <p:ph type="body" idx="3"/>
@@ -3973,7 +4309,7 @@
           <a:noFill/>
         </p:spPr>
         <p:txBody>
-          <a:bodyPr wrap="square">
+          <a:bodyPr wrap="square" lIns="0" rIns="0">
             <a:noAutofit/>
           </a:bodyPr>
           <a:lstStyle/>
@@ -4031,7 +4367,35 @@
       </p:grpSpPr>
       <p:sp>
         <p:nvSpPr>
-          <p:cNvPr id="2" name="Rectangle 1"/>
+          <p:cNvPr id="4" name="Slide Number Placeholder 3"/>
+          <p:cNvSpPr>
+            <a:spLocks noGrp="1"/>
+          </p:cNvSpPr>
+          <p:nvPr>
+            <p:ph type="sldNum" sz="quarter" idx="12"/>
+          </p:nvPr>
+        </p:nvSpPr>
+        <p:spPr>
+          <a:xfrm>
+            <a:off x="10363200" y="6035040"/>
+            <a:ext cx="1371600" cy="365760"/>
+          </a:xfrm>
+        </p:spPr>
+        <p:txBody>
+          <a:bodyPr/>
+          <a:lstStyle/>
+          <a:p>
+            <a:fld id="{C1FF6DA9-008F-8B48-92A6-B652298478BF}" type="slidenum">
+              <a:rPr lang="en-US" smtClean="0"/>
+              <a:t>‹#›</a:t>
+            </a:fld>
+            <a:endParaRPr lang="en-US"/>
+          </a:p>
+        </p:txBody>
+      </p:sp>
+      <p:sp>
+        <p:nvSpPr>
+          <p:cNvPr id="5" name="Rectangle 4"/>
           <p:cNvSpPr/>
           <p:nvPr>
             <p:ph type="body" idx="1"/>
@@ -4063,7 +4427,7 @@
       </p:sp>
       <p:sp>
         <p:nvSpPr>
-          <p:cNvPr id="3" name="TextBox 2"/>
+          <p:cNvPr id="6" name="TextBox 5"/>
           <p:cNvSpPr/>
           <p:nvPr>
             <p:ph type="body" idx="2"/>
@@ -4080,7 +4444,7 @@
           <a:noFill/>
         </p:spPr>
         <p:txBody>
-          <a:bodyPr wrap="square">
+          <a:bodyPr wrap="square" lIns="0" rIns="0">
             <a:noAutofit/>
           </a:bodyPr>
           <a:lstStyle/>
@@ -4138,7 +4502,35 @@
       </p:grpSpPr>
       <p:sp>
         <p:nvSpPr>
-          <p:cNvPr id="2" name="TextBox 1"/>
+          <p:cNvPr id="4" name="Slide Number Placeholder 3"/>
+          <p:cNvSpPr>
+            <a:spLocks noGrp="1"/>
+          </p:cNvSpPr>
+          <p:nvPr>
+            <p:ph type="sldNum" sz="quarter" idx="12"/>
+          </p:nvPr>
+        </p:nvSpPr>
+        <p:spPr>
+          <a:xfrm>
+            <a:off x="10363200" y="6035040"/>
+            <a:ext cx="1371600" cy="365760"/>
+          </a:xfrm>
+        </p:spPr>
+        <p:txBody>
+          <a:bodyPr/>
+          <a:lstStyle/>
+          <a:p>
+            <a:fld id="{C1FF6DA9-008F-8B48-92A6-B652298478BF}" type="slidenum">
+              <a:rPr lang="en-US" smtClean="0"/>
+              <a:t>‹#›</a:t>
+            </a:fld>
+            <a:endParaRPr lang="en-US"/>
+          </a:p>
+        </p:txBody>
+      </p:sp>
+      <p:sp>
+        <p:nvSpPr>
+          <p:cNvPr id="5" name="TextBox 4"/>
           <p:cNvSpPr/>
           <p:nvPr>
             <p:ph type="title"/>
@@ -4155,7 +4547,7 @@
           <a:noFill/>
         </p:spPr>
         <p:txBody>
-          <a:bodyPr wrap="square">
+          <a:bodyPr wrap="square" lIns="0" rIns="0">
             <a:noAutofit/>
           </a:bodyPr>
           <a:lstStyle/>
@@ -4175,7 +4567,7 @@
       </p:sp>
       <p:sp>
         <p:nvSpPr>
-          <p:cNvPr id="3" name="TextBox 2"/>
+          <p:cNvPr id="6" name="TextBox 5"/>
           <p:cNvSpPr/>
           <p:nvPr>
             <p:ph type="body" idx="1"/>
@@ -4192,7 +4584,7 @@
           <a:noFill/>
         </p:spPr>
         <p:txBody>
-          <a:bodyPr wrap="square">
+          <a:bodyPr wrap="square" lIns="0" rIns="0">
             <a:noAutofit/>
           </a:bodyPr>
           <a:lstStyle/>
@@ -4212,7 +4604,7 @@
       </p:sp>
       <p:sp>
         <p:nvSpPr>
-          <p:cNvPr id="4" name="TextBox 3"/>
+          <p:cNvPr id="7" name="TextBox 6"/>
           <p:cNvSpPr/>
           <p:nvPr>
             <p:ph type="body" idx="2"/>
@@ -4229,7 +4621,7 @@
           <a:noFill/>
         </p:spPr>
         <p:txBody>
-          <a:bodyPr wrap="square">
+          <a:bodyPr wrap="square" lIns="0" rIns="0">
             <a:noAutofit/>
           </a:bodyPr>
           <a:lstStyle/>
@@ -4249,7 +4641,7 @@
       </p:sp>
       <p:sp>
         <p:nvSpPr>
-          <p:cNvPr id="5" name="TextBox 4"/>
+          <p:cNvPr id="8" name="TextBox 7"/>
           <p:cNvSpPr/>
           <p:nvPr>
             <p:ph type="body" idx="3"/>
@@ -4266,7 +4658,7 @@
           <a:noFill/>
         </p:spPr>
         <p:txBody>
-          <a:bodyPr wrap="square">
+          <a:bodyPr wrap="square" lIns="0" rIns="0">
             <a:noAutofit/>
           </a:bodyPr>
           <a:lstStyle/>
@@ -4324,7 +4716,35 @@
       </p:grpSpPr>
       <p:sp>
         <p:nvSpPr>
-          <p:cNvPr id="2" name="Rectangle 1"/>
+          <p:cNvPr id="4" name="Slide Number Placeholder 3"/>
+          <p:cNvSpPr>
+            <a:spLocks noGrp="1"/>
+          </p:cNvSpPr>
+          <p:nvPr>
+            <p:ph type="sldNum" sz="quarter" idx="12"/>
+          </p:nvPr>
+        </p:nvSpPr>
+        <p:spPr>
+          <a:xfrm>
+            <a:off x="10363200" y="6035040"/>
+            <a:ext cx="1371600" cy="365760"/>
+          </a:xfrm>
+        </p:spPr>
+        <p:txBody>
+          <a:bodyPr/>
+          <a:lstStyle/>
+          <a:p>
+            <a:fld id="{C1FF6DA9-008F-8B48-92A6-B652298478BF}" type="slidenum">
+              <a:rPr lang="en-US" smtClean="0"/>
+              <a:t>‹#›</a:t>
+            </a:fld>
+            <a:endParaRPr lang="en-US"/>
+          </a:p>
+        </p:txBody>
+      </p:sp>
+      <p:sp>
+        <p:nvSpPr>
+          <p:cNvPr id="5" name="Rectangle 4"/>
           <p:cNvSpPr/>
           <p:nvPr>
             <p:ph type="body" idx="1"/>
@@ -4356,7 +4776,7 @@
       </p:sp>
       <p:sp>
         <p:nvSpPr>
-          <p:cNvPr id="3" name="Rectangle 2"/>
+          <p:cNvPr id="6" name="Rectangle 5"/>
           <p:cNvSpPr/>
           <p:nvPr>
             <p:ph type="body" idx="2"/>
@@ -4388,7 +4808,7 @@
       </p:sp>
       <p:sp>
         <p:nvSpPr>
-          <p:cNvPr id="4" name="Rectangle 3"/>
+          <p:cNvPr id="7" name="Rectangle 6"/>
           <p:cNvSpPr/>
           <p:nvPr>
             <p:ph type="body" idx="3"/>
@@ -4420,7 +4840,7 @@
       </p:sp>
       <p:sp>
         <p:nvSpPr>
-          <p:cNvPr id="5" name="TextBox 4"/>
+          <p:cNvPr id="8" name="TextBox 7"/>
           <p:cNvSpPr/>
           <p:nvPr>
             <p:ph type="body" idx="4"/>
@@ -4437,7 +4857,7 @@
           <a:noFill/>
         </p:spPr>
         <p:txBody>
-          <a:bodyPr wrap="square">
+          <a:bodyPr wrap="square" lIns="0" rIns="0">
             <a:noAutofit/>
           </a:bodyPr>
           <a:lstStyle/>
@@ -4457,7 +4877,7 @@
       </p:sp>
       <p:sp>
         <p:nvSpPr>
-          <p:cNvPr id="6" name="TextBox 5"/>
+          <p:cNvPr id="9" name="TextBox 8"/>
           <p:cNvSpPr/>
           <p:nvPr>
             <p:ph type="body" idx="5"/>
@@ -4474,7 +4894,7 @@
           <a:noFill/>
         </p:spPr>
         <p:txBody>
-          <a:bodyPr wrap="square">
+          <a:bodyPr wrap="square" lIns="0" rIns="0">
             <a:noAutofit/>
           </a:bodyPr>
           <a:lstStyle/>
@@ -4494,7 +4914,7 @@
       </p:sp>
       <p:sp>
         <p:nvSpPr>
-          <p:cNvPr id="7" name="TextBox 6"/>
+          <p:cNvPr id="10" name="TextBox 9"/>
           <p:cNvSpPr/>
           <p:nvPr>
             <p:ph type="body" idx="6"/>
@@ -4511,7 +4931,7 @@
           <a:noFill/>
         </p:spPr>
         <p:txBody>
-          <a:bodyPr wrap="square">
+          <a:bodyPr wrap="square" lIns="0" rIns="0">
             <a:noAutofit/>
           </a:bodyPr>
           <a:lstStyle/>
@@ -4531,7 +4951,7 @@
       </p:sp>
       <p:sp>
         <p:nvSpPr>
-          <p:cNvPr id="8" name="TextBox 7"/>
+          <p:cNvPr id="11" name="TextBox 10"/>
           <p:cNvSpPr/>
           <p:nvPr>
             <p:ph type="body" idx="7"/>
@@ -4548,7 +4968,7 @@
           <a:noFill/>
         </p:spPr>
         <p:txBody>
-          <a:bodyPr wrap="square">
+          <a:bodyPr wrap="square" lIns="0" rIns="0">
             <a:noAutofit/>
           </a:bodyPr>
           <a:lstStyle/>
@@ -4568,7 +4988,7 @@
       </p:sp>
       <p:sp>
         <p:nvSpPr>
-          <p:cNvPr id="9" name="TextBox 8"/>
+          <p:cNvPr id="12" name="TextBox 11"/>
           <p:cNvSpPr/>
           <p:nvPr>
             <p:ph type="body" idx="8"/>
@@ -4585,7 +5005,7 @@
           <a:noFill/>
         </p:spPr>
         <p:txBody>
-          <a:bodyPr wrap="square">
+          <a:bodyPr wrap="square" lIns="0" rIns="0">
             <a:noAutofit/>
           </a:bodyPr>
           <a:lstStyle/>
@@ -4605,7 +5025,7 @@
       </p:sp>
       <p:sp>
         <p:nvSpPr>
-          <p:cNvPr id="10" name="TextBox 9"/>
+          <p:cNvPr id="13" name="TextBox 12"/>
           <p:cNvSpPr/>
           <p:nvPr>
             <p:ph type="body" idx="9"/>
@@ -4622,7 +5042,7 @@
           <a:noFill/>
         </p:spPr>
         <p:txBody>
-          <a:bodyPr wrap="square">
+          <a:bodyPr wrap="square" lIns="0" rIns="0">
             <a:noAutofit/>
           </a:bodyPr>
           <a:lstStyle/>
@@ -4642,7 +5062,7 @@
       </p:sp>
       <p:sp>
         <p:nvSpPr>
-          <p:cNvPr id="11" name="TextBox 10"/>
+          <p:cNvPr id="14" name="TextBox 13"/>
           <p:cNvSpPr/>
           <p:nvPr>
             <p:ph type="body" idx="13"/>
@@ -4659,7 +5079,7 @@
           <a:noFill/>
         </p:spPr>
         <p:txBody>
-          <a:bodyPr wrap="square">
+          <a:bodyPr wrap="square" lIns="0" rIns="0">
             <a:noAutofit/>
           </a:bodyPr>
           <a:lstStyle/>
@@ -4679,7 +5099,7 @@
       </p:sp>
       <p:sp>
         <p:nvSpPr>
-          <p:cNvPr id="12" name="TextBox 11"/>
+          <p:cNvPr id="15" name="TextBox 14"/>
           <p:cNvSpPr/>
           <p:nvPr>
             <p:ph type="body" idx="14"/>
@@ -4696,7 +5116,7 @@
           <a:noFill/>
         </p:spPr>
         <p:txBody>
-          <a:bodyPr wrap="square">
+          <a:bodyPr wrap="square" lIns="0" rIns="0">
             <a:noAutofit/>
           </a:bodyPr>
           <a:lstStyle/>
@@ -4716,7 +5136,7 @@
       </p:sp>
       <p:sp>
         <p:nvSpPr>
-          <p:cNvPr id="13" name="TextBox 12"/>
+          <p:cNvPr id="16" name="TextBox 15"/>
           <p:cNvSpPr/>
           <p:nvPr>
             <p:ph type="body" idx="15"/>
@@ -4733,7 +5153,7 @@
           <a:noFill/>
         </p:spPr>
         <p:txBody>
-          <a:bodyPr wrap="square">
+          <a:bodyPr wrap="square" lIns="0" rIns="0">
             <a:noAutofit/>
           </a:bodyPr>
           <a:lstStyle/>
@@ -4753,7 +5173,7 @@
       </p:sp>
       <p:sp>
         <p:nvSpPr>
-          <p:cNvPr id="14" name="TextBox 13"/>
+          <p:cNvPr id="17" name="TextBox 16"/>
           <p:cNvSpPr/>
           <p:nvPr>
             <p:ph type="body" idx="16"/>
@@ -4770,7 +5190,7 @@
           <a:noFill/>
         </p:spPr>
         <p:txBody>
-          <a:bodyPr wrap="square">
+          <a:bodyPr wrap="square" lIns="0" rIns="0">
             <a:noAutofit/>
           </a:bodyPr>
           <a:lstStyle/>
@@ -4790,7 +5210,7 @@
       </p:sp>
       <p:sp>
         <p:nvSpPr>
-          <p:cNvPr id="15" name="TextBox 14"/>
+          <p:cNvPr id="18" name="TextBox 17"/>
           <p:cNvSpPr/>
           <p:nvPr>
             <p:ph type="body" idx="17"/>
@@ -4807,7 +5227,7 @@
           <a:noFill/>
         </p:spPr>
         <p:txBody>
-          <a:bodyPr wrap="square">
+          <a:bodyPr wrap="square" lIns="0" rIns="0">
             <a:noAutofit/>
           </a:bodyPr>
           <a:lstStyle/>
@@ -4827,7 +5247,7 @@
       </p:sp>
       <p:sp>
         <p:nvSpPr>
-          <p:cNvPr id="16" name="TextBox 15"/>
+          <p:cNvPr id="19" name="TextBox 18"/>
           <p:cNvSpPr/>
           <p:nvPr>
             <p:ph type="body" idx="18"/>
@@ -4844,7 +5264,7 @@
           <a:noFill/>
         </p:spPr>
         <p:txBody>
-          <a:bodyPr wrap="square">
+          <a:bodyPr wrap="square" lIns="0" rIns="0">
             <a:noAutofit/>
           </a:bodyPr>
           <a:lstStyle/>
@@ -4864,7 +5284,7 @@
       </p:sp>
       <p:sp>
         <p:nvSpPr>
-          <p:cNvPr id="17" name="TextBox 16"/>
+          <p:cNvPr id="20" name="TextBox 19"/>
           <p:cNvSpPr/>
           <p:nvPr>
             <p:ph type="body" idx="19"/>
@@ -4881,7 +5301,7 @@
           <a:noFill/>
         </p:spPr>
         <p:txBody>
-          <a:bodyPr wrap="square">
+          <a:bodyPr wrap="square" lIns="0" rIns="0">
             <a:noAutofit/>
           </a:bodyPr>
           <a:lstStyle/>
@@ -4901,7 +5321,7 @@
       </p:sp>
       <p:sp>
         <p:nvSpPr>
-          <p:cNvPr id="18" name="TextBox 17"/>
+          <p:cNvPr id="21" name="TextBox 20"/>
           <p:cNvSpPr/>
           <p:nvPr>
             <p:ph type="body" idx="20"/>
@@ -4918,7 +5338,7 @@
           <a:noFill/>
         </p:spPr>
         <p:txBody>
-          <a:bodyPr wrap="square">
+          <a:bodyPr wrap="square" lIns="0" rIns="0">
             <a:noAutofit/>
           </a:bodyPr>
           <a:lstStyle/>
@@ -4938,7 +5358,7 @@
       </p:sp>
       <p:sp>
         <p:nvSpPr>
-          <p:cNvPr id="19" name="TextBox 18"/>
+          <p:cNvPr id="22" name="TextBox 21"/>
           <p:cNvSpPr/>
           <p:nvPr>
             <p:ph type="body" idx="21"/>
@@ -4955,7 +5375,7 @@
           <a:noFill/>
         </p:spPr>
         <p:txBody>
-          <a:bodyPr wrap="square">
+          <a:bodyPr wrap="square" lIns="0" rIns="0">
             <a:noAutofit/>
           </a:bodyPr>
           <a:lstStyle/>
@@ -4975,7 +5395,7 @@
       </p:sp>
       <p:sp>
         <p:nvSpPr>
-          <p:cNvPr id="20" name="TextBox 19"/>
+          <p:cNvPr id="23" name="TextBox 22"/>
           <p:cNvSpPr/>
           <p:nvPr>
             <p:ph type="body" idx="22"/>
@@ -4992,7 +5412,7 @@
           <a:noFill/>
         </p:spPr>
         <p:txBody>
-          <a:bodyPr wrap="square">
+          <a:bodyPr wrap="square" lIns="0" rIns="0">
             <a:noAutofit/>
           </a:bodyPr>
           <a:lstStyle/>
@@ -5050,7 +5470,35 @@
       </p:grpSpPr>
       <p:sp>
         <p:nvSpPr>
-          <p:cNvPr id="2" name="TextBox 1"/>
+          <p:cNvPr id="4" name="Slide Number Placeholder 3"/>
+          <p:cNvSpPr>
+            <a:spLocks noGrp="1"/>
+          </p:cNvSpPr>
+          <p:nvPr>
+            <p:ph type="sldNum" sz="quarter" idx="12"/>
+          </p:nvPr>
+        </p:nvSpPr>
+        <p:spPr>
+          <a:xfrm>
+            <a:off x="10363200" y="6035040"/>
+            <a:ext cx="1371600" cy="365760"/>
+          </a:xfrm>
+        </p:spPr>
+        <p:txBody>
+          <a:bodyPr/>
+          <a:lstStyle/>
+          <a:p>
+            <a:fld id="{C1FF6DA9-008F-8B48-92A6-B652298478BF}" type="slidenum">
+              <a:rPr lang="en-US" smtClean="0"/>
+              <a:t>‹#›</a:t>
+            </a:fld>
+            <a:endParaRPr lang="en-US"/>
+          </a:p>
+        </p:txBody>
+      </p:sp>
+      <p:sp>
+        <p:nvSpPr>
+          <p:cNvPr id="5" name="TextBox 4"/>
           <p:cNvSpPr/>
           <p:nvPr>
             <p:ph type="title"/>
@@ -5067,7 +5515,7 @@
           <a:noFill/>
         </p:spPr>
         <p:txBody>
-          <a:bodyPr wrap="square">
+          <a:bodyPr wrap="square" lIns="0" rIns="0">
             <a:noAutofit/>
           </a:bodyPr>
           <a:lstStyle/>
@@ -5087,7 +5535,7 @@
       </p:sp>
       <p:sp>
         <p:nvSpPr>
-          <p:cNvPr id="3" name="Rounded Rectangle 2"/>
+          <p:cNvPr id="6" name="Rounded Rectangle 5"/>
           <p:cNvSpPr/>
           <p:nvPr>
             <p:ph type="body" idx="1"/>
@@ -5121,7 +5569,7 @@
       </p:sp>
       <p:sp>
         <p:nvSpPr>
-          <p:cNvPr id="4" name="TextBox 3"/>
+          <p:cNvPr id="7" name="TextBox 6"/>
           <p:cNvSpPr/>
           <p:nvPr>
             <p:ph type="body" idx="2"/>
@@ -5138,7 +5586,7 @@
           <a:noFill/>
         </p:spPr>
         <p:txBody>
-          <a:bodyPr wrap="square">
+          <a:bodyPr wrap="square" lIns="0" rIns="0">
             <a:noAutofit/>
           </a:bodyPr>
           <a:lstStyle/>
@@ -5158,7 +5606,7 @@
       </p:sp>
       <p:sp>
         <p:nvSpPr>
-          <p:cNvPr id="5" name="TextBox 4"/>
+          <p:cNvPr id="8" name="TextBox 7"/>
           <p:cNvSpPr/>
           <p:nvPr>
             <p:ph type="body" idx="3"/>
@@ -5175,7 +5623,7 @@
           <a:noFill/>
         </p:spPr>
         <p:txBody>
-          <a:bodyPr wrap="square">
+          <a:bodyPr wrap="square" lIns="0" rIns="0">
             <a:noAutofit/>
           </a:bodyPr>
           <a:lstStyle/>
@@ -5195,7 +5643,7 @@
       </p:sp>
       <p:sp>
         <p:nvSpPr>
-          <p:cNvPr id="6" name="TextBox 5"/>
+          <p:cNvPr id="9" name="TextBox 8"/>
           <p:cNvSpPr/>
           <p:nvPr>
             <p:ph type="body" idx="4"/>
@@ -5212,7 +5660,7 @@
           <a:noFill/>
         </p:spPr>
         <p:txBody>
-          <a:bodyPr wrap="square">
+          <a:bodyPr wrap="square" lIns="0" rIns="0">
             <a:noAutofit/>
           </a:bodyPr>
           <a:lstStyle/>
@@ -5232,7 +5680,7 @@
       </p:sp>
       <p:sp>
         <p:nvSpPr>
-          <p:cNvPr id="7" name="TextBox 6"/>
+          <p:cNvPr id="10" name="TextBox 9"/>
           <p:cNvSpPr/>
           <p:nvPr>
             <p:ph type="body" idx="5"/>
@@ -5249,7 +5697,7 @@
           <a:noFill/>
         </p:spPr>
         <p:txBody>
-          <a:bodyPr wrap="square">
+          <a:bodyPr wrap="square" lIns="0" rIns="0">
             <a:noAutofit/>
           </a:bodyPr>
           <a:lstStyle/>
@@ -5269,7 +5717,7 @@
       </p:sp>
       <p:sp>
         <p:nvSpPr>
-          <p:cNvPr id="8" name="TextBox 7"/>
+          <p:cNvPr id="11" name="TextBox 10"/>
           <p:cNvSpPr/>
           <p:nvPr>
             <p:ph type="body" idx="6"/>
@@ -5286,7 +5734,7 @@
           <a:noFill/>
         </p:spPr>
         <p:txBody>
-          <a:bodyPr wrap="square">
+          <a:bodyPr wrap="square" lIns="0" rIns="0">
             <a:noAutofit/>
           </a:bodyPr>
           <a:lstStyle/>
@@ -5306,7 +5754,7 @@
       </p:sp>
       <p:sp>
         <p:nvSpPr>
-          <p:cNvPr id="9" name="TextBox 8"/>
+          <p:cNvPr id="12" name="TextBox 11"/>
           <p:cNvSpPr/>
           <p:nvPr>
             <p:ph type="body" idx="7"/>
@@ -5323,7 +5771,7 @@
           <a:noFill/>
         </p:spPr>
         <p:txBody>
-          <a:bodyPr wrap="square">
+          <a:bodyPr wrap="square" lIns="0" rIns="0">
             <a:noAutofit/>
           </a:bodyPr>
           <a:lstStyle/>
@@ -5343,7 +5791,7 @@
       </p:sp>
       <p:sp>
         <p:nvSpPr>
-          <p:cNvPr id="10" name="TextBox 9"/>
+          <p:cNvPr id="13" name="TextBox 12"/>
           <p:cNvSpPr/>
           <p:nvPr>
             <p:ph type="body" idx="8"/>
@@ -5360,7 +5808,7 @@
           <a:noFill/>
         </p:spPr>
         <p:txBody>
-          <a:bodyPr wrap="square">
+          <a:bodyPr wrap="square" lIns="0" rIns="0">
             <a:noAutofit/>
           </a:bodyPr>
           <a:lstStyle/>
@@ -5380,7 +5828,7 @@
       </p:sp>
       <p:sp>
         <p:nvSpPr>
-          <p:cNvPr id="11" name="TextBox 10"/>
+          <p:cNvPr id="14" name="TextBox 13"/>
           <p:cNvSpPr/>
           <p:nvPr>
             <p:ph type="body" idx="9"/>
@@ -5397,7 +5845,7 @@
           <a:noFill/>
         </p:spPr>
         <p:txBody>
-          <a:bodyPr wrap="square">
+          <a:bodyPr wrap="square" lIns="0" rIns="0">
             <a:noAutofit/>
           </a:bodyPr>
           <a:lstStyle/>
@@ -5417,7 +5865,7 @@
       </p:sp>
       <p:sp>
         <p:nvSpPr>
-          <p:cNvPr id="12" name="TextBox 11"/>
+          <p:cNvPr id="15" name="TextBox 14"/>
           <p:cNvSpPr/>
           <p:nvPr>
             <p:ph type="body" idx="13"/>
@@ -5434,7 +5882,7 @@
           <a:noFill/>
         </p:spPr>
         <p:txBody>
-          <a:bodyPr wrap="square">
+          <a:bodyPr wrap="square" lIns="0" rIns="0">
             <a:noAutofit/>
           </a:bodyPr>
           <a:lstStyle/>
@@ -5454,7 +5902,7 @@
       </p:sp>
       <p:sp>
         <p:nvSpPr>
-          <p:cNvPr id="13" name="TextBox 12"/>
+          <p:cNvPr id="16" name="TextBox 15"/>
           <p:cNvSpPr/>
           <p:nvPr>
             <p:ph type="body" idx="14"/>
@@ -5471,7 +5919,7 @@
           <a:noFill/>
         </p:spPr>
         <p:txBody>
-          <a:bodyPr wrap="square">
+          <a:bodyPr wrap="square" lIns="0" rIns="0">
             <a:noAutofit/>
           </a:bodyPr>
           <a:lstStyle/>
@@ -5491,7 +5939,7 @@
       </p:sp>
       <p:sp>
         <p:nvSpPr>
-          <p:cNvPr id="14" name="TextBox 13"/>
+          <p:cNvPr id="17" name="TextBox 16"/>
           <p:cNvSpPr/>
           <p:nvPr>
             <p:ph type="body" idx="15"/>
@@ -5508,7 +5956,7 @@
           <a:noFill/>
         </p:spPr>
         <p:txBody>
-          <a:bodyPr wrap="square">
+          <a:bodyPr wrap="square" lIns="0" rIns="0">
             <a:noAutofit/>
           </a:bodyPr>
           <a:lstStyle/>
@@ -5528,7 +5976,7 @@
       </p:sp>
       <p:sp>
         <p:nvSpPr>
-          <p:cNvPr id="15" name="TextBox 14"/>
+          <p:cNvPr id="18" name="TextBox 17"/>
           <p:cNvSpPr/>
           <p:nvPr>
             <p:ph type="body" idx="16"/>
@@ -5545,7 +5993,7 @@
           <a:noFill/>
         </p:spPr>
         <p:txBody>
-          <a:bodyPr wrap="square">
+          <a:bodyPr wrap="square" lIns="0" rIns="0">
             <a:noAutofit/>
           </a:bodyPr>
           <a:lstStyle/>
@@ -5565,7 +6013,7 @@
       </p:sp>
       <p:sp>
         <p:nvSpPr>
-          <p:cNvPr id="16" name="TextBox 15"/>
+          <p:cNvPr id="19" name="TextBox 18"/>
           <p:cNvSpPr/>
           <p:nvPr>
             <p:ph type="body" idx="17"/>
@@ -5582,7 +6030,7 @@
           <a:noFill/>
         </p:spPr>
         <p:txBody>
-          <a:bodyPr wrap="square">
+          <a:bodyPr wrap="square" lIns="0" rIns="0">
             <a:noAutofit/>
           </a:bodyPr>
           <a:lstStyle/>
@@ -5602,7 +6050,7 @@
       </p:sp>
       <p:sp>
         <p:nvSpPr>
-          <p:cNvPr id="17" name="TextBox 16"/>
+          <p:cNvPr id="20" name="TextBox 19"/>
           <p:cNvSpPr/>
           <p:nvPr>
             <p:ph type="body" idx="18"/>
@@ -5619,7 +6067,7 @@
           <a:noFill/>
         </p:spPr>
         <p:txBody>
-          <a:bodyPr wrap="square">
+          <a:bodyPr wrap="square" lIns="0" rIns="0">
             <a:noAutofit/>
           </a:bodyPr>
           <a:lstStyle/>
@@ -5639,7 +6087,7 @@
       </p:sp>
       <p:sp>
         <p:nvSpPr>
-          <p:cNvPr id="18" name="TextBox 17"/>
+          <p:cNvPr id="21" name="TextBox 20"/>
           <p:cNvSpPr/>
           <p:nvPr>
             <p:ph type="body" idx="19"/>
@@ -5656,7 +6104,7 @@
           <a:noFill/>
         </p:spPr>
         <p:txBody>
-          <a:bodyPr wrap="square">
+          <a:bodyPr wrap="square" lIns="0" rIns="0">
             <a:noAutofit/>
           </a:bodyPr>
           <a:lstStyle/>
@@ -5714,7 +6162,35 @@
       </p:grpSpPr>
       <p:sp>
         <p:nvSpPr>
-          <p:cNvPr id="2" name="TextBox 1"/>
+          <p:cNvPr id="4" name="Slide Number Placeholder 3"/>
+          <p:cNvSpPr>
+            <a:spLocks noGrp="1"/>
+          </p:cNvSpPr>
+          <p:nvPr>
+            <p:ph type="sldNum" sz="quarter" idx="12"/>
+          </p:nvPr>
+        </p:nvSpPr>
+        <p:spPr>
+          <a:xfrm>
+            <a:off x="10363200" y="6035040"/>
+            <a:ext cx="1371600" cy="365760"/>
+          </a:xfrm>
+        </p:spPr>
+        <p:txBody>
+          <a:bodyPr/>
+          <a:lstStyle/>
+          <a:p>
+            <a:fld id="{C1FF6DA9-008F-8B48-92A6-B652298478BF}" type="slidenum">
+              <a:rPr lang="en-US" smtClean="0"/>
+              <a:t>‹#›</a:t>
+            </a:fld>
+            <a:endParaRPr lang="en-US"/>
+          </a:p>
+        </p:txBody>
+      </p:sp>
+      <p:sp>
+        <p:nvSpPr>
+          <p:cNvPr id="5" name="TextBox 4"/>
           <p:cNvSpPr/>
           <p:nvPr>
             <p:ph type="title"/>
@@ -5731,7 +6207,7 @@
           <a:noFill/>
         </p:spPr>
         <p:txBody>
-          <a:bodyPr wrap="square">
+          <a:bodyPr wrap="square" lIns="0" rIns="0">
             <a:noAutofit/>
           </a:bodyPr>
           <a:lstStyle/>
@@ -5751,7 +6227,7 @@
       </p:sp>
       <p:sp>
         <p:nvSpPr>
-          <p:cNvPr id="3" name="TextBox 2"/>
+          <p:cNvPr id="6" name="TextBox 5"/>
           <p:cNvSpPr/>
           <p:nvPr>
             <p:ph type="body" idx="1"/>
@@ -5768,7 +6244,7 @@
           <a:noFill/>
         </p:spPr>
         <p:txBody>
-          <a:bodyPr wrap="square">
+          <a:bodyPr wrap="square" lIns="0" rIns="0">
             <a:noAutofit/>
           </a:bodyPr>
           <a:lstStyle/>
@@ -5788,7 +6264,7 @@
       </p:sp>
       <p:sp>
         <p:nvSpPr>
-          <p:cNvPr id="4" name="TextBox 3"/>
+          <p:cNvPr id="7" name="TextBox 6"/>
           <p:cNvSpPr/>
           <p:nvPr>
             <p:ph type="body" idx="2"/>
@@ -5805,7 +6281,7 @@
           <a:noFill/>
         </p:spPr>
         <p:txBody>
-          <a:bodyPr wrap="square">
+          <a:bodyPr wrap="square" lIns="0" rIns="0">
             <a:noAutofit/>
           </a:bodyPr>
           <a:lstStyle/>
@@ -5825,7 +6301,7 @@
       </p:sp>
       <p:sp>
         <p:nvSpPr>
-          <p:cNvPr id="5" name="TextBox 4"/>
+          <p:cNvPr id="8" name="TextBox 7"/>
           <p:cNvSpPr/>
           <p:nvPr>
             <p:ph type="body" idx="3"/>
@@ -5842,7 +6318,7 @@
           <a:noFill/>
         </p:spPr>
         <p:txBody>
-          <a:bodyPr wrap="square">
+          <a:bodyPr wrap="square" lIns="0" rIns="0">
             <a:noAutofit/>
           </a:bodyPr>
           <a:lstStyle/>
@@ -5862,7 +6338,7 @@
       </p:sp>
       <p:sp>
         <p:nvSpPr>
-          <p:cNvPr id="6" name="TextBox 5"/>
+          <p:cNvPr id="9" name="TextBox 8"/>
           <p:cNvSpPr/>
           <p:nvPr>
             <p:ph type="body" idx="4"/>
@@ -5879,7 +6355,7 @@
           <a:noFill/>
         </p:spPr>
         <p:txBody>
-          <a:bodyPr wrap="square">
+          <a:bodyPr wrap="square" lIns="0" rIns="0">
             <a:noAutofit/>
           </a:bodyPr>
           <a:lstStyle/>
@@ -5899,7 +6375,7 @@
       </p:sp>
       <p:sp>
         <p:nvSpPr>
-          <p:cNvPr id="7" name="TextBox 6"/>
+          <p:cNvPr id="10" name="TextBox 9"/>
           <p:cNvSpPr/>
           <p:nvPr>
             <p:ph type="body" idx="5"/>
@@ -5916,7 +6392,7 @@
           <a:noFill/>
         </p:spPr>
         <p:txBody>
-          <a:bodyPr wrap="square">
+          <a:bodyPr wrap="square" lIns="0" rIns="0">
             <a:noAutofit/>
           </a:bodyPr>
           <a:lstStyle/>
@@ -5936,7 +6412,7 @@
       </p:sp>
       <p:sp>
         <p:nvSpPr>
-          <p:cNvPr id="8" name="TextBox 7"/>
+          <p:cNvPr id="11" name="TextBox 10"/>
           <p:cNvSpPr/>
           <p:nvPr>
             <p:ph type="body" idx="6"/>
@@ -5953,7 +6429,7 @@
           <a:noFill/>
         </p:spPr>
         <p:txBody>
-          <a:bodyPr wrap="square">
+          <a:bodyPr wrap="square" lIns="0" rIns="0">
             <a:noAutofit/>
           </a:bodyPr>
           <a:lstStyle/>
@@ -5973,7 +6449,7 @@
       </p:sp>
       <p:sp>
         <p:nvSpPr>
-          <p:cNvPr id="9" name="TextBox 8"/>
+          <p:cNvPr id="12" name="TextBox 11"/>
           <p:cNvSpPr/>
           <p:nvPr>
             <p:ph type="body" idx="7"/>
@@ -5990,7 +6466,7 @@
           <a:noFill/>
         </p:spPr>
         <p:txBody>
-          <a:bodyPr wrap="square">
+          <a:bodyPr wrap="square" lIns="0" rIns="0">
             <a:noAutofit/>
           </a:bodyPr>
           <a:lstStyle/>
@@ -6010,7 +6486,7 @@
       </p:sp>
       <p:sp>
         <p:nvSpPr>
-          <p:cNvPr id="10" name="TextBox 9"/>
+          <p:cNvPr id="13" name="TextBox 12"/>
           <p:cNvSpPr/>
           <p:nvPr>
             <p:ph type="body" idx="8"/>
@@ -6027,7 +6503,7 @@
           <a:noFill/>
         </p:spPr>
         <p:txBody>
-          <a:bodyPr wrap="square">
+          <a:bodyPr wrap="square" lIns="0" rIns="0">
             <a:noAutofit/>
           </a:bodyPr>
           <a:lstStyle/>
@@ -6047,7 +6523,7 @@
       </p:sp>
       <p:sp>
         <p:nvSpPr>
-          <p:cNvPr id="11" name="TextBox 10"/>
+          <p:cNvPr id="14" name="TextBox 13"/>
           <p:cNvSpPr/>
           <p:nvPr>
             <p:ph type="body" idx="9"/>
@@ -6064,7 +6540,7 @@
           <a:noFill/>
         </p:spPr>
         <p:txBody>
-          <a:bodyPr wrap="square">
+          <a:bodyPr wrap="square" lIns="0" rIns="0">
             <a:noAutofit/>
           </a:bodyPr>
           <a:lstStyle/>
@@ -6122,7 +6598,35 @@
       </p:grpSpPr>
       <p:sp>
         <p:nvSpPr>
-          <p:cNvPr id="2" name="TextBox 1"/>
+          <p:cNvPr id="4" name="Slide Number Placeholder 3"/>
+          <p:cNvSpPr>
+            <a:spLocks noGrp="1"/>
+          </p:cNvSpPr>
+          <p:nvPr>
+            <p:ph type="sldNum" sz="quarter" idx="12"/>
+          </p:nvPr>
+        </p:nvSpPr>
+        <p:spPr>
+          <a:xfrm>
+            <a:off x="10363200" y="6035040"/>
+            <a:ext cx="1371600" cy="365760"/>
+          </a:xfrm>
+        </p:spPr>
+        <p:txBody>
+          <a:bodyPr/>
+          <a:lstStyle/>
+          <a:p>
+            <a:fld id="{C1FF6DA9-008F-8B48-92A6-B652298478BF}" type="slidenum">
+              <a:rPr lang="en-US" smtClean="0"/>
+              <a:t>‹#›</a:t>
+            </a:fld>
+            <a:endParaRPr lang="en-US"/>
+          </a:p>
+        </p:txBody>
+      </p:sp>
+      <p:sp>
+        <p:nvSpPr>
+          <p:cNvPr id="5" name="TextBox 4"/>
           <p:cNvSpPr/>
           <p:nvPr>
             <p:ph type="title"/>
@@ -6139,7 +6643,7 @@
           <a:noFill/>
         </p:spPr>
         <p:txBody>
-          <a:bodyPr wrap="square">
+          <a:bodyPr wrap="square" lIns="0" rIns="0">
             <a:noAutofit/>
           </a:bodyPr>
           <a:lstStyle/>
@@ -6159,7 +6663,7 @@
       </p:sp>
       <p:sp>
         <p:nvSpPr>
-          <p:cNvPr id="3" name="TextBox 2"/>
+          <p:cNvPr id="6" name="TextBox 5"/>
           <p:cNvSpPr/>
           <p:nvPr>
             <p:ph type="body" idx="1"/>
@@ -6176,7 +6680,7 @@
           <a:noFill/>
         </p:spPr>
         <p:txBody>
-          <a:bodyPr wrap="square">
+          <a:bodyPr wrap="square" lIns="0" rIns="0">
             <a:noAutofit/>
           </a:bodyPr>
           <a:lstStyle/>
@@ -6196,7 +6700,7 @@
       </p:sp>
       <p:sp>
         <p:nvSpPr>
-          <p:cNvPr id="4" name="Rectangle 3"/>
+          <p:cNvPr id="7" name="Rectangle 6"/>
           <p:cNvSpPr/>
           <p:nvPr>
             <p:ph type="body" idx="2"/>
@@ -6228,7 +6732,7 @@
       </p:sp>
       <p:sp>
         <p:nvSpPr>
-          <p:cNvPr id="5" name="TextBox 4"/>
+          <p:cNvPr id="8" name="TextBox 7"/>
           <p:cNvSpPr/>
           <p:nvPr>
             <p:ph type="body" idx="3"/>
@@ -6245,7 +6749,7 @@
           <a:noFill/>
         </p:spPr>
         <p:txBody>
-          <a:bodyPr wrap="square">
+          <a:bodyPr wrap="square" lIns="0" rIns="0">
             <a:noAutofit/>
           </a:bodyPr>
           <a:lstStyle/>
@@ -6265,7 +6769,7 @@
       </p:sp>
       <p:sp>
         <p:nvSpPr>
-          <p:cNvPr id="6" name="Rectangle 5"/>
+          <p:cNvPr id="9" name="Rectangle 8"/>
           <p:cNvSpPr/>
           <p:nvPr>
             <p:ph type="body" idx="4"/>
@@ -6297,7 +6801,7 @@
       </p:sp>
       <p:sp>
         <p:nvSpPr>
-          <p:cNvPr id="7" name="TextBox 6"/>
+          <p:cNvPr id="10" name="TextBox 9"/>
           <p:cNvSpPr/>
           <p:nvPr>
             <p:ph type="body" idx="5"/>
@@ -6314,7 +6818,7 @@
           <a:noFill/>
         </p:spPr>
         <p:txBody>
-          <a:bodyPr wrap="square">
+          <a:bodyPr wrap="square" lIns="0" rIns="0">
             <a:noAutofit/>
           </a:bodyPr>
           <a:lstStyle/>
@@ -6334,7 +6838,7 @@
       </p:sp>
       <p:sp>
         <p:nvSpPr>
-          <p:cNvPr id="8" name="TextBox 7"/>
+          <p:cNvPr id="11" name="TextBox 10"/>
           <p:cNvSpPr/>
           <p:nvPr>
             <p:ph type="body" idx="6"/>
@@ -6351,7 +6855,7 @@
           <a:noFill/>
         </p:spPr>
         <p:txBody>
-          <a:bodyPr wrap="square">
+          <a:bodyPr wrap="square" lIns="0" rIns="0">
             <a:noAutofit/>
           </a:bodyPr>
           <a:lstStyle/>
@@ -6371,7 +6875,7 @@
       </p:sp>
       <p:sp>
         <p:nvSpPr>
-          <p:cNvPr id="9" name="TextBox 8"/>
+          <p:cNvPr id="12" name="TextBox 11"/>
           <p:cNvSpPr/>
           <p:nvPr>
             <p:ph type="body" idx="7"/>
@@ -6388,7 +6892,7 @@
           <a:noFill/>
         </p:spPr>
         <p:txBody>
-          <a:bodyPr wrap="square">
+          <a:bodyPr wrap="square" lIns="0" rIns="0">
             <a:noAutofit/>
           </a:bodyPr>
           <a:lstStyle/>
@@ -6408,7 +6912,7 @@
       </p:sp>
       <p:sp>
         <p:nvSpPr>
-          <p:cNvPr id="10" name="TextBox 9"/>
+          <p:cNvPr id="13" name="TextBox 12"/>
           <p:cNvSpPr/>
           <p:nvPr>
             <p:ph type="body" idx="8"/>
@@ -6425,7 +6929,7 @@
           <a:noFill/>
         </p:spPr>
         <p:txBody>
-          <a:bodyPr wrap="square">
+          <a:bodyPr wrap="square" lIns="0" rIns="0">
             <a:noAutofit/>
           </a:bodyPr>
           <a:lstStyle/>
@@ -6445,7 +6949,7 @@
       </p:sp>
       <p:sp>
         <p:nvSpPr>
-          <p:cNvPr id="11" name="TextBox 10"/>
+          <p:cNvPr id="14" name="TextBox 13"/>
           <p:cNvSpPr/>
           <p:nvPr>
             <p:ph type="body" idx="9"/>
@@ -6462,7 +6966,7 @@
           <a:noFill/>
         </p:spPr>
         <p:txBody>
-          <a:bodyPr wrap="square">
+          <a:bodyPr wrap="square" lIns="0" rIns="0">
             <a:noAutofit/>
           </a:bodyPr>
           <a:lstStyle/>
@@ -6482,7 +6986,7 @@
       </p:sp>
       <p:sp>
         <p:nvSpPr>
-          <p:cNvPr id="12" name="TextBox 11"/>
+          <p:cNvPr id="15" name="TextBox 14"/>
           <p:cNvSpPr/>
           <p:nvPr>
             <p:ph type="body" idx="13"/>
@@ -6499,7 +7003,7 @@
           <a:noFill/>
         </p:spPr>
         <p:txBody>
-          <a:bodyPr wrap="square">
+          <a:bodyPr wrap="square" lIns="0" rIns="0">
             <a:noAutofit/>
           </a:bodyPr>
           <a:lstStyle/>
@@ -6803,7 +7307,35 @@
       </p:grpSpPr>
       <p:sp>
         <p:nvSpPr>
-          <p:cNvPr id="2" name="TextBox 1"/>
+          <p:cNvPr id="4" name="Slide Number Placeholder 3"/>
+          <p:cNvSpPr>
+            <a:spLocks noGrp="1"/>
+          </p:cNvSpPr>
+          <p:nvPr>
+            <p:ph type="sldNum" sz="quarter" idx="12"/>
+          </p:nvPr>
+        </p:nvSpPr>
+        <p:spPr>
+          <a:xfrm>
+            <a:off x="10363200" y="6035040"/>
+            <a:ext cx="1371600" cy="365760"/>
+          </a:xfrm>
+        </p:spPr>
+        <p:txBody>
+          <a:bodyPr/>
+          <a:lstStyle/>
+          <a:p>
+            <a:fld id="{C1FF6DA9-008F-8B48-92A6-B652298478BF}" type="slidenum">
+              <a:rPr lang="en-US" smtClean="0"/>
+              <a:t>‹#›</a:t>
+            </a:fld>
+            <a:endParaRPr lang="en-US"/>
+          </a:p>
+        </p:txBody>
+      </p:sp>
+      <p:sp>
+        <p:nvSpPr>
+          <p:cNvPr id="5" name="TextBox 4"/>
           <p:cNvSpPr/>
           <p:nvPr>
             <p:ph type="title"/>
@@ -6820,7 +7352,7 @@
           <a:noFill/>
         </p:spPr>
         <p:txBody>
-          <a:bodyPr wrap="square">
+          <a:bodyPr wrap="square" lIns="0" rIns="0">
             <a:noAutofit/>
           </a:bodyPr>
           <a:lstStyle/>
@@ -6840,7 +7372,7 @@
       </p:sp>
       <p:sp>
         <p:nvSpPr>
-          <p:cNvPr id="3" name="TextBox 2"/>
+          <p:cNvPr id="6" name="TextBox 5"/>
           <p:cNvSpPr/>
           <p:nvPr>
             <p:ph type="body" idx="1"/>
@@ -6857,7 +7389,7 @@
           <a:noFill/>
         </p:spPr>
         <p:txBody>
-          <a:bodyPr wrap="square">
+          <a:bodyPr wrap="square" lIns="0" rIns="0">
             <a:noAutofit/>
           </a:bodyPr>
           <a:lstStyle/>
@@ -6877,7 +7409,7 @@
       </p:sp>
       <p:sp>
         <p:nvSpPr>
-          <p:cNvPr id="4" name="TextBox 3"/>
+          <p:cNvPr id="7" name="TextBox 6"/>
           <p:cNvSpPr/>
           <p:nvPr>
             <p:ph type="body" idx="2"/>
@@ -6894,7 +7426,7 @@
           <a:noFill/>
         </p:spPr>
         <p:txBody>
-          <a:bodyPr wrap="square">
+          <a:bodyPr wrap="square" lIns="0" rIns="0">
             <a:noAutofit/>
           </a:bodyPr>
           <a:lstStyle/>
@@ -6914,7 +7446,7 @@
       </p:sp>
       <p:sp>
         <p:nvSpPr>
-          <p:cNvPr id="5" name="TextBox 4"/>
+          <p:cNvPr id="8" name="TextBox 7"/>
           <p:cNvSpPr/>
           <p:nvPr>
             <p:ph type="body" idx="3"/>
@@ -6931,7 +7463,7 @@
           <a:noFill/>
         </p:spPr>
         <p:txBody>
-          <a:bodyPr wrap="square">
+          <a:bodyPr wrap="square" lIns="0" rIns="0">
             <a:noAutofit/>
           </a:bodyPr>
           <a:lstStyle/>
@@ -6951,7 +7483,7 @@
       </p:sp>
       <p:sp>
         <p:nvSpPr>
-          <p:cNvPr id="6" name="TextBox 5"/>
+          <p:cNvPr id="9" name="TextBox 8"/>
           <p:cNvSpPr/>
           <p:nvPr>
             <p:ph type="body" idx="4"/>
@@ -6968,7 +7500,7 @@
           <a:noFill/>
         </p:spPr>
         <p:txBody>
-          <a:bodyPr wrap="square">
+          <a:bodyPr wrap="square" lIns="0" rIns="0">
             <a:noAutofit/>
           </a:bodyPr>
           <a:lstStyle/>
@@ -6988,7 +7520,7 @@
       </p:sp>
       <p:sp>
         <p:nvSpPr>
-          <p:cNvPr id="7" name="TextBox 6"/>
+          <p:cNvPr id="10" name="TextBox 9"/>
           <p:cNvSpPr/>
           <p:nvPr>
             <p:ph type="body" idx="5"/>
@@ -7005,7 +7537,7 @@
           <a:noFill/>
         </p:spPr>
         <p:txBody>
-          <a:bodyPr wrap="square">
+          <a:bodyPr wrap="square" lIns="0" rIns="0">
             <a:noAutofit/>
           </a:bodyPr>
           <a:lstStyle/>
@@ -7063,7 +7595,35 @@
       </p:grpSpPr>
       <p:sp>
         <p:nvSpPr>
-          <p:cNvPr id="2" name="TextBox 1"/>
+          <p:cNvPr id="4" name="Slide Number Placeholder 3"/>
+          <p:cNvSpPr>
+            <a:spLocks noGrp="1"/>
+          </p:cNvSpPr>
+          <p:nvPr>
+            <p:ph type="sldNum" sz="quarter" idx="12"/>
+          </p:nvPr>
+        </p:nvSpPr>
+        <p:spPr>
+          <a:xfrm>
+            <a:off x="10363200" y="6035040"/>
+            <a:ext cx="1371600" cy="365760"/>
+          </a:xfrm>
+        </p:spPr>
+        <p:txBody>
+          <a:bodyPr/>
+          <a:lstStyle/>
+          <a:p>
+            <a:fld id="{C1FF6DA9-008F-8B48-92A6-B652298478BF}" type="slidenum">
+              <a:rPr lang="en-US" smtClean="0"/>
+              <a:t>‹#›</a:t>
+            </a:fld>
+            <a:endParaRPr lang="en-US"/>
+          </a:p>
+        </p:txBody>
+      </p:sp>
+      <p:sp>
+        <p:nvSpPr>
+          <p:cNvPr id="5" name="TextBox 4"/>
           <p:cNvSpPr/>
           <p:nvPr>
             <p:ph type="title"/>
@@ -7080,7 +7640,7 @@
           <a:noFill/>
         </p:spPr>
         <p:txBody>
-          <a:bodyPr wrap="square">
+          <a:bodyPr wrap="square" lIns="0" rIns="0">
             <a:noAutofit/>
           </a:bodyPr>
           <a:lstStyle/>
@@ -7100,7 +7660,7 @@
       </p:sp>
       <p:sp>
         <p:nvSpPr>
-          <p:cNvPr id="3" name="TextBox 2"/>
+          <p:cNvPr id="6" name="TextBox 5"/>
           <p:cNvSpPr/>
           <p:nvPr>
             <p:ph type="body" idx="1"/>
@@ -7117,7 +7677,7 @@
           <a:noFill/>
         </p:spPr>
         <p:txBody>
-          <a:bodyPr wrap="square">
+          <a:bodyPr wrap="square" lIns="0" rIns="0">
             <a:noAutofit/>
           </a:bodyPr>
           <a:lstStyle/>
@@ -7137,7 +7697,7 @@
       </p:sp>
       <p:sp>
         <p:nvSpPr>
-          <p:cNvPr id="4" name="Rectangle 3"/>
+          <p:cNvPr id="7" name="Rectangle 6"/>
           <p:cNvSpPr/>
           <p:nvPr>
             <p:ph type="body" idx="2"/>
@@ -7169,7 +7729,7 @@
       </p:sp>
       <p:sp>
         <p:nvSpPr>
-          <p:cNvPr id="5" name="TextBox 4"/>
+          <p:cNvPr id="8" name="TextBox 7"/>
           <p:cNvSpPr/>
           <p:nvPr>
             <p:ph type="body" idx="3"/>
@@ -7186,7 +7746,7 @@
           <a:noFill/>
         </p:spPr>
         <p:txBody>
-          <a:bodyPr wrap="square">
+          <a:bodyPr wrap="square" lIns="0" rIns="0">
             <a:noAutofit/>
           </a:bodyPr>
           <a:lstStyle/>
@@ -7206,7 +7766,7 @@
       </p:sp>
       <p:sp>
         <p:nvSpPr>
-          <p:cNvPr id="6" name="TextBox 5"/>
+          <p:cNvPr id="9" name="TextBox 8"/>
           <p:cNvSpPr/>
           <p:nvPr>
             <p:ph type="body" idx="4"/>
@@ -7223,7 +7783,7 @@
           <a:noFill/>
         </p:spPr>
         <p:txBody>
-          <a:bodyPr wrap="square">
+          <a:bodyPr wrap="square" lIns="0" rIns="0">
             <a:noAutofit/>
           </a:bodyPr>
           <a:lstStyle/>
@@ -7243,7 +7803,7 @@
       </p:sp>
       <p:sp>
         <p:nvSpPr>
-          <p:cNvPr id="7" name="Rectangle 6"/>
+          <p:cNvPr id="10" name="Rectangle 9"/>
           <p:cNvSpPr/>
           <p:nvPr>
             <p:ph type="body" idx="5"/>
@@ -7275,7 +7835,7 @@
       </p:sp>
       <p:sp>
         <p:nvSpPr>
-          <p:cNvPr id="8" name="TextBox 7"/>
+          <p:cNvPr id="11" name="TextBox 10"/>
           <p:cNvSpPr/>
           <p:nvPr>
             <p:ph type="body" idx="6"/>
@@ -7292,7 +7852,7 @@
           <a:noFill/>
         </p:spPr>
         <p:txBody>
-          <a:bodyPr wrap="square">
+          <a:bodyPr wrap="square" lIns="0" rIns="0">
             <a:noAutofit/>
           </a:bodyPr>
           <a:lstStyle/>
@@ -7312,7 +7872,7 @@
       </p:sp>
       <p:sp>
         <p:nvSpPr>
-          <p:cNvPr id="9" name="TextBox 8"/>
+          <p:cNvPr id="12" name="TextBox 11"/>
           <p:cNvSpPr/>
           <p:nvPr>
             <p:ph type="body" idx="7"/>
@@ -7329,7 +7889,7 @@
           <a:noFill/>
         </p:spPr>
         <p:txBody>
-          <a:bodyPr wrap="square">
+          <a:bodyPr wrap="square" lIns="0" rIns="0">
             <a:noAutofit/>
           </a:bodyPr>
           <a:lstStyle/>
@@ -7349,7 +7909,7 @@
       </p:sp>
       <p:sp>
         <p:nvSpPr>
-          <p:cNvPr id="10" name="Rectangle 9"/>
+          <p:cNvPr id="13" name="Rectangle 12"/>
           <p:cNvSpPr/>
           <p:nvPr>
             <p:ph type="body" idx="8"/>
@@ -7381,7 +7941,7 @@
       </p:sp>
       <p:sp>
         <p:nvSpPr>
-          <p:cNvPr id="11" name="TextBox 10"/>
+          <p:cNvPr id="14" name="TextBox 13"/>
           <p:cNvSpPr/>
           <p:nvPr>
             <p:ph type="body" idx="9"/>
@@ -7398,7 +7958,7 @@
           <a:noFill/>
         </p:spPr>
         <p:txBody>
-          <a:bodyPr wrap="square">
+          <a:bodyPr wrap="square" lIns="0" rIns="0">
             <a:noAutofit/>
           </a:bodyPr>
           <a:lstStyle/>
@@ -7418,7 +7978,7 @@
       </p:sp>
       <p:sp>
         <p:nvSpPr>
-          <p:cNvPr id="12" name="TextBox 11"/>
+          <p:cNvPr id="15" name="TextBox 14"/>
           <p:cNvSpPr/>
           <p:nvPr>
             <p:ph type="body" idx="13"/>
@@ -7435,7 +7995,7 @@
           <a:noFill/>
         </p:spPr>
         <p:txBody>
-          <a:bodyPr wrap="square">
+          <a:bodyPr wrap="square" lIns="0" rIns="0">
             <a:noAutofit/>
           </a:bodyPr>
           <a:lstStyle/>
@@ -7455,7 +8015,7 @@
       </p:sp>
       <p:sp>
         <p:nvSpPr>
-          <p:cNvPr id="13" name="Rectangle 12"/>
+          <p:cNvPr id="16" name="Rectangle 15"/>
           <p:cNvSpPr/>
           <p:nvPr>
             <p:ph type="body" idx="14"/>
@@ -7487,7 +8047,7 @@
       </p:sp>
       <p:sp>
         <p:nvSpPr>
-          <p:cNvPr id="14" name="TextBox 13"/>
+          <p:cNvPr id="17" name="TextBox 16"/>
           <p:cNvSpPr/>
           <p:nvPr>
             <p:ph type="body" idx="15"/>
@@ -7504,7 +8064,7 @@
           <a:noFill/>
         </p:spPr>
         <p:txBody>
-          <a:bodyPr wrap="square">
+          <a:bodyPr wrap="square" lIns="0" rIns="0">
             <a:noAutofit/>
           </a:bodyPr>
           <a:lstStyle/>
@@ -7524,7 +8084,7 @@
       </p:sp>
       <p:sp>
         <p:nvSpPr>
-          <p:cNvPr id="15" name="TextBox 14"/>
+          <p:cNvPr id="18" name="TextBox 17"/>
           <p:cNvSpPr/>
           <p:nvPr>
             <p:ph type="body" idx="16"/>
@@ -7541,7 +8101,7 @@
           <a:noFill/>
         </p:spPr>
         <p:txBody>
-          <a:bodyPr wrap="square">
+          <a:bodyPr wrap="square" lIns="0" rIns="0">
             <a:noAutofit/>
           </a:bodyPr>
           <a:lstStyle/>
@@ -7561,7 +8121,7 @@
       </p:sp>
       <p:sp>
         <p:nvSpPr>
-          <p:cNvPr id="16" name="Rectangle 15"/>
+          <p:cNvPr id="19" name="Rectangle 18"/>
           <p:cNvSpPr/>
           <p:nvPr>
             <p:ph type="body" idx="17"/>
@@ -7593,7 +8153,7 @@
       </p:sp>
       <p:sp>
         <p:nvSpPr>
-          <p:cNvPr id="17" name="TextBox 16"/>
+          <p:cNvPr id="20" name="TextBox 19"/>
           <p:cNvSpPr/>
           <p:nvPr>
             <p:ph type="body" idx="18"/>
@@ -7610,7 +8170,7 @@
           <a:noFill/>
         </p:spPr>
         <p:txBody>
-          <a:bodyPr wrap="square">
+          <a:bodyPr wrap="square" lIns="0" rIns="0">
             <a:noAutofit/>
           </a:bodyPr>
           <a:lstStyle/>
@@ -7630,7 +8190,7 @@
       </p:sp>
       <p:sp>
         <p:nvSpPr>
-          <p:cNvPr id="18" name="TextBox 17"/>
+          <p:cNvPr id="21" name="TextBox 20"/>
           <p:cNvSpPr/>
           <p:nvPr>
             <p:ph type="body" idx="19"/>
@@ -7647,7 +8207,7 @@
           <a:noFill/>
         </p:spPr>
         <p:txBody>
-          <a:bodyPr wrap="square">
+          <a:bodyPr wrap="square" lIns="0" rIns="0">
             <a:noAutofit/>
           </a:bodyPr>
           <a:lstStyle/>
@@ -7667,7 +8227,7 @@
       </p:sp>
       <p:sp>
         <p:nvSpPr>
-          <p:cNvPr id="19" name="Rectangle 18"/>
+          <p:cNvPr id="22" name="Rectangle 21"/>
           <p:cNvSpPr/>
           <p:nvPr>
             <p:ph type="body" idx="20"/>
@@ -7699,7 +8259,7 @@
       </p:sp>
       <p:sp>
         <p:nvSpPr>
-          <p:cNvPr id="20" name="TextBox 19"/>
+          <p:cNvPr id="23" name="TextBox 22"/>
           <p:cNvSpPr/>
           <p:nvPr>
             <p:ph type="body" idx="21"/>
@@ -7716,7 +8276,7 @@
           <a:noFill/>
         </p:spPr>
         <p:txBody>
-          <a:bodyPr wrap="square">
+          <a:bodyPr wrap="square" lIns="0" rIns="0">
             <a:noAutofit/>
           </a:bodyPr>
           <a:lstStyle/>
@@ -7774,7 +8334,35 @@
       </p:grpSpPr>
       <p:sp>
         <p:nvSpPr>
-          <p:cNvPr id="2" name="TextBox 1"/>
+          <p:cNvPr id="4" name="Slide Number Placeholder 3"/>
+          <p:cNvSpPr>
+            <a:spLocks noGrp="1"/>
+          </p:cNvSpPr>
+          <p:nvPr>
+            <p:ph type="sldNum" sz="quarter" idx="12"/>
+          </p:nvPr>
+        </p:nvSpPr>
+        <p:spPr>
+          <a:xfrm>
+            <a:off x="10363200" y="6035040"/>
+            <a:ext cx="1371600" cy="365760"/>
+          </a:xfrm>
+        </p:spPr>
+        <p:txBody>
+          <a:bodyPr/>
+          <a:lstStyle/>
+          <a:p>
+            <a:fld id="{C1FF6DA9-008F-8B48-92A6-B652298478BF}" type="slidenum">
+              <a:rPr lang="en-US" smtClean="0"/>
+              <a:t>‹#›</a:t>
+            </a:fld>
+            <a:endParaRPr lang="en-US"/>
+          </a:p>
+        </p:txBody>
+      </p:sp>
+      <p:sp>
+        <p:nvSpPr>
+          <p:cNvPr id="5" name="TextBox 4"/>
           <p:cNvSpPr/>
           <p:nvPr>
             <p:ph type="title"/>
@@ -7791,7 +8379,7 @@
           <a:noFill/>
         </p:spPr>
         <p:txBody>
-          <a:bodyPr wrap="square">
+          <a:bodyPr wrap="square" lIns="0" rIns="0">
             <a:noAutofit/>
           </a:bodyPr>
           <a:lstStyle/>
@@ -7811,7 +8399,7 @@
       </p:sp>
       <p:sp>
         <p:nvSpPr>
-          <p:cNvPr id="3" name="TextBox 2"/>
+          <p:cNvPr id="6" name="TextBox 5"/>
           <p:cNvSpPr/>
           <p:nvPr>
             <p:ph type="body" idx="1"/>
@@ -7828,7 +8416,7 @@
           <a:noFill/>
         </p:spPr>
         <p:txBody>
-          <a:bodyPr wrap="square">
+          <a:bodyPr wrap="square" lIns="0" rIns="0">
             <a:noAutofit/>
           </a:bodyPr>
           <a:lstStyle/>
@@ -7848,7 +8436,7 @@
       </p:sp>
       <p:sp>
         <p:nvSpPr>
-          <p:cNvPr id="4" name="Rectangle 3"/>
+          <p:cNvPr id="7" name="Rectangle 6"/>
           <p:cNvSpPr/>
           <p:nvPr>
             <p:ph type="body" idx="2"/>
@@ -7880,7 +8468,7 @@
       </p:sp>
       <p:sp>
         <p:nvSpPr>
-          <p:cNvPr id="5" name="TextBox 4"/>
+          <p:cNvPr id="8" name="TextBox 7"/>
           <p:cNvSpPr/>
           <p:nvPr>
             <p:ph type="body" idx="3"/>
@@ -7897,7 +8485,7 @@
           <a:noFill/>
         </p:spPr>
         <p:txBody>
-          <a:bodyPr wrap="square">
+          <a:bodyPr wrap="square" lIns="0" rIns="0">
             <a:noAutofit/>
           </a:bodyPr>
           <a:lstStyle/>
@@ -7917,7 +8505,7 @@
       </p:sp>
       <p:sp>
         <p:nvSpPr>
-          <p:cNvPr id="6" name="TextBox 5"/>
+          <p:cNvPr id="9" name="TextBox 8"/>
           <p:cNvSpPr/>
           <p:nvPr>
             <p:ph type="body" idx="4"/>
@@ -7934,7 +8522,7 @@
           <a:noFill/>
         </p:spPr>
         <p:txBody>
-          <a:bodyPr wrap="square">
+          <a:bodyPr wrap="square" lIns="0" rIns="0">
             <a:noAutofit/>
           </a:bodyPr>
           <a:lstStyle/>
@@ -7954,7 +8542,7 @@
       </p:sp>
       <p:sp>
         <p:nvSpPr>
-          <p:cNvPr id="7" name="Rectangle 6"/>
+          <p:cNvPr id="10" name="Rectangle 9"/>
           <p:cNvSpPr/>
           <p:nvPr>
             <p:ph type="body" idx="5"/>
@@ -7986,7 +8574,7 @@
       </p:sp>
       <p:sp>
         <p:nvSpPr>
-          <p:cNvPr id="8" name="TextBox 7"/>
+          <p:cNvPr id="11" name="TextBox 10"/>
           <p:cNvSpPr/>
           <p:nvPr>
             <p:ph type="body" idx="6"/>
@@ -8003,7 +8591,7 @@
           <a:noFill/>
         </p:spPr>
         <p:txBody>
-          <a:bodyPr wrap="square">
+          <a:bodyPr wrap="square" lIns="0" rIns="0">
             <a:noAutofit/>
           </a:bodyPr>
           <a:lstStyle/>
@@ -8023,7 +8611,7 @@
       </p:sp>
       <p:sp>
         <p:nvSpPr>
-          <p:cNvPr id="9" name="TextBox 8"/>
+          <p:cNvPr id="12" name="TextBox 11"/>
           <p:cNvSpPr/>
           <p:nvPr>
             <p:ph type="body" idx="7"/>
@@ -8040,7 +8628,7 @@
           <a:noFill/>
         </p:spPr>
         <p:txBody>
-          <a:bodyPr wrap="square">
+          <a:bodyPr wrap="square" lIns="0" rIns="0">
             <a:noAutofit/>
           </a:bodyPr>
           <a:lstStyle/>
@@ -8060,7 +8648,7 @@
       </p:sp>
       <p:sp>
         <p:nvSpPr>
-          <p:cNvPr id="10" name="Rectangle 9"/>
+          <p:cNvPr id="13" name="Rectangle 12"/>
           <p:cNvSpPr/>
           <p:nvPr>
             <p:ph type="body" idx="8"/>
@@ -8092,7 +8680,7 @@
       </p:sp>
       <p:sp>
         <p:nvSpPr>
-          <p:cNvPr id="11" name="TextBox 10"/>
+          <p:cNvPr id="14" name="TextBox 13"/>
           <p:cNvSpPr/>
           <p:nvPr>
             <p:ph type="body" idx="9"/>
@@ -8109,7 +8697,7 @@
           <a:noFill/>
         </p:spPr>
         <p:txBody>
-          <a:bodyPr wrap="square">
+          <a:bodyPr wrap="square" lIns="0" rIns="0">
             <a:noAutofit/>
           </a:bodyPr>
           <a:lstStyle/>
@@ -8129,7 +8717,7 @@
       </p:sp>
       <p:sp>
         <p:nvSpPr>
-          <p:cNvPr id="12" name="TextBox 11"/>
+          <p:cNvPr id="15" name="TextBox 14"/>
           <p:cNvSpPr/>
           <p:nvPr>
             <p:ph type="body" idx="13"/>
@@ -8146,7 +8734,7 @@
           <a:noFill/>
         </p:spPr>
         <p:txBody>
-          <a:bodyPr wrap="square">
+          <a:bodyPr wrap="square" lIns="0" rIns="0">
             <a:noAutofit/>
           </a:bodyPr>
           <a:lstStyle/>
@@ -8166,7 +8754,7 @@
       </p:sp>
       <p:sp>
         <p:nvSpPr>
-          <p:cNvPr id="13" name="Rectangle 12"/>
+          <p:cNvPr id="16" name="Rectangle 15"/>
           <p:cNvSpPr/>
           <p:nvPr>
             <p:ph type="body" idx="14"/>
@@ -8198,7 +8786,7 @@
       </p:sp>
       <p:sp>
         <p:nvSpPr>
-          <p:cNvPr id="14" name="TextBox 13"/>
+          <p:cNvPr id="17" name="TextBox 16"/>
           <p:cNvSpPr/>
           <p:nvPr>
             <p:ph type="body" idx="15"/>
@@ -8215,7 +8803,7 @@
           <a:noFill/>
         </p:spPr>
         <p:txBody>
-          <a:bodyPr wrap="square">
+          <a:bodyPr wrap="square" lIns="0" rIns="0">
             <a:noAutofit/>
           </a:bodyPr>
           <a:lstStyle/>
@@ -8235,7 +8823,7 @@
       </p:sp>
       <p:sp>
         <p:nvSpPr>
-          <p:cNvPr id="15" name="Rectangle 14"/>
+          <p:cNvPr id="18" name="Rectangle 17"/>
           <p:cNvSpPr/>
           <p:nvPr>
             <p:ph type="body" idx="16"/>
@@ -8267,7 +8855,7 @@
       </p:sp>
       <p:sp>
         <p:nvSpPr>
-          <p:cNvPr id="16" name="TextBox 15"/>
+          <p:cNvPr id="19" name="TextBox 18"/>
           <p:cNvSpPr/>
           <p:nvPr>
             <p:ph type="body" idx="17"/>
@@ -8284,7 +8872,7 @@
           <a:noFill/>
         </p:spPr>
         <p:txBody>
-          <a:bodyPr wrap="square">
+          <a:bodyPr wrap="square" lIns="0" rIns="0">
             <a:noAutofit/>
           </a:bodyPr>
           <a:lstStyle/>
@@ -8342,7 +8930,35 @@
       </p:grpSpPr>
       <p:sp>
         <p:nvSpPr>
-          <p:cNvPr id="2" name="TextBox 1"/>
+          <p:cNvPr id="4" name="Slide Number Placeholder 3"/>
+          <p:cNvSpPr>
+            <a:spLocks noGrp="1"/>
+          </p:cNvSpPr>
+          <p:nvPr>
+            <p:ph type="sldNum" sz="quarter" idx="12"/>
+          </p:nvPr>
+        </p:nvSpPr>
+        <p:spPr>
+          <a:xfrm>
+            <a:off x="10363200" y="6035040"/>
+            <a:ext cx="1371600" cy="365760"/>
+          </a:xfrm>
+        </p:spPr>
+        <p:txBody>
+          <a:bodyPr/>
+          <a:lstStyle/>
+          <a:p>
+            <a:fld id="{C1FF6DA9-008F-8B48-92A6-B652298478BF}" type="slidenum">
+              <a:rPr lang="en-US" smtClean="0"/>
+              <a:t>‹#›</a:t>
+            </a:fld>
+            <a:endParaRPr lang="en-US"/>
+          </a:p>
+        </p:txBody>
+      </p:sp>
+      <p:sp>
+        <p:nvSpPr>
+          <p:cNvPr id="5" name="TextBox 4"/>
           <p:cNvSpPr/>
           <p:nvPr>
             <p:ph type="title"/>
@@ -8359,7 +8975,7 @@
           <a:noFill/>
         </p:spPr>
         <p:txBody>
-          <a:bodyPr wrap="square">
+          <a:bodyPr wrap="square" lIns="0" rIns="0">
             <a:noAutofit/>
           </a:bodyPr>
           <a:lstStyle/>
@@ -8379,7 +8995,7 @@
       </p:sp>
       <p:sp>
         <p:nvSpPr>
-          <p:cNvPr id="3" name="TextBox 2"/>
+          <p:cNvPr id="6" name="TextBox 5"/>
           <p:cNvSpPr/>
           <p:nvPr>
             <p:ph type="body" idx="1"/>
@@ -8396,7 +9012,7 @@
           <a:noFill/>
         </p:spPr>
         <p:txBody>
-          <a:bodyPr wrap="square">
+          <a:bodyPr wrap="square" lIns="0" rIns="0">
             <a:noAutofit/>
           </a:bodyPr>
           <a:lstStyle/>
@@ -8416,7 +9032,7 @@
       </p:sp>
       <p:sp>
         <p:nvSpPr>
-          <p:cNvPr id="4" name="TextBox 3"/>
+          <p:cNvPr id="7" name="TextBox 6"/>
           <p:cNvSpPr/>
           <p:nvPr>
             <p:ph type="body" idx="2"/>
@@ -8433,7 +9049,7 @@
           <a:noFill/>
         </p:spPr>
         <p:txBody>
-          <a:bodyPr wrap="square">
+          <a:bodyPr wrap="square" lIns="0" rIns="0">
             <a:noAutofit/>
           </a:bodyPr>
           <a:lstStyle/>
@@ -8453,7 +9069,7 @@
       </p:sp>
       <p:sp>
         <p:nvSpPr>
-          <p:cNvPr id="5" name="TextBox 4"/>
+          <p:cNvPr id="8" name="TextBox 7"/>
           <p:cNvSpPr/>
           <p:nvPr>
             <p:ph type="body" idx="3"/>
@@ -8470,7 +9086,7 @@
           <a:noFill/>
         </p:spPr>
         <p:txBody>
-          <a:bodyPr wrap="square">
+          <a:bodyPr wrap="square" lIns="0" rIns="0">
             <a:noAutofit/>
           </a:bodyPr>
           <a:lstStyle/>
@@ -8490,7 +9106,7 @@
       </p:sp>
       <p:sp>
         <p:nvSpPr>
-          <p:cNvPr id="6" name="Rectangle 5"/>
+          <p:cNvPr id="9" name="Rectangle 8"/>
           <p:cNvSpPr/>
           <p:nvPr>
             <p:ph type="body" idx="4"/>
@@ -8522,7 +9138,7 @@
       </p:sp>
       <p:sp>
         <p:nvSpPr>
-          <p:cNvPr id="7" name="TextBox 6"/>
+          <p:cNvPr id="10" name="TextBox 9"/>
           <p:cNvSpPr/>
           <p:nvPr>
             <p:ph type="body" idx="5"/>
@@ -8539,7 +9155,7 @@
           <a:noFill/>
         </p:spPr>
         <p:txBody>
-          <a:bodyPr wrap="square">
+          <a:bodyPr wrap="square" lIns="0" rIns="0">
             <a:noAutofit/>
           </a:bodyPr>
           <a:lstStyle/>
@@ -8559,7 +9175,7 @@
       </p:sp>
       <p:sp>
         <p:nvSpPr>
-          <p:cNvPr id="8" name="TextBox 7"/>
+          <p:cNvPr id="11" name="TextBox 10"/>
           <p:cNvSpPr/>
           <p:nvPr>
             <p:ph type="body" idx="6"/>
@@ -8576,7 +9192,7 @@
           <a:noFill/>
         </p:spPr>
         <p:txBody>
-          <a:bodyPr wrap="square">
+          <a:bodyPr wrap="square" lIns="0" rIns="0">
             <a:noAutofit/>
           </a:bodyPr>
           <a:lstStyle/>
@@ -8596,7 +9212,7 @@
       </p:sp>
       <p:sp>
         <p:nvSpPr>
-          <p:cNvPr id="9" name="TextBox 8"/>
+          <p:cNvPr id="12" name="TextBox 11"/>
           <p:cNvSpPr/>
           <p:nvPr>
             <p:ph type="body" idx="7"/>
@@ -8613,7 +9229,7 @@
           <a:noFill/>
         </p:spPr>
         <p:txBody>
-          <a:bodyPr wrap="square">
+          <a:bodyPr wrap="square" lIns="0" rIns="0">
             <a:noAutofit/>
           </a:bodyPr>
           <a:lstStyle/>
@@ -8633,7 +9249,7 @@
       </p:sp>
       <p:sp>
         <p:nvSpPr>
-          <p:cNvPr id="10" name="TextBox 9"/>
+          <p:cNvPr id="13" name="TextBox 12"/>
           <p:cNvSpPr/>
           <p:nvPr>
             <p:ph type="body" idx="8"/>
@@ -8650,7 +9266,7 @@
           <a:noFill/>
         </p:spPr>
         <p:txBody>
-          <a:bodyPr wrap="square">
+          <a:bodyPr wrap="square" lIns="0" rIns="0">
             <a:noAutofit/>
           </a:bodyPr>
           <a:lstStyle/>
@@ -8670,7 +9286,7 @@
       </p:sp>
       <p:sp>
         <p:nvSpPr>
-          <p:cNvPr id="11" name="TextBox 10"/>
+          <p:cNvPr id="14" name="TextBox 13"/>
           <p:cNvSpPr/>
           <p:nvPr>
             <p:ph type="body" idx="9"/>
@@ -8687,7 +9303,7 @@
           <a:noFill/>
         </p:spPr>
         <p:txBody>
-          <a:bodyPr wrap="square">
+          <a:bodyPr wrap="square" lIns="0" rIns="0">
             <a:noAutofit/>
           </a:bodyPr>
           <a:lstStyle/>
@@ -8707,7 +9323,7 @@
       </p:sp>
       <p:sp>
         <p:nvSpPr>
-          <p:cNvPr id="12" name="TextBox 11"/>
+          <p:cNvPr id="15" name="TextBox 14"/>
           <p:cNvSpPr/>
           <p:nvPr>
             <p:ph type="body" idx="13"/>
@@ -8724,7 +9340,7 @@
           <a:noFill/>
         </p:spPr>
         <p:txBody>
-          <a:bodyPr wrap="square">
+          <a:bodyPr wrap="square" lIns="0" rIns="0">
             <a:noAutofit/>
           </a:bodyPr>
           <a:lstStyle/>
@@ -8744,7 +9360,7 @@
       </p:sp>
       <p:sp>
         <p:nvSpPr>
-          <p:cNvPr id="13" name="TextBox 12"/>
+          <p:cNvPr id="16" name="TextBox 15"/>
           <p:cNvSpPr/>
           <p:nvPr>
             <p:ph type="body" idx="14"/>
@@ -8761,7 +9377,7 @@
           <a:noFill/>
         </p:spPr>
         <p:txBody>
-          <a:bodyPr wrap="square">
+          <a:bodyPr wrap="square" lIns="0" rIns="0">
             <a:noAutofit/>
           </a:bodyPr>
           <a:lstStyle/>
@@ -8781,7 +9397,7 @@
       </p:sp>
       <p:sp>
         <p:nvSpPr>
-          <p:cNvPr id="14" name="TextBox 13"/>
+          <p:cNvPr id="17" name="TextBox 16"/>
           <p:cNvSpPr/>
           <p:nvPr>
             <p:ph type="body" idx="15"/>
@@ -8798,7 +9414,7 @@
           <a:noFill/>
         </p:spPr>
         <p:txBody>
-          <a:bodyPr wrap="square">
+          <a:bodyPr wrap="square" lIns="0" rIns="0">
             <a:noAutofit/>
           </a:bodyPr>
           <a:lstStyle/>
@@ -8818,7 +9434,7 @@
       </p:sp>
       <p:sp>
         <p:nvSpPr>
-          <p:cNvPr id="15" name="TextBox 14"/>
+          <p:cNvPr id="18" name="TextBox 17"/>
           <p:cNvSpPr/>
           <p:nvPr>
             <p:ph type="body" idx="16"/>
@@ -8835,7 +9451,7 @@
           <a:noFill/>
         </p:spPr>
         <p:txBody>
-          <a:bodyPr wrap="square">
+          <a:bodyPr wrap="square" lIns="0" rIns="0">
             <a:noAutofit/>
           </a:bodyPr>
           <a:lstStyle/>
@@ -8855,7 +9471,7 @@
       </p:sp>
       <p:sp>
         <p:nvSpPr>
-          <p:cNvPr id="16" name="TextBox 15"/>
+          <p:cNvPr id="19" name="TextBox 18"/>
           <p:cNvSpPr/>
           <p:nvPr>
             <p:ph type="body" idx="17"/>
@@ -8872,7 +9488,7 @@
           <a:noFill/>
         </p:spPr>
         <p:txBody>
-          <a:bodyPr wrap="square">
+          <a:bodyPr wrap="square" lIns="0" rIns="0">
             <a:noAutofit/>
           </a:bodyPr>
           <a:lstStyle/>
@@ -8892,7 +9508,7 @@
       </p:sp>
       <p:sp>
         <p:nvSpPr>
-          <p:cNvPr id="17" name="TextBox 16"/>
+          <p:cNvPr id="20" name="TextBox 19"/>
           <p:cNvSpPr/>
           <p:nvPr>
             <p:ph type="body" idx="18"/>
@@ -8909,7 +9525,7 @@
           <a:noFill/>
         </p:spPr>
         <p:txBody>
-          <a:bodyPr wrap="square">
+          <a:bodyPr wrap="square" lIns="0" rIns="0">
             <a:noAutofit/>
           </a:bodyPr>
           <a:lstStyle/>
@@ -8929,7 +9545,7 @@
       </p:sp>
       <p:sp>
         <p:nvSpPr>
-          <p:cNvPr id="18" name="TextBox 17"/>
+          <p:cNvPr id="21" name="TextBox 20"/>
           <p:cNvSpPr/>
           <p:nvPr>
             <p:ph type="body" idx="19"/>
@@ -8946,7 +9562,7 @@
           <a:noFill/>
         </p:spPr>
         <p:txBody>
-          <a:bodyPr wrap="square">
+          <a:bodyPr wrap="square" lIns="0" rIns="0">
             <a:noAutofit/>
           </a:bodyPr>
           <a:lstStyle/>
@@ -9004,7 +9620,35 @@
       </p:grpSpPr>
       <p:sp>
         <p:nvSpPr>
-          <p:cNvPr id="2" name="TextBox 1"/>
+          <p:cNvPr id="4" name="Slide Number Placeholder 3"/>
+          <p:cNvSpPr>
+            <a:spLocks noGrp="1"/>
+          </p:cNvSpPr>
+          <p:nvPr>
+            <p:ph type="sldNum" sz="quarter" idx="12"/>
+          </p:nvPr>
+        </p:nvSpPr>
+        <p:spPr>
+          <a:xfrm>
+            <a:off x="10363200" y="6035040"/>
+            <a:ext cx="1371600" cy="365760"/>
+          </a:xfrm>
+        </p:spPr>
+        <p:txBody>
+          <a:bodyPr/>
+          <a:lstStyle/>
+          <a:p>
+            <a:fld id="{C1FF6DA9-008F-8B48-92A6-B652298478BF}" type="slidenum">
+              <a:rPr lang="en-US" smtClean="0"/>
+              <a:t>‹#›</a:t>
+            </a:fld>
+            <a:endParaRPr lang="en-US"/>
+          </a:p>
+        </p:txBody>
+      </p:sp>
+      <p:sp>
+        <p:nvSpPr>
+          <p:cNvPr id="5" name="TextBox 4"/>
           <p:cNvSpPr/>
           <p:nvPr>
             <p:ph type="title"/>
@@ -9021,7 +9665,7 @@
           <a:noFill/>
         </p:spPr>
         <p:txBody>
-          <a:bodyPr wrap="square">
+          <a:bodyPr wrap="square" lIns="0" rIns="0">
             <a:noAutofit/>
           </a:bodyPr>
           <a:lstStyle/>
@@ -9041,7 +9685,7 @@
       </p:sp>
       <p:sp>
         <p:nvSpPr>
-          <p:cNvPr id="3" name="TextBox 2"/>
+          <p:cNvPr id="6" name="TextBox 5"/>
           <p:cNvSpPr/>
           <p:nvPr>
             <p:ph type="body" idx="1"/>
@@ -9058,7 +9702,7 @@
           <a:noFill/>
         </p:spPr>
         <p:txBody>
-          <a:bodyPr wrap="square">
+          <a:bodyPr wrap="square" lIns="0" rIns="0">
             <a:noAutofit/>
           </a:bodyPr>
           <a:lstStyle/>
@@ -9078,7 +9722,7 @@
       </p:sp>
       <p:sp>
         <p:nvSpPr>
-          <p:cNvPr id="4" name="TextBox 3"/>
+          <p:cNvPr id="7" name="TextBox 6"/>
           <p:cNvSpPr/>
           <p:nvPr>
             <p:ph type="body" idx="2"/>
@@ -9095,7 +9739,7 @@
           <a:noFill/>
         </p:spPr>
         <p:txBody>
-          <a:bodyPr wrap="square">
+          <a:bodyPr wrap="square" lIns="0" rIns="0">
             <a:noAutofit/>
           </a:bodyPr>
           <a:lstStyle/>
@@ -9115,7 +9759,7 @@
       </p:sp>
       <p:sp>
         <p:nvSpPr>
-          <p:cNvPr id="5" name="Rectangle 4"/>
+          <p:cNvPr id="8" name="Rectangle 7"/>
           <p:cNvSpPr/>
           <p:nvPr>
             <p:ph type="body" idx="3"/>
@@ -9147,7 +9791,7 @@
       </p:sp>
       <p:sp>
         <p:nvSpPr>
-          <p:cNvPr id="6" name="TextBox 5"/>
+          <p:cNvPr id="9" name="TextBox 8"/>
           <p:cNvSpPr/>
           <p:nvPr>
             <p:ph type="body" idx="4"/>
@@ -9164,7 +9808,7 @@
           <a:noFill/>
         </p:spPr>
         <p:txBody>
-          <a:bodyPr wrap="square">
+          <a:bodyPr wrap="square" lIns="0" rIns="0">
             <a:noAutofit/>
           </a:bodyPr>
           <a:lstStyle/>
@@ -9184,7 +9828,7 @@
       </p:sp>
       <p:sp>
         <p:nvSpPr>
-          <p:cNvPr id="7" name="TextBox 6"/>
+          <p:cNvPr id="10" name="TextBox 9"/>
           <p:cNvSpPr/>
           <p:nvPr>
             <p:ph type="body" idx="5"/>
@@ -9201,7 +9845,7 @@
           <a:noFill/>
         </p:spPr>
         <p:txBody>
-          <a:bodyPr wrap="square">
+          <a:bodyPr wrap="square" lIns="0" rIns="0">
             <a:noAutofit/>
           </a:bodyPr>
           <a:lstStyle/>
@@ -9221,7 +9865,7 @@
       </p:sp>
       <p:sp>
         <p:nvSpPr>
-          <p:cNvPr id="8" name="TextBox 7"/>
+          <p:cNvPr id="11" name="TextBox 10"/>
           <p:cNvSpPr/>
           <p:nvPr>
             <p:ph type="body" idx="6"/>
@@ -9238,7 +9882,7 @@
           <a:noFill/>
         </p:spPr>
         <p:txBody>
-          <a:bodyPr wrap="square">
+          <a:bodyPr wrap="square" lIns="0" rIns="0">
             <a:noAutofit/>
           </a:bodyPr>
           <a:lstStyle/>
@@ -9258,7 +9902,7 @@
       </p:sp>
       <p:sp>
         <p:nvSpPr>
-          <p:cNvPr id="9" name="Rectangle 8"/>
+          <p:cNvPr id="12" name="Rectangle 11"/>
           <p:cNvSpPr/>
           <p:nvPr>
             <p:ph type="body" idx="7"/>
@@ -9290,7 +9934,7 @@
       </p:sp>
       <p:sp>
         <p:nvSpPr>
-          <p:cNvPr id="10" name="TextBox 9"/>
+          <p:cNvPr id="13" name="TextBox 12"/>
           <p:cNvSpPr/>
           <p:nvPr>
             <p:ph type="body" idx="8"/>
@@ -9307,7 +9951,7 @@
           <a:noFill/>
         </p:spPr>
         <p:txBody>
-          <a:bodyPr wrap="square">
+          <a:bodyPr wrap="square" lIns="0" rIns="0">
             <a:noAutofit/>
           </a:bodyPr>
           <a:lstStyle/>
@@ -9327,7 +9971,7 @@
       </p:sp>
       <p:sp>
         <p:nvSpPr>
-          <p:cNvPr id="11" name="TextBox 10"/>
+          <p:cNvPr id="14" name="TextBox 13"/>
           <p:cNvSpPr/>
           <p:nvPr>
             <p:ph type="body" idx="9"/>
@@ -9344,7 +9988,7 @@
           <a:noFill/>
         </p:spPr>
         <p:txBody>
-          <a:bodyPr wrap="square">
+          <a:bodyPr wrap="square" lIns="0" rIns="0">
             <a:noAutofit/>
           </a:bodyPr>
           <a:lstStyle/>
@@ -9364,7 +10008,7 @@
       </p:sp>
       <p:sp>
         <p:nvSpPr>
-          <p:cNvPr id="12" name="TextBox 11"/>
+          <p:cNvPr id="15" name="TextBox 14"/>
           <p:cNvSpPr/>
           <p:nvPr>
             <p:ph type="body" idx="13"/>
@@ -9381,7 +10025,7 @@
           <a:noFill/>
         </p:spPr>
         <p:txBody>
-          <a:bodyPr wrap="square">
+          <a:bodyPr wrap="square" lIns="0" rIns="0">
             <a:noAutofit/>
           </a:bodyPr>
           <a:lstStyle/>
@@ -9401,7 +10045,7 @@
       </p:sp>
       <p:sp>
         <p:nvSpPr>
-          <p:cNvPr id="13" name="Rectangle 12"/>
+          <p:cNvPr id="16" name="Rectangle 15"/>
           <p:cNvSpPr/>
           <p:nvPr>
             <p:ph type="body" idx="14"/>
@@ -9433,7 +10077,7 @@
       </p:sp>
       <p:sp>
         <p:nvSpPr>
-          <p:cNvPr id="14" name="TextBox 13"/>
+          <p:cNvPr id="17" name="TextBox 16"/>
           <p:cNvSpPr/>
           <p:nvPr>
             <p:ph type="body" idx="15"/>
@@ -9450,7 +10094,7 @@
           <a:noFill/>
         </p:spPr>
         <p:txBody>
-          <a:bodyPr wrap="square">
+          <a:bodyPr wrap="square" lIns="0" rIns="0">
             <a:noAutofit/>
           </a:bodyPr>
           <a:lstStyle/>
@@ -9508,7 +10152,35 @@
       </p:grpSpPr>
       <p:sp>
         <p:nvSpPr>
-          <p:cNvPr id="2" name="TextBox 1"/>
+          <p:cNvPr id="4" name="Slide Number Placeholder 3"/>
+          <p:cNvSpPr>
+            <a:spLocks noGrp="1"/>
+          </p:cNvSpPr>
+          <p:nvPr>
+            <p:ph type="sldNum" sz="quarter" idx="12"/>
+          </p:nvPr>
+        </p:nvSpPr>
+        <p:spPr>
+          <a:xfrm>
+            <a:off x="10363200" y="6035040"/>
+            <a:ext cx="1371600" cy="365760"/>
+          </a:xfrm>
+        </p:spPr>
+        <p:txBody>
+          <a:bodyPr/>
+          <a:lstStyle/>
+          <a:p>
+            <a:fld id="{C1FF6DA9-008F-8B48-92A6-B652298478BF}" type="slidenum">
+              <a:rPr lang="en-US" smtClean="0"/>
+              <a:t>‹#›</a:t>
+            </a:fld>
+            <a:endParaRPr lang="en-US"/>
+          </a:p>
+        </p:txBody>
+      </p:sp>
+      <p:sp>
+        <p:nvSpPr>
+          <p:cNvPr id="5" name="TextBox 4"/>
           <p:cNvSpPr/>
           <p:nvPr>
             <p:ph type="title"/>
@@ -9525,7 +10197,7 @@
           <a:noFill/>
         </p:spPr>
         <p:txBody>
-          <a:bodyPr wrap="square">
+          <a:bodyPr wrap="square" lIns="0" rIns="0">
             <a:noAutofit/>
           </a:bodyPr>
           <a:lstStyle/>
@@ -9545,7 +10217,7 @@
       </p:sp>
       <p:sp>
         <p:nvSpPr>
-          <p:cNvPr id="3" name="TextBox 2"/>
+          <p:cNvPr id="6" name="TextBox 5"/>
           <p:cNvSpPr/>
           <p:nvPr>
             <p:ph type="body" idx="1"/>
@@ -9562,7 +10234,7 @@
           <a:noFill/>
         </p:spPr>
         <p:txBody>
-          <a:bodyPr wrap="square">
+          <a:bodyPr wrap="square" lIns="0" rIns="0">
             <a:noAutofit/>
           </a:bodyPr>
           <a:lstStyle/>
@@ -9582,7 +10254,7 @@
       </p:sp>
       <p:sp>
         <p:nvSpPr>
-          <p:cNvPr id="4" name="Rectangle 3"/>
+          <p:cNvPr id="7" name="Rectangle 6"/>
           <p:cNvSpPr/>
           <p:nvPr>
             <p:ph type="body" idx="2"/>
@@ -9614,7 +10286,7 @@
       </p:sp>
       <p:sp>
         <p:nvSpPr>
-          <p:cNvPr id="5" name="TextBox 4"/>
+          <p:cNvPr id="8" name="TextBox 7"/>
           <p:cNvSpPr/>
           <p:nvPr>
             <p:ph type="body" idx="3"/>
@@ -9631,7 +10303,7 @@
           <a:noFill/>
         </p:spPr>
         <p:txBody>
-          <a:bodyPr wrap="square">
+          <a:bodyPr wrap="square" lIns="0" rIns="0">
             <a:noAutofit/>
           </a:bodyPr>
           <a:lstStyle/>
@@ -9651,7 +10323,7 @@
       </p:sp>
       <p:sp>
         <p:nvSpPr>
-          <p:cNvPr id="6" name="TextBox 5"/>
+          <p:cNvPr id="9" name="TextBox 8"/>
           <p:cNvSpPr/>
           <p:nvPr>
             <p:ph type="body" idx="4"/>
@@ -9668,7 +10340,7 @@
           <a:noFill/>
         </p:spPr>
         <p:txBody>
-          <a:bodyPr wrap="square">
+          <a:bodyPr wrap="square" lIns="0" rIns="0">
             <a:noAutofit/>
           </a:bodyPr>
           <a:lstStyle/>
@@ -9688,7 +10360,7 @@
       </p:sp>
       <p:sp>
         <p:nvSpPr>
-          <p:cNvPr id="7" name="TextBox 6"/>
+          <p:cNvPr id="10" name="TextBox 9"/>
           <p:cNvSpPr/>
           <p:nvPr>
             <p:ph type="body" idx="5"/>
@@ -9705,7 +10377,7 @@
           <a:noFill/>
         </p:spPr>
         <p:txBody>
-          <a:bodyPr wrap="square">
+          <a:bodyPr wrap="square" lIns="0" rIns="0">
             <a:noAutofit/>
           </a:bodyPr>
           <a:lstStyle/>
@@ -9725,7 +10397,7 @@
       </p:sp>
       <p:sp>
         <p:nvSpPr>
-          <p:cNvPr id="8" name="Rectangle 7"/>
+          <p:cNvPr id="11" name="Rectangle 10"/>
           <p:cNvSpPr/>
           <p:nvPr>
             <p:ph type="body" idx="6"/>
@@ -9757,7 +10429,7 @@
       </p:sp>
       <p:sp>
         <p:nvSpPr>
-          <p:cNvPr id="9" name="TextBox 8"/>
+          <p:cNvPr id="12" name="TextBox 11"/>
           <p:cNvSpPr/>
           <p:nvPr>
             <p:ph type="body" idx="7"/>
@@ -9774,7 +10446,7 @@
           <a:noFill/>
         </p:spPr>
         <p:txBody>
-          <a:bodyPr wrap="square">
+          <a:bodyPr wrap="square" lIns="0" rIns="0">
             <a:noAutofit/>
           </a:bodyPr>
           <a:lstStyle/>
@@ -9794,7 +10466,7 @@
       </p:sp>
       <p:sp>
         <p:nvSpPr>
-          <p:cNvPr id="10" name="TextBox 9"/>
+          <p:cNvPr id="13" name="TextBox 12"/>
           <p:cNvSpPr/>
           <p:nvPr>
             <p:ph type="body" idx="8"/>
@@ -9811,7 +10483,7 @@
           <a:noFill/>
         </p:spPr>
         <p:txBody>
-          <a:bodyPr wrap="square">
+          <a:bodyPr wrap="square" lIns="0" rIns="0">
             <a:noAutofit/>
           </a:bodyPr>
           <a:lstStyle/>
@@ -9831,7 +10503,7 @@
       </p:sp>
       <p:sp>
         <p:nvSpPr>
-          <p:cNvPr id="11" name="TextBox 10"/>
+          <p:cNvPr id="14" name="TextBox 13"/>
           <p:cNvSpPr/>
           <p:nvPr>
             <p:ph type="body" idx="9"/>
@@ -9848,7 +10520,7 @@
           <a:noFill/>
         </p:spPr>
         <p:txBody>
-          <a:bodyPr wrap="square">
+          <a:bodyPr wrap="square" lIns="0" rIns="0">
             <a:noAutofit/>
           </a:bodyPr>
           <a:lstStyle/>
@@ -9868,7 +10540,7 @@
       </p:sp>
       <p:sp>
         <p:nvSpPr>
-          <p:cNvPr id="12" name="Rectangle 11"/>
+          <p:cNvPr id="15" name="Rectangle 14"/>
           <p:cNvSpPr/>
           <p:nvPr>
             <p:ph type="body" idx="13"/>
@@ -9900,7 +10572,7 @@
       </p:sp>
       <p:sp>
         <p:nvSpPr>
-          <p:cNvPr id="13" name="TextBox 12"/>
+          <p:cNvPr id="16" name="TextBox 15"/>
           <p:cNvSpPr/>
           <p:nvPr>
             <p:ph type="body" idx="14"/>
@@ -9917,7 +10589,7 @@
           <a:noFill/>
         </p:spPr>
         <p:txBody>
-          <a:bodyPr wrap="square">
+          <a:bodyPr wrap="square" lIns="0" rIns="0">
             <a:noAutofit/>
           </a:bodyPr>
           <a:lstStyle/>
@@ -9937,7 +10609,7 @@
       </p:sp>
       <p:sp>
         <p:nvSpPr>
-          <p:cNvPr id="14" name="TextBox 13"/>
+          <p:cNvPr id="17" name="TextBox 16"/>
           <p:cNvSpPr/>
           <p:nvPr>
             <p:ph type="body" idx="15"/>
@@ -9954,7 +10626,7 @@
           <a:noFill/>
         </p:spPr>
         <p:txBody>
-          <a:bodyPr wrap="square">
+          <a:bodyPr wrap="square" lIns="0" rIns="0">
             <a:noAutofit/>
           </a:bodyPr>
           <a:lstStyle/>
@@ -9974,7 +10646,7 @@
       </p:sp>
       <p:sp>
         <p:nvSpPr>
-          <p:cNvPr id="15" name="TextBox 14"/>
+          <p:cNvPr id="18" name="TextBox 17"/>
           <p:cNvSpPr/>
           <p:nvPr>
             <p:ph type="body" idx="16"/>
@@ -9991,7 +10663,7 @@
           <a:noFill/>
         </p:spPr>
         <p:txBody>
-          <a:bodyPr wrap="square">
+          <a:bodyPr wrap="square" lIns="0" rIns="0">
             <a:noAutofit/>
           </a:bodyPr>
           <a:lstStyle/>
@@ -10011,7 +10683,7 @@
       </p:sp>
       <p:sp>
         <p:nvSpPr>
-          <p:cNvPr id="16" name="Rectangle 15"/>
+          <p:cNvPr id="19" name="Rectangle 18"/>
           <p:cNvSpPr/>
           <p:nvPr>
             <p:ph type="body" idx="17"/>
@@ -10043,7 +10715,7 @@
       </p:sp>
       <p:sp>
         <p:nvSpPr>
-          <p:cNvPr id="17" name="TextBox 16"/>
+          <p:cNvPr id="20" name="TextBox 19"/>
           <p:cNvSpPr/>
           <p:nvPr>
             <p:ph type="body" idx="18"/>
@@ -10060,7 +10732,7 @@
           <a:noFill/>
         </p:spPr>
         <p:txBody>
-          <a:bodyPr wrap="square">
+          <a:bodyPr wrap="square" lIns="0" rIns="0">
             <a:noAutofit/>
           </a:bodyPr>
           <a:lstStyle/>
@@ -10080,7 +10752,7 @@
       </p:sp>
       <p:sp>
         <p:nvSpPr>
-          <p:cNvPr id="18" name="TextBox 17"/>
+          <p:cNvPr id="21" name="TextBox 20"/>
           <p:cNvSpPr/>
           <p:nvPr>
             <p:ph type="body" idx="19"/>
@@ -10097,7 +10769,7 @@
           <a:noFill/>
         </p:spPr>
         <p:txBody>
-          <a:bodyPr wrap="square">
+          <a:bodyPr wrap="square" lIns="0" rIns="0">
             <a:noAutofit/>
           </a:bodyPr>
           <a:lstStyle/>
@@ -10155,7 +10827,35 @@
       </p:grpSpPr>
       <p:sp>
         <p:nvSpPr>
-          <p:cNvPr id="2" name="TextBox 1"/>
+          <p:cNvPr id="4" name="Slide Number Placeholder 3"/>
+          <p:cNvSpPr>
+            <a:spLocks noGrp="1"/>
+          </p:cNvSpPr>
+          <p:nvPr>
+            <p:ph type="sldNum" sz="quarter" idx="12"/>
+          </p:nvPr>
+        </p:nvSpPr>
+        <p:spPr>
+          <a:xfrm>
+            <a:off x="10363200" y="6035040"/>
+            <a:ext cx="1371600" cy="365760"/>
+          </a:xfrm>
+        </p:spPr>
+        <p:txBody>
+          <a:bodyPr/>
+          <a:lstStyle/>
+          <a:p>
+            <a:fld id="{C1FF6DA9-008F-8B48-92A6-B652298478BF}" type="slidenum">
+              <a:rPr lang="en-US" smtClean="0"/>
+              <a:t>‹#›</a:t>
+            </a:fld>
+            <a:endParaRPr lang="en-US"/>
+          </a:p>
+        </p:txBody>
+      </p:sp>
+      <p:sp>
+        <p:nvSpPr>
+          <p:cNvPr id="5" name="TextBox 4"/>
           <p:cNvSpPr/>
           <p:nvPr>
             <p:ph type="title"/>
@@ -10172,7 +10872,7 @@
           <a:noFill/>
         </p:spPr>
         <p:txBody>
-          <a:bodyPr wrap="square">
+          <a:bodyPr wrap="square" lIns="0" rIns="0">
             <a:noAutofit/>
           </a:bodyPr>
           <a:lstStyle/>
@@ -10192,7 +10892,7 @@
       </p:sp>
       <p:sp>
         <p:nvSpPr>
-          <p:cNvPr id="3" name="Rectangle 2"/>
+          <p:cNvPr id="6" name="Rectangle 5"/>
           <p:cNvSpPr/>
           <p:nvPr>
             <p:ph type="body" idx="1"/>
@@ -10224,7 +10924,7 @@
       </p:sp>
       <p:sp>
         <p:nvSpPr>
-          <p:cNvPr id="4" name="TextBox 3"/>
+          <p:cNvPr id="7" name="TextBox 6"/>
           <p:cNvSpPr/>
           <p:nvPr>
             <p:ph type="body" idx="2"/>
@@ -10241,7 +10941,7 @@
           <a:noFill/>
         </p:spPr>
         <p:txBody>
-          <a:bodyPr wrap="square">
+          <a:bodyPr wrap="square" lIns="0" rIns="0">
             <a:noAutofit/>
           </a:bodyPr>
           <a:lstStyle/>
@@ -10261,7 +10961,7 @@
       </p:sp>
       <p:sp>
         <p:nvSpPr>
-          <p:cNvPr id="5" name="TextBox 4"/>
+          <p:cNvPr id="8" name="TextBox 7"/>
           <p:cNvSpPr/>
           <p:nvPr>
             <p:ph type="body" idx="3"/>
@@ -10278,7 +10978,7 @@
           <a:noFill/>
         </p:spPr>
         <p:txBody>
-          <a:bodyPr wrap="square">
+          <a:bodyPr wrap="square" lIns="0" rIns="0">
             <a:noAutofit/>
           </a:bodyPr>
           <a:lstStyle/>
@@ -10298,7 +10998,7 @@
       </p:sp>
       <p:sp>
         <p:nvSpPr>
-          <p:cNvPr id="6" name="TextBox 5"/>
+          <p:cNvPr id="9" name="TextBox 8"/>
           <p:cNvSpPr/>
           <p:nvPr>
             <p:ph type="body" idx="4"/>
@@ -10315,7 +11015,7 @@
           <a:noFill/>
         </p:spPr>
         <p:txBody>
-          <a:bodyPr wrap="square">
+          <a:bodyPr wrap="square" lIns="0" rIns="0">
             <a:noAutofit/>
           </a:bodyPr>
           <a:lstStyle/>
@@ -10335,7 +11035,7 @@
       </p:sp>
       <p:sp>
         <p:nvSpPr>
-          <p:cNvPr id="7" name="Rectangle 6"/>
+          <p:cNvPr id="10" name="Rectangle 9"/>
           <p:cNvSpPr/>
           <p:nvPr>
             <p:ph type="body" idx="5"/>
@@ -10367,7 +11067,7 @@
       </p:sp>
       <p:sp>
         <p:nvSpPr>
-          <p:cNvPr id="8" name="TextBox 7"/>
+          <p:cNvPr id="11" name="TextBox 10"/>
           <p:cNvSpPr/>
           <p:nvPr>
             <p:ph type="body" idx="6"/>
@@ -10384,7 +11084,7 @@
           <a:noFill/>
         </p:spPr>
         <p:txBody>
-          <a:bodyPr wrap="square">
+          <a:bodyPr wrap="square" lIns="0" rIns="0">
             <a:noAutofit/>
           </a:bodyPr>
           <a:lstStyle/>
@@ -10404,7 +11104,7 @@
       </p:sp>
       <p:sp>
         <p:nvSpPr>
-          <p:cNvPr id="9" name="TextBox 8"/>
+          <p:cNvPr id="12" name="TextBox 11"/>
           <p:cNvSpPr/>
           <p:nvPr>
             <p:ph type="body" idx="7"/>
@@ -10421,7 +11121,7 @@
           <a:noFill/>
         </p:spPr>
         <p:txBody>
-          <a:bodyPr wrap="square">
+          <a:bodyPr wrap="square" lIns="0" rIns="0">
             <a:noAutofit/>
           </a:bodyPr>
           <a:lstStyle/>
@@ -10441,7 +11141,7 @@
       </p:sp>
       <p:sp>
         <p:nvSpPr>
-          <p:cNvPr id="10" name="TextBox 9"/>
+          <p:cNvPr id="13" name="TextBox 12"/>
           <p:cNvSpPr/>
           <p:nvPr>
             <p:ph type="body" idx="8"/>
@@ -10458,7 +11158,7 @@
           <a:noFill/>
         </p:spPr>
         <p:txBody>
-          <a:bodyPr wrap="square">
+          <a:bodyPr wrap="square" lIns="0" rIns="0">
             <a:noAutofit/>
           </a:bodyPr>
           <a:lstStyle/>
@@ -10478,7 +11178,7 @@
       </p:sp>
       <p:sp>
         <p:nvSpPr>
-          <p:cNvPr id="11" name="Rectangle 10"/>
+          <p:cNvPr id="14" name="Rectangle 13"/>
           <p:cNvSpPr/>
           <p:nvPr>
             <p:ph type="body" idx="9"/>
@@ -10510,7 +11210,7 @@
       </p:sp>
       <p:sp>
         <p:nvSpPr>
-          <p:cNvPr id="12" name="TextBox 11"/>
+          <p:cNvPr id="15" name="TextBox 14"/>
           <p:cNvSpPr/>
           <p:nvPr>
             <p:ph type="body" idx="13"/>
@@ -10527,7 +11227,7 @@
           <a:noFill/>
         </p:spPr>
         <p:txBody>
-          <a:bodyPr wrap="square">
+          <a:bodyPr wrap="square" lIns="0" rIns="0">
             <a:noAutofit/>
           </a:bodyPr>
           <a:lstStyle/>
@@ -10547,7 +11247,7 @@
       </p:sp>
       <p:sp>
         <p:nvSpPr>
-          <p:cNvPr id="13" name="TextBox 12"/>
+          <p:cNvPr id="16" name="TextBox 15"/>
           <p:cNvSpPr/>
           <p:nvPr>
             <p:ph type="body" idx="14"/>
@@ -10564,7 +11264,7 @@
           <a:noFill/>
         </p:spPr>
         <p:txBody>
-          <a:bodyPr wrap="square">
+          <a:bodyPr wrap="square" lIns="0" rIns="0">
             <a:noAutofit/>
           </a:bodyPr>
           <a:lstStyle/>
@@ -10584,7 +11284,7 @@
       </p:sp>
       <p:sp>
         <p:nvSpPr>
-          <p:cNvPr id="14" name="TextBox 13"/>
+          <p:cNvPr id="17" name="TextBox 16"/>
           <p:cNvSpPr/>
           <p:nvPr>
             <p:ph type="body" idx="15"/>
@@ -10601,7 +11301,7 @@
           <a:noFill/>
         </p:spPr>
         <p:txBody>
-          <a:bodyPr wrap="square">
+          <a:bodyPr wrap="square" lIns="0" rIns="0">
             <a:noAutofit/>
           </a:bodyPr>
           <a:lstStyle/>
@@ -10659,7 +11359,35 @@
       </p:grpSpPr>
       <p:sp>
         <p:nvSpPr>
-          <p:cNvPr id="2" name="TextBox 1"/>
+          <p:cNvPr id="4" name="Slide Number Placeholder 3"/>
+          <p:cNvSpPr>
+            <a:spLocks noGrp="1"/>
+          </p:cNvSpPr>
+          <p:nvPr>
+            <p:ph type="sldNum" sz="quarter" idx="12"/>
+          </p:nvPr>
+        </p:nvSpPr>
+        <p:spPr>
+          <a:xfrm>
+            <a:off x="10363200" y="6035040"/>
+            <a:ext cx="1371600" cy="365760"/>
+          </a:xfrm>
+        </p:spPr>
+        <p:txBody>
+          <a:bodyPr/>
+          <a:lstStyle/>
+          <a:p>
+            <a:fld id="{C1FF6DA9-008F-8B48-92A6-B652298478BF}" type="slidenum">
+              <a:rPr lang="en-US" smtClean="0"/>
+              <a:t>‹#›</a:t>
+            </a:fld>
+            <a:endParaRPr lang="en-US"/>
+          </a:p>
+        </p:txBody>
+      </p:sp>
+      <p:sp>
+        <p:nvSpPr>
+          <p:cNvPr id="5" name="TextBox 4"/>
           <p:cNvSpPr/>
           <p:nvPr>
             <p:ph type="title"/>
@@ -10676,7 +11404,7 @@
           <a:noFill/>
         </p:spPr>
         <p:txBody>
-          <a:bodyPr wrap="square">
+          <a:bodyPr wrap="square" lIns="0" rIns="0">
             <a:noAutofit/>
           </a:bodyPr>
           <a:lstStyle/>
@@ -10696,7 +11424,7 @@
       </p:sp>
       <p:sp>
         <p:nvSpPr>
-          <p:cNvPr id="3" name="Rectangle 2"/>
+          <p:cNvPr id="6" name="Rectangle 5"/>
           <p:cNvSpPr/>
           <p:nvPr>
             <p:ph type="body" idx="1"/>
@@ -10728,7 +11456,7 @@
       </p:sp>
       <p:sp>
         <p:nvSpPr>
-          <p:cNvPr id="4" name="TextBox 3"/>
+          <p:cNvPr id="7" name="TextBox 6"/>
           <p:cNvSpPr/>
           <p:nvPr>
             <p:ph type="body" idx="2"/>
@@ -10745,7 +11473,7 @@
           <a:noFill/>
         </p:spPr>
         <p:txBody>
-          <a:bodyPr wrap="square">
+          <a:bodyPr wrap="square" lIns="0" rIns="0">
             <a:noAutofit/>
           </a:bodyPr>
           <a:lstStyle/>
@@ -10765,7 +11493,7 @@
       </p:sp>
       <p:sp>
         <p:nvSpPr>
-          <p:cNvPr id="5" name="Rectangle 4"/>
+          <p:cNvPr id="8" name="Rectangle 7"/>
           <p:cNvSpPr/>
           <p:nvPr>
             <p:ph type="body" idx="3"/>
@@ -10797,7 +11525,7 @@
       </p:sp>
       <p:sp>
         <p:nvSpPr>
-          <p:cNvPr id="6" name="TextBox 5"/>
+          <p:cNvPr id="9" name="TextBox 8"/>
           <p:cNvSpPr/>
           <p:nvPr>
             <p:ph type="body" idx="4"/>
@@ -10814,7 +11542,7 @@
           <a:noFill/>
         </p:spPr>
         <p:txBody>
-          <a:bodyPr wrap="square">
+          <a:bodyPr wrap="square" lIns="0" rIns="0">
             <a:noAutofit/>
           </a:bodyPr>
           <a:lstStyle/>
@@ -10834,7 +11562,7 @@
       </p:sp>
       <p:sp>
         <p:nvSpPr>
-          <p:cNvPr id="7" name="Rectangle 6"/>
+          <p:cNvPr id="10" name="Rectangle 9"/>
           <p:cNvSpPr/>
           <p:nvPr>
             <p:ph type="body" idx="5"/>
@@ -10866,7 +11594,7 @@
       </p:sp>
       <p:sp>
         <p:nvSpPr>
-          <p:cNvPr id="8" name="TextBox 7"/>
+          <p:cNvPr id="11" name="TextBox 10"/>
           <p:cNvSpPr/>
           <p:nvPr>
             <p:ph type="body" idx="6"/>
@@ -10883,7 +11611,7 @@
           <a:noFill/>
         </p:spPr>
         <p:txBody>
-          <a:bodyPr wrap="square">
+          <a:bodyPr wrap="square" lIns="0" rIns="0">
             <a:noAutofit/>
           </a:bodyPr>
           <a:lstStyle/>
@@ -10903,7 +11631,7 @@
       </p:sp>
       <p:sp>
         <p:nvSpPr>
-          <p:cNvPr id="9" name="Rectangle 8"/>
+          <p:cNvPr id="12" name="Rectangle 11"/>
           <p:cNvSpPr/>
           <p:nvPr>
             <p:ph type="body" idx="7"/>
@@ -10935,7 +11663,7 @@
       </p:sp>
       <p:sp>
         <p:nvSpPr>
-          <p:cNvPr id="10" name="TextBox 9"/>
+          <p:cNvPr id="13" name="TextBox 12"/>
           <p:cNvSpPr/>
           <p:nvPr>
             <p:ph type="body" idx="8"/>
@@ -10952,7 +11680,7 @@
           <a:noFill/>
         </p:spPr>
         <p:txBody>
-          <a:bodyPr wrap="square">
+          <a:bodyPr wrap="square" lIns="0" rIns="0">
             <a:noAutofit/>
           </a:bodyPr>
           <a:lstStyle/>
@@ -11010,7 +11738,35 @@
       </p:grpSpPr>
       <p:sp>
         <p:nvSpPr>
-          <p:cNvPr id="2" name="TextBox 1"/>
+          <p:cNvPr id="4" name="Slide Number Placeholder 3"/>
+          <p:cNvSpPr>
+            <a:spLocks noGrp="1"/>
+          </p:cNvSpPr>
+          <p:nvPr>
+            <p:ph type="sldNum" sz="quarter" idx="12"/>
+          </p:nvPr>
+        </p:nvSpPr>
+        <p:spPr>
+          <a:xfrm>
+            <a:off x="10363200" y="6035040"/>
+            <a:ext cx="1371600" cy="365760"/>
+          </a:xfrm>
+        </p:spPr>
+        <p:txBody>
+          <a:bodyPr/>
+          <a:lstStyle/>
+          <a:p>
+            <a:fld id="{C1FF6DA9-008F-8B48-92A6-B652298478BF}" type="slidenum">
+              <a:rPr lang="en-US" smtClean="0"/>
+              <a:t>‹#›</a:t>
+            </a:fld>
+            <a:endParaRPr lang="en-US"/>
+          </a:p>
+        </p:txBody>
+      </p:sp>
+      <p:sp>
+        <p:nvSpPr>
+          <p:cNvPr id="5" name="TextBox 4"/>
           <p:cNvSpPr/>
           <p:nvPr>
             <p:ph type="title"/>
@@ -11027,7 +11783,7 @@
           <a:noFill/>
         </p:spPr>
         <p:txBody>
-          <a:bodyPr wrap="square">
+          <a:bodyPr wrap="square" lIns="0" rIns="0">
             <a:noAutofit/>
           </a:bodyPr>
           <a:lstStyle/>
@@ -11047,7 +11803,7 @@
       </p:sp>
       <p:sp>
         <p:nvSpPr>
-          <p:cNvPr id="3" name="Oval 2"/>
+          <p:cNvPr id="6" name="Oval 5"/>
           <p:cNvSpPr/>
           <p:nvPr>
             <p:ph type="body" idx="1"/>
@@ -11079,7 +11835,7 @@
       </p:sp>
       <p:sp>
         <p:nvSpPr>
-          <p:cNvPr id="4" name="Oval 3"/>
+          <p:cNvPr id="7" name="Oval 6"/>
           <p:cNvSpPr/>
           <p:nvPr>
             <p:ph type="body" idx="2"/>
@@ -11111,7 +11867,7 @@
       </p:sp>
       <p:sp>
         <p:nvSpPr>
-          <p:cNvPr id="5" name="Oval 4"/>
+          <p:cNvPr id="8" name="Oval 7"/>
           <p:cNvSpPr/>
           <p:nvPr>
             <p:ph type="body" idx="3"/>
@@ -11143,7 +11899,7 @@
       </p:sp>
       <p:sp>
         <p:nvSpPr>
-          <p:cNvPr id="6" name="TextBox 5"/>
+          <p:cNvPr id="9" name="TextBox 8"/>
           <p:cNvSpPr/>
           <p:nvPr>
             <p:ph type="body" idx="4"/>
@@ -11160,7 +11916,7 @@
           <a:noFill/>
         </p:spPr>
         <p:txBody>
-          <a:bodyPr wrap="square">
+          <a:bodyPr wrap="square" lIns="0" rIns="0">
             <a:noAutofit/>
           </a:bodyPr>
           <a:lstStyle/>
@@ -11180,7 +11936,7 @@
       </p:sp>
       <p:sp>
         <p:nvSpPr>
-          <p:cNvPr id="7" name="TextBox 6"/>
+          <p:cNvPr id="10" name="TextBox 9"/>
           <p:cNvSpPr/>
           <p:nvPr>
             <p:ph type="body" idx="5"/>
@@ -11197,7 +11953,7 @@
           <a:noFill/>
         </p:spPr>
         <p:txBody>
-          <a:bodyPr wrap="square">
+          <a:bodyPr wrap="square" lIns="0" rIns="0">
             <a:noAutofit/>
           </a:bodyPr>
           <a:lstStyle/>
@@ -11217,7 +11973,7 @@
       </p:sp>
       <p:sp>
         <p:nvSpPr>
-          <p:cNvPr id="8" name="TextBox 7"/>
+          <p:cNvPr id="11" name="TextBox 10"/>
           <p:cNvSpPr/>
           <p:nvPr>
             <p:ph type="body" idx="6"/>
@@ -11234,7 +11990,7 @@
           <a:noFill/>
         </p:spPr>
         <p:txBody>
-          <a:bodyPr wrap="square">
+          <a:bodyPr wrap="square" lIns="0" rIns="0">
             <a:noAutofit/>
           </a:bodyPr>
           <a:lstStyle/>
@@ -11254,7 +12010,7 @@
       </p:sp>
       <p:sp>
         <p:nvSpPr>
-          <p:cNvPr id="9" name="TextBox 8"/>
+          <p:cNvPr id="12" name="TextBox 11"/>
           <p:cNvSpPr/>
           <p:nvPr>
             <p:ph type="body" idx="7"/>
@@ -11271,7 +12027,7 @@
           <a:noFill/>
         </p:spPr>
         <p:txBody>
-          <a:bodyPr wrap="square">
+          <a:bodyPr wrap="square" lIns="0" rIns="0">
             <a:noAutofit/>
           </a:bodyPr>
           <a:lstStyle/>
@@ -11291,7 +12047,7 @@
       </p:sp>
       <p:sp>
         <p:nvSpPr>
-          <p:cNvPr id="10" name="TextBox 9"/>
+          <p:cNvPr id="13" name="TextBox 12"/>
           <p:cNvSpPr/>
           <p:nvPr>
             <p:ph type="body" idx="8"/>
@@ -11308,7 +12064,7 @@
           <a:noFill/>
         </p:spPr>
         <p:txBody>
-          <a:bodyPr wrap="square">
+          <a:bodyPr wrap="square" lIns="0" rIns="0">
             <a:noAutofit/>
           </a:bodyPr>
           <a:lstStyle/>
@@ -11328,7 +12084,7 @@
       </p:sp>
       <p:sp>
         <p:nvSpPr>
-          <p:cNvPr id="11" name="TextBox 10"/>
+          <p:cNvPr id="14" name="TextBox 13"/>
           <p:cNvSpPr/>
           <p:nvPr>
             <p:ph type="body" idx="9"/>
@@ -11345,7 +12101,7 @@
           <a:noFill/>
         </p:spPr>
         <p:txBody>
-          <a:bodyPr wrap="square">
+          <a:bodyPr wrap="square" lIns="0" rIns="0">
             <a:noAutofit/>
           </a:bodyPr>
           <a:lstStyle/>
@@ -11403,7 +12159,35 @@
       </p:grpSpPr>
       <p:sp>
         <p:nvSpPr>
-          <p:cNvPr id="2" name="TextBox 1"/>
+          <p:cNvPr id="4" name="Slide Number Placeholder 3"/>
+          <p:cNvSpPr>
+            <a:spLocks noGrp="1"/>
+          </p:cNvSpPr>
+          <p:nvPr>
+            <p:ph type="sldNum" sz="quarter" idx="12"/>
+          </p:nvPr>
+        </p:nvSpPr>
+        <p:spPr>
+          <a:xfrm>
+            <a:off x="10363200" y="6035040"/>
+            <a:ext cx="1371600" cy="365760"/>
+          </a:xfrm>
+        </p:spPr>
+        <p:txBody>
+          <a:bodyPr/>
+          <a:lstStyle/>
+          <a:p>
+            <a:fld id="{C1FF6DA9-008F-8B48-92A6-B652298478BF}" type="slidenum">
+              <a:rPr lang="en-US" smtClean="0"/>
+              <a:t>‹#›</a:t>
+            </a:fld>
+            <a:endParaRPr lang="en-US"/>
+          </a:p>
+        </p:txBody>
+      </p:sp>
+      <p:sp>
+        <p:nvSpPr>
+          <p:cNvPr id="5" name="TextBox 4"/>
           <p:cNvSpPr/>
           <p:nvPr>
             <p:ph type="title"/>
@@ -11420,7 +12204,7 @@
           <a:noFill/>
         </p:spPr>
         <p:txBody>
-          <a:bodyPr wrap="square">
+          <a:bodyPr wrap="square" lIns="0" rIns="0">
             <a:noAutofit/>
           </a:bodyPr>
           <a:lstStyle/>
@@ -11440,7 +12224,7 @@
       </p:sp>
       <p:sp>
         <p:nvSpPr>
-          <p:cNvPr id="3" name="Rectangle 2"/>
+          <p:cNvPr id="6" name="Rectangle 5"/>
           <p:cNvSpPr/>
           <p:nvPr>
             <p:ph type="body" idx="1"/>
@@ -11472,7 +12256,7 @@
       </p:sp>
       <p:sp>
         <p:nvSpPr>
-          <p:cNvPr id="4" name="TextBox 3"/>
+          <p:cNvPr id="7" name="TextBox 6"/>
           <p:cNvSpPr/>
           <p:nvPr>
             <p:ph type="body" idx="2"/>
@@ -11489,7 +12273,7 @@
           <a:noFill/>
         </p:spPr>
         <p:txBody>
-          <a:bodyPr wrap="square">
+          <a:bodyPr wrap="square" lIns="0" rIns="0">
             <a:noAutofit/>
           </a:bodyPr>
           <a:lstStyle/>
@@ -11509,7 +12293,7 @@
       </p:sp>
       <p:sp>
         <p:nvSpPr>
-          <p:cNvPr id="5" name="Rectangle 4"/>
+          <p:cNvPr id="8" name="Rectangle 7"/>
           <p:cNvSpPr/>
           <p:nvPr>
             <p:ph type="body" idx="3"/>
@@ -11541,7 +12325,7 @@
       </p:sp>
       <p:sp>
         <p:nvSpPr>
-          <p:cNvPr id="6" name="TextBox 5"/>
+          <p:cNvPr id="9" name="TextBox 8"/>
           <p:cNvSpPr/>
           <p:nvPr>
             <p:ph type="body" idx="4"/>
@@ -11558,7 +12342,7 @@
           <a:noFill/>
         </p:spPr>
         <p:txBody>
-          <a:bodyPr wrap="square">
+          <a:bodyPr wrap="square" lIns="0" rIns="0">
             <a:noAutofit/>
           </a:bodyPr>
           <a:lstStyle/>
@@ -11578,7 +12362,7 @@
       </p:sp>
       <p:sp>
         <p:nvSpPr>
-          <p:cNvPr id="7" name="Rectangle 6"/>
+          <p:cNvPr id="10" name="Rectangle 9"/>
           <p:cNvSpPr/>
           <p:nvPr>
             <p:ph type="body" idx="5"/>
@@ -11610,7 +12394,7 @@
       </p:sp>
       <p:sp>
         <p:nvSpPr>
-          <p:cNvPr id="8" name="TextBox 7"/>
+          <p:cNvPr id="11" name="TextBox 10"/>
           <p:cNvSpPr/>
           <p:nvPr>
             <p:ph type="body" idx="6"/>
@@ -11627,7 +12411,7 @@
           <a:noFill/>
         </p:spPr>
         <p:txBody>
-          <a:bodyPr wrap="square">
+          <a:bodyPr wrap="square" lIns="0" rIns="0">
             <a:noAutofit/>
           </a:bodyPr>
           <a:lstStyle/>
@@ -11647,7 +12431,7 @@
       </p:sp>
       <p:sp>
         <p:nvSpPr>
-          <p:cNvPr id="9" name="Rectangle 8"/>
+          <p:cNvPr id="12" name="Rectangle 11"/>
           <p:cNvSpPr/>
           <p:nvPr>
             <p:ph type="body" idx="7"/>
@@ -11679,7 +12463,7 @@
       </p:sp>
       <p:sp>
         <p:nvSpPr>
-          <p:cNvPr id="10" name="TextBox 9"/>
+          <p:cNvPr id="13" name="TextBox 12"/>
           <p:cNvSpPr/>
           <p:nvPr>
             <p:ph type="body" idx="8"/>
@@ -11696,7 +12480,7 @@
           <a:noFill/>
         </p:spPr>
         <p:txBody>
-          <a:bodyPr wrap="square">
+          <a:bodyPr wrap="square" lIns="0" rIns="0">
             <a:noAutofit/>
           </a:bodyPr>
           <a:lstStyle/>
@@ -12042,7 +12826,35 @@
       </p:grpSpPr>
       <p:sp>
         <p:nvSpPr>
-          <p:cNvPr id="2" name="TextBox 1"/>
+          <p:cNvPr id="4" name="Slide Number Placeholder 3"/>
+          <p:cNvSpPr>
+            <a:spLocks noGrp="1"/>
+          </p:cNvSpPr>
+          <p:nvPr>
+            <p:ph type="sldNum" sz="quarter" idx="12"/>
+          </p:nvPr>
+        </p:nvSpPr>
+        <p:spPr>
+          <a:xfrm>
+            <a:off x="10363200" y="6035040"/>
+            <a:ext cx="1371600" cy="365760"/>
+          </a:xfrm>
+        </p:spPr>
+        <p:txBody>
+          <a:bodyPr/>
+          <a:lstStyle/>
+          <a:p>
+            <a:fld id="{C1FF6DA9-008F-8B48-92A6-B652298478BF}" type="slidenum">
+              <a:rPr lang="en-US" smtClean="0"/>
+              <a:t>‹#›</a:t>
+            </a:fld>
+            <a:endParaRPr lang="en-US"/>
+          </a:p>
+        </p:txBody>
+      </p:sp>
+      <p:sp>
+        <p:nvSpPr>
+          <p:cNvPr id="5" name="TextBox 4"/>
           <p:cNvSpPr/>
           <p:nvPr>
             <p:ph type="title"/>
@@ -12059,7 +12871,7 @@
           <a:noFill/>
         </p:spPr>
         <p:txBody>
-          <a:bodyPr wrap="square">
+          <a:bodyPr wrap="square" lIns="0" rIns="0">
             <a:noAutofit/>
           </a:bodyPr>
           <a:lstStyle/>
@@ -12079,7 +12891,7 @@
       </p:sp>
       <p:sp>
         <p:nvSpPr>
-          <p:cNvPr id="3" name="TextBox 2"/>
+          <p:cNvPr id="6" name="TextBox 5"/>
           <p:cNvSpPr/>
           <p:nvPr>
             <p:ph type="body" idx="1"/>
@@ -12096,7 +12908,7 @@
           <a:noFill/>
         </p:spPr>
         <p:txBody>
-          <a:bodyPr wrap="square">
+          <a:bodyPr wrap="square" lIns="0" rIns="0">
             <a:noAutofit/>
           </a:bodyPr>
           <a:lstStyle/>
@@ -12116,7 +12928,7 @@
       </p:sp>
       <p:sp>
         <p:nvSpPr>
-          <p:cNvPr id="4" name="Rectangle 3"/>
+          <p:cNvPr id="7" name="Rectangle 6"/>
           <p:cNvSpPr/>
           <p:nvPr>
             <p:ph type="body" idx="2"/>
@@ -12148,7 +12960,7 @@
       </p:sp>
       <p:sp>
         <p:nvSpPr>
-          <p:cNvPr id="5" name="TextBox 4"/>
+          <p:cNvPr id="8" name="TextBox 7"/>
           <p:cNvSpPr/>
           <p:nvPr>
             <p:ph type="body" idx="3"/>
@@ -12165,7 +12977,7 @@
           <a:noFill/>
         </p:spPr>
         <p:txBody>
-          <a:bodyPr wrap="square">
+          <a:bodyPr wrap="square" lIns="0" rIns="0">
             <a:noAutofit/>
           </a:bodyPr>
           <a:lstStyle/>
@@ -12185,7 +12997,7 @@
       </p:sp>
       <p:sp>
         <p:nvSpPr>
-          <p:cNvPr id="6" name="TextBox 5"/>
+          <p:cNvPr id="9" name="TextBox 8"/>
           <p:cNvSpPr/>
           <p:nvPr>
             <p:ph type="body" idx="4"/>
@@ -12202,7 +13014,7 @@
           <a:noFill/>
         </p:spPr>
         <p:txBody>
-          <a:bodyPr wrap="square">
+          <a:bodyPr wrap="square" lIns="0" rIns="0">
             <a:noAutofit/>
           </a:bodyPr>
           <a:lstStyle/>
@@ -12222,7 +13034,7 @@
       </p:sp>
       <p:sp>
         <p:nvSpPr>
-          <p:cNvPr id="7" name="Rectangle 6"/>
+          <p:cNvPr id="10" name="Rectangle 9"/>
           <p:cNvSpPr/>
           <p:nvPr>
             <p:ph type="body" idx="5"/>
@@ -12254,7 +13066,7 @@
       </p:sp>
       <p:sp>
         <p:nvSpPr>
-          <p:cNvPr id="8" name="TextBox 7"/>
+          <p:cNvPr id="11" name="TextBox 10"/>
           <p:cNvSpPr/>
           <p:nvPr>
             <p:ph type="body" idx="6"/>
@@ -12271,7 +13083,7 @@
           <a:noFill/>
         </p:spPr>
         <p:txBody>
-          <a:bodyPr wrap="square">
+          <a:bodyPr wrap="square" lIns="0" rIns="0">
             <a:noAutofit/>
           </a:bodyPr>
           <a:lstStyle/>
@@ -12291,7 +13103,7 @@
       </p:sp>
       <p:sp>
         <p:nvSpPr>
-          <p:cNvPr id="9" name="TextBox 8"/>
+          <p:cNvPr id="12" name="TextBox 11"/>
           <p:cNvSpPr/>
           <p:nvPr>
             <p:ph type="body" idx="7"/>
@@ -12308,7 +13120,7 @@
           <a:noFill/>
         </p:spPr>
         <p:txBody>
-          <a:bodyPr wrap="square">
+          <a:bodyPr wrap="square" lIns="0" rIns="0">
             <a:noAutofit/>
           </a:bodyPr>
           <a:lstStyle/>
@@ -12328,7 +13140,7 @@
       </p:sp>
       <p:sp>
         <p:nvSpPr>
-          <p:cNvPr id="10" name="Rectangle 9"/>
+          <p:cNvPr id="13" name="Rectangle 12"/>
           <p:cNvSpPr/>
           <p:nvPr>
             <p:ph type="body" idx="8"/>
@@ -12360,7 +13172,7 @@
       </p:sp>
       <p:sp>
         <p:nvSpPr>
-          <p:cNvPr id="11" name="TextBox 10"/>
+          <p:cNvPr id="14" name="TextBox 13"/>
           <p:cNvSpPr/>
           <p:nvPr>
             <p:ph type="body" idx="9"/>
@@ -12377,7 +13189,7 @@
           <a:noFill/>
         </p:spPr>
         <p:txBody>
-          <a:bodyPr wrap="square">
+          <a:bodyPr wrap="square" lIns="0" rIns="0">
             <a:noAutofit/>
           </a:bodyPr>
           <a:lstStyle/>
@@ -12397,7 +13209,7 @@
       </p:sp>
       <p:sp>
         <p:nvSpPr>
-          <p:cNvPr id="12" name="TextBox 11"/>
+          <p:cNvPr id="15" name="TextBox 14"/>
           <p:cNvSpPr/>
           <p:nvPr>
             <p:ph type="body" idx="13"/>
@@ -12414,7 +13226,7 @@
           <a:noFill/>
         </p:spPr>
         <p:txBody>
-          <a:bodyPr wrap="square">
+          <a:bodyPr wrap="square" lIns="0" rIns="0">
             <a:noAutofit/>
           </a:bodyPr>
           <a:lstStyle/>
@@ -12434,7 +13246,7 @@
       </p:sp>
       <p:sp>
         <p:nvSpPr>
-          <p:cNvPr id="13" name="Rectangle 12"/>
+          <p:cNvPr id="16" name="Rectangle 15"/>
           <p:cNvSpPr/>
           <p:nvPr>
             <p:ph type="body" idx="14"/>
@@ -12466,7 +13278,7 @@
       </p:sp>
       <p:sp>
         <p:nvSpPr>
-          <p:cNvPr id="14" name="TextBox 13"/>
+          <p:cNvPr id="17" name="TextBox 16"/>
           <p:cNvSpPr/>
           <p:nvPr>
             <p:ph type="body" idx="15"/>
@@ -12483,7 +13295,7 @@
           <a:noFill/>
         </p:spPr>
         <p:txBody>
-          <a:bodyPr wrap="square">
+          <a:bodyPr wrap="square" lIns="0" rIns="0">
             <a:noAutofit/>
           </a:bodyPr>
           <a:lstStyle/>
@@ -12541,7 +13353,35 @@
       </p:grpSpPr>
       <p:sp>
         <p:nvSpPr>
-          <p:cNvPr id="2" name="TextBox 1"/>
+          <p:cNvPr id="4" name="Slide Number Placeholder 3"/>
+          <p:cNvSpPr>
+            <a:spLocks noGrp="1"/>
+          </p:cNvSpPr>
+          <p:nvPr>
+            <p:ph type="sldNum" sz="quarter" idx="12"/>
+          </p:nvPr>
+        </p:nvSpPr>
+        <p:spPr>
+          <a:xfrm>
+            <a:off x="10363200" y="6035040"/>
+            <a:ext cx="1371600" cy="365760"/>
+          </a:xfrm>
+        </p:spPr>
+        <p:txBody>
+          <a:bodyPr/>
+          <a:lstStyle/>
+          <a:p>
+            <a:fld id="{C1FF6DA9-008F-8B48-92A6-B652298478BF}" type="slidenum">
+              <a:rPr lang="en-US" smtClean="0"/>
+              <a:t>‹#›</a:t>
+            </a:fld>
+            <a:endParaRPr lang="en-US"/>
+          </a:p>
+        </p:txBody>
+      </p:sp>
+      <p:sp>
+        <p:nvSpPr>
+          <p:cNvPr id="5" name="TextBox 4"/>
           <p:cNvSpPr/>
           <p:nvPr>
             <p:ph type="title"/>
@@ -12558,7 +13398,7 @@
           <a:noFill/>
         </p:spPr>
         <p:txBody>
-          <a:bodyPr wrap="square">
+          <a:bodyPr wrap="square" lIns="0" rIns="0">
             <a:noAutofit/>
           </a:bodyPr>
           <a:lstStyle/>
@@ -12578,7 +13418,7 @@
       </p:sp>
       <p:sp>
         <p:nvSpPr>
-          <p:cNvPr id="3" name="TextBox 2"/>
+          <p:cNvPr id="6" name="TextBox 5"/>
           <p:cNvSpPr/>
           <p:nvPr>
             <p:ph type="body" idx="1"/>
@@ -12595,7 +13435,7 @@
           <a:noFill/>
         </p:spPr>
         <p:txBody>
-          <a:bodyPr wrap="square">
+          <a:bodyPr wrap="square" lIns="0" rIns="0">
             <a:noAutofit/>
           </a:bodyPr>
           <a:lstStyle/>
@@ -12615,7 +13455,7 @@
       </p:sp>
       <p:sp>
         <p:nvSpPr>
-          <p:cNvPr id="4" name="TextBox 3"/>
+          <p:cNvPr id="7" name="TextBox 6"/>
           <p:cNvSpPr/>
           <p:nvPr>
             <p:ph type="body" idx="2"/>
@@ -12632,7 +13472,7 @@
           <a:noFill/>
         </p:spPr>
         <p:txBody>
-          <a:bodyPr wrap="square">
+          <a:bodyPr wrap="square" lIns="0" rIns="0">
             <a:noAutofit/>
           </a:bodyPr>
           <a:lstStyle/>
@@ -12652,7 +13492,7 @@
       </p:sp>
       <p:sp>
         <p:nvSpPr>
-          <p:cNvPr id="5" name="TextBox 4"/>
+          <p:cNvPr id="8" name="TextBox 7"/>
           <p:cNvSpPr/>
           <p:nvPr>
             <p:ph type="body" idx="3"/>
@@ -12669,7 +13509,7 @@
           <a:noFill/>
         </p:spPr>
         <p:txBody>
-          <a:bodyPr wrap="square">
+          <a:bodyPr wrap="square" lIns="0" rIns="0">
             <a:noAutofit/>
           </a:bodyPr>
           <a:lstStyle/>
@@ -12689,7 +13529,7 @@
       </p:sp>
       <p:sp>
         <p:nvSpPr>
-          <p:cNvPr id="6" name="Rectangle 5"/>
+          <p:cNvPr id="9" name="Rectangle 8"/>
           <p:cNvSpPr/>
           <p:nvPr>
             <p:ph type="body" idx="4"/>
@@ -12721,7 +13561,7 @@
       </p:sp>
       <p:sp>
         <p:nvSpPr>
-          <p:cNvPr id="7" name="TextBox 6"/>
+          <p:cNvPr id="10" name="TextBox 9"/>
           <p:cNvSpPr/>
           <p:nvPr>
             <p:ph type="body" idx="5"/>
@@ -12738,7 +13578,7 @@
           <a:noFill/>
         </p:spPr>
         <p:txBody>
-          <a:bodyPr wrap="square">
+          <a:bodyPr wrap="square" lIns="0" rIns="0">
             <a:noAutofit/>
           </a:bodyPr>
           <a:lstStyle/>
@@ -12758,7 +13598,7 @@
       </p:sp>
       <p:sp>
         <p:nvSpPr>
-          <p:cNvPr id="8" name="Rectangle 7"/>
+          <p:cNvPr id="11" name="Rectangle 10"/>
           <p:cNvSpPr/>
           <p:nvPr>
             <p:ph type="body" idx="6"/>
@@ -12790,7 +13630,7 @@
       </p:sp>
       <p:sp>
         <p:nvSpPr>
-          <p:cNvPr id="9" name="TextBox 8"/>
+          <p:cNvPr id="12" name="TextBox 11"/>
           <p:cNvSpPr/>
           <p:nvPr>
             <p:ph type="body" idx="7"/>
@@ -12807,7 +13647,7 @@
           <a:noFill/>
         </p:spPr>
         <p:txBody>
-          <a:bodyPr wrap="square">
+          <a:bodyPr wrap="square" lIns="0" rIns="0">
             <a:noAutofit/>
           </a:bodyPr>
           <a:lstStyle/>
@@ -12827,7 +13667,7 @@
       </p:sp>
       <p:sp>
         <p:nvSpPr>
-          <p:cNvPr id="10" name="TextBox 9"/>
+          <p:cNvPr id="13" name="TextBox 12"/>
           <p:cNvSpPr/>
           <p:nvPr>
             <p:ph type="body" idx="8"/>
@@ -12844,7 +13684,7 @@
           <a:noFill/>
         </p:spPr>
         <p:txBody>
-          <a:bodyPr wrap="square">
+          <a:bodyPr wrap="square" lIns="0" rIns="0">
             <a:noAutofit/>
           </a:bodyPr>
           <a:lstStyle/>
@@ -12864,7 +13704,7 @@
       </p:sp>
       <p:sp>
         <p:nvSpPr>
-          <p:cNvPr id="11" name="TextBox 10"/>
+          <p:cNvPr id="14" name="TextBox 13"/>
           <p:cNvSpPr/>
           <p:nvPr>
             <p:ph type="body" idx="9"/>
@@ -12881,7 +13721,7 @@
           <a:noFill/>
         </p:spPr>
         <p:txBody>
-          <a:bodyPr wrap="square">
+          <a:bodyPr wrap="square" lIns="0" rIns="0">
             <a:noAutofit/>
           </a:bodyPr>
           <a:lstStyle/>
@@ -12901,7 +13741,7 @@
       </p:sp>
       <p:sp>
         <p:nvSpPr>
-          <p:cNvPr id="12" name="TextBox 11"/>
+          <p:cNvPr id="15" name="TextBox 14"/>
           <p:cNvSpPr/>
           <p:nvPr>
             <p:ph type="body" idx="13"/>
@@ -12918,7 +13758,7 @@
           <a:noFill/>
         </p:spPr>
         <p:txBody>
-          <a:bodyPr wrap="square">
+          <a:bodyPr wrap="square" lIns="0" rIns="0">
             <a:noAutofit/>
           </a:bodyPr>
           <a:lstStyle/>
@@ -12938,7 +13778,7 @@
       </p:sp>
       <p:sp>
         <p:nvSpPr>
-          <p:cNvPr id="13" name="TextBox 12"/>
+          <p:cNvPr id="16" name="TextBox 15"/>
           <p:cNvSpPr/>
           <p:nvPr>
             <p:ph type="body" idx="14"/>
@@ -12955,7 +13795,7 @@
           <a:noFill/>
         </p:spPr>
         <p:txBody>
-          <a:bodyPr wrap="square">
+          <a:bodyPr wrap="square" lIns="0" rIns="0">
             <a:noAutofit/>
           </a:bodyPr>
           <a:lstStyle/>
@@ -12975,7 +13815,7 @@
       </p:sp>
       <p:sp>
         <p:nvSpPr>
-          <p:cNvPr id="14" name="TextBox 13"/>
+          <p:cNvPr id="17" name="TextBox 16"/>
           <p:cNvSpPr/>
           <p:nvPr>
             <p:ph type="body" idx="15"/>
@@ -12992,7 +13832,7 @@
           <a:noFill/>
         </p:spPr>
         <p:txBody>
-          <a:bodyPr wrap="square">
+          <a:bodyPr wrap="square" lIns="0" rIns="0">
             <a:noAutofit/>
           </a:bodyPr>
           <a:lstStyle/>
@@ -13012,7 +13852,7 @@
       </p:sp>
       <p:sp>
         <p:nvSpPr>
-          <p:cNvPr id="15" name="TextBox 14"/>
+          <p:cNvPr id="18" name="TextBox 17"/>
           <p:cNvSpPr/>
           <p:nvPr>
             <p:ph type="body" idx="16"/>
@@ -13029,7 +13869,7 @@
           <a:noFill/>
         </p:spPr>
         <p:txBody>
-          <a:bodyPr wrap="square">
+          <a:bodyPr wrap="square" lIns="0" rIns="0">
             <a:noAutofit/>
           </a:bodyPr>
           <a:lstStyle/>
@@ -13049,7 +13889,7 @@
       </p:sp>
       <p:sp>
         <p:nvSpPr>
-          <p:cNvPr id="16" name="TextBox 15"/>
+          <p:cNvPr id="19" name="TextBox 18"/>
           <p:cNvSpPr/>
           <p:nvPr>
             <p:ph type="body" idx="17"/>
@@ -13066,7 +13906,7 @@
           <a:noFill/>
         </p:spPr>
         <p:txBody>
-          <a:bodyPr wrap="square">
+          <a:bodyPr wrap="square" lIns="0" rIns="0">
             <a:noAutofit/>
           </a:bodyPr>
           <a:lstStyle/>
@@ -13086,7 +13926,7 @@
       </p:sp>
       <p:sp>
         <p:nvSpPr>
-          <p:cNvPr id="17" name="Rectangle 16"/>
+          <p:cNvPr id="20" name="Rectangle 19"/>
           <p:cNvSpPr/>
           <p:nvPr>
             <p:ph type="body" idx="18"/>
@@ -13118,7 +13958,7 @@
       </p:sp>
       <p:sp>
         <p:nvSpPr>
-          <p:cNvPr id="18" name="TextBox 17"/>
+          <p:cNvPr id="21" name="TextBox 20"/>
           <p:cNvSpPr/>
           <p:nvPr>
             <p:ph type="body" idx="19"/>
@@ -13135,7 +13975,7 @@
           <a:noFill/>
         </p:spPr>
         <p:txBody>
-          <a:bodyPr wrap="square">
+          <a:bodyPr wrap="square" lIns="0" rIns="0">
             <a:noAutofit/>
           </a:bodyPr>
           <a:lstStyle/>
@@ -13155,7 +13995,7 @@
       </p:sp>
       <p:sp>
         <p:nvSpPr>
-          <p:cNvPr id="19" name="TextBox 18"/>
+          <p:cNvPr id="22" name="TextBox 21"/>
           <p:cNvSpPr/>
           <p:nvPr>
             <p:ph type="body" idx="20"/>
@@ -13172,7 +14012,7 @@
           <a:noFill/>
         </p:spPr>
         <p:txBody>
-          <a:bodyPr wrap="square">
+          <a:bodyPr wrap="square" lIns="0" rIns="0">
             <a:noAutofit/>
           </a:bodyPr>
           <a:lstStyle/>
@@ -13192,7 +14032,7 @@
       </p:sp>
       <p:sp>
         <p:nvSpPr>
-          <p:cNvPr id="20" name="TextBox 19"/>
+          <p:cNvPr id="23" name="TextBox 22"/>
           <p:cNvSpPr/>
           <p:nvPr>
             <p:ph type="body" idx="21"/>
@@ -13209,7 +14049,7 @@
           <a:noFill/>
         </p:spPr>
         <p:txBody>
-          <a:bodyPr wrap="square">
+          <a:bodyPr wrap="square" lIns="0" rIns="0">
             <a:noAutofit/>
           </a:bodyPr>
           <a:lstStyle/>
@@ -14980,7 +15820,7 @@
           <a:noFill/>
         </p:spPr>
         <p:txBody>
-          <a:bodyPr wrap="square">
+          <a:bodyPr wrap="square" lIns="0" rIns="0">
             <a:noAutofit/>
           </a:bodyPr>
           <a:lstStyle/>
@@ -15015,7 +15855,7 @@
           <a:noFill/>
         </p:spPr>
         <p:txBody>
-          <a:bodyPr wrap="square">
+          <a:bodyPr wrap="square" lIns="0" rIns="0">
             <a:noAutofit/>
           </a:bodyPr>
           <a:lstStyle/>
@@ -15076,7 +15916,7 @@
           <a:noFill/>
         </p:spPr>
         <p:txBody>
-          <a:bodyPr wrap="square">
+          <a:bodyPr wrap="square" lIns="0" rIns="0">
             <a:noAutofit/>
           </a:bodyPr>
           <a:lstStyle/>
@@ -15111,7 +15951,7 @@
           <a:noFill/>
         </p:spPr>
         <p:txBody>
-          <a:bodyPr wrap="square">
+          <a:bodyPr wrap="square" lIns="0" rIns="0">
             <a:noAutofit/>
           </a:bodyPr>
           <a:lstStyle/>
@@ -15146,7 +15986,7 @@
           <a:noFill/>
         </p:spPr>
         <p:txBody>
-          <a:bodyPr wrap="square">
+          <a:bodyPr wrap="square" lIns="0" rIns="0">
             <a:noAutofit/>
           </a:bodyPr>
           <a:lstStyle/>
@@ -15181,7 +16021,7 @@
           <a:noFill/>
         </p:spPr>
         <p:txBody>
-          <a:bodyPr wrap="square">
+          <a:bodyPr wrap="square" lIns="0" rIns="0">
             <a:noAutofit/>
           </a:bodyPr>
           <a:lstStyle/>
@@ -15216,7 +16056,7 @@
           <a:noFill/>
         </p:spPr>
         <p:txBody>
-          <a:bodyPr wrap="square">
+          <a:bodyPr wrap="square" lIns="0" rIns="0">
             <a:noAutofit/>
           </a:bodyPr>
           <a:lstStyle/>
@@ -15251,7 +16091,7 @@
           <a:noFill/>
         </p:spPr>
         <p:txBody>
-          <a:bodyPr wrap="square">
+          <a:bodyPr wrap="square" lIns="0" rIns="0">
             <a:noAutofit/>
           </a:bodyPr>
           <a:lstStyle/>
@@ -15286,7 +16126,7 @@
           <a:noFill/>
         </p:spPr>
         <p:txBody>
-          <a:bodyPr wrap="square">
+          <a:bodyPr wrap="square" lIns="0" rIns="0">
             <a:noAutofit/>
           </a:bodyPr>
           <a:lstStyle/>
@@ -15321,7 +16161,7 @@
           <a:noFill/>
         </p:spPr>
         <p:txBody>
-          <a:bodyPr wrap="square">
+          <a:bodyPr wrap="square" lIns="0" rIns="0">
             <a:noAutofit/>
           </a:bodyPr>
           <a:lstStyle/>
@@ -15356,7 +16196,7 @@
           <a:noFill/>
         </p:spPr>
         <p:txBody>
-          <a:bodyPr wrap="square">
+          <a:bodyPr wrap="square" lIns="0" rIns="0">
             <a:noAutofit/>
           </a:bodyPr>
           <a:lstStyle/>
@@ -15391,7 +16231,7 @@
           <a:noFill/>
         </p:spPr>
         <p:txBody>
-          <a:bodyPr wrap="square">
+          <a:bodyPr wrap="square" lIns="0" rIns="0">
             <a:noAutofit/>
           </a:bodyPr>
           <a:lstStyle/>
@@ -15412,8 +16252,10 @@
       <p:sp>
         <p:nvSpPr>
           <p:cNvPr id="12" name="TextBox 11"/>
-          <p:cNvSpPr txBox="1"/>
-          <p:nvPr/>
+          <p:cNvSpPr/>
+          <p:nvPr>
+            <p:ph type="sldNum" idx="12"/>
+          </p:nvPr>
         </p:nvSpPr>
         <p:spPr>
           <a:xfrm>
@@ -15426,13 +16268,13 @@
           <a:noFill/>
         </p:spPr>
         <p:txBody>
-          <a:bodyPr wrap="square">
-            <a:noAutofit/>
-          </a:bodyPr>
-          <a:lstStyle/>
-          <a:p>
-            <a:pPr algn="l"/>
-            <a:r>
+          <a:bodyPr wrap="square" lIns="0" rIns="0">
+            <a:noAutofit/>
+          </a:bodyPr>
+          <a:lstStyle/>
+          <a:p>
+            <a:pPr algn="l"/>
+            <a:fld id="{1F2E3D4C-5B6A-4978-8765-43210FEDCBA9}" type="slidenum">
               <a:rPr sz="1600" b="0" i="0">
                 <a:solidFill>
                   <a:srgbClr val="8A8A9A"/>
@@ -15440,7 +16282,7 @@
                 <a:latin typeface="Calibri"/>
               </a:rPr>
               <a:t>2</a:t>
-            </a:r>
+            </a:fld>
           </a:p>
         </p:txBody>
       </p:sp>
@@ -15487,7 +16329,7 @@
           <a:noFill/>
         </p:spPr>
         <p:txBody>
-          <a:bodyPr wrap="square">
+          <a:bodyPr wrap="square" lIns="0" rIns="0">
             <a:noAutofit/>
           </a:bodyPr>
           <a:lstStyle/>
@@ -15522,7 +16364,7 @@
           <a:noFill/>
         </p:spPr>
         <p:txBody>
-          <a:bodyPr wrap="square">
+          <a:bodyPr wrap="square" lIns="0" rIns="0">
             <a:noAutofit/>
           </a:bodyPr>
           <a:lstStyle/>
@@ -15557,7 +16399,7 @@
           <a:noFill/>
         </p:spPr>
         <p:txBody>
-          <a:bodyPr wrap="square">
+          <a:bodyPr wrap="square" lIns="0" rIns="0">
             <a:noAutofit/>
           </a:bodyPr>
           <a:lstStyle/>
@@ -15592,7 +16434,7 @@
           <a:noFill/>
         </p:spPr>
         <p:txBody>
-          <a:bodyPr wrap="square">
+          <a:bodyPr wrap="square" lIns="0" rIns="0">
             <a:noAutofit/>
           </a:bodyPr>
           <a:lstStyle/>
@@ -15627,7 +16469,7 @@
           <a:noFill/>
         </p:spPr>
         <p:txBody>
-          <a:bodyPr wrap="square">
+          <a:bodyPr wrap="square" lIns="0" rIns="0">
             <a:noAutofit/>
           </a:bodyPr>
           <a:lstStyle/>
@@ -15662,7 +16504,7 @@
           <a:noFill/>
         </p:spPr>
         <p:txBody>
-          <a:bodyPr wrap="square">
+          <a:bodyPr wrap="square" lIns="0" rIns="0">
             <a:noAutofit/>
           </a:bodyPr>
           <a:lstStyle/>
@@ -15697,7 +16539,7 @@
           <a:noFill/>
         </p:spPr>
         <p:txBody>
-          <a:bodyPr wrap="square">
+          <a:bodyPr wrap="square" lIns="0" rIns="0">
             <a:noAutofit/>
           </a:bodyPr>
           <a:lstStyle/>
@@ -15718,8 +16560,10 @@
       <p:sp>
         <p:nvSpPr>
           <p:cNvPr id="9" name="TextBox 8"/>
-          <p:cNvSpPr txBox="1"/>
-          <p:nvPr/>
+          <p:cNvSpPr/>
+          <p:nvPr>
+            <p:ph type="sldNum" idx="12"/>
+          </p:nvPr>
         </p:nvSpPr>
         <p:spPr>
           <a:xfrm>
@@ -15732,13 +16576,13 @@
           <a:noFill/>
         </p:spPr>
         <p:txBody>
-          <a:bodyPr wrap="square">
-            <a:noAutofit/>
-          </a:bodyPr>
-          <a:lstStyle/>
-          <a:p>
-            <a:pPr algn="l"/>
-            <a:r>
+          <a:bodyPr wrap="square" lIns="0" rIns="0">
+            <a:noAutofit/>
+          </a:bodyPr>
+          <a:lstStyle/>
+          <a:p>
+            <a:pPr algn="l"/>
+            <a:fld id="{1F2E3D4C-5B6A-4978-8765-43210FEDCBA9}" type="slidenum">
               <a:rPr sz="1600" b="0" i="0">
                 <a:solidFill>
                   <a:srgbClr val="8A8A9A"/>
@@ -15746,7 +16590,7 @@
                 <a:latin typeface="Calibri"/>
               </a:rPr>
               <a:t>3</a:t>
-            </a:r>
+            </a:fld>
           </a:p>
         </p:txBody>
       </p:sp>
@@ -15793,7 +16637,7 @@
           <a:noFill/>
         </p:spPr>
         <p:txBody>
-          <a:bodyPr wrap="square">
+          <a:bodyPr wrap="square" lIns="0" rIns="0">
             <a:noAutofit/>
           </a:bodyPr>
           <a:lstStyle/>
@@ -15828,7 +16672,7 @@
           <a:noFill/>
         </p:spPr>
         <p:txBody>
-          <a:bodyPr wrap="square">
+          <a:bodyPr wrap="square" lIns="0" rIns="0">
             <a:noAutofit/>
           </a:bodyPr>
           <a:lstStyle/>
@@ -15863,7 +16707,7 @@
           <a:noFill/>
         </p:spPr>
         <p:txBody>
-          <a:bodyPr wrap="square">
+          <a:bodyPr wrap="square" lIns="0" rIns="0">
             <a:noAutofit/>
           </a:bodyPr>
           <a:lstStyle/>
@@ -15898,7 +16742,7 @@
           <a:noFill/>
         </p:spPr>
         <p:txBody>
-          <a:bodyPr wrap="square">
+          <a:bodyPr wrap="square" lIns="0" rIns="0">
             <a:noAutofit/>
           </a:bodyPr>
           <a:lstStyle/>
@@ -15933,7 +16777,7 @@
           <a:noFill/>
         </p:spPr>
         <p:txBody>
-          <a:bodyPr wrap="square">
+          <a:bodyPr wrap="square" lIns="0" rIns="0">
             <a:noAutofit/>
           </a:bodyPr>
           <a:lstStyle/>
@@ -15968,7 +16812,7 @@
           <a:noFill/>
         </p:spPr>
         <p:txBody>
-          <a:bodyPr wrap="square">
+          <a:bodyPr wrap="square" lIns="0" rIns="0">
             <a:noAutofit/>
           </a:bodyPr>
           <a:lstStyle/>
@@ -16003,7 +16847,7 @@
           <a:noFill/>
         </p:spPr>
         <p:txBody>
-          <a:bodyPr wrap="square">
+          <a:bodyPr wrap="square" lIns="0" rIns="0">
             <a:noAutofit/>
           </a:bodyPr>
           <a:lstStyle/>
@@ -16038,7 +16882,7 @@
           <a:noFill/>
         </p:spPr>
         <p:txBody>
-          <a:bodyPr wrap="square">
+          <a:bodyPr wrap="square" lIns="0" rIns="0">
             <a:noAutofit/>
           </a:bodyPr>
           <a:lstStyle/>
@@ -16073,7 +16917,7 @@
           <a:noFill/>
         </p:spPr>
         <p:txBody>
-          <a:bodyPr wrap="square">
+          <a:bodyPr wrap="square" lIns="0" rIns="0">
             <a:noAutofit/>
           </a:bodyPr>
           <a:lstStyle/>
@@ -16094,8 +16938,10 @@
       <p:sp>
         <p:nvSpPr>
           <p:cNvPr id="11" name="TextBox 10"/>
-          <p:cNvSpPr txBox="1"/>
-          <p:nvPr/>
+          <p:cNvSpPr/>
+          <p:nvPr>
+            <p:ph type="sldNum" idx="12"/>
+          </p:nvPr>
         </p:nvSpPr>
         <p:spPr>
           <a:xfrm>
@@ -16108,13 +16954,13 @@
           <a:noFill/>
         </p:spPr>
         <p:txBody>
-          <a:bodyPr wrap="square">
-            <a:noAutofit/>
-          </a:bodyPr>
-          <a:lstStyle/>
-          <a:p>
-            <a:pPr algn="l"/>
-            <a:r>
+          <a:bodyPr wrap="square" lIns="0" rIns="0">
+            <a:noAutofit/>
+          </a:bodyPr>
+          <a:lstStyle/>
+          <a:p>
+            <a:pPr algn="l"/>
+            <a:fld id="{1F2E3D4C-5B6A-4978-8765-43210FEDCBA9}" type="slidenum">
               <a:rPr sz="1600" b="0" i="0">
                 <a:solidFill>
                   <a:srgbClr val="8A8A9A"/>
@@ -16122,7 +16968,7 @@
                 <a:latin typeface="Calibri"/>
               </a:rPr>
               <a:t>4</a:t>
-            </a:r>
+            </a:fld>
           </a:p>
         </p:txBody>
       </p:sp>

--- a/examples/agency-pipeline-demo/deck.pptx
+++ b/examples/agency-pipeline-demo/deck.pptx
@@ -7418,7 +7418,7 @@
         <p:spPr>
           <a:xfrm>
             <a:off x="0" y="3950208"/>
-            <a:ext cx="7450614" cy="518159"/>
+            <a:ext cx="5707380" cy="518159"/>
           </a:xfrm>
           <a:prstGeom prst="rect">
             <a:avLst/>
@@ -7844,7 +7844,7 @@
         <p:spPr>
           <a:xfrm>
             <a:off x="3585131" y="2593848"/>
-            <a:ext cx="5021739" cy="609600"/>
+            <a:ext cx="5021738" cy="609600"/>
           </a:xfrm>
           <a:prstGeom prst="rect">
             <a:avLst/>
@@ -7949,8 +7949,8 @@
         </p:nvSpPr>
         <p:spPr>
           <a:xfrm>
-            <a:off x="7356496" y="2593848"/>
-            <a:ext cx="4835504" cy="609600"/>
+            <a:off x="7701280" y="2593848"/>
+            <a:ext cx="4490720" cy="609600"/>
           </a:xfrm>
           <a:prstGeom prst="rect">
             <a:avLst/>
@@ -8267,8 +8267,8 @@
         </p:nvSpPr>
         <p:spPr>
           <a:xfrm>
-            <a:off x="7264907" y="4861560"/>
-            <a:ext cx="4927093" cy="609600"/>
+            <a:off x="7701280" y="4861560"/>
+            <a:ext cx="4490720" cy="609600"/>
           </a:xfrm>
           <a:prstGeom prst="rect">
             <a:avLst/>
@@ -9694,7 +9694,7 @@
         <p:spPr>
           <a:xfrm>
             <a:off x="113596" y="1831849"/>
-            <a:ext cx="4263529" cy="883919"/>
+            <a:ext cx="4263528" cy="883919"/>
           </a:xfrm>
           <a:prstGeom prst="rect">
             <a:avLst/>
@@ -9874,7 +9874,7 @@
         <p:spPr>
           <a:xfrm>
             <a:off x="3528964" y="2990088"/>
-            <a:ext cx="5134073" cy="1645920"/>
+            <a:ext cx="5134072" cy="1645920"/>
           </a:xfrm>
           <a:prstGeom prst="rect">
             <a:avLst/>
@@ -10086,7 +10086,7 @@
         <p:spPr>
           <a:xfrm>
             <a:off x="9085044" y="4910328"/>
-            <a:ext cx="1723192" cy="518159"/>
+            <a:ext cx="1723191" cy="518159"/>
           </a:xfrm>
           <a:prstGeom prst="rect">
             <a:avLst/>
@@ -11908,7 +11908,7 @@
         <p:spPr>
           <a:xfrm>
             <a:off x="4518512" y="1645920"/>
-            <a:ext cx="3154977" cy="762000"/>
+            <a:ext cx="3154976" cy="762000"/>
           </a:xfrm>
           <a:prstGeom prst="rect">
             <a:avLst/>
@@ -12093,7 +12093,7 @@
         <p:spPr>
           <a:xfrm>
             <a:off x="5140147" y="5583935"/>
-            <a:ext cx="1911707" cy="426720"/>
+            <a:ext cx="1911706" cy="426720"/>
           </a:xfrm>
           <a:prstGeom prst="rect">
             <a:avLst/>
@@ -13676,7 +13676,7 @@
         <p:spPr>
           <a:xfrm>
             <a:off x="6339331" y="2401823"/>
-            <a:ext cx="2945387" cy="936752"/>
+            <a:ext cx="2945386" cy="936752"/>
           </a:xfrm>
           <a:prstGeom prst="rect">
             <a:avLst/>
@@ -13787,7 +13787,7 @@
         <p:spPr>
           <a:xfrm>
             <a:off x="3632707" y="3612895"/>
-            <a:ext cx="2945387" cy="936752"/>
+            <a:ext cx="2945386" cy="936752"/>
           </a:xfrm>
           <a:prstGeom prst="rect">
             <a:avLst/>
@@ -13861,7 +13861,7 @@
         <p:spPr>
           <a:xfrm>
             <a:off x="9045955" y="3612895"/>
-            <a:ext cx="2945387" cy="936752"/>
+            <a:ext cx="2945386" cy="936752"/>
           </a:xfrm>
           <a:prstGeom prst="rect">
             <a:avLst/>
@@ -14041,7 +14041,7 @@
         <p:spPr>
           <a:xfrm>
             <a:off x="9045955" y="4823967"/>
-            <a:ext cx="2945387" cy="936752"/>
+            <a:ext cx="2945386" cy="936752"/>
           </a:xfrm>
           <a:prstGeom prst="rect">
             <a:avLst/>

--- a/examples/agency-pipeline-demo/deck.pptx
+++ b/examples/agency-pipeline-demo/deck.pptx
@@ -739,8 +739,8 @@
         </p:nvSpPr>
         <p:spPr>
           <a:xfrm>
-            <a:off x="10363200" y="6035040"/>
-            <a:ext cx="1371600" cy="365760"/>
+            <a:off x="11186160" y="6035040"/>
+            <a:ext cx="548640" cy="365760"/>
           </a:xfrm>
         </p:spPr>
         <p:txBody>
@@ -783,7 +783,7 @@
             <a:r>
               <a:rPr sz="5800" b="1" i="0">
                 <a:solidFill>
-                  <a:srgbClr val="16504B"/>
+                  <a:srgbClr val="E2A03F"/>
                 </a:solidFill>
                 <a:latin typeface="Calibri"/>
               </a:rPr>
@@ -842,8 +842,8 @@
         </p:nvSpPr>
         <p:spPr>
           <a:xfrm>
-            <a:off x="10363200" y="6035040"/>
-            <a:ext cx="1371600" cy="365760"/>
+            <a:off x="11186160" y="6035040"/>
+            <a:ext cx="548640" cy="365760"/>
           </a:xfrm>
         </p:spPr>
         <p:txBody>
@@ -886,7 +886,7 @@
             <a:r>
               <a:rPr sz="4200" b="1" i="0">
                 <a:solidFill>
-                  <a:srgbClr val="16504B"/>
+                  <a:srgbClr val="E2A03F"/>
                 </a:solidFill>
                 <a:latin typeface="Calibri"/>
               </a:rPr>
@@ -1167,8 +1167,8 @@
         </p:nvSpPr>
         <p:spPr>
           <a:xfrm>
-            <a:off x="10363200" y="6035040"/>
-            <a:ext cx="1371600" cy="365760"/>
+            <a:off x="11186160" y="6035040"/>
+            <a:ext cx="548640" cy="365760"/>
           </a:xfrm>
         </p:spPr>
         <p:txBody>
@@ -1211,7 +1211,7 @@
             <a:r>
               <a:rPr sz="4200" b="1" i="0">
                 <a:solidFill>
-                  <a:srgbClr val="16504B"/>
+                  <a:srgbClr val="E2A03F"/>
                 </a:solidFill>
                 <a:latin typeface="Calibri"/>
               </a:rPr>
@@ -1492,8 +1492,8 @@
         </p:nvSpPr>
         <p:spPr>
           <a:xfrm>
-            <a:off x="10363200" y="6035040"/>
-            <a:ext cx="1371600" cy="365760"/>
+            <a:off x="11186160" y="6035040"/>
+            <a:ext cx="548640" cy="365760"/>
           </a:xfrm>
         </p:spPr>
         <p:txBody>
@@ -1536,7 +1536,7 @@
             <a:r>
               <a:rPr sz="4200" b="1" i="0">
                 <a:solidFill>
-                  <a:srgbClr val="16504B"/>
+                  <a:srgbClr val="E2A03F"/>
                 </a:solidFill>
                 <a:latin typeface="Calibri"/>
               </a:rPr>
@@ -1573,7 +1573,7 @@
             <a:r>
               <a:rPr sz="3400" b="1" i="0">
                 <a:solidFill>
-                  <a:srgbClr val="16504B"/>
+                  <a:srgbClr val="E2A03F"/>
                 </a:solidFill>
                 <a:latin typeface="Calibri"/>
               </a:rPr>
@@ -1610,7 +1610,7 @@
             <a:r>
               <a:rPr sz="3400" b="1" i="0">
                 <a:solidFill>
-                  <a:srgbClr val="16504B"/>
+                  <a:srgbClr val="E2A03F"/>
                 </a:solidFill>
                 <a:latin typeface="Calibri"/>
               </a:rPr>
@@ -1891,8 +1891,8 @@
         </p:nvSpPr>
         <p:spPr>
           <a:xfrm>
-            <a:off x="10363200" y="6035040"/>
-            <a:ext cx="1371600" cy="365760"/>
+            <a:off x="11186160" y="6035040"/>
+            <a:ext cx="548640" cy="365760"/>
           </a:xfrm>
         </p:spPr>
         <p:txBody>
@@ -1935,7 +1935,7 @@
             <a:r>
               <a:rPr sz="4200" b="1" i="0">
                 <a:solidFill>
-                  <a:srgbClr val="16504B"/>
+                  <a:srgbClr val="E2A03F"/>
                 </a:solidFill>
                 <a:latin typeface="Calibri"/>
               </a:rPr>
@@ -2438,8 +2438,8 @@
         </p:nvSpPr>
         <p:spPr>
           <a:xfrm>
-            <a:off x="10363200" y="6035040"/>
-            <a:ext cx="1371600" cy="365760"/>
+            <a:off x="11186160" y="6035040"/>
+            <a:ext cx="548640" cy="365760"/>
           </a:xfrm>
         </p:spPr>
         <p:txBody>
@@ -2482,7 +2482,7 @@
             <a:r>
               <a:rPr sz="4200" b="1" i="0">
                 <a:solidFill>
-                  <a:srgbClr val="16504B"/>
+                  <a:srgbClr val="E2A03F"/>
                 </a:solidFill>
                 <a:latin typeface="Calibri"/>
               </a:rPr>
@@ -2502,6 +2502,43 @@
         <p:spPr>
           <a:xfrm>
             <a:off x="6233160" y="1499616"/>
+            <a:ext cx="5958840" cy="609600"/>
+          </a:xfrm>
+          <a:prstGeom prst="rect">
+            <a:avLst/>
+          </a:prstGeom>
+          <a:noFill/>
+        </p:spPr>
+        <p:txBody>
+          <a:bodyPr wrap="none" lIns="0" rIns="0">
+            <a:noAutofit/>
+          </a:bodyPr>
+          <a:lstStyle/>
+          <a:p>
+            <a:pPr algn="l"/>
+            <a:r>
+              <a:rPr sz="3400" b="0" i="0">
+                <a:solidFill>
+                  <a:srgbClr val="1C1C28"/>
+                </a:solidFill>
+                <a:latin typeface="Calibri"/>
+              </a:rPr>
+              <a:t>Built with customers.</a:t>
+            </a:r>
+          </a:p>
+        </p:txBody>
+      </p:sp>
+      <p:sp>
+        <p:nvSpPr>
+          <p:cNvPr id="7" name="TextBox 6"/>
+          <p:cNvSpPr/>
+          <p:nvPr>
+            <p:ph type="body" idx="2"/>
+          </p:nvPr>
+        </p:nvSpPr>
+        <p:spPr>
+          <a:xfrm>
+            <a:off x="6233160" y="2383536"/>
             <a:ext cx="5501640" cy="1127760"/>
           </a:xfrm>
           <a:prstGeom prst="rect">
@@ -2523,44 +2560,7 @@
                 </a:solidFill>
                 <a:latin typeface="Calibri"/>
               </a:rPr>
-              <a:t>Built with customers, not just for them.</a:t>
-            </a:r>
-          </a:p>
-        </p:txBody>
-      </p:sp>
-      <p:sp>
-        <p:nvSpPr>
-          <p:cNvPr id="7" name="TextBox 6"/>
-          <p:cNvSpPr/>
-          <p:nvPr>
-            <p:ph type="body" idx="2"/>
-          </p:nvPr>
-        </p:nvSpPr>
-        <p:spPr>
-          <a:xfrm>
-            <a:off x="6233160" y="2901696"/>
-            <a:ext cx="5501640" cy="1127760"/>
-          </a:xfrm>
-          <a:prstGeom prst="rect">
-            <a:avLst/>
-          </a:prstGeom>
-          <a:noFill/>
-        </p:spPr>
-        <p:txBody>
-          <a:bodyPr wrap="square" lIns="0" rIns="0">
-            <a:noAutofit/>
-          </a:bodyPr>
-          <a:lstStyle/>
-          <a:p>
-            <a:pPr algn="l"/>
-            <a:r>
-              <a:rPr sz="3400" b="0" i="0">
-                <a:solidFill>
-                  <a:srgbClr val="1C1C28"/>
-                </a:solidFill>
-                <a:latin typeface="Calibri"/>
-              </a:rPr>
-              <a:t>60% faster rollout; 50% fewer tickets.</a:t>
+              <a:t>60% faster; 50% fewer tickets</a:t>
             </a:r>
           </a:p>
         </p:txBody>
@@ -2579,405 +2579,6 @@
 </file>
 
 <file path=ppt/slideLayouts/slideLayout18.xml><?xml version="1.0" encoding="utf-8"?>
-<p:sldLayout xmlns:a="http://schemas.openxmlformats.org/drawingml/2006/main" xmlns:r="http://schemas.openxmlformats.org/officeDocument/2006/relationships" xmlns:p="http://schemas.openxmlformats.org/presentationml/2006/main" type="blank" preserve="1">
-  <p:cSld name="slidekit · Card Grid">
-    <p:bg>
-      <p:bgPr>
-        <a:solidFill>
-          <a:srgbClr val="FFFFFF"/>
-        </a:solidFill>
-        <a:effectLst/>
-      </p:bgPr>
-    </p:bg>
-    <p:spTree>
-      <p:nvGrpSpPr>
-        <p:cNvPr id="1" name=""/>
-        <p:cNvGrpSpPr/>
-        <p:nvPr/>
-      </p:nvGrpSpPr>
-      <p:grpSpPr>
-        <a:xfrm>
-          <a:off x="0" y="0"/>
-          <a:ext cx="0" cy="0"/>
-          <a:chOff x="0" y="0"/>
-          <a:chExt cx="0" cy="0"/>
-        </a:xfrm>
-      </p:grpSpPr>
-      <p:sp>
-        <p:nvSpPr>
-          <p:cNvPr id="4" name="Slide Number Placeholder 3"/>
-          <p:cNvSpPr>
-            <a:spLocks noGrp="1"/>
-          </p:cNvSpPr>
-          <p:nvPr>
-            <p:ph type="sldNum" sz="quarter" idx="12"/>
-          </p:nvPr>
-        </p:nvSpPr>
-        <p:spPr>
-          <a:xfrm>
-            <a:off x="10363200" y="6035040"/>
-            <a:ext cx="1371600" cy="365760"/>
-          </a:xfrm>
-        </p:spPr>
-        <p:txBody>
-          <a:bodyPr/>
-          <a:lstStyle/>
-          <a:p>
-            <a:fld id="{C1FF6DA9-008F-8B48-92A6-B652298478BF}" type="slidenum">
-              <a:rPr lang="en-US" smtClean="0"/>
-              <a:t>‹#›</a:t>
-            </a:fld>
-            <a:endParaRPr lang="en-US"/>
-          </a:p>
-        </p:txBody>
-      </p:sp>
-      <p:sp>
-        <p:nvSpPr>
-          <p:cNvPr id="5" name="TextBox 4"/>
-          <p:cNvSpPr/>
-          <p:nvPr>
-            <p:ph type="title"/>
-          </p:nvPr>
-        </p:nvSpPr>
-        <p:spPr>
-          <a:xfrm>
-            <a:off x="457200" y="457200"/>
-            <a:ext cx="11277600" cy="768096"/>
-          </a:xfrm>
-          <a:prstGeom prst="rect">
-            <a:avLst/>
-          </a:prstGeom>
-          <a:noFill/>
-        </p:spPr>
-        <p:txBody>
-          <a:bodyPr wrap="none" lIns="0" rIns="0">
-            <a:noAutofit/>
-          </a:bodyPr>
-          <a:lstStyle/>
-          <a:p>
-            <a:pPr algn="l"/>
-            <a:r>
-              <a:rPr sz="4200" b="1" i="0">
-                <a:solidFill>
-                  <a:srgbClr val="16504B"/>
-                </a:solidFill>
-                <a:latin typeface="Calibri"/>
-              </a:rPr>
-              <a:t>What We Offer</a:t>
-            </a:r>
-          </a:p>
-        </p:txBody>
-      </p:sp>
-      <p:sp>
-        <p:nvSpPr>
-          <p:cNvPr id="6" name="TextBox 5"/>
-          <p:cNvSpPr/>
-          <p:nvPr>
-            <p:ph type="body" idx="1"/>
-          </p:nvPr>
-        </p:nvSpPr>
-        <p:spPr>
-          <a:xfrm>
-            <a:off x="457200" y="1499616"/>
-            <a:ext cx="3307694" cy="518159"/>
-          </a:xfrm>
-          <a:prstGeom prst="rect">
-            <a:avLst/>
-          </a:prstGeom>
-          <a:noFill/>
-        </p:spPr>
-        <p:txBody>
-          <a:bodyPr wrap="none" lIns="0" rIns="0">
-            <a:noAutofit/>
-          </a:bodyPr>
-          <a:lstStyle/>
-          <a:p>
-            <a:pPr algn="l"/>
-            <a:r>
-              <a:rPr sz="3400" b="1" i="0">
-                <a:solidFill>
-                  <a:srgbClr val="1C1C28"/>
-                </a:solidFill>
-                <a:latin typeface="Calibri"/>
-              </a:rPr>
-              <a:t>Insights</a:t>
-            </a:r>
-          </a:p>
-        </p:txBody>
-      </p:sp>
-      <p:sp>
-        <p:nvSpPr>
-          <p:cNvPr id="7" name="TextBox 6"/>
-          <p:cNvSpPr/>
-          <p:nvPr>
-            <p:ph type="body" idx="2"/>
-          </p:nvPr>
-        </p:nvSpPr>
-        <p:spPr>
-          <a:xfrm>
-            <a:off x="457200" y="2154935"/>
-            <a:ext cx="2613660" cy="3605785"/>
-          </a:xfrm>
-          <a:prstGeom prst="rect">
-            <a:avLst/>
-          </a:prstGeom>
-          <a:noFill/>
-        </p:spPr>
-        <p:txBody>
-          <a:bodyPr wrap="square" lIns="0" rIns="0">
-            <a:noAutofit/>
-          </a:bodyPr>
-          <a:lstStyle/>
-          <a:p>
-            <a:pPr algn="l"/>
-            <a:r>
-              <a:rPr sz="3400" b="0" i="0">
-                <a:solidFill>
-                  <a:srgbClr val="1C1C28"/>
-                </a:solidFill>
-                <a:latin typeface="Calibri"/>
-              </a:rPr>
-              <a:t>Live data and AI analytics.</a:t>
-            </a:r>
-          </a:p>
-        </p:txBody>
-      </p:sp>
-      <p:sp>
-        <p:nvSpPr>
-          <p:cNvPr id="8" name="TextBox 7"/>
-          <p:cNvSpPr/>
-          <p:nvPr>
-            <p:ph type="body" idx="3"/>
-          </p:nvPr>
-        </p:nvSpPr>
-        <p:spPr>
-          <a:xfrm>
-            <a:off x="3345180" y="1499616"/>
-            <a:ext cx="3408561" cy="518159"/>
-          </a:xfrm>
-          <a:prstGeom prst="rect">
-            <a:avLst/>
-          </a:prstGeom>
-          <a:noFill/>
-        </p:spPr>
-        <p:txBody>
-          <a:bodyPr wrap="none" lIns="0" rIns="0">
-            <a:noAutofit/>
-          </a:bodyPr>
-          <a:lstStyle/>
-          <a:p>
-            <a:pPr algn="l"/>
-            <a:r>
-              <a:rPr sz="3400" b="1" i="0">
-                <a:solidFill>
-                  <a:srgbClr val="1C1C28"/>
-                </a:solidFill>
-                <a:latin typeface="Calibri"/>
-              </a:rPr>
-              <a:t>Security</a:t>
-            </a:r>
-          </a:p>
-        </p:txBody>
-      </p:sp>
-      <p:sp>
-        <p:nvSpPr>
-          <p:cNvPr id="9" name="TextBox 8"/>
-          <p:cNvSpPr/>
-          <p:nvPr>
-            <p:ph type="body" idx="4"/>
-          </p:nvPr>
-        </p:nvSpPr>
-        <p:spPr>
-          <a:xfrm>
-            <a:off x="3345180" y="2154935"/>
-            <a:ext cx="2613660" cy="3605785"/>
-          </a:xfrm>
-          <a:prstGeom prst="rect">
-            <a:avLst/>
-          </a:prstGeom>
-          <a:noFill/>
-        </p:spPr>
-        <p:txBody>
-          <a:bodyPr wrap="square" lIns="0" rIns="0">
-            <a:noAutofit/>
-          </a:bodyPr>
-          <a:lstStyle/>
-          <a:p>
-            <a:pPr algn="l"/>
-            <a:r>
-              <a:rPr sz="3400" b="0" i="0">
-                <a:solidFill>
-                  <a:srgbClr val="1C1C28"/>
-                </a:solidFill>
-                <a:latin typeface="Calibri"/>
-              </a:rPr>
-              <a:t>Zero-trust, SOC 2 ready.</a:t>
-            </a:r>
-          </a:p>
-        </p:txBody>
-      </p:sp>
-      <p:sp>
-        <p:nvSpPr>
-          <p:cNvPr id="10" name="TextBox 9"/>
-          <p:cNvSpPr/>
-          <p:nvPr>
-            <p:ph type="body" idx="5"/>
-          </p:nvPr>
-        </p:nvSpPr>
-        <p:spPr>
-          <a:xfrm>
-            <a:off x="6233160" y="1499616"/>
-            <a:ext cx="2613660" cy="518159"/>
-          </a:xfrm>
-          <a:prstGeom prst="rect">
-            <a:avLst/>
-          </a:prstGeom>
-          <a:noFill/>
-        </p:spPr>
-        <p:txBody>
-          <a:bodyPr wrap="none" lIns="0" rIns="0">
-            <a:noAutofit/>
-          </a:bodyPr>
-          <a:lstStyle/>
-          <a:p>
-            <a:pPr algn="l"/>
-            <a:r>
-              <a:rPr sz="3400" b="1" i="0">
-                <a:solidFill>
-                  <a:srgbClr val="1C1C28"/>
-                </a:solidFill>
-                <a:latin typeface="Calibri"/>
-              </a:rPr>
-              <a:t>Speed</a:t>
-            </a:r>
-          </a:p>
-        </p:txBody>
-      </p:sp>
-      <p:sp>
-        <p:nvSpPr>
-          <p:cNvPr id="11" name="TextBox 10"/>
-          <p:cNvSpPr/>
-          <p:nvPr>
-            <p:ph type="body" idx="6"/>
-          </p:nvPr>
-        </p:nvSpPr>
-        <p:spPr>
-          <a:xfrm>
-            <a:off x="6233160" y="2154935"/>
-            <a:ext cx="2613660" cy="3605785"/>
-          </a:xfrm>
-          <a:prstGeom prst="rect">
-            <a:avLst/>
-          </a:prstGeom>
-          <a:noFill/>
-        </p:spPr>
-        <p:txBody>
-          <a:bodyPr wrap="square" lIns="0" rIns="0">
-            <a:noAutofit/>
-          </a:bodyPr>
-          <a:lstStyle/>
-          <a:p>
-            <a:pPr algn="l"/>
-            <a:r>
-              <a:rPr sz="3400" b="0" i="0">
-                <a:solidFill>
-                  <a:srgbClr val="1C1C28"/>
-                </a:solidFill>
-                <a:latin typeface="Calibri"/>
-              </a:rPr>
-              <a:t>Sub-100ms p99 latency.</a:t>
-            </a:r>
-          </a:p>
-        </p:txBody>
-      </p:sp>
-      <p:sp>
-        <p:nvSpPr>
-          <p:cNvPr id="12" name="TextBox 11"/>
-          <p:cNvSpPr/>
-          <p:nvPr>
-            <p:ph type="body" idx="7"/>
-          </p:nvPr>
-        </p:nvSpPr>
-        <p:spPr>
-          <a:xfrm>
-            <a:off x="9121140" y="1499616"/>
-            <a:ext cx="2613660" cy="518159"/>
-          </a:xfrm>
-          <a:prstGeom prst="rect">
-            <a:avLst/>
-          </a:prstGeom>
-          <a:noFill/>
-        </p:spPr>
-        <p:txBody>
-          <a:bodyPr wrap="none" lIns="0" rIns="0">
-            <a:noAutofit/>
-          </a:bodyPr>
-          <a:lstStyle/>
-          <a:p>
-            <a:pPr algn="l"/>
-            <a:r>
-              <a:rPr sz="3400" b="1" i="0">
-                <a:solidFill>
-                  <a:srgbClr val="1C1C28"/>
-                </a:solidFill>
-                <a:latin typeface="Calibri"/>
-              </a:rPr>
-              <a:t>APIs</a:t>
-            </a:r>
-          </a:p>
-        </p:txBody>
-      </p:sp>
-      <p:sp>
-        <p:nvSpPr>
-          <p:cNvPr id="13" name="TextBox 12"/>
-          <p:cNvSpPr/>
-          <p:nvPr>
-            <p:ph type="body" idx="8"/>
-          </p:nvPr>
-        </p:nvSpPr>
-        <p:spPr>
-          <a:xfrm>
-            <a:off x="9121140" y="2154935"/>
-            <a:ext cx="2613660" cy="3605785"/>
-          </a:xfrm>
-          <a:prstGeom prst="rect">
-            <a:avLst/>
-          </a:prstGeom>
-          <a:noFill/>
-        </p:spPr>
-        <p:txBody>
-          <a:bodyPr wrap="square" lIns="0" rIns="0">
-            <a:noAutofit/>
-          </a:bodyPr>
-          <a:lstStyle/>
-          <a:p>
-            <a:pPr algn="l"/>
-            <a:r>
-              <a:rPr sz="3400" b="0" i="0">
-                <a:solidFill>
-                  <a:srgbClr val="1C1C28"/>
-                </a:solidFill>
-                <a:latin typeface="Calibri"/>
-              </a:rPr>
-              <a:t>300+ open connectors.</a:t>
-            </a:r>
-          </a:p>
-        </p:txBody>
-      </p:sp>
-    </p:spTree>
-    <p:extLst>
-      <p:ext uri="{BB962C8B-B14F-4D97-AF65-F5344CB8AC3E}">
-        <p14:creationId xmlns:p14="http://schemas.microsoft.com/office/powerpoint/2010/main" val="1212999818"/>
-      </p:ext>
-    </p:extLst>
-  </p:cSld>
-  <p:clrMapOvr>
-    <a:masterClrMapping/>
-  </p:clrMapOvr>
-</p:sldLayout>
-</file>
-
-<file path=ppt/slideLayouts/slideLayout19.xml><?xml version="1.0" encoding="utf-8"?>
 <p:sldLayout xmlns:a="http://schemas.openxmlformats.org/drawingml/2006/main" xmlns:r="http://schemas.openxmlformats.org/officeDocument/2006/relationships" xmlns:p="http://schemas.openxmlformats.org/presentationml/2006/main" type="blank" preserve="1">
   <p:cSld name="slidekit · Section Divider">
     <p:bg>
@@ -3014,8 +2615,8 @@
         </p:nvSpPr>
         <p:spPr>
           <a:xfrm>
-            <a:off x="10363200" y="6035040"/>
-            <a:ext cx="1371600" cy="365760"/>
+            <a:off x="11186160" y="6035040"/>
+            <a:ext cx="548640" cy="365760"/>
           </a:xfrm>
         </p:spPr>
         <p:txBody>
@@ -3127,11 +2728,516 @@
             <a:r>
               <a:rPr sz="4200" b="1" i="0">
                 <a:solidFill>
+                  <a:srgbClr val="E2A03F"/>
+                </a:solidFill>
+                <a:latin typeface="Calibri"/>
+              </a:rPr>
+              <a:t>Where We Stand Today</a:t>
+            </a:r>
+          </a:p>
+        </p:txBody>
+      </p:sp>
+    </p:spTree>
+    <p:extLst>
+      <p:ext uri="{BB962C8B-B14F-4D97-AF65-F5344CB8AC3E}">
+        <p14:creationId xmlns:p14="http://schemas.microsoft.com/office/powerpoint/2010/main" val="1212999818"/>
+      </p:ext>
+    </p:extLst>
+  </p:cSld>
+  <p:clrMapOvr>
+    <a:masterClrMapping/>
+  </p:clrMapOvr>
+</p:sldLayout>
+</file>
+
+<file path=ppt/slideLayouts/slideLayout19.xml><?xml version="1.0" encoding="utf-8"?>
+<p:sldLayout xmlns:a="http://schemas.openxmlformats.org/drawingml/2006/main" xmlns:r="http://schemas.openxmlformats.org/officeDocument/2006/relationships" xmlns:p="http://schemas.openxmlformats.org/presentationml/2006/main" type="blank" preserve="1">
+  <p:cSld name="slidekit · Agenda">
+    <p:bg>
+      <p:bgPr>
+        <a:solidFill>
+          <a:srgbClr val="FFFFFF"/>
+        </a:solidFill>
+        <a:effectLst/>
+      </p:bgPr>
+    </p:bg>
+    <p:spTree>
+      <p:nvGrpSpPr>
+        <p:cNvPr id="1" name=""/>
+        <p:cNvGrpSpPr/>
+        <p:nvPr/>
+      </p:nvGrpSpPr>
+      <p:grpSpPr>
+        <a:xfrm>
+          <a:off x="0" y="0"/>
+          <a:ext cx="0" cy="0"/>
+          <a:chOff x="0" y="0"/>
+          <a:chExt cx="0" cy="0"/>
+        </a:xfrm>
+      </p:grpSpPr>
+      <p:sp>
+        <p:nvSpPr>
+          <p:cNvPr id="4" name="Slide Number Placeholder 3"/>
+          <p:cNvSpPr>
+            <a:spLocks noGrp="1"/>
+          </p:cNvSpPr>
+          <p:nvPr>
+            <p:ph type="sldNum" sz="quarter" idx="12"/>
+          </p:nvPr>
+        </p:nvSpPr>
+        <p:spPr>
+          <a:xfrm>
+            <a:off x="11186160" y="6035040"/>
+            <a:ext cx="548640" cy="365760"/>
+          </a:xfrm>
+        </p:spPr>
+        <p:txBody>
+          <a:bodyPr/>
+          <a:lstStyle/>
+          <a:p>
+            <a:fld id="{C1FF6DA9-008F-8B48-92A6-B652298478BF}" type="slidenum">
+              <a:rPr lang="en-US" smtClean="0"/>
+              <a:t>‹#›</a:t>
+            </a:fld>
+            <a:endParaRPr lang="en-US"/>
+          </a:p>
+        </p:txBody>
+      </p:sp>
+      <p:sp>
+        <p:nvSpPr>
+          <p:cNvPr id="5" name="TextBox 4"/>
+          <p:cNvSpPr/>
+          <p:nvPr>
+            <p:ph type="title"/>
+          </p:nvPr>
+        </p:nvSpPr>
+        <p:spPr>
+          <a:xfrm>
+            <a:off x="457200" y="457200"/>
+            <a:ext cx="11277600" cy="768096"/>
+          </a:xfrm>
+          <a:prstGeom prst="rect">
+            <a:avLst/>
+          </a:prstGeom>
+          <a:noFill/>
+        </p:spPr>
+        <p:txBody>
+          <a:bodyPr wrap="none" lIns="0" rIns="0">
+            <a:noAutofit/>
+          </a:bodyPr>
+          <a:lstStyle/>
+          <a:p>
+            <a:pPr algn="l"/>
+            <a:r>
+              <a:rPr sz="4200" b="1" i="0">
+                <a:solidFill>
+                  <a:srgbClr val="E2A03F"/>
+                </a:solidFill>
+                <a:latin typeface="Calibri"/>
+              </a:rPr>
+              <a:t>What We Will Cover</a:t>
+            </a:r>
+          </a:p>
+        </p:txBody>
+      </p:sp>
+      <p:sp>
+        <p:nvSpPr>
+          <p:cNvPr id="6" name="Rectangle 5"/>
+          <p:cNvSpPr/>
+          <p:nvPr>
+            <p:ph type="body" idx="1"/>
+          </p:nvPr>
+        </p:nvSpPr>
+        <p:spPr>
+          <a:xfrm>
+            <a:off x="457200" y="1280160"/>
+            <a:ext cx="11277600" cy="64008"/>
+          </a:xfrm>
+          <a:prstGeom prst="rect">
+            <a:avLst/>
+          </a:prstGeom>
+          <a:solidFill>
+            <a:srgbClr val="E2A03F"/>
+          </a:solidFill>
+          <a:ln>
+            <a:noFill/>
+          </a:ln>
+          <a:effectLst/>
+        </p:spPr>
+        <p:txBody>
+          <a:bodyPr rtlCol="0" anchor="ctr"/>
+          <a:lstStyle/>
+          <a:p>
+            <a:pPr algn="ctr"/>
+          </a:p>
+        </p:txBody>
+      </p:sp>
+      <p:sp>
+        <p:nvSpPr>
+          <p:cNvPr id="7" name="TextBox 6"/>
+          <p:cNvSpPr/>
+          <p:nvPr>
+            <p:ph type="body" idx="2"/>
+          </p:nvPr>
+        </p:nvSpPr>
+        <p:spPr>
+          <a:xfrm>
+            <a:off x="457200" y="1618488"/>
+            <a:ext cx="1144310" cy="518159"/>
+          </a:xfrm>
+          <a:prstGeom prst="rect">
+            <a:avLst/>
+          </a:prstGeom>
+          <a:noFill/>
+        </p:spPr>
+        <p:txBody>
+          <a:bodyPr wrap="none" lIns="0" rIns="0">
+            <a:noAutofit/>
+          </a:bodyPr>
+          <a:lstStyle/>
+          <a:p>
+            <a:pPr algn="l"/>
+            <a:r>
+              <a:rPr sz="3400" b="1" i="0">
+                <a:solidFill>
+                  <a:srgbClr val="E2A03F"/>
+                </a:solidFill>
+                <a:latin typeface="Calibri"/>
+              </a:rPr>
+              <a:t>01</a:t>
+            </a:r>
+          </a:p>
+        </p:txBody>
+      </p:sp>
+      <p:sp>
+        <p:nvSpPr>
+          <p:cNvPr id="8" name="TextBox 7"/>
+          <p:cNvSpPr/>
+          <p:nvPr>
+            <p:ph type="body" idx="3"/>
+          </p:nvPr>
+        </p:nvSpPr>
+        <p:spPr>
+          <a:xfrm>
+            <a:off x="1371600" y="1618488"/>
+            <a:ext cx="10363200" cy="518159"/>
+          </a:xfrm>
+          <a:prstGeom prst="rect">
+            <a:avLst/>
+          </a:prstGeom>
+          <a:noFill/>
+        </p:spPr>
+        <p:txBody>
+          <a:bodyPr wrap="none" lIns="0" rIns="0">
+            <a:noAutofit/>
+          </a:bodyPr>
+          <a:lstStyle/>
+          <a:p>
+            <a:pPr algn="l"/>
+            <a:r>
+              <a:rPr sz="3400" b="0" i="0">
+                <a:solidFill>
                   <a:srgbClr val="1C1C28"/>
                 </a:solidFill>
                 <a:latin typeface="Calibri"/>
               </a:rPr>
-              <a:t>Where We Stand Today</a:t>
+              <a:t>Performance against targets</a:t>
+            </a:r>
+          </a:p>
+        </p:txBody>
+      </p:sp>
+      <p:sp>
+        <p:nvSpPr>
+          <p:cNvPr id="9" name="TextBox 8"/>
+          <p:cNvSpPr/>
+          <p:nvPr>
+            <p:ph type="body" idx="4"/>
+          </p:nvPr>
+        </p:nvSpPr>
+        <p:spPr>
+          <a:xfrm>
+            <a:off x="457200" y="2501798"/>
+            <a:ext cx="1144310" cy="518159"/>
+          </a:xfrm>
+          <a:prstGeom prst="rect">
+            <a:avLst/>
+          </a:prstGeom>
+          <a:noFill/>
+        </p:spPr>
+        <p:txBody>
+          <a:bodyPr wrap="none" lIns="0" rIns="0">
+            <a:noAutofit/>
+          </a:bodyPr>
+          <a:lstStyle/>
+          <a:p>
+            <a:pPr algn="l"/>
+            <a:r>
+              <a:rPr sz="3400" b="1" i="0">
+                <a:solidFill>
+                  <a:srgbClr val="E2A03F"/>
+                </a:solidFill>
+                <a:latin typeface="Calibri"/>
+              </a:rPr>
+              <a:t>02</a:t>
+            </a:r>
+          </a:p>
+        </p:txBody>
+      </p:sp>
+      <p:sp>
+        <p:nvSpPr>
+          <p:cNvPr id="10" name="TextBox 9"/>
+          <p:cNvSpPr/>
+          <p:nvPr>
+            <p:ph type="body" idx="5"/>
+          </p:nvPr>
+        </p:nvSpPr>
+        <p:spPr>
+          <a:xfrm>
+            <a:off x="1371600" y="2501798"/>
+            <a:ext cx="10363200" cy="518159"/>
+          </a:xfrm>
+          <a:prstGeom prst="rect">
+            <a:avLst/>
+          </a:prstGeom>
+          <a:noFill/>
+        </p:spPr>
+        <p:txBody>
+          <a:bodyPr wrap="none" lIns="0" rIns="0">
+            <a:noAutofit/>
+          </a:bodyPr>
+          <a:lstStyle/>
+          <a:p>
+            <a:pPr algn="l"/>
+            <a:r>
+              <a:rPr sz="3400" b="0" i="0">
+                <a:solidFill>
+                  <a:srgbClr val="1C1C28"/>
+                </a:solidFill>
+                <a:latin typeface="Calibri"/>
+              </a:rPr>
+              <a:t>Customer and market signals</a:t>
+            </a:r>
+          </a:p>
+        </p:txBody>
+      </p:sp>
+      <p:sp>
+        <p:nvSpPr>
+          <p:cNvPr id="11" name="TextBox 10"/>
+          <p:cNvSpPr/>
+          <p:nvPr>
+            <p:ph type="body" idx="6"/>
+          </p:nvPr>
+        </p:nvSpPr>
+        <p:spPr>
+          <a:xfrm>
+            <a:off x="457200" y="3385108"/>
+            <a:ext cx="1144310" cy="518159"/>
+          </a:xfrm>
+          <a:prstGeom prst="rect">
+            <a:avLst/>
+          </a:prstGeom>
+          <a:noFill/>
+        </p:spPr>
+        <p:txBody>
+          <a:bodyPr wrap="none" lIns="0" rIns="0">
+            <a:noAutofit/>
+          </a:bodyPr>
+          <a:lstStyle/>
+          <a:p>
+            <a:pPr algn="l"/>
+            <a:r>
+              <a:rPr sz="3400" b="1" i="0">
+                <a:solidFill>
+                  <a:srgbClr val="E2A03F"/>
+                </a:solidFill>
+                <a:latin typeface="Calibri"/>
+              </a:rPr>
+              <a:t>03</a:t>
+            </a:r>
+          </a:p>
+        </p:txBody>
+      </p:sp>
+      <p:sp>
+        <p:nvSpPr>
+          <p:cNvPr id="12" name="TextBox 11"/>
+          <p:cNvSpPr/>
+          <p:nvPr>
+            <p:ph type="body" idx="7"/>
+          </p:nvPr>
+        </p:nvSpPr>
+        <p:spPr>
+          <a:xfrm>
+            <a:off x="1371600" y="3385108"/>
+            <a:ext cx="10363200" cy="518159"/>
+          </a:xfrm>
+          <a:prstGeom prst="rect">
+            <a:avLst/>
+          </a:prstGeom>
+          <a:noFill/>
+        </p:spPr>
+        <p:txBody>
+          <a:bodyPr wrap="none" lIns="0" rIns="0">
+            <a:noAutofit/>
+          </a:bodyPr>
+          <a:lstStyle/>
+          <a:p>
+            <a:pPr algn="l"/>
+            <a:r>
+              <a:rPr sz="3400" b="0" i="0">
+                <a:solidFill>
+                  <a:srgbClr val="1C1C28"/>
+                </a:solidFill>
+                <a:latin typeface="Calibri"/>
+              </a:rPr>
+              <a:t>Operational health and risks</a:t>
+            </a:r>
+          </a:p>
+        </p:txBody>
+      </p:sp>
+      <p:sp>
+        <p:nvSpPr>
+          <p:cNvPr id="13" name="TextBox 12"/>
+          <p:cNvSpPr/>
+          <p:nvPr>
+            <p:ph type="body" idx="8"/>
+          </p:nvPr>
+        </p:nvSpPr>
+        <p:spPr>
+          <a:xfrm>
+            <a:off x="457200" y="4268418"/>
+            <a:ext cx="1144310" cy="518159"/>
+          </a:xfrm>
+          <a:prstGeom prst="rect">
+            <a:avLst/>
+          </a:prstGeom>
+          <a:noFill/>
+        </p:spPr>
+        <p:txBody>
+          <a:bodyPr wrap="none" lIns="0" rIns="0">
+            <a:noAutofit/>
+          </a:bodyPr>
+          <a:lstStyle/>
+          <a:p>
+            <a:pPr algn="l"/>
+            <a:r>
+              <a:rPr sz="3400" b="1" i="0">
+                <a:solidFill>
+                  <a:srgbClr val="E2A03F"/>
+                </a:solidFill>
+                <a:latin typeface="Calibri"/>
+              </a:rPr>
+              <a:t>04</a:t>
+            </a:r>
+          </a:p>
+        </p:txBody>
+      </p:sp>
+      <p:sp>
+        <p:nvSpPr>
+          <p:cNvPr id="14" name="TextBox 13"/>
+          <p:cNvSpPr/>
+          <p:nvPr>
+            <p:ph type="body" idx="9"/>
+          </p:nvPr>
+        </p:nvSpPr>
+        <p:spPr>
+          <a:xfrm>
+            <a:off x="1371600" y="4268418"/>
+            <a:ext cx="10363200" cy="518159"/>
+          </a:xfrm>
+          <a:prstGeom prst="rect">
+            <a:avLst/>
+          </a:prstGeom>
+          <a:noFill/>
+        </p:spPr>
+        <p:txBody>
+          <a:bodyPr wrap="none" lIns="0" rIns="0">
+            <a:noAutofit/>
+          </a:bodyPr>
+          <a:lstStyle/>
+          <a:p>
+            <a:pPr algn="l"/>
+            <a:r>
+              <a:rPr sz="3400" b="0" i="0">
+                <a:solidFill>
+                  <a:srgbClr val="1C1C28"/>
+                </a:solidFill>
+                <a:latin typeface="Calibri"/>
+              </a:rPr>
+              <a:t>Roadmap for next quarter</a:t>
+            </a:r>
+          </a:p>
+        </p:txBody>
+      </p:sp>
+      <p:sp>
+        <p:nvSpPr>
+          <p:cNvPr id="15" name="TextBox 14"/>
+          <p:cNvSpPr/>
+          <p:nvPr>
+            <p:ph type="body" idx="13"/>
+          </p:nvPr>
+        </p:nvSpPr>
+        <p:spPr>
+          <a:xfrm>
+            <a:off x="457200" y="5151728"/>
+            <a:ext cx="1144310" cy="518159"/>
+          </a:xfrm>
+          <a:prstGeom prst="rect">
+            <a:avLst/>
+          </a:prstGeom>
+          <a:noFill/>
+        </p:spPr>
+        <p:txBody>
+          <a:bodyPr wrap="none" lIns="0" rIns="0">
+            <a:noAutofit/>
+          </a:bodyPr>
+          <a:lstStyle/>
+          <a:p>
+            <a:pPr algn="l"/>
+            <a:r>
+              <a:rPr sz="3400" b="1" i="0">
+                <a:solidFill>
+                  <a:srgbClr val="E2A03F"/>
+                </a:solidFill>
+                <a:latin typeface="Calibri"/>
+              </a:rPr>
+              <a:t>05</a:t>
+            </a:r>
+          </a:p>
+        </p:txBody>
+      </p:sp>
+      <p:sp>
+        <p:nvSpPr>
+          <p:cNvPr id="16" name="TextBox 15"/>
+          <p:cNvSpPr/>
+          <p:nvPr>
+            <p:ph type="body" idx="14"/>
+          </p:nvPr>
+        </p:nvSpPr>
+        <p:spPr>
+          <a:xfrm>
+            <a:off x="1371600" y="5151728"/>
+            <a:ext cx="10363200" cy="518159"/>
+          </a:xfrm>
+          <a:prstGeom prst="rect">
+            <a:avLst/>
+          </a:prstGeom>
+          <a:noFill/>
+        </p:spPr>
+        <p:txBody>
+          <a:bodyPr wrap="none" lIns="0" rIns="0">
+            <a:noAutofit/>
+          </a:bodyPr>
+          <a:lstStyle/>
+          <a:p>
+            <a:pPr algn="l"/>
+            <a:r>
+              <a:rPr sz="3400" b="0" i="0">
+                <a:solidFill>
+                  <a:srgbClr val="1C1C28"/>
+                </a:solidFill>
+                <a:latin typeface="Calibri"/>
+              </a:rPr>
+              <a:t>Decisions we need today</a:t>
             </a:r>
           </a:p>
         </p:txBody>
@@ -3321,511 +3427,6 @@
 
 <file path=ppt/slideLayouts/slideLayout20.xml><?xml version="1.0" encoding="utf-8"?>
 <p:sldLayout xmlns:a="http://schemas.openxmlformats.org/drawingml/2006/main" xmlns:r="http://schemas.openxmlformats.org/officeDocument/2006/relationships" xmlns:p="http://schemas.openxmlformats.org/presentationml/2006/main" type="blank" preserve="1">
-  <p:cSld name="slidekit · Agenda">
-    <p:bg>
-      <p:bgPr>
-        <a:solidFill>
-          <a:srgbClr val="FFFFFF"/>
-        </a:solidFill>
-        <a:effectLst/>
-      </p:bgPr>
-    </p:bg>
-    <p:spTree>
-      <p:nvGrpSpPr>
-        <p:cNvPr id="1" name=""/>
-        <p:cNvGrpSpPr/>
-        <p:nvPr/>
-      </p:nvGrpSpPr>
-      <p:grpSpPr>
-        <a:xfrm>
-          <a:off x="0" y="0"/>
-          <a:ext cx="0" cy="0"/>
-          <a:chOff x="0" y="0"/>
-          <a:chExt cx="0" cy="0"/>
-        </a:xfrm>
-      </p:grpSpPr>
-      <p:sp>
-        <p:nvSpPr>
-          <p:cNvPr id="4" name="Slide Number Placeholder 3"/>
-          <p:cNvSpPr>
-            <a:spLocks noGrp="1"/>
-          </p:cNvSpPr>
-          <p:nvPr>
-            <p:ph type="sldNum" sz="quarter" idx="12"/>
-          </p:nvPr>
-        </p:nvSpPr>
-        <p:spPr>
-          <a:xfrm>
-            <a:off x="10363200" y="6035040"/>
-            <a:ext cx="1371600" cy="365760"/>
-          </a:xfrm>
-        </p:spPr>
-        <p:txBody>
-          <a:bodyPr/>
-          <a:lstStyle/>
-          <a:p>
-            <a:fld id="{C1FF6DA9-008F-8B48-92A6-B652298478BF}" type="slidenum">
-              <a:rPr lang="en-US" smtClean="0"/>
-              <a:t>‹#›</a:t>
-            </a:fld>
-            <a:endParaRPr lang="en-US"/>
-          </a:p>
-        </p:txBody>
-      </p:sp>
-      <p:sp>
-        <p:nvSpPr>
-          <p:cNvPr id="5" name="TextBox 4"/>
-          <p:cNvSpPr/>
-          <p:nvPr>
-            <p:ph type="title"/>
-          </p:nvPr>
-        </p:nvSpPr>
-        <p:spPr>
-          <a:xfrm>
-            <a:off x="457200" y="457200"/>
-            <a:ext cx="11277600" cy="768096"/>
-          </a:xfrm>
-          <a:prstGeom prst="rect">
-            <a:avLst/>
-          </a:prstGeom>
-          <a:noFill/>
-        </p:spPr>
-        <p:txBody>
-          <a:bodyPr wrap="none" lIns="0" rIns="0">
-            <a:noAutofit/>
-          </a:bodyPr>
-          <a:lstStyle/>
-          <a:p>
-            <a:pPr algn="l"/>
-            <a:r>
-              <a:rPr sz="4200" b="1" i="0">
-                <a:solidFill>
-                  <a:srgbClr val="1C1C28"/>
-                </a:solidFill>
-                <a:latin typeface="Calibri"/>
-              </a:rPr>
-              <a:t>What We Will Cover</a:t>
-            </a:r>
-          </a:p>
-        </p:txBody>
-      </p:sp>
-      <p:sp>
-        <p:nvSpPr>
-          <p:cNvPr id="6" name="Rectangle 5"/>
-          <p:cNvSpPr/>
-          <p:nvPr>
-            <p:ph type="body" idx="1"/>
-          </p:nvPr>
-        </p:nvSpPr>
-        <p:spPr>
-          <a:xfrm>
-            <a:off x="457200" y="1280160"/>
-            <a:ext cx="11277600" cy="64008"/>
-          </a:xfrm>
-          <a:prstGeom prst="rect">
-            <a:avLst/>
-          </a:prstGeom>
-          <a:solidFill>
-            <a:srgbClr val="E2A03F"/>
-          </a:solidFill>
-          <a:ln>
-            <a:noFill/>
-          </a:ln>
-          <a:effectLst/>
-        </p:spPr>
-        <p:txBody>
-          <a:bodyPr rtlCol="0" anchor="ctr"/>
-          <a:lstStyle/>
-          <a:p>
-            <a:pPr algn="ctr"/>
-          </a:p>
-        </p:txBody>
-      </p:sp>
-      <p:sp>
-        <p:nvSpPr>
-          <p:cNvPr id="7" name="TextBox 6"/>
-          <p:cNvSpPr/>
-          <p:nvPr>
-            <p:ph type="body" idx="2"/>
-          </p:nvPr>
-        </p:nvSpPr>
-        <p:spPr>
-          <a:xfrm>
-            <a:off x="457200" y="1618488"/>
-            <a:ext cx="1144310" cy="518159"/>
-          </a:xfrm>
-          <a:prstGeom prst="rect">
-            <a:avLst/>
-          </a:prstGeom>
-          <a:noFill/>
-        </p:spPr>
-        <p:txBody>
-          <a:bodyPr wrap="none" lIns="0" rIns="0">
-            <a:noAutofit/>
-          </a:bodyPr>
-          <a:lstStyle/>
-          <a:p>
-            <a:pPr algn="l"/>
-            <a:r>
-              <a:rPr sz="3400" b="1" i="0">
-                <a:solidFill>
-                  <a:srgbClr val="E2A03F"/>
-                </a:solidFill>
-                <a:latin typeface="Calibri"/>
-              </a:rPr>
-              <a:t>01</a:t>
-            </a:r>
-          </a:p>
-        </p:txBody>
-      </p:sp>
-      <p:sp>
-        <p:nvSpPr>
-          <p:cNvPr id="8" name="TextBox 7"/>
-          <p:cNvSpPr/>
-          <p:nvPr>
-            <p:ph type="body" idx="3"/>
-          </p:nvPr>
-        </p:nvSpPr>
-        <p:spPr>
-          <a:xfrm>
-            <a:off x="1371600" y="1618488"/>
-            <a:ext cx="10363200" cy="518159"/>
-          </a:xfrm>
-          <a:prstGeom prst="rect">
-            <a:avLst/>
-          </a:prstGeom>
-          <a:noFill/>
-        </p:spPr>
-        <p:txBody>
-          <a:bodyPr wrap="none" lIns="0" rIns="0">
-            <a:noAutofit/>
-          </a:bodyPr>
-          <a:lstStyle/>
-          <a:p>
-            <a:pPr algn="l"/>
-            <a:r>
-              <a:rPr sz="3400" b="0" i="0">
-                <a:solidFill>
-                  <a:srgbClr val="1C1C28"/>
-                </a:solidFill>
-                <a:latin typeface="Calibri"/>
-              </a:rPr>
-              <a:t>Performance against targets</a:t>
-            </a:r>
-          </a:p>
-        </p:txBody>
-      </p:sp>
-      <p:sp>
-        <p:nvSpPr>
-          <p:cNvPr id="9" name="TextBox 8"/>
-          <p:cNvSpPr/>
-          <p:nvPr>
-            <p:ph type="body" idx="4"/>
-          </p:nvPr>
-        </p:nvSpPr>
-        <p:spPr>
-          <a:xfrm>
-            <a:off x="457200" y="2501798"/>
-            <a:ext cx="1144310" cy="518159"/>
-          </a:xfrm>
-          <a:prstGeom prst="rect">
-            <a:avLst/>
-          </a:prstGeom>
-          <a:noFill/>
-        </p:spPr>
-        <p:txBody>
-          <a:bodyPr wrap="none" lIns="0" rIns="0">
-            <a:noAutofit/>
-          </a:bodyPr>
-          <a:lstStyle/>
-          <a:p>
-            <a:pPr algn="l"/>
-            <a:r>
-              <a:rPr sz="3400" b="1" i="0">
-                <a:solidFill>
-                  <a:srgbClr val="E2A03F"/>
-                </a:solidFill>
-                <a:latin typeface="Calibri"/>
-              </a:rPr>
-              <a:t>02</a:t>
-            </a:r>
-          </a:p>
-        </p:txBody>
-      </p:sp>
-      <p:sp>
-        <p:nvSpPr>
-          <p:cNvPr id="10" name="TextBox 9"/>
-          <p:cNvSpPr/>
-          <p:nvPr>
-            <p:ph type="body" idx="5"/>
-          </p:nvPr>
-        </p:nvSpPr>
-        <p:spPr>
-          <a:xfrm>
-            <a:off x="1371600" y="2501798"/>
-            <a:ext cx="10363200" cy="518159"/>
-          </a:xfrm>
-          <a:prstGeom prst="rect">
-            <a:avLst/>
-          </a:prstGeom>
-          <a:noFill/>
-        </p:spPr>
-        <p:txBody>
-          <a:bodyPr wrap="none" lIns="0" rIns="0">
-            <a:noAutofit/>
-          </a:bodyPr>
-          <a:lstStyle/>
-          <a:p>
-            <a:pPr algn="l"/>
-            <a:r>
-              <a:rPr sz="3400" b="0" i="0">
-                <a:solidFill>
-                  <a:srgbClr val="1C1C28"/>
-                </a:solidFill>
-                <a:latin typeface="Calibri"/>
-              </a:rPr>
-              <a:t>Customer and market signals</a:t>
-            </a:r>
-          </a:p>
-        </p:txBody>
-      </p:sp>
-      <p:sp>
-        <p:nvSpPr>
-          <p:cNvPr id="11" name="TextBox 10"/>
-          <p:cNvSpPr/>
-          <p:nvPr>
-            <p:ph type="body" idx="6"/>
-          </p:nvPr>
-        </p:nvSpPr>
-        <p:spPr>
-          <a:xfrm>
-            <a:off x="457200" y="3385108"/>
-            <a:ext cx="1144310" cy="518159"/>
-          </a:xfrm>
-          <a:prstGeom prst="rect">
-            <a:avLst/>
-          </a:prstGeom>
-          <a:noFill/>
-        </p:spPr>
-        <p:txBody>
-          <a:bodyPr wrap="none" lIns="0" rIns="0">
-            <a:noAutofit/>
-          </a:bodyPr>
-          <a:lstStyle/>
-          <a:p>
-            <a:pPr algn="l"/>
-            <a:r>
-              <a:rPr sz="3400" b="1" i="0">
-                <a:solidFill>
-                  <a:srgbClr val="E2A03F"/>
-                </a:solidFill>
-                <a:latin typeface="Calibri"/>
-              </a:rPr>
-              <a:t>03</a:t>
-            </a:r>
-          </a:p>
-        </p:txBody>
-      </p:sp>
-      <p:sp>
-        <p:nvSpPr>
-          <p:cNvPr id="12" name="TextBox 11"/>
-          <p:cNvSpPr/>
-          <p:nvPr>
-            <p:ph type="body" idx="7"/>
-          </p:nvPr>
-        </p:nvSpPr>
-        <p:spPr>
-          <a:xfrm>
-            <a:off x="1371600" y="3385108"/>
-            <a:ext cx="10363200" cy="518159"/>
-          </a:xfrm>
-          <a:prstGeom prst="rect">
-            <a:avLst/>
-          </a:prstGeom>
-          <a:noFill/>
-        </p:spPr>
-        <p:txBody>
-          <a:bodyPr wrap="none" lIns="0" rIns="0">
-            <a:noAutofit/>
-          </a:bodyPr>
-          <a:lstStyle/>
-          <a:p>
-            <a:pPr algn="l"/>
-            <a:r>
-              <a:rPr sz="3400" b="0" i="0">
-                <a:solidFill>
-                  <a:srgbClr val="1C1C28"/>
-                </a:solidFill>
-                <a:latin typeface="Calibri"/>
-              </a:rPr>
-              <a:t>Operational health and risks</a:t>
-            </a:r>
-          </a:p>
-        </p:txBody>
-      </p:sp>
-      <p:sp>
-        <p:nvSpPr>
-          <p:cNvPr id="13" name="TextBox 12"/>
-          <p:cNvSpPr/>
-          <p:nvPr>
-            <p:ph type="body" idx="8"/>
-          </p:nvPr>
-        </p:nvSpPr>
-        <p:spPr>
-          <a:xfrm>
-            <a:off x="457200" y="4268418"/>
-            <a:ext cx="1144310" cy="518159"/>
-          </a:xfrm>
-          <a:prstGeom prst="rect">
-            <a:avLst/>
-          </a:prstGeom>
-          <a:noFill/>
-        </p:spPr>
-        <p:txBody>
-          <a:bodyPr wrap="none" lIns="0" rIns="0">
-            <a:noAutofit/>
-          </a:bodyPr>
-          <a:lstStyle/>
-          <a:p>
-            <a:pPr algn="l"/>
-            <a:r>
-              <a:rPr sz="3400" b="1" i="0">
-                <a:solidFill>
-                  <a:srgbClr val="E2A03F"/>
-                </a:solidFill>
-                <a:latin typeface="Calibri"/>
-              </a:rPr>
-              <a:t>04</a:t>
-            </a:r>
-          </a:p>
-        </p:txBody>
-      </p:sp>
-      <p:sp>
-        <p:nvSpPr>
-          <p:cNvPr id="14" name="TextBox 13"/>
-          <p:cNvSpPr/>
-          <p:nvPr>
-            <p:ph type="body" idx="9"/>
-          </p:nvPr>
-        </p:nvSpPr>
-        <p:spPr>
-          <a:xfrm>
-            <a:off x="1371600" y="4268418"/>
-            <a:ext cx="10363200" cy="518159"/>
-          </a:xfrm>
-          <a:prstGeom prst="rect">
-            <a:avLst/>
-          </a:prstGeom>
-          <a:noFill/>
-        </p:spPr>
-        <p:txBody>
-          <a:bodyPr wrap="none" lIns="0" rIns="0">
-            <a:noAutofit/>
-          </a:bodyPr>
-          <a:lstStyle/>
-          <a:p>
-            <a:pPr algn="l"/>
-            <a:r>
-              <a:rPr sz="3400" b="0" i="0">
-                <a:solidFill>
-                  <a:srgbClr val="1C1C28"/>
-                </a:solidFill>
-                <a:latin typeface="Calibri"/>
-              </a:rPr>
-              <a:t>Roadmap for next quarter</a:t>
-            </a:r>
-          </a:p>
-        </p:txBody>
-      </p:sp>
-      <p:sp>
-        <p:nvSpPr>
-          <p:cNvPr id="15" name="TextBox 14"/>
-          <p:cNvSpPr/>
-          <p:nvPr>
-            <p:ph type="body" idx="13"/>
-          </p:nvPr>
-        </p:nvSpPr>
-        <p:spPr>
-          <a:xfrm>
-            <a:off x="457200" y="5151728"/>
-            <a:ext cx="1144310" cy="518159"/>
-          </a:xfrm>
-          <a:prstGeom prst="rect">
-            <a:avLst/>
-          </a:prstGeom>
-          <a:noFill/>
-        </p:spPr>
-        <p:txBody>
-          <a:bodyPr wrap="none" lIns="0" rIns="0">
-            <a:noAutofit/>
-          </a:bodyPr>
-          <a:lstStyle/>
-          <a:p>
-            <a:pPr algn="l"/>
-            <a:r>
-              <a:rPr sz="3400" b="1" i="0">
-                <a:solidFill>
-                  <a:srgbClr val="E2A03F"/>
-                </a:solidFill>
-                <a:latin typeface="Calibri"/>
-              </a:rPr>
-              <a:t>05</a:t>
-            </a:r>
-          </a:p>
-        </p:txBody>
-      </p:sp>
-      <p:sp>
-        <p:nvSpPr>
-          <p:cNvPr id="16" name="TextBox 15"/>
-          <p:cNvSpPr/>
-          <p:nvPr>
-            <p:ph type="body" idx="14"/>
-          </p:nvPr>
-        </p:nvSpPr>
-        <p:spPr>
-          <a:xfrm>
-            <a:off x="1371600" y="5151728"/>
-            <a:ext cx="10363200" cy="518159"/>
-          </a:xfrm>
-          <a:prstGeom prst="rect">
-            <a:avLst/>
-          </a:prstGeom>
-          <a:noFill/>
-        </p:spPr>
-        <p:txBody>
-          <a:bodyPr wrap="none" lIns="0" rIns="0">
-            <a:noAutofit/>
-          </a:bodyPr>
-          <a:lstStyle/>
-          <a:p>
-            <a:pPr algn="l"/>
-            <a:r>
-              <a:rPr sz="3400" b="0" i="0">
-                <a:solidFill>
-                  <a:srgbClr val="1C1C28"/>
-                </a:solidFill>
-                <a:latin typeface="Calibri"/>
-              </a:rPr>
-              <a:t>Decisions we need today</a:t>
-            </a:r>
-          </a:p>
-        </p:txBody>
-      </p:sp>
-    </p:spTree>
-    <p:extLst>
-      <p:ext uri="{BB962C8B-B14F-4D97-AF65-F5344CB8AC3E}">
-        <p14:creationId xmlns:p14="http://schemas.microsoft.com/office/powerpoint/2010/main" val="1212999818"/>
-      </p:ext>
-    </p:extLst>
-  </p:cSld>
-  <p:clrMapOvr>
-    <a:masterClrMapping/>
-  </p:clrMapOvr>
-</p:sldLayout>
-</file>
-
-<file path=ppt/slideLayouts/slideLayout21.xml><?xml version="1.0" encoding="utf-8"?>
-<p:sldLayout xmlns:a="http://schemas.openxmlformats.org/drawingml/2006/main" xmlns:r="http://schemas.openxmlformats.org/officeDocument/2006/relationships" xmlns:p="http://schemas.openxmlformats.org/presentationml/2006/main" type="blank" preserve="1">
   <p:cSld name="slidekit · Big Number">
     <p:bg>
       <p:bgPr>
@@ -3861,8 +3462,8 @@
         </p:nvSpPr>
         <p:spPr>
           <a:xfrm>
-            <a:off x="10363200" y="6035040"/>
-            <a:ext cx="1371600" cy="365760"/>
+            <a:off x="11186160" y="6035040"/>
+            <a:ext cx="548640" cy="365760"/>
           </a:xfrm>
         </p:spPr>
         <p:txBody>
@@ -3996,7 +3597,7 @@
 </p:sldLayout>
 </file>
 
-<file path=ppt/slideLayouts/slideLayout22.xml><?xml version="1.0" encoding="utf-8"?>
+<file path=ppt/slideLayouts/slideLayout21.xml><?xml version="1.0" encoding="utf-8"?>
 <p:sldLayout xmlns:a="http://schemas.openxmlformats.org/drawingml/2006/main" xmlns:r="http://schemas.openxmlformats.org/officeDocument/2006/relationships" xmlns:p="http://schemas.openxmlformats.org/presentationml/2006/main" type="blank" preserve="1">
   <p:cSld name="slidekit · Pull Quote">
     <p:bg>
@@ -4033,8 +3634,8 @@
         </p:nvSpPr>
         <p:spPr>
           <a:xfrm>
-            <a:off x="10363200" y="6035040"/>
-            <a:ext cx="1371600" cy="365760"/>
+            <a:off x="11186160" y="6035040"/>
+            <a:ext cx="548640" cy="365760"/>
           </a:xfrm>
         </p:spPr>
         <p:txBody>
@@ -4059,8 +3660,8 @@
         </p:nvSpPr>
         <p:spPr>
           <a:xfrm>
-            <a:off x="457200" y="2301240"/>
-            <a:ext cx="128016" cy="2255520"/>
+            <a:off x="457200" y="2621280"/>
+            <a:ext cx="128016" cy="1615440"/>
           </a:xfrm>
           <a:prstGeom prst="rect">
             <a:avLst/>
@@ -4091,16 +3692,16 @@
         </p:nvSpPr>
         <p:spPr>
           <a:xfrm>
-            <a:off x="996696" y="2301240"/>
-            <a:ext cx="10738104" cy="1371600"/>
-          </a:xfrm>
-          <a:prstGeom prst="rect">
-            <a:avLst/>
-          </a:prstGeom>
-          <a:noFill/>
-        </p:spPr>
-        <p:txBody>
-          <a:bodyPr wrap="square" lIns="0" rIns="0">
+            <a:off x="996696" y="2621280"/>
+            <a:ext cx="11195304" cy="731520"/>
+          </a:xfrm>
+          <a:prstGeom prst="rect">
+            <a:avLst/>
+          </a:prstGeom>
+          <a:noFill/>
+        </p:spPr>
+        <p:txBody>
+          <a:bodyPr wrap="none" lIns="0" rIns="0">
             <a:noAutofit/>
           </a:bodyPr>
           <a:lstStyle/>
@@ -4113,7 +3714,7 @@
                 </a:solidFill>
                 <a:latin typeface="Calibri"/>
               </a:rPr>
-              <a:t>"We stopped buying tools and started buying outcomes."</a:t>
+              <a:t>"We buy outcomes, not tools."</a:t>
             </a:r>
           </a:p>
         </p:txBody>
@@ -4128,7 +3729,7 @@
         </p:nvSpPr>
         <p:spPr>
           <a:xfrm>
-            <a:off x="996696" y="3947160"/>
+            <a:off x="996696" y="3627120"/>
             <a:ext cx="11195304" cy="609600"/>
           </a:xfrm>
           <a:prstGeom prst="rect">
@@ -4146,7 +3747,7 @@
             <a:r>
               <a:rPr sz="3400" b="0" i="0">
                 <a:solidFill>
-                  <a:srgbClr val="8A8A9A"/>
+                  <a:srgbClr val="1C1C28"/>
                 </a:solidFill>
                 <a:latin typeface="Calibri"/>
               </a:rPr>
@@ -4168,7 +3769,7 @@
 </p:sldLayout>
 </file>
 
-<file path=ppt/slideLayouts/slideLayout23.xml><?xml version="1.0" encoding="utf-8"?>
+<file path=ppt/slideLayouts/slideLayout22.xml><?xml version="1.0" encoding="utf-8"?>
 <p:sldLayout xmlns:a="http://schemas.openxmlformats.org/drawingml/2006/main" xmlns:r="http://schemas.openxmlformats.org/officeDocument/2006/relationships" xmlns:p="http://schemas.openxmlformats.org/presentationml/2006/main" type="blank" preserve="1">
   <p:cSld name="slidekit · Definition">
     <p:bg>
@@ -4205,8 +3806,8 @@
         </p:nvSpPr>
         <p:spPr>
           <a:xfrm>
-            <a:off x="10363200" y="6035040"/>
-            <a:ext cx="1371600" cy="365760"/>
+            <a:off x="11186160" y="6035040"/>
+            <a:ext cx="548640" cy="365760"/>
           </a:xfrm>
         </p:spPr>
         <p:txBody>
@@ -4231,8 +3832,8 @@
         </p:nvSpPr>
         <p:spPr>
           <a:xfrm>
-            <a:off x="457200" y="1981200"/>
-            <a:ext cx="128016" cy="2895600"/>
+            <a:off x="457200" y="2499360"/>
+            <a:ext cx="128016" cy="1859280"/>
           </a:xfrm>
           <a:prstGeom prst="rect">
             <a:avLst/>
@@ -4263,7 +3864,7 @@
         </p:nvSpPr>
         <p:spPr>
           <a:xfrm>
-            <a:off x="996696" y="1981200"/>
+            <a:off x="996696" y="2499360"/>
             <a:ext cx="11195304" cy="975360"/>
           </a:xfrm>
           <a:prstGeom prst="rect">
@@ -4300,16 +3901,16 @@
         </p:nvSpPr>
         <p:spPr>
           <a:xfrm>
-            <a:off x="996696" y="3230880"/>
-            <a:ext cx="10738104" cy="1645920"/>
-          </a:xfrm>
-          <a:prstGeom prst="rect">
-            <a:avLst/>
-          </a:prstGeom>
-          <a:noFill/>
-        </p:spPr>
-        <p:txBody>
-          <a:bodyPr wrap="square" lIns="0" rIns="0">
+            <a:off x="996696" y="3749040"/>
+            <a:ext cx="11195304" cy="609600"/>
+          </a:xfrm>
+          <a:prstGeom prst="rect">
+            <a:avLst/>
+          </a:prstGeom>
+          <a:noFill/>
+        </p:spPr>
+        <p:txBody>
+          <a:bodyPr wrap="none" lIns="0" rIns="0">
             <a:noAutofit/>
           </a:bodyPr>
           <a:lstStyle/>
@@ -4322,7 +3923,7 @@
                 </a:solidFill>
                 <a:latin typeface="Calibri"/>
               </a:rPr>
-              <a:t>The percentage of recurring revenue retained from existing customers over a period, including expansion and after churn.</a:t>
+              <a:t>Revenue kept from existing customers.</a:t>
             </a:r>
           </a:p>
         </p:txBody>
@@ -4340,7 +3941,7 @@
 </p:sldLayout>
 </file>
 
-<file path=ppt/slideLayouts/slideLayout24.xml><?xml version="1.0" encoding="utf-8"?>
+<file path=ppt/slideLayouts/slideLayout23.xml><?xml version="1.0" encoding="utf-8"?>
 <p:sldLayout xmlns:a="http://schemas.openxmlformats.org/drawingml/2006/main" xmlns:r="http://schemas.openxmlformats.org/officeDocument/2006/relationships" xmlns:p="http://schemas.openxmlformats.org/presentationml/2006/main" type="blank" preserve="1">
   <p:cSld name="slidekit · Question">
     <p:bg>
@@ -4377,8 +3978,8 @@
         </p:nvSpPr>
         <p:spPr>
           <a:xfrm>
-            <a:off x="10363200" y="6035040"/>
-            <a:ext cx="1371600" cy="365760"/>
+            <a:off x="11186160" y="6035040"/>
+            <a:ext cx="548640" cy="365760"/>
           </a:xfrm>
         </p:spPr>
         <p:txBody>
@@ -4403,8 +4004,8 @@
         </p:nvSpPr>
         <p:spPr>
           <a:xfrm>
-            <a:off x="457200" y="2057400"/>
-            <a:ext cx="128016" cy="2743200"/>
+            <a:off x="457200" y="2499360"/>
+            <a:ext cx="128016" cy="1859280"/>
           </a:xfrm>
           <a:prstGeom prst="rect">
             <a:avLst/>
@@ -4435,8 +4036,8 @@
         </p:nvSpPr>
         <p:spPr>
           <a:xfrm>
-            <a:off x="996696" y="2057400"/>
-            <a:ext cx="10738104" cy="2743200"/>
+            <a:off x="996696" y="2499360"/>
+            <a:ext cx="10738104" cy="1859280"/>
           </a:xfrm>
           <a:prstGeom prst="rect">
             <a:avLst/>
@@ -4457,7 +4058,7 @@
                 </a:solidFill>
                 <a:latin typeface="Calibri"/>
               </a:rPr>
-              <a:t>What would we build if we trusted our customers completely?</a:t>
+              <a:t>What if we trusted users?</a:t>
             </a:r>
           </a:p>
         </p:txBody>
@@ -4475,7 +4076,7 @@
 </p:sldLayout>
 </file>
 
-<file path=ppt/slideLayouts/slideLayout25.xml><?xml version="1.0" encoding="utf-8"?>
+<file path=ppt/slideLayouts/slideLayout24.xml><?xml version="1.0" encoding="utf-8"?>
 <p:sldLayout xmlns:a="http://schemas.openxmlformats.org/drawingml/2006/main" xmlns:r="http://schemas.openxmlformats.org/officeDocument/2006/relationships" xmlns:p="http://schemas.openxmlformats.org/presentationml/2006/main" type="blank" preserve="1">
   <p:cSld name="slidekit · Bullet List">
     <p:bg>
@@ -4512,8 +4113,8 @@
         </p:nvSpPr>
         <p:spPr>
           <a:xfrm>
-            <a:off x="10363200" y="6035040"/>
-            <a:ext cx="1371600" cy="365760"/>
+            <a:off x="11186160" y="6035040"/>
+            <a:ext cx="548640" cy="365760"/>
           </a:xfrm>
         </p:spPr>
         <p:txBody>
@@ -4556,7 +4157,7 @@
             <a:r>
               <a:rPr sz="4200" b="1" i="0">
                 <a:solidFill>
-                  <a:srgbClr val="1C1C28"/>
+                  <a:srgbClr val="E2A03F"/>
                 </a:solidFill>
                 <a:latin typeface="Calibri"/>
               </a:rPr>
@@ -4689,7 +4290,7 @@
 </p:sldLayout>
 </file>
 
-<file path=ppt/slideLayouts/slideLayout26.xml><?xml version="1.0" encoding="utf-8"?>
+<file path=ppt/slideLayouts/slideLayout25.xml><?xml version="1.0" encoding="utf-8"?>
 <p:sldLayout xmlns:a="http://schemas.openxmlformats.org/drawingml/2006/main" xmlns:r="http://schemas.openxmlformats.org/officeDocument/2006/relationships" xmlns:p="http://schemas.openxmlformats.org/presentationml/2006/main" type="blank" preserve="1">
   <p:cSld name="slidekit · Code Block">
     <p:bg>
@@ -4726,8 +4327,8 @@
         </p:nvSpPr>
         <p:spPr>
           <a:xfrm>
-            <a:off x="10363200" y="6035040"/>
-            <a:ext cx="1371600" cy="365760"/>
+            <a:off x="11186160" y="6035040"/>
+            <a:ext cx="548640" cy="365760"/>
           </a:xfrm>
         </p:spPr>
         <p:txBody>
@@ -4759,7 +4360,7 @@
             <a:avLst/>
           </a:prstGeom>
           <a:solidFill>
-            <a:srgbClr val="FF5F56"/>
+            <a:srgbClr val="FFFFFF"/>
           </a:solidFill>
           <a:ln>
             <a:noFill/>
@@ -4791,7 +4392,7 @@
             <a:avLst/>
           </a:prstGeom>
           <a:solidFill>
-            <a:srgbClr val="FFBD2E"/>
+            <a:srgbClr val="FFFFFF"/>
           </a:solidFill>
           <a:ln>
             <a:noFill/>
@@ -4823,7 +4424,7 @@
             <a:avLst/>
           </a:prstGeom>
           <a:solidFill>
-            <a:srgbClr val="27C93F"/>
+            <a:srgbClr val="FFFFFF"/>
           </a:solidFill>
           <a:ln>
             <a:noFill/>
@@ -4866,7 +4467,7 @@
             <a:r>
               <a:rPr sz="4200" b="0" i="0">
                 <a:solidFill>
-                  <a:srgbClr val="D4D4D4"/>
+                  <a:srgbClr val="FFFFFF"/>
                 </a:solidFill>
                 <a:latin typeface="Calibri"/>
               </a:rPr>
@@ -4903,7 +4504,7 @@
             <a:r>
               <a:rPr sz="3400" b="0" i="0">
                 <a:solidFill>
-                  <a:srgbClr val="6A9955"/>
+                  <a:srgbClr val="FFFFFF"/>
                 </a:solidFill>
                 <a:latin typeface="Calibri"/>
               </a:rPr>
@@ -4960,7 +4561,7 @@
         <p:spPr>
           <a:xfrm>
             <a:off x="1148966" y="2356103"/>
-            <a:ext cx="320137" cy="518159"/>
+            <a:ext cx="2900521" cy="518159"/>
           </a:xfrm>
           <a:prstGeom prst="rect">
             <a:avLst/>
@@ -4977,11 +4578,11 @@
             <a:r>
               <a:rPr sz="3400" b="0" i="0">
                 <a:solidFill>
-                  <a:srgbClr val="D4D4D4"/>
-                </a:solidFill>
-                <a:latin typeface="Calibri"/>
-              </a:rPr>
-              <a:t> </a:t>
+                  <a:srgbClr val="FFFFFF"/>
+                </a:solidFill>
+                <a:latin typeface="Calibri"/>
+              </a:rPr>
+              <a:t> main():</a:t>
             </a:r>
           </a:p>
         </p:txBody>
@@ -4996,8 +4597,8 @@
         </p:nvSpPr>
         <p:spPr>
           <a:xfrm>
-            <a:off x="1286222" y="2356103"/>
-            <a:ext cx="1909067" cy="518159"/>
+            <a:off x="457200" y="2874262"/>
+            <a:ext cx="8228865" cy="518159"/>
           </a:xfrm>
           <a:prstGeom prst="rect">
             <a:avLst/>
@@ -5014,11 +4615,11 @@
             <a:r>
               <a:rPr sz="3400" b="0" i="0">
                 <a:solidFill>
-                  <a:srgbClr val="DCDCAA"/>
-                </a:solidFill>
-                <a:latin typeface="Calibri"/>
-              </a:rPr>
-              <a:t>main</a:t>
+                  <a:srgbClr val="FFFFFF"/>
+                </a:solidFill>
+                <a:latin typeface="Calibri"/>
+              </a:rPr>
+              <a:t>    print("Hello, world!")</a:t>
             </a:r>
           </a:p>
         </p:txBody>
@@ -5033,8 +4634,8 @@
         </p:nvSpPr>
         <p:spPr>
           <a:xfrm>
-            <a:off x="2365090" y="2356103"/>
-            <a:ext cx="954723" cy="518159"/>
+            <a:off x="457200" y="3910580"/>
+            <a:ext cx="2448144" cy="518159"/>
           </a:xfrm>
           <a:prstGeom prst="rect">
             <a:avLst/>
@@ -5051,11 +4652,11 @@
             <a:r>
               <a:rPr sz="3400" b="0" i="0">
                 <a:solidFill>
-                  <a:srgbClr val="D4D4D4"/>
-                </a:solidFill>
-                <a:latin typeface="Calibri"/>
-              </a:rPr>
-              <a:t>():</a:t>
+                  <a:srgbClr val="FFFFFF"/>
+                </a:solidFill>
+                <a:latin typeface="Calibri"/>
+              </a:rPr>
+              <a:t>main()</a:t>
             </a:r>
           </a:p>
         </p:txBody>
@@ -5066,265 +4667,6 @@
           <p:cNvSpPr/>
           <p:nvPr>
             <p:ph type="body" idx="13"/>
-          </p:nvPr>
-        </p:nvSpPr>
-        <p:spPr>
-          <a:xfrm>
-            <a:off x="457200" y="2874262"/>
-            <a:ext cx="731907" cy="518159"/>
-          </a:xfrm>
-          <a:prstGeom prst="rect">
-            <a:avLst/>
-          </a:prstGeom>
-          <a:noFill/>
-        </p:spPr>
-        <p:txBody>
-          <a:bodyPr wrap="none" lIns="0" rIns="0">
-            <a:noAutofit/>
-          </a:bodyPr>
-          <a:lstStyle/>
-          <a:p>
-            <a:pPr algn="l"/>
-            <a:r>
-              <a:rPr sz="3400" b="0" i="0">
-                <a:solidFill>
-                  <a:srgbClr val="D4D4D4"/>
-                </a:solidFill>
-                <a:latin typeface="Calibri"/>
-              </a:rPr>
-              <a:t>    </a:t>
-            </a:r>
-          </a:p>
-        </p:txBody>
-      </p:sp>
-      <p:sp>
-        <p:nvSpPr>
-          <p:cNvPr id="15" name="TextBox 14"/>
-          <p:cNvSpPr/>
-          <p:nvPr>
-            <p:ph type="body" idx="14"/>
-          </p:nvPr>
-        </p:nvSpPr>
-        <p:spPr>
-          <a:xfrm>
-            <a:off x="1006227" y="2874262"/>
-            <a:ext cx="1806177" cy="518159"/>
-          </a:xfrm>
-          <a:prstGeom prst="rect">
-            <a:avLst/>
-          </a:prstGeom>
-          <a:noFill/>
-        </p:spPr>
-        <p:txBody>
-          <a:bodyPr wrap="none" lIns="0" rIns="0">
-            <a:noAutofit/>
-          </a:bodyPr>
-          <a:lstStyle/>
-          <a:p>
-            <a:pPr algn="l"/>
-            <a:r>
-              <a:rPr sz="3400" b="0" i="0">
-                <a:solidFill>
-                  <a:srgbClr val="DCDCAA"/>
-                </a:solidFill>
-                <a:latin typeface="Calibri"/>
-              </a:rPr>
-              <a:t>print</a:t>
-            </a:r>
-          </a:p>
-        </p:txBody>
-      </p:sp>
-      <p:sp>
-        <p:nvSpPr>
-          <p:cNvPr id="16" name="TextBox 15"/>
-          <p:cNvSpPr/>
-          <p:nvPr>
-            <p:ph type="body" idx="15"/>
-          </p:nvPr>
-        </p:nvSpPr>
-        <p:spPr>
-          <a:xfrm>
-            <a:off x="2020788" y="2874262"/>
-            <a:ext cx="452417" cy="518159"/>
-          </a:xfrm>
-          <a:prstGeom prst="rect">
-            <a:avLst/>
-          </a:prstGeom>
-          <a:noFill/>
-        </p:spPr>
-        <p:txBody>
-          <a:bodyPr wrap="none" lIns="0" rIns="0">
-            <a:noAutofit/>
-          </a:bodyPr>
-          <a:lstStyle/>
-          <a:p>
-            <a:pPr algn="l"/>
-            <a:r>
-              <a:rPr sz="3400" b="0" i="0">
-                <a:solidFill>
-                  <a:srgbClr val="D4D4D4"/>
-                </a:solidFill>
-                <a:latin typeface="Calibri"/>
-              </a:rPr>
-              <a:t>(</a:t>
-            </a:r>
-          </a:p>
-        </p:txBody>
-      </p:sp>
-      <p:sp>
-        <p:nvSpPr>
-          <p:cNvPr id="17" name="TextBox 16"/>
-          <p:cNvSpPr/>
-          <p:nvPr>
-            <p:ph type="body" idx="16"/>
-          </p:nvPr>
-        </p:nvSpPr>
-        <p:spPr>
-          <a:xfrm>
-            <a:off x="2189249" y="2874262"/>
-            <a:ext cx="5188049" cy="518159"/>
-          </a:xfrm>
-          <a:prstGeom prst="rect">
-            <a:avLst/>
-          </a:prstGeom>
-          <a:noFill/>
-        </p:spPr>
-        <p:txBody>
-          <a:bodyPr wrap="none" lIns="0" rIns="0">
-            <a:noAutofit/>
-          </a:bodyPr>
-          <a:lstStyle/>
-          <a:p>
-            <a:pPr algn="l"/>
-            <a:r>
-              <a:rPr sz="3400" b="0" i="0">
-                <a:solidFill>
-                  <a:srgbClr val="CE9178"/>
-                </a:solidFill>
-                <a:latin typeface="Calibri"/>
-              </a:rPr>
-              <a:t>"Hello, world!"</a:t>
-            </a:r>
-          </a:p>
-        </p:txBody>
-      </p:sp>
-      <p:sp>
-        <p:nvSpPr>
-          <p:cNvPr id="18" name="TextBox 17"/>
-          <p:cNvSpPr/>
-          <p:nvPr>
-            <p:ph type="body" idx="17"/>
-          </p:nvPr>
-        </p:nvSpPr>
-        <p:spPr>
-          <a:xfrm>
-            <a:off x="5317480" y="2874262"/>
-            <a:ext cx="452417" cy="518159"/>
-          </a:xfrm>
-          <a:prstGeom prst="rect">
-            <a:avLst/>
-          </a:prstGeom>
-          <a:noFill/>
-        </p:spPr>
-        <p:txBody>
-          <a:bodyPr wrap="none" lIns="0" rIns="0">
-            <a:noAutofit/>
-          </a:bodyPr>
-          <a:lstStyle/>
-          <a:p>
-            <a:pPr algn="l"/>
-            <a:r>
-              <a:rPr sz="3400" b="0" i="0">
-                <a:solidFill>
-                  <a:srgbClr val="D4D4D4"/>
-                </a:solidFill>
-                <a:latin typeface="Calibri"/>
-              </a:rPr>
-              <a:t>)</a:t>
-            </a:r>
-          </a:p>
-        </p:txBody>
-      </p:sp>
-      <p:sp>
-        <p:nvSpPr>
-          <p:cNvPr id="19" name="TextBox 18"/>
-          <p:cNvSpPr/>
-          <p:nvPr>
-            <p:ph type="body" idx="18"/>
-          </p:nvPr>
-        </p:nvSpPr>
-        <p:spPr>
-          <a:xfrm>
-            <a:off x="457200" y="3910580"/>
-            <a:ext cx="1909067" cy="518159"/>
-          </a:xfrm>
-          <a:prstGeom prst="rect">
-            <a:avLst/>
-          </a:prstGeom>
-          <a:noFill/>
-        </p:spPr>
-        <p:txBody>
-          <a:bodyPr wrap="none" lIns="0" rIns="0">
-            <a:noAutofit/>
-          </a:bodyPr>
-          <a:lstStyle/>
-          <a:p>
-            <a:pPr algn="l"/>
-            <a:r>
-              <a:rPr sz="3400" b="0" i="0">
-                <a:solidFill>
-                  <a:srgbClr val="DCDCAA"/>
-                </a:solidFill>
-                <a:latin typeface="Calibri"/>
-              </a:rPr>
-              <a:t>main</a:t>
-            </a:r>
-          </a:p>
-        </p:txBody>
-      </p:sp>
-      <p:sp>
-        <p:nvSpPr>
-          <p:cNvPr id="20" name="TextBox 19"/>
-          <p:cNvSpPr/>
-          <p:nvPr>
-            <p:ph type="body" idx="19"/>
-          </p:nvPr>
-        </p:nvSpPr>
-        <p:spPr>
-          <a:xfrm>
-            <a:off x="1536067" y="3910580"/>
-            <a:ext cx="721955" cy="518159"/>
-          </a:xfrm>
-          <a:prstGeom prst="rect">
-            <a:avLst/>
-          </a:prstGeom>
-          <a:noFill/>
-        </p:spPr>
-        <p:txBody>
-          <a:bodyPr wrap="none" lIns="0" rIns="0">
-            <a:noAutofit/>
-          </a:bodyPr>
-          <a:lstStyle/>
-          <a:p>
-            <a:pPr algn="l"/>
-            <a:r>
-              <a:rPr sz="3400" b="0" i="0">
-                <a:solidFill>
-                  <a:srgbClr val="D4D4D4"/>
-                </a:solidFill>
-                <a:latin typeface="Calibri"/>
-              </a:rPr>
-              <a:t>()</a:t>
-            </a:r>
-          </a:p>
-        </p:txBody>
-      </p:sp>
-      <p:sp>
-        <p:nvSpPr>
-          <p:cNvPr id="21" name="TextBox 20"/>
-          <p:cNvSpPr/>
-          <p:nvPr>
-            <p:ph type="body" idx="20"/>
           </p:nvPr>
         </p:nvSpPr>
         <p:spPr>
@@ -5347,7 +4689,7 @@
             <a:r>
               <a:rPr sz="3400" b="0" i="0">
                 <a:solidFill>
-                  <a:srgbClr val="4EC9B0"/>
+                  <a:srgbClr val="569CD6"/>
                 </a:solidFill>
                 <a:latin typeface="Calibri"/>
               </a:rPr>
@@ -5358,10 +4700,10 @@
       </p:sp>
       <p:sp>
         <p:nvSpPr>
-          <p:cNvPr id="22" name="TextBox 21"/>
-          <p:cNvSpPr/>
-          <p:nvPr>
-            <p:ph type="body" idx="21"/>
+          <p:cNvPr id="15" name="TextBox 14"/>
+          <p:cNvSpPr/>
+          <p:nvPr>
+            <p:ph type="body" idx="14"/>
           </p:nvPr>
         </p:nvSpPr>
         <p:spPr>
@@ -5384,7 +4726,7 @@
             <a:r>
               <a:rPr sz="3400" b="0" i="0">
                 <a:solidFill>
-                  <a:srgbClr val="D4D4D4"/>
+                  <a:srgbClr val="FFFFFF"/>
                 </a:solidFill>
                 <a:latin typeface="Calibri"/>
               </a:rPr>
@@ -5395,10 +4737,10 @@
       </p:sp>
       <p:sp>
         <p:nvSpPr>
-          <p:cNvPr id="23" name="TextBox 22"/>
-          <p:cNvSpPr/>
-          <p:nvPr>
-            <p:ph type="body" idx="22"/>
+          <p:cNvPr id="16" name="TextBox 15"/>
+          <p:cNvSpPr/>
+          <p:nvPr>
+            <p:ph type="body" idx="15"/>
           </p:nvPr>
         </p:nvSpPr>
         <p:spPr>
@@ -5421,7 +4763,7 @@
             <a:r>
               <a:rPr sz="3400" b="0" i="0">
                 <a:solidFill>
-                  <a:srgbClr val="D4D4D4"/>
+                  <a:srgbClr val="FFFFFF"/>
                 </a:solidFill>
                 <a:latin typeface="Calibri"/>
               </a:rPr>
@@ -5443,7 +4785,7 @@
 </p:sldLayout>
 </file>
 
-<file path=ppt/slideLayouts/slideLayout27.xml><?xml version="1.0" encoding="utf-8"?>
+<file path=ppt/slideLayouts/slideLayout26.xml><?xml version="1.0" encoding="utf-8"?>
 <p:sldLayout xmlns:a="http://schemas.openxmlformats.org/drawingml/2006/main" xmlns:r="http://schemas.openxmlformats.org/officeDocument/2006/relationships" xmlns:p="http://schemas.openxmlformats.org/presentationml/2006/main" type="blank" preserve="1">
   <p:cSld name="slidekit · File Tree">
     <p:bg>
@@ -5480,8 +4822,8 @@
         </p:nvSpPr>
         <p:spPr>
           <a:xfrm>
-            <a:off x="10363200" y="6035040"/>
-            <a:ext cx="1371600" cy="365760"/>
+            <a:off x="11186160" y="6035040"/>
+            <a:ext cx="548640" cy="365760"/>
           </a:xfrm>
         </p:spPr>
         <p:txBody>
@@ -5524,7 +4866,7 @@
             <a:r>
               <a:rPr sz="4200" b="1" i="0">
                 <a:solidFill>
-                  <a:srgbClr val="16504B"/>
+                  <a:srgbClr val="E2A03F"/>
                 </a:solidFill>
                 <a:latin typeface="Calibri"/>
               </a:rPr>
@@ -5552,7 +4894,7 @@
             </a:avLst>
           </a:prstGeom>
           <a:solidFill>
-            <a:srgbClr val="0C1A1C"/>
+            <a:srgbClr val="1C1C28"/>
           </a:solidFill>
           <a:ln>
             <a:noFill/>
@@ -5595,7 +4937,7 @@
             <a:r>
               <a:rPr sz="2600" b="1" i="0">
                 <a:solidFill>
-                  <a:srgbClr val="569CD6"/>
+                  <a:srgbClr val="E2A03F"/>
                 </a:solidFill>
                 <a:latin typeface="Courier New"/>
               </a:rPr>
@@ -5632,7 +4974,7 @@
             <a:r>
               <a:rPr sz="2600" b="0" i="0">
                 <a:solidFill>
-                  <a:srgbClr val="55707A"/>
+                  <a:srgbClr val="E2A03F"/>
                 </a:solidFill>
                 <a:latin typeface="Courier New"/>
               </a:rPr>
@@ -5669,7 +5011,7 @@
             <a:r>
               <a:rPr sz="2600" b="1" i="0">
                 <a:solidFill>
-                  <a:srgbClr val="569CD6"/>
+                  <a:srgbClr val="E2A03F"/>
                 </a:solidFill>
                 <a:latin typeface="Courier New"/>
               </a:rPr>
@@ -5706,7 +5048,7 @@
             <a:r>
               <a:rPr sz="2600" b="0" i="0">
                 <a:solidFill>
-                  <a:srgbClr val="55707A"/>
+                  <a:srgbClr val="E2A03F"/>
                 </a:solidFill>
                 <a:latin typeface="Courier New"/>
               </a:rPr>
@@ -5743,7 +5085,7 @@
             <a:r>
               <a:rPr sz="2600" b="1" i="0">
                 <a:solidFill>
-                  <a:srgbClr val="569CD6"/>
+                  <a:srgbClr val="E2A03F"/>
                 </a:solidFill>
                 <a:latin typeface="Courier New"/>
               </a:rPr>
@@ -5780,7 +5122,7 @@
             <a:r>
               <a:rPr sz="2600" b="0" i="0">
                 <a:solidFill>
-                  <a:srgbClr val="55707A"/>
+                  <a:srgbClr val="E2A03F"/>
                 </a:solidFill>
                 <a:latin typeface="Courier New"/>
               </a:rPr>
@@ -5817,7 +5159,7 @@
             <a:r>
               <a:rPr sz="2600" b="0" i="0">
                 <a:solidFill>
-                  <a:srgbClr val="D4D4D4"/>
+                  <a:srgbClr val="FFFFFF"/>
                 </a:solidFill>
                 <a:latin typeface="Courier New"/>
               </a:rPr>
@@ -5854,7 +5196,7 @@
             <a:r>
               <a:rPr sz="2600" b="0" i="0">
                 <a:solidFill>
-                  <a:srgbClr val="55707A"/>
+                  <a:srgbClr val="E2A03F"/>
                 </a:solidFill>
                 <a:latin typeface="Courier New"/>
               </a:rPr>
@@ -5891,7 +5233,7 @@
             <a:r>
               <a:rPr sz="2600" b="0" i="0">
                 <a:solidFill>
-                  <a:srgbClr val="D4D4D4"/>
+                  <a:srgbClr val="FFFFFF"/>
                 </a:solidFill>
                 <a:latin typeface="Courier New"/>
               </a:rPr>
@@ -5928,7 +5270,7 @@
             <a:r>
               <a:rPr sz="2600" b="0" i="0">
                 <a:solidFill>
-                  <a:srgbClr val="55707A"/>
+                  <a:srgbClr val="E2A03F"/>
                 </a:solidFill>
                 <a:latin typeface="Courier New"/>
               </a:rPr>
@@ -5965,7 +5307,7 @@
             <a:r>
               <a:rPr sz="2600" b="0" i="0">
                 <a:solidFill>
-                  <a:srgbClr val="D4D4D4"/>
+                  <a:srgbClr val="FFFFFF"/>
                 </a:solidFill>
                 <a:latin typeface="Courier New"/>
               </a:rPr>
@@ -6002,7 +5344,7 @@
             <a:r>
               <a:rPr sz="2600" b="0" i="0">
                 <a:solidFill>
-                  <a:srgbClr val="55707A"/>
+                  <a:srgbClr val="E2A03F"/>
                 </a:solidFill>
                 <a:latin typeface="Courier New"/>
               </a:rPr>
@@ -6039,7 +5381,7 @@
             <a:r>
               <a:rPr sz="2600" b="0" i="0">
                 <a:solidFill>
-                  <a:srgbClr val="D4D4D4"/>
+                  <a:srgbClr val="FFFFFF"/>
                 </a:solidFill>
                 <a:latin typeface="Courier New"/>
               </a:rPr>
@@ -6076,7 +5418,7 @@
             <a:r>
               <a:rPr sz="2600" b="0" i="0">
                 <a:solidFill>
-                  <a:srgbClr val="55707A"/>
+                  <a:srgbClr val="E2A03F"/>
                 </a:solidFill>
                 <a:latin typeface="Courier New"/>
               </a:rPr>
@@ -6113,7 +5455,7 @@
             <a:r>
               <a:rPr sz="2600" b="0" i="0">
                 <a:solidFill>
-                  <a:srgbClr val="D4D4D4"/>
+                  <a:srgbClr val="FFFFFF"/>
                 </a:solidFill>
                 <a:latin typeface="Courier New"/>
               </a:rPr>
@@ -6135,7 +5477,7 @@
 </p:sldLayout>
 </file>
 
-<file path=ppt/slideLayouts/slideLayout28.xml><?xml version="1.0" encoding="utf-8"?>
+<file path=ppt/slideLayouts/slideLayout27.xml><?xml version="1.0" encoding="utf-8"?>
 <p:sldLayout xmlns:a="http://schemas.openxmlformats.org/drawingml/2006/main" xmlns:r="http://schemas.openxmlformats.org/officeDocument/2006/relationships" xmlns:p="http://schemas.openxmlformats.org/presentationml/2006/main" type="blank" preserve="1">
   <p:cSld name="slidekit · Numbered Steps">
     <p:bg>
@@ -6172,8 +5514,8 @@
         </p:nvSpPr>
         <p:spPr>
           <a:xfrm>
-            <a:off x="10363200" y="6035040"/>
-            <a:ext cx="1371600" cy="365760"/>
+            <a:off x="11186160" y="6035040"/>
+            <a:ext cx="548640" cy="365760"/>
           </a:xfrm>
         </p:spPr>
         <p:txBody>
@@ -6216,7 +5558,7 @@
             <a:r>
               <a:rPr sz="4200" b="1" i="0">
                 <a:solidFill>
-                  <a:srgbClr val="1C1C28"/>
+                  <a:srgbClr val="E2A03F"/>
                 </a:solidFill>
                 <a:latin typeface="Calibri"/>
               </a:rPr>
@@ -6253,7 +5595,7 @@
             <a:r>
               <a:rPr sz="4200" b="1" i="0">
                 <a:solidFill>
-                  <a:srgbClr val="16504B"/>
+                  <a:srgbClr val="E2A03F"/>
                 </a:solidFill>
                 <a:latin typeface="Calibri"/>
               </a:rPr>
@@ -6290,7 +5632,7 @@
             <a:r>
               <a:rPr sz="4200" b="1" i="0">
                 <a:solidFill>
-                  <a:srgbClr val="16504B"/>
+                  <a:srgbClr val="E2A03F"/>
                 </a:solidFill>
                 <a:latin typeface="Calibri"/>
               </a:rPr>
@@ -6364,7 +5706,7 @@
             <a:r>
               <a:rPr sz="4200" b="1" i="0">
                 <a:solidFill>
-                  <a:srgbClr val="16504B"/>
+                  <a:srgbClr val="E2A03F"/>
                 </a:solidFill>
                 <a:latin typeface="Calibri"/>
               </a:rPr>
@@ -6401,7 +5743,7 @@
             <a:r>
               <a:rPr sz="4200" b="1" i="0">
                 <a:solidFill>
-                  <a:srgbClr val="16504B"/>
+                  <a:srgbClr val="E2A03F"/>
                 </a:solidFill>
                 <a:latin typeface="Calibri"/>
               </a:rPr>
@@ -6475,7 +5817,7 @@
             <a:r>
               <a:rPr sz="4200" b="1" i="0">
                 <a:solidFill>
-                  <a:srgbClr val="16504B"/>
+                  <a:srgbClr val="E2A03F"/>
                 </a:solidFill>
                 <a:latin typeface="Calibri"/>
               </a:rPr>
@@ -6512,7 +5854,7 @@
             <a:r>
               <a:rPr sz="4200" b="1" i="0">
                 <a:solidFill>
-                  <a:srgbClr val="16504B"/>
+                  <a:srgbClr val="E2A03F"/>
                 </a:solidFill>
                 <a:latin typeface="Calibri"/>
               </a:rPr>
@@ -6571,7 +5913,7 @@
 </p:sldLayout>
 </file>
 
-<file path=ppt/slideLayouts/slideLayout29.xml><?xml version="1.0" encoding="utf-8"?>
+<file path=ppt/slideLayouts/slideLayout28.xml><?xml version="1.0" encoding="utf-8"?>
 <p:sldLayout xmlns:a="http://schemas.openxmlformats.org/drawingml/2006/main" xmlns:r="http://schemas.openxmlformats.org/officeDocument/2006/relationships" xmlns:p="http://schemas.openxmlformats.org/presentationml/2006/main" type="blank" preserve="1">
   <p:cSld name="slidekit · Two Panel List">
     <p:bg>
@@ -6608,8 +5950,8 @@
         </p:nvSpPr>
         <p:spPr>
           <a:xfrm>
-            <a:off x="10363200" y="6035040"/>
-            <a:ext cx="1371600" cy="365760"/>
+            <a:off x="11186160" y="6035040"/>
+            <a:ext cx="548640" cy="365760"/>
           </a:xfrm>
         </p:spPr>
         <p:txBody>
@@ -6652,7 +5994,7 @@
             <a:r>
               <a:rPr sz="4200" b="1" i="0">
                 <a:solidFill>
-                  <a:srgbClr val="16504B"/>
+                  <a:srgbClr val="E2A03F"/>
                 </a:solidFill>
                 <a:latin typeface="Calibri"/>
               </a:rPr>
@@ -6689,7 +6031,7 @@
             <a:r>
               <a:rPr sz="3400" b="1" i="0">
                 <a:solidFill>
-                  <a:srgbClr val="16504B"/>
+                  <a:srgbClr val="E2A03F"/>
                 </a:solidFill>
                 <a:latin typeface="Calibri"/>
               </a:rPr>
@@ -6708,14 +6050,14 @@
         </p:nvSpPr>
         <p:spPr>
           <a:xfrm>
-            <a:off x="548640" y="2176271"/>
-            <a:ext cx="1650492" cy="54864"/>
+            <a:off x="457200" y="2176271"/>
+            <a:ext cx="1612292" cy="54864"/>
           </a:xfrm>
           <a:prstGeom prst="rect">
             <a:avLst/>
           </a:prstGeom>
           <a:solidFill>
-            <a:srgbClr val="16504B"/>
+            <a:srgbClr val="E2A03F"/>
           </a:solidFill>
           <a:ln>
             <a:noFill/>
@@ -6758,7 +6100,7 @@
             <a:r>
               <a:rPr sz="3400" b="1" i="0">
                 <a:solidFill>
-                  <a:srgbClr val="8A8A9A"/>
+                  <a:srgbClr val="1C1C28"/>
                 </a:solidFill>
                 <a:latin typeface="Calibri"/>
               </a:rPr>
@@ -6777,14 +6119,14 @@
         </p:nvSpPr>
         <p:spPr>
           <a:xfrm>
-            <a:off x="6324600" y="2176271"/>
-            <a:ext cx="1650492" cy="54864"/>
+            <a:off x="6233160" y="2176271"/>
+            <a:ext cx="1234256" cy="54864"/>
           </a:xfrm>
           <a:prstGeom prst="rect">
             <a:avLst/>
           </a:prstGeom>
           <a:solidFill>
-            <a:srgbClr val="8A8A9A"/>
+            <a:srgbClr val="1C1C28"/>
           </a:solidFill>
           <a:ln>
             <a:noFill/>
@@ -7017,6 +6359,294 @@
                 <a:latin typeface="Calibri"/>
               </a:rPr>
               <a:t>In-product live chat</a:t>
+            </a:r>
+          </a:p>
+        </p:txBody>
+      </p:sp>
+    </p:spTree>
+    <p:extLst>
+      <p:ext uri="{BB962C8B-B14F-4D97-AF65-F5344CB8AC3E}">
+        <p14:creationId xmlns:p14="http://schemas.microsoft.com/office/powerpoint/2010/main" val="1212999818"/>
+      </p:ext>
+    </p:extLst>
+  </p:cSld>
+  <p:clrMapOvr>
+    <a:masterClrMapping/>
+  </p:clrMapOvr>
+</p:sldLayout>
+</file>
+
+<file path=ppt/slideLayouts/slideLayout29.xml><?xml version="1.0" encoding="utf-8"?>
+<p:sldLayout xmlns:a="http://schemas.openxmlformats.org/drawingml/2006/main" xmlns:r="http://schemas.openxmlformats.org/officeDocument/2006/relationships" xmlns:p="http://schemas.openxmlformats.org/presentationml/2006/main" type="blank" preserve="1">
+  <p:cSld name="slidekit · This vs That">
+    <p:bg>
+      <p:bgPr>
+        <a:solidFill>
+          <a:srgbClr val="FFFFFF"/>
+        </a:solidFill>
+        <a:effectLst/>
+      </p:bgPr>
+    </p:bg>
+    <p:spTree>
+      <p:nvGrpSpPr>
+        <p:cNvPr id="1" name=""/>
+        <p:cNvGrpSpPr/>
+        <p:nvPr/>
+      </p:nvGrpSpPr>
+      <p:grpSpPr>
+        <a:xfrm>
+          <a:off x="0" y="0"/>
+          <a:ext cx="0" cy="0"/>
+          <a:chOff x="0" y="0"/>
+          <a:chExt cx="0" cy="0"/>
+        </a:xfrm>
+      </p:grpSpPr>
+      <p:sp>
+        <p:nvSpPr>
+          <p:cNvPr id="4" name="Slide Number Placeholder 3"/>
+          <p:cNvSpPr>
+            <a:spLocks noGrp="1"/>
+          </p:cNvSpPr>
+          <p:nvPr>
+            <p:ph type="sldNum" sz="quarter" idx="12"/>
+          </p:nvPr>
+        </p:nvSpPr>
+        <p:spPr>
+          <a:xfrm>
+            <a:off x="11186160" y="6035040"/>
+            <a:ext cx="548640" cy="365760"/>
+          </a:xfrm>
+        </p:spPr>
+        <p:txBody>
+          <a:bodyPr/>
+          <a:lstStyle/>
+          <a:p>
+            <a:fld id="{C1FF6DA9-008F-8B48-92A6-B652298478BF}" type="slidenum">
+              <a:rPr lang="en-US" smtClean="0"/>
+              <a:t>‹#›</a:t>
+            </a:fld>
+            <a:endParaRPr lang="en-US"/>
+          </a:p>
+        </p:txBody>
+      </p:sp>
+      <p:sp>
+        <p:nvSpPr>
+          <p:cNvPr id="5" name="TextBox 4"/>
+          <p:cNvSpPr/>
+          <p:nvPr>
+            <p:ph type="title"/>
+          </p:nvPr>
+        </p:nvSpPr>
+        <p:spPr>
+          <a:xfrm>
+            <a:off x="457200" y="457200"/>
+            <a:ext cx="11277600" cy="768096"/>
+          </a:xfrm>
+          <a:prstGeom prst="rect">
+            <a:avLst/>
+          </a:prstGeom>
+          <a:noFill/>
+        </p:spPr>
+        <p:txBody>
+          <a:bodyPr wrap="none" lIns="0" rIns="0">
+            <a:noAutofit/>
+          </a:bodyPr>
+          <a:lstStyle/>
+          <a:p>
+            <a:pPr algn="l"/>
+            <a:r>
+              <a:rPr sz="4200" b="1" i="0">
+                <a:solidFill>
+                  <a:srgbClr val="E2A03F"/>
+                </a:solidFill>
+                <a:latin typeface="Calibri"/>
+              </a:rPr>
+              <a:t>Cloud or On-Prem</a:t>
+            </a:r>
+          </a:p>
+        </p:txBody>
+      </p:sp>
+      <p:sp>
+        <p:nvSpPr>
+          <p:cNvPr id="6" name="TextBox 5"/>
+          <p:cNvSpPr/>
+          <p:nvPr>
+            <p:ph type="body" idx="1"/>
+          </p:nvPr>
+        </p:nvSpPr>
+        <p:spPr>
+          <a:xfrm>
+            <a:off x="457200" y="2791969"/>
+            <a:ext cx="4792980" cy="883919"/>
+          </a:xfrm>
+          <a:prstGeom prst="rect">
+            <a:avLst/>
+          </a:prstGeom>
+          <a:noFill/>
+        </p:spPr>
+        <p:txBody>
+          <a:bodyPr wrap="none" lIns="0" rIns="0">
+            <a:noAutofit/>
+          </a:bodyPr>
+          <a:lstStyle/>
+          <a:p>
+            <a:pPr algn="ctr"/>
+            <a:r>
+              <a:rPr sz="5800" b="1" i="0">
+                <a:solidFill>
+                  <a:srgbClr val="1C1C28"/>
+                </a:solidFill>
+                <a:latin typeface="Calibri"/>
+              </a:rPr>
+              <a:t>3 wks</a:t>
+            </a:r>
+          </a:p>
+        </p:txBody>
+      </p:sp>
+      <p:sp>
+        <p:nvSpPr>
+          <p:cNvPr id="7" name="TextBox 6"/>
+          <p:cNvSpPr/>
+          <p:nvPr>
+            <p:ph type="body" idx="2"/>
+          </p:nvPr>
+        </p:nvSpPr>
+        <p:spPr>
+          <a:xfrm>
+            <a:off x="0" y="3950208"/>
+            <a:ext cx="5707380" cy="518159"/>
+          </a:xfrm>
+          <a:prstGeom prst="rect">
+            <a:avLst/>
+          </a:prstGeom>
+          <a:noFill/>
+        </p:spPr>
+        <p:txBody>
+          <a:bodyPr wrap="none" lIns="0" rIns="0">
+            <a:noAutofit/>
+          </a:bodyPr>
+          <a:lstStyle/>
+          <a:p>
+            <a:pPr algn="ctr"/>
+            <a:r>
+              <a:rPr sz="3400" b="0" i="0">
+                <a:solidFill>
+                  <a:srgbClr val="1C1C28"/>
+                </a:solidFill>
+                <a:latin typeface="Calibri"/>
+              </a:rPr>
+              <a:t>Cloud time-to-launch</a:t>
+            </a:r>
+          </a:p>
+        </p:txBody>
+      </p:sp>
+      <p:sp>
+        <p:nvSpPr>
+          <p:cNvPr id="8" name="TextBox 7"/>
+          <p:cNvSpPr/>
+          <p:nvPr>
+            <p:ph type="body" idx="3"/>
+          </p:nvPr>
+        </p:nvSpPr>
+        <p:spPr>
+          <a:xfrm>
+            <a:off x="6941820" y="2791969"/>
+            <a:ext cx="4792980" cy="883919"/>
+          </a:xfrm>
+          <a:prstGeom prst="rect">
+            <a:avLst/>
+          </a:prstGeom>
+          <a:noFill/>
+        </p:spPr>
+        <p:txBody>
+          <a:bodyPr wrap="none" lIns="0" rIns="0">
+            <a:noAutofit/>
+          </a:bodyPr>
+          <a:lstStyle/>
+          <a:p>
+            <a:pPr algn="ctr"/>
+            <a:r>
+              <a:rPr sz="5800" b="1" i="0">
+                <a:solidFill>
+                  <a:srgbClr val="1C1C28"/>
+                </a:solidFill>
+                <a:latin typeface="Calibri"/>
+              </a:rPr>
+              <a:t>6 mo</a:t>
+            </a:r>
+          </a:p>
+        </p:txBody>
+      </p:sp>
+      <p:sp>
+        <p:nvSpPr>
+          <p:cNvPr id="9" name="TextBox 8"/>
+          <p:cNvSpPr/>
+          <p:nvPr>
+            <p:ph type="body" idx="4"/>
+          </p:nvPr>
+        </p:nvSpPr>
+        <p:spPr>
+          <a:xfrm>
+            <a:off x="6941820" y="3950208"/>
+            <a:ext cx="4792980" cy="518159"/>
+          </a:xfrm>
+          <a:prstGeom prst="rect">
+            <a:avLst/>
+          </a:prstGeom>
+          <a:noFill/>
+        </p:spPr>
+        <p:txBody>
+          <a:bodyPr wrap="square" lIns="0" rIns="0">
+            <a:noAutofit/>
+          </a:bodyPr>
+          <a:lstStyle/>
+          <a:p>
+            <a:pPr algn="ctr"/>
+            <a:r>
+              <a:rPr sz="3400" b="0" i="0">
+                <a:solidFill>
+                  <a:srgbClr val="1C1C28"/>
+                </a:solidFill>
+                <a:latin typeface="Calibri"/>
+              </a:rPr>
+              <a:t>On-prem time-to-launch</a:t>
+            </a:r>
+          </a:p>
+        </p:txBody>
+      </p:sp>
+      <p:sp>
+        <p:nvSpPr>
+          <p:cNvPr id="10" name="TextBox 9"/>
+          <p:cNvSpPr/>
+          <p:nvPr>
+            <p:ph type="body" idx="5"/>
+          </p:nvPr>
+        </p:nvSpPr>
+        <p:spPr>
+          <a:xfrm>
+            <a:off x="5366980" y="3310128"/>
+            <a:ext cx="1458040" cy="640080"/>
+          </a:xfrm>
+          <a:prstGeom prst="rect">
+            <a:avLst/>
+          </a:prstGeom>
+          <a:noFill/>
+        </p:spPr>
+        <p:txBody>
+          <a:bodyPr wrap="none" lIns="0" rIns="0">
+            <a:noAutofit/>
+          </a:bodyPr>
+          <a:lstStyle/>
+          <a:p>
+            <a:pPr algn="ctr"/>
+            <a:r>
+              <a:rPr sz="4200" b="1" i="0">
+                <a:solidFill>
+                  <a:srgbClr val="1C1C28"/>
+                </a:solidFill>
+                <a:latin typeface="Calibri"/>
+              </a:rPr>
+              <a:t>VS</a:t>
             </a:r>
           </a:p>
         </p:txBody>
@@ -7282,294 +6912,6 @@
 
 <file path=ppt/slideLayouts/slideLayout30.xml><?xml version="1.0" encoding="utf-8"?>
 <p:sldLayout xmlns:a="http://schemas.openxmlformats.org/drawingml/2006/main" xmlns:r="http://schemas.openxmlformats.org/officeDocument/2006/relationships" xmlns:p="http://schemas.openxmlformats.org/presentationml/2006/main" type="blank" preserve="1">
-  <p:cSld name="slidekit · This vs That">
-    <p:bg>
-      <p:bgPr>
-        <a:solidFill>
-          <a:srgbClr val="FFFFFF"/>
-        </a:solidFill>
-        <a:effectLst/>
-      </p:bgPr>
-    </p:bg>
-    <p:spTree>
-      <p:nvGrpSpPr>
-        <p:cNvPr id="1" name=""/>
-        <p:cNvGrpSpPr/>
-        <p:nvPr/>
-      </p:nvGrpSpPr>
-      <p:grpSpPr>
-        <a:xfrm>
-          <a:off x="0" y="0"/>
-          <a:ext cx="0" cy="0"/>
-          <a:chOff x="0" y="0"/>
-          <a:chExt cx="0" cy="0"/>
-        </a:xfrm>
-      </p:grpSpPr>
-      <p:sp>
-        <p:nvSpPr>
-          <p:cNvPr id="4" name="Slide Number Placeholder 3"/>
-          <p:cNvSpPr>
-            <a:spLocks noGrp="1"/>
-          </p:cNvSpPr>
-          <p:nvPr>
-            <p:ph type="sldNum" sz="quarter" idx="12"/>
-          </p:nvPr>
-        </p:nvSpPr>
-        <p:spPr>
-          <a:xfrm>
-            <a:off x="10363200" y="6035040"/>
-            <a:ext cx="1371600" cy="365760"/>
-          </a:xfrm>
-        </p:spPr>
-        <p:txBody>
-          <a:bodyPr/>
-          <a:lstStyle/>
-          <a:p>
-            <a:fld id="{C1FF6DA9-008F-8B48-92A6-B652298478BF}" type="slidenum">
-              <a:rPr lang="en-US" smtClean="0"/>
-              <a:t>‹#›</a:t>
-            </a:fld>
-            <a:endParaRPr lang="en-US"/>
-          </a:p>
-        </p:txBody>
-      </p:sp>
-      <p:sp>
-        <p:nvSpPr>
-          <p:cNvPr id="5" name="TextBox 4"/>
-          <p:cNvSpPr/>
-          <p:nvPr>
-            <p:ph type="title"/>
-          </p:nvPr>
-        </p:nvSpPr>
-        <p:spPr>
-          <a:xfrm>
-            <a:off x="457200" y="457200"/>
-            <a:ext cx="11277600" cy="768096"/>
-          </a:xfrm>
-          <a:prstGeom prst="rect">
-            <a:avLst/>
-          </a:prstGeom>
-          <a:noFill/>
-        </p:spPr>
-        <p:txBody>
-          <a:bodyPr wrap="none" lIns="0" rIns="0">
-            <a:noAutofit/>
-          </a:bodyPr>
-          <a:lstStyle/>
-          <a:p>
-            <a:pPr algn="l"/>
-            <a:r>
-              <a:rPr sz="4200" b="1" i="0">
-                <a:solidFill>
-                  <a:srgbClr val="16504B"/>
-                </a:solidFill>
-                <a:latin typeface="Calibri"/>
-              </a:rPr>
-              <a:t>Cloud or On-Prem</a:t>
-            </a:r>
-          </a:p>
-        </p:txBody>
-      </p:sp>
-      <p:sp>
-        <p:nvSpPr>
-          <p:cNvPr id="6" name="TextBox 5"/>
-          <p:cNvSpPr/>
-          <p:nvPr>
-            <p:ph type="body" idx="1"/>
-          </p:nvPr>
-        </p:nvSpPr>
-        <p:spPr>
-          <a:xfrm>
-            <a:off x="457200" y="2791969"/>
-            <a:ext cx="4792980" cy="883919"/>
-          </a:xfrm>
-          <a:prstGeom prst="rect">
-            <a:avLst/>
-          </a:prstGeom>
-          <a:noFill/>
-        </p:spPr>
-        <p:txBody>
-          <a:bodyPr wrap="none" lIns="0" rIns="0">
-            <a:noAutofit/>
-          </a:bodyPr>
-          <a:lstStyle/>
-          <a:p>
-            <a:pPr algn="ctr"/>
-            <a:r>
-              <a:rPr sz="5800" b="1" i="0">
-                <a:solidFill>
-                  <a:srgbClr val="1C1C28"/>
-                </a:solidFill>
-                <a:latin typeface="Calibri"/>
-              </a:rPr>
-              <a:t>3 wks</a:t>
-            </a:r>
-          </a:p>
-        </p:txBody>
-      </p:sp>
-      <p:sp>
-        <p:nvSpPr>
-          <p:cNvPr id="7" name="TextBox 6"/>
-          <p:cNvSpPr/>
-          <p:nvPr>
-            <p:ph type="body" idx="2"/>
-          </p:nvPr>
-        </p:nvSpPr>
-        <p:spPr>
-          <a:xfrm>
-            <a:off x="0" y="3950208"/>
-            <a:ext cx="5707380" cy="518159"/>
-          </a:xfrm>
-          <a:prstGeom prst="rect">
-            <a:avLst/>
-          </a:prstGeom>
-          <a:noFill/>
-        </p:spPr>
-        <p:txBody>
-          <a:bodyPr wrap="none" lIns="0" rIns="0">
-            <a:noAutofit/>
-          </a:bodyPr>
-          <a:lstStyle/>
-          <a:p>
-            <a:pPr algn="ctr"/>
-            <a:r>
-              <a:rPr sz="3400" b="0" i="0">
-                <a:solidFill>
-                  <a:srgbClr val="1C1C28"/>
-                </a:solidFill>
-                <a:latin typeface="Calibri"/>
-              </a:rPr>
-              <a:t>Cloud time-to-launch</a:t>
-            </a:r>
-          </a:p>
-        </p:txBody>
-      </p:sp>
-      <p:sp>
-        <p:nvSpPr>
-          <p:cNvPr id="8" name="TextBox 7"/>
-          <p:cNvSpPr/>
-          <p:nvPr>
-            <p:ph type="body" idx="3"/>
-          </p:nvPr>
-        </p:nvSpPr>
-        <p:spPr>
-          <a:xfrm>
-            <a:off x="6941820" y="2791969"/>
-            <a:ext cx="4792980" cy="883919"/>
-          </a:xfrm>
-          <a:prstGeom prst="rect">
-            <a:avLst/>
-          </a:prstGeom>
-          <a:noFill/>
-        </p:spPr>
-        <p:txBody>
-          <a:bodyPr wrap="none" lIns="0" rIns="0">
-            <a:noAutofit/>
-          </a:bodyPr>
-          <a:lstStyle/>
-          <a:p>
-            <a:pPr algn="ctr"/>
-            <a:r>
-              <a:rPr sz="5800" b="1" i="0">
-                <a:solidFill>
-                  <a:srgbClr val="1C1C28"/>
-                </a:solidFill>
-                <a:latin typeface="Calibri"/>
-              </a:rPr>
-              <a:t>6 mo</a:t>
-            </a:r>
-          </a:p>
-        </p:txBody>
-      </p:sp>
-      <p:sp>
-        <p:nvSpPr>
-          <p:cNvPr id="9" name="TextBox 8"/>
-          <p:cNvSpPr/>
-          <p:nvPr>
-            <p:ph type="body" idx="4"/>
-          </p:nvPr>
-        </p:nvSpPr>
-        <p:spPr>
-          <a:xfrm>
-            <a:off x="6941820" y="3950208"/>
-            <a:ext cx="4792980" cy="518159"/>
-          </a:xfrm>
-          <a:prstGeom prst="rect">
-            <a:avLst/>
-          </a:prstGeom>
-          <a:noFill/>
-        </p:spPr>
-        <p:txBody>
-          <a:bodyPr wrap="square" lIns="0" rIns="0">
-            <a:noAutofit/>
-          </a:bodyPr>
-          <a:lstStyle/>
-          <a:p>
-            <a:pPr algn="ctr"/>
-            <a:r>
-              <a:rPr sz="3400" b="0" i="0">
-                <a:solidFill>
-                  <a:srgbClr val="1C1C28"/>
-                </a:solidFill>
-                <a:latin typeface="Calibri"/>
-              </a:rPr>
-              <a:t>On-prem time-to-launch</a:t>
-            </a:r>
-          </a:p>
-        </p:txBody>
-      </p:sp>
-      <p:sp>
-        <p:nvSpPr>
-          <p:cNvPr id="10" name="TextBox 9"/>
-          <p:cNvSpPr/>
-          <p:nvPr>
-            <p:ph type="body" idx="5"/>
-          </p:nvPr>
-        </p:nvSpPr>
-        <p:spPr>
-          <a:xfrm>
-            <a:off x="5366980" y="3310128"/>
-            <a:ext cx="1458040" cy="640080"/>
-          </a:xfrm>
-          <a:prstGeom prst="rect">
-            <a:avLst/>
-          </a:prstGeom>
-          <a:noFill/>
-        </p:spPr>
-        <p:txBody>
-          <a:bodyPr wrap="none" lIns="0" rIns="0">
-            <a:noAutofit/>
-          </a:bodyPr>
-          <a:lstStyle/>
-          <a:p>
-            <a:pPr algn="ctr"/>
-            <a:r>
-              <a:rPr sz="4200" b="1" i="0">
-                <a:solidFill>
-                  <a:srgbClr val="8A8A9A"/>
-                </a:solidFill>
-                <a:latin typeface="Calibri"/>
-              </a:rPr>
-              <a:t>VS</a:t>
-            </a:r>
-          </a:p>
-        </p:txBody>
-      </p:sp>
-    </p:spTree>
-    <p:extLst>
-      <p:ext uri="{BB962C8B-B14F-4D97-AF65-F5344CB8AC3E}">
-        <p14:creationId xmlns:p14="http://schemas.microsoft.com/office/powerpoint/2010/main" val="1212999818"/>
-      </p:ext>
-    </p:extLst>
-  </p:cSld>
-  <p:clrMapOvr>
-    <a:masterClrMapping/>
-  </p:clrMapOvr>
-</p:sldLayout>
-</file>
-
-<file path=ppt/slideLayouts/slideLayout31.xml><?xml version="1.0" encoding="utf-8"?>
-<p:sldLayout xmlns:a="http://schemas.openxmlformats.org/drawingml/2006/main" xmlns:r="http://schemas.openxmlformats.org/officeDocument/2006/relationships" xmlns:p="http://schemas.openxmlformats.org/presentationml/2006/main" type="blank" preserve="1">
   <p:cSld name="slidekit · KPI Grid">
     <p:bg>
       <p:bgPr>
@@ -7605,8 +6947,8 @@
         </p:nvSpPr>
         <p:spPr>
           <a:xfrm>
-            <a:off x="10363200" y="6035040"/>
-            <a:ext cx="1371600" cy="365760"/>
+            <a:off x="11186160" y="6035040"/>
+            <a:ext cx="548640" cy="365760"/>
           </a:xfrm>
         </p:spPr>
         <p:txBody>
@@ -7649,7 +6991,7 @@
             <a:r>
               <a:rPr sz="4200" b="1" i="0">
                 <a:solidFill>
-                  <a:srgbClr val="16504B"/>
+                  <a:srgbClr val="E2A03F"/>
                 </a:solidFill>
                 <a:latin typeface="Calibri"/>
               </a:rPr>
@@ -8092,7 +7434,7 @@
         </p:nvSpPr>
         <p:spPr>
           <a:xfrm>
-            <a:off x="4149745" y="3797808"/>
+            <a:off x="4149745" y="4056888"/>
             <a:ext cx="3892510" cy="640080"/>
           </a:xfrm>
           <a:prstGeom prst="rect">
@@ -8129,7 +7471,7 @@
         </p:nvSpPr>
         <p:spPr>
           <a:xfrm>
-            <a:off x="5559552" y="4492752"/>
+            <a:off x="5559552" y="4751832"/>
             <a:ext cx="1072896" cy="54864"/>
           </a:xfrm>
           <a:prstGeom prst="rect">
@@ -8161,16 +7503,16 @@
         </p:nvSpPr>
         <p:spPr>
           <a:xfrm>
-            <a:off x="4307840" y="4602480"/>
-            <a:ext cx="3576320" cy="1127760"/>
-          </a:xfrm>
-          <a:prstGeom prst="rect">
-            <a:avLst/>
-          </a:prstGeom>
-          <a:noFill/>
-        </p:spPr>
-        <p:txBody>
-          <a:bodyPr wrap="square" lIns="0" rIns="0">
+            <a:off x="3649226" y="4861560"/>
+            <a:ext cx="4893548" cy="609600"/>
+          </a:xfrm>
+          <a:prstGeom prst="rect">
+            <a:avLst/>
+          </a:prstGeom>
+          <a:noFill/>
+        </p:spPr>
+        <p:txBody>
+          <a:bodyPr wrap="none" lIns="0" rIns="0">
             <a:noAutofit/>
           </a:bodyPr>
           <a:lstStyle/>
@@ -8183,7 +7525,7 @@
                 </a:solidFill>
                 <a:latin typeface="Calibri"/>
               </a:rPr>
-              <a:t>Avg. time to value</a:t>
+              <a:t>Time to value</a:t>
             </a:r>
           </a:p>
         </p:txBody>
@@ -8307,7 +7649,7 @@
 </p:sldLayout>
 </file>
 
-<file path=ppt/slideLayouts/slideLayout32.xml><?xml version="1.0" encoding="utf-8"?>
+<file path=ppt/slideLayouts/slideLayout31.xml><?xml version="1.0" encoding="utf-8"?>
 <p:sldLayout xmlns:a="http://schemas.openxmlformats.org/drawingml/2006/main" xmlns:r="http://schemas.openxmlformats.org/officeDocument/2006/relationships" xmlns:p="http://schemas.openxmlformats.org/presentationml/2006/main" type="blank" preserve="1">
   <p:cSld name="slidekit · Chart With Insight">
     <p:bg>
@@ -8344,8 +7686,8 @@
         </p:nvSpPr>
         <p:spPr>
           <a:xfrm>
-            <a:off x="10363200" y="6035040"/>
-            <a:ext cx="1371600" cy="365760"/>
+            <a:off x="11186160" y="6035040"/>
+            <a:ext cx="548640" cy="365760"/>
           </a:xfrm>
         </p:spPr>
         <p:txBody>
@@ -8388,7 +7730,7 @@
             <a:r>
               <a:rPr sz="4200" b="1" i="0">
                 <a:solidFill>
-                  <a:srgbClr val="16504B"/>
+                  <a:srgbClr val="E2A03F"/>
                 </a:solidFill>
                 <a:latin typeface="Calibri"/>
               </a:rPr>
@@ -8494,7 +7836,7 @@
             <a:r>
               <a:rPr sz="2400" b="0" i="0">
                 <a:solidFill>
-                  <a:srgbClr val="8A8A9A"/>
+                  <a:srgbClr val="1C1C28"/>
                 </a:solidFill>
                 <a:latin typeface="Calibri"/>
               </a:rPr>
@@ -8600,7 +7942,7 @@
             <a:r>
               <a:rPr sz="2400" b="0" i="0">
                 <a:solidFill>
-                  <a:srgbClr val="8A8A9A"/>
+                  <a:srgbClr val="1C1C28"/>
                 </a:solidFill>
                 <a:latin typeface="Calibri"/>
               </a:rPr>
@@ -8706,7 +8048,7 @@
             <a:r>
               <a:rPr sz="2400" b="0" i="0">
                 <a:solidFill>
-                  <a:srgbClr val="8A8A9A"/>
+                  <a:srgbClr val="1C1C28"/>
                 </a:solidFill>
                 <a:latin typeface="Calibri"/>
               </a:rPr>
@@ -8812,7 +8154,7 @@
             <a:r>
               <a:rPr sz="2400" b="0" i="0">
                 <a:solidFill>
-                  <a:srgbClr val="8A8A9A"/>
+                  <a:srgbClr val="1C1C28"/>
                 </a:solidFill>
                 <a:latin typeface="Calibri"/>
               </a:rPr>
@@ -8831,8 +8173,8 @@
         </p:nvSpPr>
         <p:spPr>
           <a:xfrm>
-            <a:off x="7498080" y="1511808"/>
-            <a:ext cx="128016" cy="4236720"/>
+            <a:off x="7498080" y="3066288"/>
+            <a:ext cx="128016" cy="1127760"/>
           </a:xfrm>
           <a:prstGeom prst="rect">
             <a:avLst/>
@@ -8863,8 +8205,8 @@
         </p:nvSpPr>
         <p:spPr>
           <a:xfrm>
-            <a:off x="8037576" y="1511808"/>
-            <a:ext cx="3697224" cy="4236720"/>
+            <a:off x="8037576" y="3066288"/>
+            <a:ext cx="3697224" cy="1127760"/>
           </a:xfrm>
           <a:prstGeom prst="rect">
             <a:avLst/>
@@ -8885,7 +8227,7 @@
                 </a:solidFill>
                 <a:latin typeface="Calibri"/>
               </a:rPr>
-              <a:t>Activations nearly quadrupled once self-serve onboarding shipped in February.</a:t>
+              <a:t>Activations 4x.</a:t>
             </a:r>
           </a:p>
         </p:txBody>
@@ -8903,7 +8245,7 @@
 </p:sldLayout>
 </file>
 
-<file path=ppt/slideLayouts/slideLayout33.xml><?xml version="1.0" encoding="utf-8"?>
+<file path=ppt/slideLayouts/slideLayout32.xml><?xml version="1.0" encoding="utf-8"?>
 <p:sldLayout xmlns:a="http://schemas.openxmlformats.org/drawingml/2006/main" xmlns:r="http://schemas.openxmlformats.org/officeDocument/2006/relationships" xmlns:p="http://schemas.openxmlformats.org/presentationml/2006/main" type="blank" preserve="1">
   <p:cSld name="slidekit · Table">
     <p:bg>
@@ -8940,8 +8282,8 @@
         </p:nvSpPr>
         <p:spPr>
           <a:xfrm>
-            <a:off x="10363200" y="6035040"/>
-            <a:ext cx="1371600" cy="365760"/>
+            <a:off x="11186160" y="6035040"/>
+            <a:ext cx="548640" cy="365760"/>
           </a:xfrm>
         </p:spPr>
         <p:txBody>
@@ -8984,7 +8326,7 @@
             <a:r>
               <a:rPr sz="4200" b="1" i="0">
                 <a:solidFill>
-                  <a:srgbClr val="16504B"/>
+                  <a:srgbClr val="E2A03F"/>
                 </a:solidFill>
                 <a:latin typeface="Calibri"/>
               </a:rPr>
@@ -9021,7 +8363,7 @@
             <a:r>
               <a:rPr sz="3400" b="1" i="0">
                 <a:solidFill>
-                  <a:srgbClr val="16504B"/>
+                  <a:srgbClr val="E2A03F"/>
                 </a:solidFill>
                 <a:latin typeface="Calibri"/>
               </a:rPr>
@@ -9058,7 +8400,7 @@
             <a:r>
               <a:rPr sz="3400" b="1" i="0">
                 <a:solidFill>
-                  <a:srgbClr val="16504B"/>
+                  <a:srgbClr val="E2A03F"/>
                 </a:solidFill>
                 <a:latin typeface="Calibri"/>
               </a:rPr>
@@ -9095,7 +8437,7 @@
             <a:r>
               <a:rPr sz="3400" b="1" i="0">
                 <a:solidFill>
-                  <a:srgbClr val="16504B"/>
+                  <a:srgbClr val="E2A03F"/>
                 </a:solidFill>
                 <a:latin typeface="Calibri"/>
               </a:rPr>
@@ -9593,7 +8935,7 @@
 </p:sldLayout>
 </file>
 
-<file path=ppt/slideLayouts/slideLayout34.xml><?xml version="1.0" encoding="utf-8"?>
+<file path=ppt/slideLayouts/slideLayout33.xml><?xml version="1.0" encoding="utf-8"?>
 <p:sldLayout xmlns:a="http://schemas.openxmlformats.org/drawingml/2006/main" xmlns:r="http://schemas.openxmlformats.org/officeDocument/2006/relationships" xmlns:p="http://schemas.openxmlformats.org/presentationml/2006/main" type="blank" preserve="1">
   <p:cSld name="slidekit · Metric Comparison">
     <p:bg>
@@ -9630,8 +8972,8 @@
         </p:nvSpPr>
         <p:spPr>
           <a:xfrm>
-            <a:off x="10363200" y="6035040"/>
-            <a:ext cx="1371600" cy="365760"/>
+            <a:off x="11186160" y="6035040"/>
+            <a:ext cx="548640" cy="365760"/>
           </a:xfrm>
         </p:spPr>
         <p:txBody>
@@ -9674,7 +9016,7 @@
             <a:r>
               <a:rPr sz="4200" b="1" i="0">
                 <a:solidFill>
-                  <a:srgbClr val="16504B"/>
+                  <a:srgbClr val="E2A03F"/>
                 </a:solidFill>
                 <a:latin typeface="Calibri"/>
               </a:rPr>
@@ -9693,7 +9035,7 @@
         </p:nvSpPr>
         <p:spPr>
           <a:xfrm>
-            <a:off x="113596" y="1831849"/>
+            <a:off x="113596" y="2350009"/>
             <a:ext cx="4263528" cy="883919"/>
           </a:xfrm>
           <a:prstGeom prst="rect">
@@ -9730,16 +9072,16 @@
         </p:nvSpPr>
         <p:spPr>
           <a:xfrm>
-            <a:off x="457200" y="2990088"/>
-            <a:ext cx="3576320" cy="1645920"/>
-          </a:xfrm>
-          <a:prstGeom prst="rect">
-            <a:avLst/>
-          </a:prstGeom>
-          <a:noFill/>
-        </p:spPr>
-        <p:txBody>
-          <a:bodyPr wrap="square" lIns="0" rIns="0">
+            <a:off x="457200" y="3508248"/>
+            <a:ext cx="3576320" cy="609600"/>
+          </a:xfrm>
+          <a:prstGeom prst="rect">
+            <a:avLst/>
+          </a:prstGeom>
+          <a:noFill/>
+        </p:spPr>
+        <p:txBody>
+          <a:bodyPr wrap="none" lIns="0" rIns="0">
             <a:noAutofit/>
           </a:bodyPr>
           <a:lstStyle/>
@@ -9752,7 +9094,7 @@
                 </a:solidFill>
                 <a:latin typeface="Calibri"/>
               </a:rPr>
-              <a:t>Annual recurring revenue</a:t>
+              <a:t>Revenue</a:t>
             </a:r>
           </a:p>
         </p:txBody>
@@ -9767,7 +9109,7 @@
         </p:nvSpPr>
         <p:spPr>
           <a:xfrm>
-            <a:off x="1383099" y="4910328"/>
+            <a:off x="1383099" y="4392168"/>
             <a:ext cx="1724522" cy="518159"/>
           </a:xfrm>
           <a:prstGeom prst="rect">
@@ -9799,7 +9141,7 @@
         </p:nvSpPr>
         <p:spPr>
           <a:xfrm>
-            <a:off x="1037650" y="4910328"/>
+            <a:off x="1037650" y="4392168"/>
             <a:ext cx="2415420" cy="518159"/>
           </a:xfrm>
           <a:prstGeom prst="rect">
@@ -9836,7 +9178,7 @@
         </p:nvSpPr>
         <p:spPr>
           <a:xfrm>
-            <a:off x="4307840" y="1831849"/>
+            <a:off x="4307840" y="2350009"/>
             <a:ext cx="3576320" cy="883919"/>
           </a:xfrm>
           <a:prstGeom prst="rect">
@@ -9873,8 +9215,8 @@
         </p:nvSpPr>
         <p:spPr>
           <a:xfrm>
-            <a:off x="3528964" y="2990088"/>
-            <a:ext cx="5134072" cy="1645920"/>
+            <a:off x="3528964" y="3508248"/>
+            <a:ext cx="5134072" cy="609600"/>
           </a:xfrm>
           <a:prstGeom prst="rect">
             <a:avLst/>
@@ -9910,7 +9252,7 @@
         </p:nvSpPr>
         <p:spPr>
           <a:xfrm>
-            <a:off x="4997914" y="4910328"/>
+            <a:off x="4997914" y="4392168"/>
             <a:ext cx="2196171" cy="518159"/>
           </a:xfrm>
           <a:prstGeom prst="rect">
@@ -9942,7 +9284,7 @@
         </p:nvSpPr>
         <p:spPr>
           <a:xfrm>
-            <a:off x="4510970" y="4910328"/>
+            <a:off x="4510970" y="4392168"/>
             <a:ext cx="3170059" cy="518159"/>
           </a:xfrm>
           <a:prstGeom prst="rect">
@@ -9979,7 +9321,7 @@
         </p:nvSpPr>
         <p:spPr>
           <a:xfrm>
-            <a:off x="8158480" y="1831849"/>
+            <a:off x="8158480" y="2350009"/>
             <a:ext cx="3576320" cy="883919"/>
           </a:xfrm>
           <a:prstGeom prst="rect">
@@ -10016,16 +9358,16 @@
         </p:nvSpPr>
         <p:spPr>
           <a:xfrm>
-            <a:off x="8158480" y="2990088"/>
-            <a:ext cx="3576320" cy="1645920"/>
-          </a:xfrm>
-          <a:prstGeom prst="rect">
-            <a:avLst/>
-          </a:prstGeom>
-          <a:noFill/>
-        </p:spPr>
-        <p:txBody>
-          <a:bodyPr wrap="square" lIns="0" rIns="0">
+            <a:off x="7701280" y="3508248"/>
+            <a:ext cx="4490720" cy="609600"/>
+          </a:xfrm>
+          <a:prstGeom prst="rect">
+            <a:avLst/>
+          </a:prstGeom>
+          <a:noFill/>
+        </p:spPr>
+        <p:txBody>
+          <a:bodyPr wrap="none" lIns="0" rIns="0">
             <a:noAutofit/>
           </a:bodyPr>
           <a:lstStyle/>
@@ -10038,7 +9380,7 @@
                 </a:solidFill>
                 <a:latin typeface="Calibri"/>
               </a:rPr>
-              <a:t>Net promoter score</a:t>
+              <a:t>Promoter score</a:t>
             </a:r>
           </a:p>
         </p:txBody>
@@ -10053,7 +9395,7 @@
         </p:nvSpPr>
         <p:spPr>
           <a:xfrm>
-            <a:off x="9300700" y="4910328"/>
+            <a:off x="9300700" y="4392168"/>
             <a:ext cx="1291879" cy="518159"/>
           </a:xfrm>
           <a:prstGeom prst="rect">
@@ -10085,7 +9427,7 @@
         </p:nvSpPr>
         <p:spPr>
           <a:xfrm>
-            <a:off x="9085044" y="4910328"/>
+            <a:off x="9085044" y="4392168"/>
             <a:ext cx="1723191" cy="518159"/>
           </a:xfrm>
           <a:prstGeom prst="rect">
@@ -10125,7 +9467,7 @@
 </p:sldLayout>
 </file>
 
-<file path=ppt/slideLayouts/slideLayout35.xml><?xml version="1.0" encoding="utf-8"?>
+<file path=ppt/slideLayouts/slideLayout34.xml><?xml version="1.0" encoding="utf-8"?>
 <p:sldLayout xmlns:a="http://schemas.openxmlformats.org/drawingml/2006/main" xmlns:r="http://schemas.openxmlformats.org/officeDocument/2006/relationships" xmlns:p="http://schemas.openxmlformats.org/presentationml/2006/main" type="blank" preserve="1">
   <p:cSld name="slidekit · Process Steps">
     <p:bg>
@@ -10162,8 +9504,8 @@
         </p:nvSpPr>
         <p:spPr>
           <a:xfrm>
-            <a:off x="10363200" y="6035040"/>
-            <a:ext cx="1371600" cy="365760"/>
+            <a:off x="11186160" y="6035040"/>
+            <a:ext cx="548640" cy="365760"/>
           </a:xfrm>
         </p:spPr>
         <p:txBody>
@@ -10206,7 +9548,7 @@
             <a:r>
               <a:rPr sz="4200" b="1" i="0">
                 <a:solidFill>
-                  <a:srgbClr val="16504B"/>
+                  <a:srgbClr val="E2A03F"/>
                 </a:solidFill>
                 <a:latin typeface="Calibri"/>
               </a:rPr>
@@ -10243,7 +9585,7 @@
             <a:r>
               <a:rPr sz="4200" b="1" i="0">
                 <a:solidFill>
-                  <a:srgbClr val="16504B"/>
+                  <a:srgbClr val="E2A03F"/>
                 </a:solidFill>
                 <a:latin typeface="Calibri"/>
               </a:rPr>
@@ -10263,13 +9605,13 @@
         <p:spPr>
           <a:xfrm>
             <a:off x="457200" y="2194560"/>
-            <a:ext cx="784098" cy="54864"/>
+            <a:ext cx="742280" cy="54864"/>
           </a:xfrm>
           <a:prstGeom prst="rect">
             <a:avLst/>
           </a:prstGeom>
           <a:solidFill>
-            <a:srgbClr val="16504B"/>
+            <a:srgbClr val="E2A03F"/>
           </a:solidFill>
           <a:ln>
             <a:noFill/>
@@ -10312,7 +9654,7 @@
             <a:r>
               <a:rPr sz="3400" b="1" i="0">
                 <a:solidFill>
-                  <a:srgbClr val="16504B"/>
+                  <a:srgbClr val="E2A03F"/>
                 </a:solidFill>
                 <a:latin typeface="Calibri"/>
               </a:rPr>
@@ -10386,7 +9728,7 @@
             <a:r>
               <a:rPr sz="4200" b="1" i="0">
                 <a:solidFill>
-                  <a:srgbClr val="16504B"/>
+                  <a:srgbClr val="E2A03F"/>
                 </a:solidFill>
                 <a:latin typeface="Calibri"/>
               </a:rPr>
@@ -10406,13 +9748,13 @@
         <p:spPr>
           <a:xfrm>
             <a:off x="3345180" y="2194560"/>
-            <a:ext cx="784098" cy="54864"/>
+            <a:ext cx="742280" cy="54864"/>
           </a:xfrm>
           <a:prstGeom prst="rect">
             <a:avLst/>
           </a:prstGeom>
           <a:solidFill>
-            <a:srgbClr val="16504B"/>
+            <a:srgbClr val="E2A03F"/>
           </a:solidFill>
           <a:ln>
             <a:noFill/>
@@ -10455,7 +9797,7 @@
             <a:r>
               <a:rPr sz="3400" b="1" i="0">
                 <a:solidFill>
-                  <a:srgbClr val="16504B"/>
+                  <a:srgbClr val="E2A03F"/>
                 </a:solidFill>
                 <a:latin typeface="Calibri"/>
               </a:rPr>
@@ -10529,7 +9871,7 @@
             <a:r>
               <a:rPr sz="4200" b="1" i="0">
                 <a:solidFill>
-                  <a:srgbClr val="16504B"/>
+                  <a:srgbClr val="E2A03F"/>
                 </a:solidFill>
                 <a:latin typeface="Calibri"/>
               </a:rPr>
@@ -10549,13 +9891,13 @@
         <p:spPr>
           <a:xfrm>
             <a:off x="6233160" y="2194560"/>
-            <a:ext cx="784098" cy="54864"/>
+            <a:ext cx="742280" cy="54864"/>
           </a:xfrm>
           <a:prstGeom prst="rect">
             <a:avLst/>
           </a:prstGeom>
           <a:solidFill>
-            <a:srgbClr val="16504B"/>
+            <a:srgbClr val="E2A03F"/>
           </a:solidFill>
           <a:ln>
             <a:noFill/>
@@ -10598,7 +9940,7 @@
             <a:r>
               <a:rPr sz="3400" b="1" i="0">
                 <a:solidFill>
-                  <a:srgbClr val="16504B"/>
+                  <a:srgbClr val="E2A03F"/>
                 </a:solidFill>
                 <a:latin typeface="Calibri"/>
               </a:rPr>
@@ -10672,7 +10014,7 @@
             <a:r>
               <a:rPr sz="4200" b="1" i="0">
                 <a:solidFill>
-                  <a:srgbClr val="16504B"/>
+                  <a:srgbClr val="E2A03F"/>
                 </a:solidFill>
                 <a:latin typeface="Calibri"/>
               </a:rPr>
@@ -10692,13 +10034,13 @@
         <p:spPr>
           <a:xfrm>
             <a:off x="9121140" y="2194560"/>
-            <a:ext cx="784098" cy="54864"/>
+            <a:ext cx="742280" cy="54864"/>
           </a:xfrm>
           <a:prstGeom prst="rect">
             <a:avLst/>
           </a:prstGeom>
           <a:solidFill>
-            <a:srgbClr val="16504B"/>
+            <a:srgbClr val="E2A03F"/>
           </a:solidFill>
           <a:ln>
             <a:noFill/>
@@ -10741,7 +10083,7 @@
             <a:r>
               <a:rPr sz="3400" b="1" i="0">
                 <a:solidFill>
-                  <a:srgbClr val="16504B"/>
+                  <a:srgbClr val="E2A03F"/>
                 </a:solidFill>
                 <a:latin typeface="Calibri"/>
               </a:rPr>
@@ -10800,7 +10142,7 @@
 </p:sldLayout>
 </file>
 
-<file path=ppt/slideLayouts/slideLayout36.xml><?xml version="1.0" encoding="utf-8"?>
+<file path=ppt/slideLayouts/slideLayout35.xml><?xml version="1.0" encoding="utf-8"?>
 <p:sldLayout xmlns:a="http://schemas.openxmlformats.org/drawingml/2006/main" xmlns:r="http://schemas.openxmlformats.org/officeDocument/2006/relationships" xmlns:p="http://schemas.openxmlformats.org/presentationml/2006/main" type="blank" preserve="1">
   <p:cSld name="slidekit · Roadmap">
     <p:bg>
@@ -10837,8 +10179,8 @@
         </p:nvSpPr>
         <p:spPr>
           <a:xfrm>
-            <a:off x="10363200" y="6035040"/>
-            <a:ext cx="1371600" cy="365760"/>
+            <a:off x="11186160" y="6035040"/>
+            <a:ext cx="548640" cy="365760"/>
           </a:xfrm>
         </p:spPr>
         <p:txBody>
@@ -10881,7 +10223,7 @@
             <a:r>
               <a:rPr sz="4200" b="1" i="0">
                 <a:solidFill>
-                  <a:srgbClr val="16504B"/>
+                  <a:srgbClr val="E2A03F"/>
                 </a:solidFill>
                 <a:latin typeface="Calibri"/>
               </a:rPr>
@@ -11332,7 +10674,7 @@
 </p:sldLayout>
 </file>
 
-<file path=ppt/slideLayouts/slideLayout37.xml><?xml version="1.0" encoding="utf-8"?>
+<file path=ppt/slideLayouts/slideLayout36.xml><?xml version="1.0" encoding="utf-8"?>
 <p:sldLayout xmlns:a="http://schemas.openxmlformats.org/drawingml/2006/main" xmlns:r="http://schemas.openxmlformats.org/officeDocument/2006/relationships" xmlns:p="http://schemas.openxmlformats.org/presentationml/2006/main" type="blank" preserve="1">
   <p:cSld name="slidekit · Funnel">
     <p:bg>
@@ -11369,8 +10711,8 @@
         </p:nvSpPr>
         <p:spPr>
           <a:xfrm>
-            <a:off x="10363200" y="6035040"/>
-            <a:ext cx="1371600" cy="365760"/>
+            <a:off x="11186160" y="6035040"/>
+            <a:ext cx="548640" cy="365760"/>
           </a:xfrm>
         </p:spPr>
         <p:txBody>
@@ -11413,7 +10755,7 @@
             <a:r>
               <a:rPr sz="4200" b="1" i="0">
                 <a:solidFill>
-                  <a:srgbClr val="16504B"/>
+                  <a:srgbClr val="E2A03F"/>
                 </a:solidFill>
                 <a:latin typeface="Calibri"/>
               </a:rPr>
@@ -11711,7 +11053,7 @@
 </p:sldLayout>
 </file>
 
-<file path=ppt/slideLayouts/slideLayout38.xml><?xml version="1.0" encoding="utf-8"?>
+<file path=ppt/slideLayouts/slideLayout37.xml><?xml version="1.0" encoding="utf-8"?>
 <p:sldLayout xmlns:a="http://schemas.openxmlformats.org/drawingml/2006/main" xmlns:r="http://schemas.openxmlformats.org/officeDocument/2006/relationships" xmlns:p="http://schemas.openxmlformats.org/presentationml/2006/main" type="blank" preserve="1">
   <p:cSld name="slidekit · Nested Circles">
     <p:bg>
@@ -11748,8 +11090,8 @@
         </p:nvSpPr>
         <p:spPr>
           <a:xfrm>
-            <a:off x="10363200" y="6035040"/>
-            <a:ext cx="1371600" cy="365760"/>
+            <a:off x="11186160" y="6035040"/>
+            <a:ext cx="548640" cy="365760"/>
           </a:xfrm>
         </p:spPr>
         <p:txBody>
@@ -11792,7 +11134,7 @@
             <a:r>
               <a:rPr sz="4200" b="1" i="0">
                 <a:solidFill>
-                  <a:srgbClr val="16504B"/>
+                  <a:srgbClr val="E2A03F"/>
                 </a:solidFill>
                 <a:latin typeface="Calibri"/>
               </a:rPr>
@@ -11818,7 +11160,7 @@
             <a:avLst/>
           </a:prstGeom>
           <a:solidFill>
-            <a:srgbClr val="8A8A9A"/>
+            <a:srgbClr val="1C1C28"/>
           </a:solidFill>
           <a:ln>
             <a:noFill/>
@@ -11882,7 +11224,7 @@
             <a:avLst/>
           </a:prstGeom>
           <a:solidFill>
-            <a:srgbClr val="16504B"/>
+            <a:srgbClr val="1C1C28"/>
           </a:solidFill>
           <a:ln>
             <a:noFill/>
@@ -12132,7 +11474,7 @@
 </p:sldLayout>
 </file>
 
-<file path=ppt/slideLayouts/slideLayout39.xml><?xml version="1.0" encoding="utf-8"?>
+<file path=ppt/slideLayouts/slideLayout38.xml><?xml version="1.0" encoding="utf-8"?>
 <p:sldLayout xmlns:a="http://schemas.openxmlformats.org/drawingml/2006/main" xmlns:r="http://schemas.openxmlformats.org/officeDocument/2006/relationships" xmlns:p="http://schemas.openxmlformats.org/presentationml/2006/main" type="blank" preserve="1">
   <p:cSld name="slidekit · Pyramid">
     <p:bg>
@@ -12169,8 +11511,8 @@
         </p:nvSpPr>
         <p:spPr>
           <a:xfrm>
-            <a:off x="10363200" y="6035040"/>
-            <a:ext cx="1371600" cy="365760"/>
+            <a:off x="11186160" y="6035040"/>
+            <a:ext cx="548640" cy="365760"/>
           </a:xfrm>
         </p:spPr>
         <p:txBody>
@@ -12213,7 +11555,7 @@
             <a:r>
               <a:rPr sz="4200" b="1" i="0">
                 <a:solidFill>
-                  <a:srgbClr val="16504B"/>
+                  <a:srgbClr val="E2A03F"/>
                 </a:solidFill>
                 <a:latin typeface="Calibri"/>
               </a:rPr>
@@ -12234,75 +11576,6 @@
           <a:xfrm>
             <a:off x="3840480" y="1499616"/>
             <a:ext cx="4511040" cy="859536"/>
-          </a:xfrm>
-          <a:prstGeom prst="rect">
-            <a:avLst/>
-          </a:prstGeom>
-          <a:solidFill>
-            <a:srgbClr val="16504B"/>
-          </a:solidFill>
-          <a:ln>
-            <a:noFill/>
-          </a:ln>
-          <a:effectLst/>
-        </p:spPr>
-        <p:txBody>
-          <a:bodyPr rtlCol="0" anchor="ctr"/>
-          <a:lstStyle/>
-          <a:p>
-            <a:pPr algn="ctr"/>
-          </a:p>
-        </p:txBody>
-      </p:sp>
-      <p:sp>
-        <p:nvSpPr>
-          <p:cNvPr id="7" name="TextBox 6"/>
-          <p:cNvSpPr/>
-          <p:nvPr>
-            <p:ph type="body" idx="2"/>
-          </p:nvPr>
-        </p:nvSpPr>
-        <p:spPr>
-          <a:xfrm>
-            <a:off x="3840480" y="1499616"/>
-            <a:ext cx="4511040" cy="859536"/>
-          </a:xfrm>
-          <a:prstGeom prst="rect">
-            <a:avLst/>
-          </a:prstGeom>
-          <a:noFill/>
-        </p:spPr>
-        <p:txBody>
-          <a:bodyPr wrap="none" lIns="0" rIns="0">
-            <a:noAutofit/>
-          </a:bodyPr>
-          <a:lstStyle/>
-          <a:p>
-            <a:pPr algn="l"/>
-            <a:r>
-              <a:rPr sz="3400" b="1" i="0">
-                <a:solidFill>
-                  <a:srgbClr val="FFFFFF"/>
-                </a:solidFill>
-                <a:latin typeface="Calibri"/>
-              </a:rPr>
-              <a:t>Vision</a:t>
-            </a:r>
-          </a:p>
-        </p:txBody>
-      </p:sp>
-      <p:sp>
-        <p:nvSpPr>
-          <p:cNvPr id="8" name="Rectangle 7"/>
-          <p:cNvSpPr/>
-          <p:nvPr>
-            <p:ph type="body" idx="3"/>
-          </p:nvPr>
-        </p:nvSpPr>
-        <p:spPr>
-          <a:xfrm>
-            <a:off x="2712720" y="2633472"/>
-            <a:ext cx="6766560" cy="859536"/>
           </a:xfrm>
           <a:prstGeom prst="rect">
             <a:avLst/>
@@ -12325,122 +11598,53 @@
       </p:sp>
       <p:sp>
         <p:nvSpPr>
-          <p:cNvPr id="9" name="TextBox 8"/>
-          <p:cNvSpPr/>
-          <p:nvPr>
-            <p:ph type="body" idx="4"/>
+          <p:cNvPr id="7" name="TextBox 6"/>
+          <p:cNvSpPr/>
+          <p:nvPr>
+            <p:ph type="body" idx="2"/>
+          </p:nvPr>
+        </p:nvSpPr>
+        <p:spPr>
+          <a:xfrm>
+            <a:off x="3840480" y="1499616"/>
+            <a:ext cx="4511040" cy="859536"/>
+          </a:xfrm>
+          <a:prstGeom prst="rect">
+            <a:avLst/>
+          </a:prstGeom>
+          <a:noFill/>
+        </p:spPr>
+        <p:txBody>
+          <a:bodyPr wrap="none" lIns="0" rIns="0">
+            <a:noAutofit/>
+          </a:bodyPr>
+          <a:lstStyle/>
+          <a:p>
+            <a:pPr algn="l"/>
+            <a:r>
+              <a:rPr sz="3400" b="1" i="0">
+                <a:solidFill>
+                  <a:srgbClr val="FFFFFF"/>
+                </a:solidFill>
+                <a:latin typeface="Calibri"/>
+              </a:rPr>
+              <a:t>Vision</a:t>
+            </a:r>
+          </a:p>
+        </p:txBody>
+      </p:sp>
+      <p:sp>
+        <p:nvSpPr>
+          <p:cNvPr id="8" name="Rectangle 7"/>
+          <p:cNvSpPr/>
+          <p:nvPr>
+            <p:ph type="body" idx="3"/>
           </p:nvPr>
         </p:nvSpPr>
         <p:spPr>
           <a:xfrm>
             <a:off x="2712720" y="2633472"/>
             <a:ext cx="6766560" cy="859536"/>
-          </a:xfrm>
-          <a:prstGeom prst="rect">
-            <a:avLst/>
-          </a:prstGeom>
-          <a:noFill/>
-        </p:spPr>
-        <p:txBody>
-          <a:bodyPr wrap="none" lIns="0" rIns="0">
-            <a:noAutofit/>
-          </a:bodyPr>
-          <a:lstStyle/>
-          <a:p>
-            <a:pPr algn="l"/>
-            <a:r>
-              <a:rPr sz="3400" b="1" i="0">
-                <a:solidFill>
-                  <a:srgbClr val="FFFFFF"/>
-                </a:solidFill>
-                <a:latin typeface="Calibri"/>
-              </a:rPr>
-              <a:t>Strategy</a:t>
-            </a:r>
-          </a:p>
-        </p:txBody>
-      </p:sp>
-      <p:sp>
-        <p:nvSpPr>
-          <p:cNvPr id="10" name="Rectangle 9"/>
-          <p:cNvSpPr/>
-          <p:nvPr>
-            <p:ph type="body" idx="5"/>
-          </p:nvPr>
-        </p:nvSpPr>
-        <p:spPr>
-          <a:xfrm>
-            <a:off x="1584960" y="3767328"/>
-            <a:ext cx="9022080" cy="859536"/>
-          </a:xfrm>
-          <a:prstGeom prst="rect">
-            <a:avLst/>
-          </a:prstGeom>
-          <a:solidFill>
-            <a:srgbClr val="16504B"/>
-          </a:solidFill>
-          <a:ln>
-            <a:noFill/>
-          </a:ln>
-          <a:effectLst/>
-        </p:spPr>
-        <p:txBody>
-          <a:bodyPr rtlCol="0" anchor="ctr"/>
-          <a:lstStyle/>
-          <a:p>
-            <a:pPr algn="ctr"/>
-          </a:p>
-        </p:txBody>
-      </p:sp>
-      <p:sp>
-        <p:nvSpPr>
-          <p:cNvPr id="11" name="TextBox 10"/>
-          <p:cNvSpPr/>
-          <p:nvPr>
-            <p:ph type="body" idx="6"/>
-          </p:nvPr>
-        </p:nvSpPr>
-        <p:spPr>
-          <a:xfrm>
-            <a:off x="1584960" y="3767328"/>
-            <a:ext cx="9022080" cy="859536"/>
-          </a:xfrm>
-          <a:prstGeom prst="rect">
-            <a:avLst/>
-          </a:prstGeom>
-          <a:noFill/>
-        </p:spPr>
-        <p:txBody>
-          <a:bodyPr wrap="none" lIns="0" rIns="0">
-            <a:noAutofit/>
-          </a:bodyPr>
-          <a:lstStyle/>
-          <a:p>
-            <a:pPr algn="l"/>
-            <a:r>
-              <a:rPr sz="3400" b="1" i="0">
-                <a:solidFill>
-                  <a:srgbClr val="FFFFFF"/>
-                </a:solidFill>
-                <a:latin typeface="Calibri"/>
-              </a:rPr>
-              <a:t>Goals</a:t>
-            </a:r>
-          </a:p>
-        </p:txBody>
-      </p:sp>
-      <p:sp>
-        <p:nvSpPr>
-          <p:cNvPr id="12" name="Rectangle 11"/>
-          <p:cNvSpPr/>
-          <p:nvPr>
-            <p:ph type="body" idx="7"/>
-          </p:nvPr>
-        </p:nvSpPr>
-        <p:spPr>
-          <a:xfrm>
-            <a:off x="457200" y="4901184"/>
-            <a:ext cx="11277600" cy="859536"/>
           </a:xfrm>
           <a:prstGeom prst="rect">
             <a:avLst/>
@@ -12463,10 +11667,116 @@
       </p:sp>
       <p:sp>
         <p:nvSpPr>
-          <p:cNvPr id="13" name="TextBox 12"/>
-          <p:cNvSpPr/>
-          <p:nvPr>
-            <p:ph type="body" idx="8"/>
+          <p:cNvPr id="9" name="TextBox 8"/>
+          <p:cNvSpPr/>
+          <p:nvPr>
+            <p:ph type="body" idx="4"/>
+          </p:nvPr>
+        </p:nvSpPr>
+        <p:spPr>
+          <a:xfrm>
+            <a:off x="2712720" y="2633472"/>
+            <a:ext cx="6766560" cy="859536"/>
+          </a:xfrm>
+          <a:prstGeom prst="rect">
+            <a:avLst/>
+          </a:prstGeom>
+          <a:noFill/>
+        </p:spPr>
+        <p:txBody>
+          <a:bodyPr wrap="none" lIns="0" rIns="0">
+            <a:noAutofit/>
+          </a:bodyPr>
+          <a:lstStyle/>
+          <a:p>
+            <a:pPr algn="l"/>
+            <a:r>
+              <a:rPr sz="3400" b="1" i="0">
+                <a:solidFill>
+                  <a:srgbClr val="FFFFFF"/>
+                </a:solidFill>
+                <a:latin typeface="Calibri"/>
+              </a:rPr>
+              <a:t>Strategy</a:t>
+            </a:r>
+          </a:p>
+        </p:txBody>
+      </p:sp>
+      <p:sp>
+        <p:nvSpPr>
+          <p:cNvPr id="10" name="Rectangle 9"/>
+          <p:cNvSpPr/>
+          <p:nvPr>
+            <p:ph type="body" idx="5"/>
+          </p:nvPr>
+        </p:nvSpPr>
+        <p:spPr>
+          <a:xfrm>
+            <a:off x="1584960" y="3767328"/>
+            <a:ext cx="9022080" cy="859536"/>
+          </a:xfrm>
+          <a:prstGeom prst="rect">
+            <a:avLst/>
+          </a:prstGeom>
+          <a:solidFill>
+            <a:srgbClr val="E2A03F"/>
+          </a:solidFill>
+          <a:ln>
+            <a:noFill/>
+          </a:ln>
+          <a:effectLst/>
+        </p:spPr>
+        <p:txBody>
+          <a:bodyPr rtlCol="0" anchor="ctr"/>
+          <a:lstStyle/>
+          <a:p>
+            <a:pPr algn="ctr"/>
+          </a:p>
+        </p:txBody>
+      </p:sp>
+      <p:sp>
+        <p:nvSpPr>
+          <p:cNvPr id="11" name="TextBox 10"/>
+          <p:cNvSpPr/>
+          <p:nvPr>
+            <p:ph type="body" idx="6"/>
+          </p:nvPr>
+        </p:nvSpPr>
+        <p:spPr>
+          <a:xfrm>
+            <a:off x="1584960" y="3767328"/>
+            <a:ext cx="9022080" cy="859536"/>
+          </a:xfrm>
+          <a:prstGeom prst="rect">
+            <a:avLst/>
+          </a:prstGeom>
+          <a:noFill/>
+        </p:spPr>
+        <p:txBody>
+          <a:bodyPr wrap="none" lIns="0" rIns="0">
+            <a:noAutofit/>
+          </a:bodyPr>
+          <a:lstStyle/>
+          <a:p>
+            <a:pPr algn="l"/>
+            <a:r>
+              <a:rPr sz="3400" b="1" i="0">
+                <a:solidFill>
+                  <a:srgbClr val="FFFFFF"/>
+                </a:solidFill>
+                <a:latin typeface="Calibri"/>
+              </a:rPr>
+              <a:t>Goals</a:t>
+            </a:r>
+          </a:p>
+        </p:txBody>
+      </p:sp>
+      <p:sp>
+        <p:nvSpPr>
+          <p:cNvPr id="12" name="Rectangle 11"/>
+          <p:cNvSpPr/>
+          <p:nvPr>
+            <p:ph type="body" idx="7"/>
           </p:nvPr>
         </p:nvSpPr>
         <p:spPr>
@@ -12477,6 +11787,38 @@
           <a:prstGeom prst="rect">
             <a:avLst/>
           </a:prstGeom>
+          <a:solidFill>
+            <a:srgbClr val="E2A03F"/>
+          </a:solidFill>
+          <a:ln>
+            <a:noFill/>
+          </a:ln>
+          <a:effectLst/>
+        </p:spPr>
+        <p:txBody>
+          <a:bodyPr rtlCol="0" anchor="ctr"/>
+          <a:lstStyle/>
+          <a:p>
+            <a:pPr algn="ctr"/>
+          </a:p>
+        </p:txBody>
+      </p:sp>
+      <p:sp>
+        <p:nvSpPr>
+          <p:cNvPr id="13" name="TextBox 12"/>
+          <p:cNvSpPr/>
+          <p:nvPr>
+            <p:ph type="body" idx="8"/>
+          </p:nvPr>
+        </p:nvSpPr>
+        <p:spPr>
+          <a:xfrm>
+            <a:off x="457200" y="4901184"/>
+            <a:ext cx="11277600" cy="859536"/>
+          </a:xfrm>
+          <a:prstGeom prst="rect">
+            <a:avLst/>
+          </a:prstGeom>
           <a:noFill/>
         </p:spPr>
         <p:txBody>
@@ -12494,6 +11836,533 @@
                 <a:latin typeface="Calibri"/>
               </a:rPr>
               <a:t>Tactics</a:t>
+            </a:r>
+          </a:p>
+        </p:txBody>
+      </p:sp>
+    </p:spTree>
+    <p:extLst>
+      <p:ext uri="{BB962C8B-B14F-4D97-AF65-F5344CB8AC3E}">
+        <p14:creationId xmlns:p14="http://schemas.microsoft.com/office/powerpoint/2010/main" val="1212999818"/>
+      </p:ext>
+    </p:extLst>
+  </p:cSld>
+  <p:clrMapOvr>
+    <a:masterClrMapping/>
+  </p:clrMapOvr>
+</p:sldLayout>
+</file>
+
+<file path=ppt/slideLayouts/slideLayout39.xml><?xml version="1.0" encoding="utf-8"?>
+<p:sldLayout xmlns:a="http://schemas.openxmlformats.org/drawingml/2006/main" xmlns:r="http://schemas.openxmlformats.org/officeDocument/2006/relationships" xmlns:p="http://schemas.openxmlformats.org/presentationml/2006/main" type="blank" preserve="1">
+  <p:cSld name="slidekit · SWOT">
+    <p:bg>
+      <p:bgPr>
+        <a:solidFill>
+          <a:srgbClr val="FFFFFF"/>
+        </a:solidFill>
+        <a:effectLst/>
+      </p:bgPr>
+    </p:bg>
+    <p:spTree>
+      <p:nvGrpSpPr>
+        <p:cNvPr id="1" name=""/>
+        <p:cNvGrpSpPr/>
+        <p:nvPr/>
+      </p:nvGrpSpPr>
+      <p:grpSpPr>
+        <a:xfrm>
+          <a:off x="0" y="0"/>
+          <a:ext cx="0" cy="0"/>
+          <a:chOff x="0" y="0"/>
+          <a:chExt cx="0" cy="0"/>
+        </a:xfrm>
+      </p:grpSpPr>
+      <p:sp>
+        <p:nvSpPr>
+          <p:cNvPr id="4" name="Slide Number Placeholder 3"/>
+          <p:cNvSpPr>
+            <a:spLocks noGrp="1"/>
+          </p:cNvSpPr>
+          <p:nvPr>
+            <p:ph type="sldNum" sz="quarter" idx="12"/>
+          </p:nvPr>
+        </p:nvSpPr>
+        <p:spPr>
+          <a:xfrm>
+            <a:off x="11186160" y="6035040"/>
+            <a:ext cx="548640" cy="365760"/>
+          </a:xfrm>
+        </p:spPr>
+        <p:txBody>
+          <a:bodyPr/>
+          <a:lstStyle/>
+          <a:p>
+            <a:fld id="{C1FF6DA9-008F-8B48-92A6-B652298478BF}" type="slidenum">
+              <a:rPr lang="en-US" smtClean="0"/>
+              <a:t>‹#›</a:t>
+            </a:fld>
+            <a:endParaRPr lang="en-US"/>
+          </a:p>
+        </p:txBody>
+      </p:sp>
+      <p:sp>
+        <p:nvSpPr>
+          <p:cNvPr id="5" name="TextBox 4"/>
+          <p:cNvSpPr/>
+          <p:nvPr>
+            <p:ph type="title"/>
+          </p:nvPr>
+        </p:nvSpPr>
+        <p:spPr>
+          <a:xfrm>
+            <a:off x="457200" y="457200"/>
+            <a:ext cx="11277600" cy="768096"/>
+          </a:xfrm>
+          <a:prstGeom prst="rect">
+            <a:avLst/>
+          </a:prstGeom>
+          <a:noFill/>
+        </p:spPr>
+        <p:txBody>
+          <a:bodyPr wrap="none" lIns="0" rIns="0">
+            <a:noAutofit/>
+          </a:bodyPr>
+          <a:lstStyle/>
+          <a:p>
+            <a:pPr algn="l"/>
+            <a:r>
+              <a:rPr sz="4200" b="1" i="0">
+                <a:solidFill>
+                  <a:srgbClr val="E2A03F"/>
+                </a:solidFill>
+                <a:latin typeface="Calibri"/>
+              </a:rPr>
+              <a:t>SWOT Analysis</a:t>
+            </a:r>
+          </a:p>
+        </p:txBody>
+      </p:sp>
+      <p:sp>
+        <p:nvSpPr>
+          <p:cNvPr id="6" name="TextBox 5"/>
+          <p:cNvSpPr/>
+          <p:nvPr>
+            <p:ph type="body" idx="1"/>
+          </p:nvPr>
+        </p:nvSpPr>
+        <p:spPr>
+          <a:xfrm>
+            <a:off x="457200" y="1499616"/>
+            <a:ext cx="5501640" cy="621791"/>
+          </a:xfrm>
+          <a:prstGeom prst="rect">
+            <a:avLst/>
+          </a:prstGeom>
+          <a:noFill/>
+        </p:spPr>
+        <p:txBody>
+          <a:bodyPr wrap="none" lIns="0" rIns="0">
+            <a:noAutofit/>
+          </a:bodyPr>
+          <a:lstStyle/>
+          <a:p>
+            <a:pPr algn="l"/>
+            <a:r>
+              <a:rPr sz="3400" b="1" i="0">
+                <a:solidFill>
+                  <a:srgbClr val="E2A03F"/>
+                </a:solidFill>
+                <a:latin typeface="Calibri"/>
+              </a:rPr>
+              <a:t>Strengths</a:t>
+            </a:r>
+          </a:p>
+        </p:txBody>
+      </p:sp>
+      <p:sp>
+        <p:nvSpPr>
+          <p:cNvPr id="7" name="Rectangle 6"/>
+          <p:cNvSpPr/>
+          <p:nvPr>
+            <p:ph type="body" idx="2"/>
+          </p:nvPr>
+        </p:nvSpPr>
+        <p:spPr>
+          <a:xfrm>
+            <a:off x="457200" y="2176271"/>
+            <a:ext cx="2410532" cy="54864"/>
+          </a:xfrm>
+          <a:prstGeom prst="rect">
+            <a:avLst/>
+          </a:prstGeom>
+          <a:solidFill>
+            <a:srgbClr val="E2A03F"/>
+          </a:solidFill>
+          <a:ln>
+            <a:noFill/>
+          </a:ln>
+          <a:effectLst/>
+        </p:spPr>
+        <p:txBody>
+          <a:bodyPr rtlCol="0" anchor="ctr"/>
+          <a:lstStyle/>
+          <a:p>
+            <a:pPr algn="ctr"/>
+          </a:p>
+        </p:txBody>
+      </p:sp>
+      <p:sp>
+        <p:nvSpPr>
+          <p:cNvPr id="8" name="TextBox 7"/>
+          <p:cNvSpPr/>
+          <p:nvPr>
+            <p:ph type="body" idx="3"/>
+          </p:nvPr>
+        </p:nvSpPr>
+        <p:spPr>
+          <a:xfrm>
+            <a:off x="457200" y="2395727"/>
+            <a:ext cx="5501640" cy="1097281"/>
+          </a:xfrm>
+          <a:prstGeom prst="rect">
+            <a:avLst/>
+          </a:prstGeom>
+          <a:noFill/>
+        </p:spPr>
+        <p:txBody>
+          <a:bodyPr wrap="square" lIns="0" rIns="0">
+            <a:noAutofit/>
+          </a:bodyPr>
+          <a:lstStyle/>
+          <a:p>
+            <a:pPr algn="l"/>
+            <a:r>
+              <a:rPr sz="3400" b="0" i="0">
+                <a:solidFill>
+                  <a:srgbClr val="1C1C28"/>
+                </a:solidFill>
+                <a:latin typeface="Calibri"/>
+              </a:rPr>
+              <a:t>Strong brand, loyal users</a:t>
+            </a:r>
+          </a:p>
+        </p:txBody>
+      </p:sp>
+      <p:sp>
+        <p:nvSpPr>
+          <p:cNvPr id="9" name="TextBox 8"/>
+          <p:cNvSpPr/>
+          <p:nvPr>
+            <p:ph type="body" idx="4"/>
+          </p:nvPr>
+        </p:nvSpPr>
+        <p:spPr>
+          <a:xfrm>
+            <a:off x="6233160" y="1499616"/>
+            <a:ext cx="5501640" cy="621791"/>
+          </a:xfrm>
+          <a:prstGeom prst="rect">
+            <a:avLst/>
+          </a:prstGeom>
+          <a:noFill/>
+        </p:spPr>
+        <p:txBody>
+          <a:bodyPr wrap="none" lIns="0" rIns="0">
+            <a:noAutofit/>
+          </a:bodyPr>
+          <a:lstStyle/>
+          <a:p>
+            <a:pPr algn="l"/>
+            <a:r>
+              <a:rPr sz="3400" b="1" i="0">
+                <a:solidFill>
+                  <a:srgbClr val="1C1C28"/>
+                </a:solidFill>
+                <a:latin typeface="Calibri"/>
+              </a:rPr>
+              <a:t>Weaknesses</a:t>
+            </a:r>
+          </a:p>
+        </p:txBody>
+      </p:sp>
+      <p:sp>
+        <p:nvSpPr>
+          <p:cNvPr id="10" name="Rectangle 9"/>
+          <p:cNvSpPr/>
+          <p:nvPr>
+            <p:ph type="body" idx="5"/>
+          </p:nvPr>
+        </p:nvSpPr>
+        <p:spPr>
+          <a:xfrm>
+            <a:off x="6233160" y="2176271"/>
+            <a:ext cx="2996456" cy="54864"/>
+          </a:xfrm>
+          <a:prstGeom prst="rect">
+            <a:avLst/>
+          </a:prstGeom>
+          <a:solidFill>
+            <a:srgbClr val="1C1C28"/>
+          </a:solidFill>
+          <a:ln>
+            <a:noFill/>
+          </a:ln>
+          <a:effectLst/>
+        </p:spPr>
+        <p:txBody>
+          <a:bodyPr rtlCol="0" anchor="ctr"/>
+          <a:lstStyle/>
+          <a:p>
+            <a:pPr algn="ctr"/>
+          </a:p>
+        </p:txBody>
+      </p:sp>
+      <p:sp>
+        <p:nvSpPr>
+          <p:cNvPr id="11" name="TextBox 10"/>
+          <p:cNvSpPr/>
+          <p:nvPr>
+            <p:ph type="body" idx="6"/>
+          </p:nvPr>
+        </p:nvSpPr>
+        <p:spPr>
+          <a:xfrm>
+            <a:off x="6233160" y="2395727"/>
+            <a:ext cx="5501640" cy="1097281"/>
+          </a:xfrm>
+          <a:prstGeom prst="rect">
+            <a:avLst/>
+          </a:prstGeom>
+          <a:noFill/>
+        </p:spPr>
+        <p:txBody>
+          <a:bodyPr wrap="square" lIns="0" rIns="0">
+            <a:noAutofit/>
+          </a:bodyPr>
+          <a:lstStyle/>
+          <a:p>
+            <a:pPr algn="l"/>
+            <a:r>
+              <a:rPr sz="3400" b="0" i="0">
+                <a:solidFill>
+                  <a:srgbClr val="1C1C28"/>
+                </a:solidFill>
+                <a:latin typeface="Calibri"/>
+              </a:rPr>
+              <a:t>Thin margins, small team</a:t>
+            </a:r>
+          </a:p>
+        </p:txBody>
+      </p:sp>
+      <p:sp>
+        <p:nvSpPr>
+          <p:cNvPr id="12" name="TextBox 11"/>
+          <p:cNvSpPr/>
+          <p:nvPr>
+            <p:ph type="body" idx="7"/>
+          </p:nvPr>
+        </p:nvSpPr>
+        <p:spPr>
+          <a:xfrm>
+            <a:off x="457200" y="3767328"/>
+            <a:ext cx="5572283" cy="621791"/>
+          </a:xfrm>
+          <a:prstGeom prst="rect">
+            <a:avLst/>
+          </a:prstGeom>
+          <a:noFill/>
+        </p:spPr>
+        <p:txBody>
+          <a:bodyPr wrap="none" lIns="0" rIns="0">
+            <a:noAutofit/>
+          </a:bodyPr>
+          <a:lstStyle/>
+          <a:p>
+            <a:pPr algn="l"/>
+            <a:r>
+              <a:rPr sz="3400" b="1" i="0">
+                <a:solidFill>
+                  <a:srgbClr val="E2A03F"/>
+                </a:solidFill>
+                <a:latin typeface="Calibri"/>
+              </a:rPr>
+              <a:t>Opportunities</a:t>
+            </a:r>
+          </a:p>
+        </p:txBody>
+      </p:sp>
+      <p:sp>
+        <p:nvSpPr>
+          <p:cNvPr id="13" name="Rectangle 12"/>
+          <p:cNvSpPr/>
+          <p:nvPr>
+            <p:ph type="body" idx="8"/>
+          </p:nvPr>
+        </p:nvSpPr>
+        <p:spPr>
+          <a:xfrm>
+            <a:off x="457200" y="4443983"/>
+            <a:ext cx="3368377" cy="54864"/>
+          </a:xfrm>
+          <a:prstGeom prst="rect">
+            <a:avLst/>
+          </a:prstGeom>
+          <a:solidFill>
+            <a:srgbClr val="E2A03F"/>
+          </a:solidFill>
+          <a:ln>
+            <a:noFill/>
+          </a:ln>
+          <a:effectLst/>
+        </p:spPr>
+        <p:txBody>
+          <a:bodyPr rtlCol="0" anchor="ctr"/>
+          <a:lstStyle/>
+          <a:p>
+            <a:pPr algn="ctr"/>
+          </a:p>
+        </p:txBody>
+      </p:sp>
+      <p:sp>
+        <p:nvSpPr>
+          <p:cNvPr id="14" name="TextBox 13"/>
+          <p:cNvSpPr/>
+          <p:nvPr>
+            <p:ph type="body" idx="9"/>
+          </p:nvPr>
+        </p:nvSpPr>
+        <p:spPr>
+          <a:xfrm>
+            <a:off x="457200" y="4663439"/>
+            <a:ext cx="5501640" cy="1097281"/>
+          </a:xfrm>
+          <a:prstGeom prst="rect">
+            <a:avLst/>
+          </a:prstGeom>
+          <a:noFill/>
+        </p:spPr>
+        <p:txBody>
+          <a:bodyPr wrap="square" lIns="0" rIns="0">
+            <a:noAutofit/>
+          </a:bodyPr>
+          <a:lstStyle/>
+          <a:p>
+            <a:pPr algn="l"/>
+            <a:r>
+              <a:rPr sz="3400" b="0" i="0">
+                <a:solidFill>
+                  <a:srgbClr val="1C1C28"/>
+                </a:solidFill>
+                <a:latin typeface="Calibri"/>
+              </a:rPr>
+              <a:t>New markets via partners</a:t>
+            </a:r>
+          </a:p>
+        </p:txBody>
+      </p:sp>
+      <p:sp>
+        <p:nvSpPr>
+          <p:cNvPr id="15" name="TextBox 14"/>
+          <p:cNvSpPr/>
+          <p:nvPr>
+            <p:ph type="body" idx="13"/>
+          </p:nvPr>
+        </p:nvSpPr>
+        <p:spPr>
+          <a:xfrm>
+            <a:off x="6233160" y="3767328"/>
+            <a:ext cx="5501640" cy="621791"/>
+          </a:xfrm>
+          <a:prstGeom prst="rect">
+            <a:avLst/>
+          </a:prstGeom>
+          <a:noFill/>
+        </p:spPr>
+        <p:txBody>
+          <a:bodyPr wrap="none" lIns="0" rIns="0">
+            <a:noAutofit/>
+          </a:bodyPr>
+          <a:lstStyle/>
+          <a:p>
+            <a:pPr algn="l"/>
+            <a:r>
+              <a:rPr sz="3400" b="1" i="0">
+                <a:solidFill>
+                  <a:srgbClr val="1C1C28"/>
+                </a:solidFill>
+                <a:latin typeface="Calibri"/>
+              </a:rPr>
+              <a:t>Threats</a:t>
+            </a:r>
+          </a:p>
+        </p:txBody>
+      </p:sp>
+      <p:sp>
+        <p:nvSpPr>
+          <p:cNvPr id="16" name="Rectangle 15"/>
+          <p:cNvSpPr/>
+          <p:nvPr>
+            <p:ph type="body" idx="14"/>
+          </p:nvPr>
+        </p:nvSpPr>
+        <p:spPr>
+          <a:xfrm>
+            <a:off x="6233160" y="4443983"/>
+            <a:ext cx="1862559" cy="54864"/>
+          </a:xfrm>
+          <a:prstGeom prst="rect">
+            <a:avLst/>
+          </a:prstGeom>
+          <a:solidFill>
+            <a:srgbClr val="1C1C28"/>
+          </a:solidFill>
+          <a:ln>
+            <a:noFill/>
+          </a:ln>
+          <a:effectLst/>
+        </p:spPr>
+        <p:txBody>
+          <a:bodyPr rtlCol="0" anchor="ctr"/>
+          <a:lstStyle/>
+          <a:p>
+            <a:pPr algn="ctr"/>
+          </a:p>
+        </p:txBody>
+      </p:sp>
+      <p:sp>
+        <p:nvSpPr>
+          <p:cNvPr id="17" name="TextBox 16"/>
+          <p:cNvSpPr/>
+          <p:nvPr>
+            <p:ph type="body" idx="15"/>
+          </p:nvPr>
+        </p:nvSpPr>
+        <p:spPr>
+          <a:xfrm>
+            <a:off x="6233160" y="4663439"/>
+            <a:ext cx="5958840" cy="609600"/>
+          </a:xfrm>
+          <a:prstGeom prst="rect">
+            <a:avLst/>
+          </a:prstGeom>
+          <a:noFill/>
+        </p:spPr>
+        <p:txBody>
+          <a:bodyPr wrap="none" lIns="0" rIns="0">
+            <a:noAutofit/>
+          </a:bodyPr>
+          <a:lstStyle/>
+          <a:p>
+            <a:pPr algn="l"/>
+            <a:r>
+              <a:rPr sz="3400" b="0" i="0">
+                <a:solidFill>
+                  <a:srgbClr val="1C1C28"/>
+                </a:solidFill>
+                <a:latin typeface="Calibri"/>
+              </a:rPr>
+              <a:t>New entrants cut prices</a:t>
             </a:r>
           </a:p>
         </p:txBody>
@@ -12801,533 +12670,6 @@
 
 <file path=ppt/slideLayouts/slideLayout40.xml><?xml version="1.0" encoding="utf-8"?>
 <p:sldLayout xmlns:a="http://schemas.openxmlformats.org/drawingml/2006/main" xmlns:r="http://schemas.openxmlformats.org/officeDocument/2006/relationships" xmlns:p="http://schemas.openxmlformats.org/presentationml/2006/main" type="blank" preserve="1">
-  <p:cSld name="slidekit · SWOT">
-    <p:bg>
-      <p:bgPr>
-        <a:solidFill>
-          <a:srgbClr val="FFFFFF"/>
-        </a:solidFill>
-        <a:effectLst/>
-      </p:bgPr>
-    </p:bg>
-    <p:spTree>
-      <p:nvGrpSpPr>
-        <p:cNvPr id="1" name=""/>
-        <p:cNvGrpSpPr/>
-        <p:nvPr/>
-      </p:nvGrpSpPr>
-      <p:grpSpPr>
-        <a:xfrm>
-          <a:off x="0" y="0"/>
-          <a:ext cx="0" cy="0"/>
-          <a:chOff x="0" y="0"/>
-          <a:chExt cx="0" cy="0"/>
-        </a:xfrm>
-      </p:grpSpPr>
-      <p:sp>
-        <p:nvSpPr>
-          <p:cNvPr id="4" name="Slide Number Placeholder 3"/>
-          <p:cNvSpPr>
-            <a:spLocks noGrp="1"/>
-          </p:cNvSpPr>
-          <p:nvPr>
-            <p:ph type="sldNum" sz="quarter" idx="12"/>
-          </p:nvPr>
-        </p:nvSpPr>
-        <p:spPr>
-          <a:xfrm>
-            <a:off x="10363200" y="6035040"/>
-            <a:ext cx="1371600" cy="365760"/>
-          </a:xfrm>
-        </p:spPr>
-        <p:txBody>
-          <a:bodyPr/>
-          <a:lstStyle/>
-          <a:p>
-            <a:fld id="{C1FF6DA9-008F-8B48-92A6-B652298478BF}" type="slidenum">
-              <a:rPr lang="en-US" smtClean="0"/>
-              <a:t>‹#›</a:t>
-            </a:fld>
-            <a:endParaRPr lang="en-US"/>
-          </a:p>
-        </p:txBody>
-      </p:sp>
-      <p:sp>
-        <p:nvSpPr>
-          <p:cNvPr id="5" name="TextBox 4"/>
-          <p:cNvSpPr/>
-          <p:nvPr>
-            <p:ph type="title"/>
-          </p:nvPr>
-        </p:nvSpPr>
-        <p:spPr>
-          <a:xfrm>
-            <a:off x="457200" y="457200"/>
-            <a:ext cx="11277600" cy="768096"/>
-          </a:xfrm>
-          <a:prstGeom prst="rect">
-            <a:avLst/>
-          </a:prstGeom>
-          <a:noFill/>
-        </p:spPr>
-        <p:txBody>
-          <a:bodyPr wrap="none" lIns="0" rIns="0">
-            <a:noAutofit/>
-          </a:bodyPr>
-          <a:lstStyle/>
-          <a:p>
-            <a:pPr algn="l"/>
-            <a:r>
-              <a:rPr sz="4200" b="1" i="0">
-                <a:solidFill>
-                  <a:srgbClr val="16504B"/>
-                </a:solidFill>
-                <a:latin typeface="Calibri"/>
-              </a:rPr>
-              <a:t>SWOT Analysis</a:t>
-            </a:r>
-          </a:p>
-        </p:txBody>
-      </p:sp>
-      <p:sp>
-        <p:nvSpPr>
-          <p:cNvPr id="6" name="TextBox 5"/>
-          <p:cNvSpPr/>
-          <p:nvPr>
-            <p:ph type="body" idx="1"/>
-          </p:nvPr>
-        </p:nvSpPr>
-        <p:spPr>
-          <a:xfrm>
-            <a:off x="457200" y="1499616"/>
-            <a:ext cx="5501640" cy="621791"/>
-          </a:xfrm>
-          <a:prstGeom prst="rect">
-            <a:avLst/>
-          </a:prstGeom>
-          <a:noFill/>
-        </p:spPr>
-        <p:txBody>
-          <a:bodyPr wrap="none" lIns="0" rIns="0">
-            <a:noAutofit/>
-          </a:bodyPr>
-          <a:lstStyle/>
-          <a:p>
-            <a:pPr algn="l"/>
-            <a:r>
-              <a:rPr sz="3400" b="1" i="0">
-                <a:solidFill>
-                  <a:srgbClr val="E2A03F"/>
-                </a:solidFill>
-                <a:latin typeface="Calibri"/>
-              </a:rPr>
-              <a:t>Strengths</a:t>
-            </a:r>
-          </a:p>
-        </p:txBody>
-      </p:sp>
-      <p:sp>
-        <p:nvSpPr>
-          <p:cNvPr id="7" name="Rectangle 6"/>
-          <p:cNvSpPr/>
-          <p:nvPr>
-            <p:ph type="body" idx="2"/>
-          </p:nvPr>
-        </p:nvSpPr>
-        <p:spPr>
-          <a:xfrm>
-            <a:off x="457200" y="2176271"/>
-            <a:ext cx="1650492" cy="54864"/>
-          </a:xfrm>
-          <a:prstGeom prst="rect">
-            <a:avLst/>
-          </a:prstGeom>
-          <a:solidFill>
-            <a:srgbClr val="E2A03F"/>
-          </a:solidFill>
-          <a:ln>
-            <a:noFill/>
-          </a:ln>
-          <a:effectLst/>
-        </p:spPr>
-        <p:txBody>
-          <a:bodyPr rtlCol="0" anchor="ctr"/>
-          <a:lstStyle/>
-          <a:p>
-            <a:pPr algn="ctr"/>
-          </a:p>
-        </p:txBody>
-      </p:sp>
-      <p:sp>
-        <p:nvSpPr>
-          <p:cNvPr id="8" name="TextBox 7"/>
-          <p:cNvSpPr/>
-          <p:nvPr>
-            <p:ph type="body" idx="3"/>
-          </p:nvPr>
-        </p:nvSpPr>
-        <p:spPr>
-          <a:xfrm>
-            <a:off x="457200" y="2395727"/>
-            <a:ext cx="5501640" cy="1097281"/>
-          </a:xfrm>
-          <a:prstGeom prst="rect">
-            <a:avLst/>
-          </a:prstGeom>
-          <a:noFill/>
-        </p:spPr>
-        <p:txBody>
-          <a:bodyPr wrap="square" lIns="0" rIns="0">
-            <a:noAutofit/>
-          </a:bodyPr>
-          <a:lstStyle/>
-          <a:p>
-            <a:pPr algn="l"/>
-            <a:r>
-              <a:rPr sz="3400" b="0" i="0">
-                <a:solidFill>
-                  <a:srgbClr val="1C1C28"/>
-                </a:solidFill>
-                <a:latin typeface="Calibri"/>
-              </a:rPr>
-              <a:t>A strong brand with loyal users</a:t>
-            </a:r>
-          </a:p>
-        </p:txBody>
-      </p:sp>
-      <p:sp>
-        <p:nvSpPr>
-          <p:cNvPr id="9" name="TextBox 8"/>
-          <p:cNvSpPr/>
-          <p:nvPr>
-            <p:ph type="body" idx="4"/>
-          </p:nvPr>
-        </p:nvSpPr>
-        <p:spPr>
-          <a:xfrm>
-            <a:off x="6233160" y="1499616"/>
-            <a:ext cx="5501640" cy="621791"/>
-          </a:xfrm>
-          <a:prstGeom prst="rect">
-            <a:avLst/>
-          </a:prstGeom>
-          <a:noFill/>
-        </p:spPr>
-        <p:txBody>
-          <a:bodyPr wrap="none" lIns="0" rIns="0">
-            <a:noAutofit/>
-          </a:bodyPr>
-          <a:lstStyle/>
-          <a:p>
-            <a:pPr algn="l"/>
-            <a:r>
-              <a:rPr sz="3400" b="1" i="0">
-                <a:solidFill>
-                  <a:srgbClr val="8A8A9A"/>
-                </a:solidFill>
-                <a:latin typeface="Calibri"/>
-              </a:rPr>
-              <a:t>Weaknesses</a:t>
-            </a:r>
-          </a:p>
-        </p:txBody>
-      </p:sp>
-      <p:sp>
-        <p:nvSpPr>
-          <p:cNvPr id="10" name="Rectangle 9"/>
-          <p:cNvSpPr/>
-          <p:nvPr>
-            <p:ph type="body" idx="5"/>
-          </p:nvPr>
-        </p:nvSpPr>
-        <p:spPr>
-          <a:xfrm>
-            <a:off x="6233160" y="2176271"/>
-            <a:ext cx="1650492" cy="54864"/>
-          </a:xfrm>
-          <a:prstGeom prst="rect">
-            <a:avLst/>
-          </a:prstGeom>
-          <a:solidFill>
-            <a:srgbClr val="8A8A9A"/>
-          </a:solidFill>
-          <a:ln>
-            <a:noFill/>
-          </a:ln>
-          <a:effectLst/>
-        </p:spPr>
-        <p:txBody>
-          <a:bodyPr rtlCol="0" anchor="ctr"/>
-          <a:lstStyle/>
-          <a:p>
-            <a:pPr algn="ctr"/>
-          </a:p>
-        </p:txBody>
-      </p:sp>
-      <p:sp>
-        <p:nvSpPr>
-          <p:cNvPr id="11" name="TextBox 10"/>
-          <p:cNvSpPr/>
-          <p:nvPr>
-            <p:ph type="body" idx="6"/>
-          </p:nvPr>
-        </p:nvSpPr>
-        <p:spPr>
-          <a:xfrm>
-            <a:off x="6233160" y="2395727"/>
-            <a:ext cx="5501640" cy="1097281"/>
-          </a:xfrm>
-          <a:prstGeom prst="rect">
-            <a:avLst/>
-          </a:prstGeom>
-          <a:noFill/>
-        </p:spPr>
-        <p:txBody>
-          <a:bodyPr wrap="square" lIns="0" rIns="0">
-            <a:noAutofit/>
-          </a:bodyPr>
-          <a:lstStyle/>
-          <a:p>
-            <a:pPr algn="l"/>
-            <a:r>
-              <a:rPr sz="3400" b="0" i="0">
-                <a:solidFill>
-                  <a:srgbClr val="1C1C28"/>
-                </a:solidFill>
-                <a:latin typeface="Calibri"/>
-              </a:rPr>
-              <a:t>Thin margins and a small team</a:t>
-            </a:r>
-          </a:p>
-        </p:txBody>
-      </p:sp>
-      <p:sp>
-        <p:nvSpPr>
-          <p:cNvPr id="12" name="TextBox 11"/>
-          <p:cNvSpPr/>
-          <p:nvPr>
-            <p:ph type="body" idx="7"/>
-          </p:nvPr>
-        </p:nvSpPr>
-        <p:spPr>
-          <a:xfrm>
-            <a:off x="457200" y="3767328"/>
-            <a:ext cx="5572283" cy="621791"/>
-          </a:xfrm>
-          <a:prstGeom prst="rect">
-            <a:avLst/>
-          </a:prstGeom>
-          <a:noFill/>
-        </p:spPr>
-        <p:txBody>
-          <a:bodyPr wrap="none" lIns="0" rIns="0">
-            <a:noAutofit/>
-          </a:bodyPr>
-          <a:lstStyle/>
-          <a:p>
-            <a:pPr algn="l"/>
-            <a:r>
-              <a:rPr sz="3400" b="1" i="0">
-                <a:solidFill>
-                  <a:srgbClr val="E2A03F"/>
-                </a:solidFill>
-                <a:latin typeface="Calibri"/>
-              </a:rPr>
-              <a:t>Opportunities</a:t>
-            </a:r>
-          </a:p>
-        </p:txBody>
-      </p:sp>
-      <p:sp>
-        <p:nvSpPr>
-          <p:cNvPr id="13" name="Rectangle 12"/>
-          <p:cNvSpPr/>
-          <p:nvPr>
-            <p:ph type="body" idx="8"/>
-          </p:nvPr>
-        </p:nvSpPr>
-        <p:spPr>
-          <a:xfrm>
-            <a:off x="457200" y="4443983"/>
-            <a:ext cx="1650492" cy="54864"/>
-          </a:xfrm>
-          <a:prstGeom prst="rect">
-            <a:avLst/>
-          </a:prstGeom>
-          <a:solidFill>
-            <a:srgbClr val="E2A03F"/>
-          </a:solidFill>
-          <a:ln>
-            <a:noFill/>
-          </a:ln>
-          <a:effectLst/>
-        </p:spPr>
-        <p:txBody>
-          <a:bodyPr rtlCol="0" anchor="ctr"/>
-          <a:lstStyle/>
-          <a:p>
-            <a:pPr algn="ctr"/>
-          </a:p>
-        </p:txBody>
-      </p:sp>
-      <p:sp>
-        <p:nvSpPr>
-          <p:cNvPr id="14" name="TextBox 13"/>
-          <p:cNvSpPr/>
-          <p:nvPr>
-            <p:ph type="body" idx="9"/>
-          </p:nvPr>
-        </p:nvSpPr>
-        <p:spPr>
-          <a:xfrm>
-            <a:off x="457200" y="4663439"/>
-            <a:ext cx="5501640" cy="1097281"/>
-          </a:xfrm>
-          <a:prstGeom prst="rect">
-            <a:avLst/>
-          </a:prstGeom>
-          <a:noFill/>
-        </p:spPr>
-        <p:txBody>
-          <a:bodyPr wrap="square" lIns="0" rIns="0">
-            <a:noAutofit/>
-          </a:bodyPr>
-          <a:lstStyle/>
-          <a:p>
-            <a:pPr algn="l"/>
-            <a:r>
-              <a:rPr sz="3400" b="0" i="0">
-                <a:solidFill>
-                  <a:srgbClr val="1C1C28"/>
-                </a:solidFill>
-                <a:latin typeface="Calibri"/>
-              </a:rPr>
-              <a:t>New markets through partnerships</a:t>
-            </a:r>
-          </a:p>
-        </p:txBody>
-      </p:sp>
-      <p:sp>
-        <p:nvSpPr>
-          <p:cNvPr id="15" name="TextBox 14"/>
-          <p:cNvSpPr/>
-          <p:nvPr>
-            <p:ph type="body" idx="13"/>
-          </p:nvPr>
-        </p:nvSpPr>
-        <p:spPr>
-          <a:xfrm>
-            <a:off x="6233160" y="3767328"/>
-            <a:ext cx="5501640" cy="621791"/>
-          </a:xfrm>
-          <a:prstGeom prst="rect">
-            <a:avLst/>
-          </a:prstGeom>
-          <a:noFill/>
-        </p:spPr>
-        <p:txBody>
-          <a:bodyPr wrap="none" lIns="0" rIns="0">
-            <a:noAutofit/>
-          </a:bodyPr>
-          <a:lstStyle/>
-          <a:p>
-            <a:pPr algn="l"/>
-            <a:r>
-              <a:rPr sz="3400" b="1" i="0">
-                <a:solidFill>
-                  <a:srgbClr val="8A8A9A"/>
-                </a:solidFill>
-                <a:latin typeface="Calibri"/>
-              </a:rPr>
-              <a:t>Threats</a:t>
-            </a:r>
-          </a:p>
-        </p:txBody>
-      </p:sp>
-      <p:sp>
-        <p:nvSpPr>
-          <p:cNvPr id="16" name="Rectangle 15"/>
-          <p:cNvSpPr/>
-          <p:nvPr>
-            <p:ph type="body" idx="14"/>
-          </p:nvPr>
-        </p:nvSpPr>
-        <p:spPr>
-          <a:xfrm>
-            <a:off x="6233160" y="4443983"/>
-            <a:ext cx="1650492" cy="54864"/>
-          </a:xfrm>
-          <a:prstGeom prst="rect">
-            <a:avLst/>
-          </a:prstGeom>
-          <a:solidFill>
-            <a:srgbClr val="8A8A9A"/>
-          </a:solidFill>
-          <a:ln>
-            <a:noFill/>
-          </a:ln>
-          <a:effectLst/>
-        </p:spPr>
-        <p:txBody>
-          <a:bodyPr rtlCol="0" anchor="ctr"/>
-          <a:lstStyle/>
-          <a:p>
-            <a:pPr algn="ctr"/>
-          </a:p>
-        </p:txBody>
-      </p:sp>
-      <p:sp>
-        <p:nvSpPr>
-          <p:cNvPr id="17" name="TextBox 16"/>
-          <p:cNvSpPr/>
-          <p:nvPr>
-            <p:ph type="body" idx="15"/>
-          </p:nvPr>
-        </p:nvSpPr>
-        <p:spPr>
-          <a:xfrm>
-            <a:off x="6233160" y="4663439"/>
-            <a:ext cx="5501640" cy="1097281"/>
-          </a:xfrm>
-          <a:prstGeom prst="rect">
-            <a:avLst/>
-          </a:prstGeom>
-          <a:noFill/>
-        </p:spPr>
-        <p:txBody>
-          <a:bodyPr wrap="square" lIns="0" rIns="0">
-            <a:noAutofit/>
-          </a:bodyPr>
-          <a:lstStyle/>
-          <a:p>
-            <a:pPr algn="l"/>
-            <a:r>
-              <a:rPr sz="3400" b="0" i="0">
-                <a:solidFill>
-                  <a:srgbClr val="1C1C28"/>
-                </a:solidFill>
-                <a:latin typeface="Calibri"/>
-              </a:rPr>
-              <a:t>New entrants driving price pressure</a:t>
-            </a:r>
-          </a:p>
-        </p:txBody>
-      </p:sp>
-    </p:spTree>
-    <p:extLst>
-      <p:ext uri="{BB962C8B-B14F-4D97-AF65-F5344CB8AC3E}">
-        <p14:creationId xmlns:p14="http://schemas.microsoft.com/office/powerpoint/2010/main" val="1212999818"/>
-      </p:ext>
-    </p:extLst>
-  </p:cSld>
-  <p:clrMapOvr>
-    <a:masterClrMapping/>
-  </p:clrMapOvr>
-</p:sldLayout>
-</file>
-
-<file path=ppt/slideLayouts/slideLayout41.xml><?xml version="1.0" encoding="utf-8"?>
-<p:sldLayout xmlns:a="http://schemas.openxmlformats.org/drawingml/2006/main" xmlns:r="http://schemas.openxmlformats.org/officeDocument/2006/relationships" xmlns:p="http://schemas.openxmlformats.org/presentationml/2006/main" type="blank" preserve="1">
   <p:cSld name="slidekit · Comparison Matrix">
     <p:bg>
       <p:bgPr>
@@ -13363,8 +12705,8 @@
         </p:nvSpPr>
         <p:spPr>
           <a:xfrm>
-            <a:off x="10363200" y="6035040"/>
-            <a:ext cx="1371600" cy="365760"/>
+            <a:off x="11186160" y="6035040"/>
+            <a:ext cx="548640" cy="365760"/>
           </a:xfrm>
         </p:spPr>
         <p:txBody>
@@ -13407,7 +12749,7 @@
             <a:r>
               <a:rPr sz="4200" b="1" i="0">
                 <a:solidFill>
-                  <a:srgbClr val="16504B"/>
+                  <a:srgbClr val="E2A03F"/>
                 </a:solidFill>
                 <a:latin typeface="Calibri"/>
               </a:rPr>
@@ -15530,7 +14872,6 @@
     <p:sldLayoutId id="2147483738" r:id="rId39"/>
     <p:sldLayoutId id="2147483739" r:id="rId40"/>
     <p:sldLayoutId id="2147483740" r:id="rId41"/>
-    <p:sldLayoutId id="2147483741" r:id="rId42"/>
   </p:sldLayoutIdLst>
   <p:txStyles>
     <p:titleStyle>
@@ -15829,7 +15170,7 @@
             <a:r>
               <a:rPr sz="5800" b="1" i="0">
                 <a:solidFill>
-                  <a:srgbClr val="16504B"/>
+                  <a:srgbClr val="E2A03F"/>
                 </a:solidFill>
                 <a:latin typeface="Calibri"/>
               </a:rPr>
@@ -15925,7 +15266,7 @@
             <a:r>
               <a:rPr sz="4200" b="1" i="0">
                 <a:solidFill>
-                  <a:srgbClr val="16504B"/>
+                  <a:srgbClr val="E2A03F"/>
                 </a:solidFill>
                 <a:latin typeface="Calibri"/>
               </a:rPr>
@@ -16030,7 +15371,7 @@
             <a:r>
               <a:rPr sz="2400" b="0" i="0">
                 <a:solidFill>
-                  <a:srgbClr val="8A8A9A"/>
+                  <a:srgbClr val="1C1C28"/>
                 </a:solidFill>
                 <a:latin typeface="Calibri"/>
               </a:rPr>
@@ -16135,7 +15476,7 @@
             <a:r>
               <a:rPr sz="2400" b="0" i="0">
                 <a:solidFill>
-                  <a:srgbClr val="8A8A9A"/>
+                  <a:srgbClr val="1C1C28"/>
                 </a:solidFill>
                 <a:latin typeface="Calibri"/>
               </a:rPr>
@@ -16240,7 +15581,7 @@
             <a:r>
               <a:rPr sz="2400" b="0" i="0">
                 <a:solidFill>
-                  <a:srgbClr val="8A8A9A"/>
+                  <a:srgbClr val="1C1C28"/>
                 </a:solidFill>
                 <a:latin typeface="Calibri"/>
               </a:rPr>
@@ -16259,25 +15600,25 @@
         </p:nvSpPr>
         <p:spPr>
           <a:xfrm>
-            <a:off x="10363200" y="6035040"/>
-            <a:ext cx="1371600" cy="365760"/>
-          </a:xfrm>
-          <a:prstGeom prst="rect">
-            <a:avLst/>
-          </a:prstGeom>
-          <a:noFill/>
-        </p:spPr>
-        <p:txBody>
-          <a:bodyPr wrap="none" lIns="0" rIns="0">
-            <a:noAutofit/>
-          </a:bodyPr>
-          <a:lstStyle/>
-          <a:p>
-            <a:pPr algn="l"/>
+            <a:off x="11186160" y="6035040"/>
+            <a:ext cx="548640" cy="365760"/>
+          </a:xfrm>
+          <a:prstGeom prst="rect">
+            <a:avLst/>
+          </a:prstGeom>
+          <a:noFill/>
+        </p:spPr>
+        <p:txBody>
+          <a:bodyPr wrap="none" lIns="0" rIns="0">
+            <a:noAutofit/>
+          </a:bodyPr>
+          <a:lstStyle/>
+          <a:p>
+            <a:pPr algn="r"/>
             <a:fld id="{4B0E1F8A-6C1D-4E2A-9F3B-7A5C8D2E1F60}" type="slidenum">
               <a:rPr sz="1600" b="0" i="0">
                 <a:solidFill>
-                  <a:srgbClr val="8A8A9A"/>
+                  <a:srgbClr val="1C1C28"/>
                 </a:solidFill>
                 <a:latin typeface="Calibri"/>
               </a:rPr>
@@ -16338,7 +15679,7 @@
             <a:r>
               <a:rPr sz="4200" b="1" i="0">
                 <a:solidFill>
-                  <a:srgbClr val="16504B"/>
+                  <a:srgbClr val="E2A03F"/>
                 </a:solidFill>
                 <a:latin typeface="Calibri"/>
               </a:rPr>
@@ -16567,25 +15908,25 @@
         </p:nvSpPr>
         <p:spPr>
           <a:xfrm>
-            <a:off x="10363200" y="6035040"/>
-            <a:ext cx="1371600" cy="365760"/>
-          </a:xfrm>
-          <a:prstGeom prst="rect">
-            <a:avLst/>
-          </a:prstGeom>
-          <a:noFill/>
-        </p:spPr>
-        <p:txBody>
-          <a:bodyPr wrap="none" lIns="0" rIns="0">
-            <a:noAutofit/>
-          </a:bodyPr>
-          <a:lstStyle/>
-          <a:p>
-            <a:pPr algn="l"/>
+            <a:off x="11186160" y="6035040"/>
+            <a:ext cx="548640" cy="365760"/>
+          </a:xfrm>
+          <a:prstGeom prst="rect">
+            <a:avLst/>
+          </a:prstGeom>
+          <a:noFill/>
+        </p:spPr>
+        <p:txBody>
+          <a:bodyPr wrap="none" lIns="0" rIns="0">
+            <a:noAutofit/>
+          </a:bodyPr>
+          <a:lstStyle/>
+          <a:p>
+            <a:pPr algn="r"/>
             <a:fld id="{4B0E1F8A-6C1D-4E2A-9F3B-7A5C8D2E1F60}" type="slidenum">
               <a:rPr sz="1600" b="0" i="0">
                 <a:solidFill>
-                  <a:srgbClr val="8A8A9A"/>
+                  <a:srgbClr val="1C1C28"/>
                 </a:solidFill>
                 <a:latin typeface="Calibri"/>
               </a:rPr>
@@ -16646,7 +15987,7 @@
             <a:r>
               <a:rPr sz="4200" b="1" i="0">
                 <a:solidFill>
-                  <a:srgbClr val="16504B"/>
+                  <a:srgbClr val="E2A03F"/>
                 </a:solidFill>
                 <a:latin typeface="Calibri"/>
               </a:rPr>
@@ -16681,7 +16022,7 @@
             <a:r>
               <a:rPr sz="3400" b="1" i="0">
                 <a:solidFill>
-                  <a:srgbClr val="16504B"/>
+                  <a:srgbClr val="E2A03F"/>
                 </a:solidFill>
                 <a:latin typeface="Calibri"/>
               </a:rPr>
@@ -16716,7 +16057,7 @@
             <a:r>
               <a:rPr sz="3400" b="1" i="0">
                 <a:solidFill>
-                  <a:srgbClr val="16504B"/>
+                  <a:srgbClr val="E2A03F"/>
                 </a:solidFill>
                 <a:latin typeface="Calibri"/>
               </a:rPr>
@@ -16945,25 +16286,25 @@
         </p:nvSpPr>
         <p:spPr>
           <a:xfrm>
-            <a:off x="10363200" y="6035040"/>
-            <a:ext cx="1371600" cy="365760"/>
-          </a:xfrm>
-          <a:prstGeom prst="rect">
-            <a:avLst/>
-          </a:prstGeom>
-          <a:noFill/>
-        </p:spPr>
-        <p:txBody>
-          <a:bodyPr wrap="none" lIns="0" rIns="0">
-            <a:noAutofit/>
-          </a:bodyPr>
-          <a:lstStyle/>
-          <a:p>
-            <a:pPr algn="l"/>
+            <a:off x="11186160" y="6035040"/>
+            <a:ext cx="548640" cy="365760"/>
+          </a:xfrm>
+          <a:prstGeom prst="rect">
+            <a:avLst/>
+          </a:prstGeom>
+          <a:noFill/>
+        </p:spPr>
+        <p:txBody>
+          <a:bodyPr wrap="none" lIns="0" rIns="0">
+            <a:noAutofit/>
+          </a:bodyPr>
+          <a:lstStyle/>
+          <a:p>
+            <a:pPr algn="r"/>
             <a:fld id="{4B0E1F8A-6C1D-4E2A-9F3B-7A5C8D2E1F60}" type="slidenum">
               <a:rPr sz="1600" b="0" i="0">
                 <a:solidFill>
-                  <a:srgbClr val="8A8A9A"/>
+                  <a:srgbClr val="1C1C28"/>
                 </a:solidFill>
                 <a:latin typeface="Calibri"/>
               </a:rPr>
